--- a/Pronóstico de Demanda Eléctrica GBA.pptx
+++ b/Pronóstico de Demanda Eléctrica GBA.pptx
@@ -1,21 +1,24 @@
 
 <file path=ppt/presentation.xml><?xml version="1.0" encoding="utf-8"?>
-<p:presentation xmlns:a="http://schemas.openxmlformats.org/drawingml/2006/main" xmlns:r="http://schemas.openxmlformats.org/officeDocument/2006/relationships" xmlns:p="http://schemas.openxmlformats.org/presentationml/2006/main" xmlns:m="http://schemas.openxmlformats.org/officeDocument/2006/math" xmlns:a14="http://schemas.microsoft.com/office/drawing/2010/main">
+<p:presentation xmlns:a="http://schemas.openxmlformats.org/drawingml/2006/main" xmlns:r="http://schemas.openxmlformats.org/officeDocument/2006/relationships" xmlns:p="http://schemas.openxmlformats.org/presentationml/2006/main">
   <p:sldMasterIdLst>
-    <p:sldMasterId id="2147483648" r:id="rId5"/>
+    <p:sldMasterId id="2147483648" r:id="rId1"/>
   </p:sldMasterIdLst>
   <p:notesMasterIdLst>
-    <p:notesMasterId r:id="rId7"/>
+    <p:notesMasterId r:id="rId13"/>
   </p:notesMasterIdLst>
   <p:sldIdLst>
-    <p:sldId id="256" r:id="rId8"/>
-    <p:sldId id="257" r:id="rId9"/>
-    <p:sldId id="258" r:id="rId10"/>
-    <p:sldId id="259" r:id="rId11"/>
-    <p:sldId id="260" r:id="rId12"/>
-    <p:sldId id="261" r:id="rId13"/>
-    <p:sldId id="262" r:id="rId14"/>
-    <p:sldId id="263" r:id="rId15"/>
+    <p:sldId id="256" r:id="rId2"/>
+    <p:sldId id="257" r:id="rId3"/>
+    <p:sldId id="258" r:id="rId4"/>
+    <p:sldId id="259" r:id="rId5"/>
+    <p:sldId id="260" r:id="rId6"/>
+    <p:sldId id="261" r:id="rId7"/>
+    <p:sldId id="264" r:id="rId8"/>
+    <p:sldId id="265" r:id="rId9"/>
+    <p:sldId id="266" r:id="rId10"/>
+    <p:sldId id="262" r:id="rId11"/>
+    <p:sldId id="263" r:id="rId12"/>
   </p:sldIdLst>
   <p:sldSz cx="20104100" cy="11303000"/>
   <p:notesSz cx="6858000" cy="9144000"/>
@@ -35,7 +38,7 @@
       <a:buFontTx/>
       <a:buNone/>
       <a:tabLst/>
-      <a:defRPr b="0" baseline="0" cap="none" i="0" spc="0" strike="noStrike" sz="1800" u="none" kumimoji="0" normalizeH="0">
+      <a:defRPr kumimoji="0" sz="1800" b="0" i="0" u="none" strike="noStrike" cap="none" spc="0" normalizeH="0" baseline="0">
         <a:ln>
           <a:noFill/>
         </a:ln>
@@ -61,7 +64,7 @@
       <a:buFontTx/>
       <a:buNone/>
       <a:tabLst/>
-      <a:defRPr b="0" baseline="0" cap="none" i="0" spc="0" strike="noStrike" sz="1800" u="none" kumimoji="0" normalizeH="0">
+      <a:defRPr kumimoji="0" sz="1800" b="0" i="0" u="none" strike="noStrike" cap="none" spc="0" normalizeH="0" baseline="0">
         <a:ln>
           <a:noFill/>
         </a:ln>
@@ -91,7 +94,7 @@
       <a:buFontTx/>
       <a:buNone/>
       <a:tabLst/>
-      <a:defRPr b="0" baseline="0" cap="none" i="0" spc="0" strike="noStrike" sz="1800" u="none" kumimoji="0" normalizeH="0">
+      <a:defRPr kumimoji="0" sz="1800" b="0" i="0" u="none" strike="noStrike" cap="none" spc="0" normalizeH="0" baseline="0">
         <a:ln>
           <a:noFill/>
         </a:ln>
@@ -121,7 +124,7 @@
       <a:buFontTx/>
       <a:buNone/>
       <a:tabLst/>
-      <a:defRPr b="0" baseline="0" cap="none" i="0" spc="0" strike="noStrike" sz="1800" u="none" kumimoji="0" normalizeH="0">
+      <a:defRPr kumimoji="0" sz="1800" b="0" i="0" u="none" strike="noStrike" cap="none" spc="0" normalizeH="0" baseline="0">
         <a:ln>
           <a:noFill/>
         </a:ln>
@@ -151,7 +154,7 @@
       <a:buFontTx/>
       <a:buNone/>
       <a:tabLst/>
-      <a:defRPr b="0" baseline="0" cap="none" i="0" spc="0" strike="noStrike" sz="1800" u="none" kumimoji="0" normalizeH="0">
+      <a:defRPr kumimoji="0" sz="1800" b="0" i="0" u="none" strike="noStrike" cap="none" spc="0" normalizeH="0" baseline="0">
         <a:ln>
           <a:noFill/>
         </a:ln>
@@ -181,7 +184,7 @@
       <a:buFontTx/>
       <a:buNone/>
       <a:tabLst/>
-      <a:defRPr b="0" baseline="0" cap="none" i="0" spc="0" strike="noStrike" sz="1800" u="none" kumimoji="0" normalizeH="0">
+      <a:defRPr kumimoji="0" sz="1800" b="0" i="0" u="none" strike="noStrike" cap="none" spc="0" normalizeH="0" baseline="0">
         <a:ln>
           <a:noFill/>
         </a:ln>
@@ -211,7 +214,7 @@
       <a:buFontTx/>
       <a:buNone/>
       <a:tabLst/>
-      <a:defRPr b="0" baseline="0" cap="none" i="0" spc="0" strike="noStrike" sz="1800" u="none" kumimoji="0" normalizeH="0">
+      <a:defRPr kumimoji="0" sz="1800" b="0" i="0" u="none" strike="noStrike" cap="none" spc="0" normalizeH="0" baseline="0">
         <a:ln>
           <a:noFill/>
         </a:ln>
@@ -241,7 +244,7 @@
       <a:buFontTx/>
       <a:buNone/>
       <a:tabLst/>
-      <a:defRPr b="0" baseline="0" cap="none" i="0" spc="0" strike="noStrike" sz="1800" u="none" kumimoji="0" normalizeH="0">
+      <a:defRPr kumimoji="0" sz="1800" b="0" i="0" u="none" strike="noStrike" cap="none" spc="0" normalizeH="0" baseline="0">
         <a:ln>
           <a:noFill/>
         </a:ln>
@@ -271,7 +274,7 @@
       <a:buFontTx/>
       <a:buNone/>
       <a:tabLst/>
-      <a:defRPr b="0" baseline="0" cap="none" i="0" spc="0" strike="noStrike" sz="1800" u="none" kumimoji="0" normalizeH="0">
+      <a:defRPr kumimoji="0" sz="1800" b="0" i="0" u="none" strike="noStrike" cap="none" spc="0" normalizeH="0" baseline="0">
         <a:ln>
           <a:noFill/>
         </a:ln>
@@ -301,7 +304,7 @@
       <a:buFontTx/>
       <a:buNone/>
       <a:tabLst/>
-      <a:defRPr b="0" baseline="0" cap="none" i="0" spc="0" strike="noStrike" sz="1800" u="none" kumimoji="0" normalizeH="0">
+      <a:defRPr kumimoji="0" sz="1800" b="0" i="0" u="none" strike="noStrike" cap="none" spc="0" normalizeH="0" baseline="0">
         <a:ln>
           <a:noFill/>
         </a:ln>
@@ -320,13 +323,14 @@
 </p:presentation>
 </file>
 
-<file path=ppt/commentAuthors.xml><?xml version="1.0" encoding="utf-8"?>
-<p:cmAuthorLst xmlns:a="http://schemas.openxmlformats.org/drawingml/2006/main" xmlns:r="http://schemas.openxmlformats.org/officeDocument/2006/relationships" xmlns:p="http://schemas.openxmlformats.org/presentationml/2006/main" xmlns:m="http://schemas.openxmlformats.org/officeDocument/2006/math" xmlns:a14="http://schemas.microsoft.com/office/drawing/2010/main"/>
-</file>
-
 <file path=ppt/notesMasters/notesMaster1.xml><?xml version="1.0" encoding="utf-8"?>
-<p:notesMaster xmlns:a="http://schemas.openxmlformats.org/drawingml/2006/main" xmlns:r="http://schemas.openxmlformats.org/officeDocument/2006/relationships" xmlns:p="http://schemas.openxmlformats.org/presentationml/2006/main" xmlns:m="http://schemas.openxmlformats.org/officeDocument/2006/math" xmlns:a14="http://schemas.microsoft.com/office/drawing/2010/main">
+<p:notesMaster xmlns:a="http://schemas.openxmlformats.org/drawingml/2006/main" xmlns:r="http://schemas.openxmlformats.org/officeDocument/2006/relationships" xmlns:p="http://schemas.openxmlformats.org/presentationml/2006/main">
   <p:cSld>
+    <p:bg>
+      <p:bgRef idx="1001">
+        <a:schemeClr val="bg1"/>
+      </p:bgRef>
+    </p:bg>
     <p:spTree>
       <p:nvGrpSpPr>
         <p:cNvPr id="1" name=""/>
@@ -344,7 +348,9 @@
       <p:sp>
         <p:nvSpPr>
           <p:cNvPr id="62" name="Shape 62"/>
-          <p:cNvSpPr/>
+          <p:cNvSpPr>
+            <a:spLocks noGrp="1" noRot="1" noChangeAspect="1"/>
+          </p:cNvSpPr>
           <p:nvPr>
             <p:ph type="sldImg"/>
           </p:nvPr>
@@ -362,14 +368,16 @@
           <a:bodyPr/>
           <a:lstStyle/>
           <a:p>
-            <a:pPr/>
+            <a:endParaRPr/>
           </a:p>
         </p:txBody>
       </p:sp>
       <p:sp>
         <p:nvSpPr>
           <p:cNvPr id="63" name="Shape 63"/>
-          <p:cNvSpPr/>
+          <p:cNvSpPr>
+            <a:spLocks noGrp="1"/>
+          </p:cNvSpPr>
           <p:nvPr>
             <p:ph type="body" sz="quarter" idx="1"/>
           </p:nvPr>
@@ -387,7 +395,7 @@
           <a:bodyPr/>
           <a:lstStyle/>
           <a:p>
-            <a:pPr/>
+            <a:endParaRPr/>
           </a:p>
         </p:txBody>
       </p:sp>
@@ -472,7 +480,7 @@
 </file>
 
 <file path=ppt/slideLayouts/slideLayout1.xml><?xml version="1.0" encoding="utf-8"?>
-<p:sldLayout xmlns:a="http://schemas.openxmlformats.org/drawingml/2006/main" xmlns:r="http://schemas.openxmlformats.org/officeDocument/2006/relationships" xmlns:p="http://schemas.openxmlformats.org/presentationml/2006/main" xmlns:m="http://schemas.openxmlformats.org/officeDocument/2006/math" xmlns:a14="http://schemas.microsoft.com/office/drawing/2010/main" type="title" showMasterSp="1" showMasterPhAnim="1">
+<p:sldLayout xmlns:a="http://schemas.openxmlformats.org/drawingml/2006/main" xmlns:r="http://schemas.openxmlformats.org/officeDocument/2006/relationships" xmlns:p="http://schemas.openxmlformats.org/presentationml/2006/main" type="title">
   <p:cSld name="Title Slide">
     <p:spTree>
       <p:nvGrpSpPr>
@@ -513,14 +521,16 @@
           <a:bodyPr lIns="45719" rIns="45719"/>
           <a:lstStyle/>
           <a:p>
-            <a:pPr/>
+            <a:endParaRPr/>
           </a:p>
         </p:txBody>
       </p:sp>
       <p:sp>
         <p:nvSpPr>
           <p:cNvPr id="12" name="Title Text"/>
-          <p:cNvSpPr txBox="1"/>
+          <p:cNvSpPr txBox="1">
+            <a:spLocks noGrp="1"/>
+          </p:cNvSpPr>
           <p:nvPr>
             <p:ph type="title"/>
           </p:nvPr>
@@ -536,11 +546,10 @@
         </p:spPr>
         <p:txBody>
           <a:bodyPr>
-            <a:normAutofit fontScale="100000" lnSpcReduction="0"/>
+            <a:normAutofit/>
           </a:bodyPr>
           <a:lstStyle/>
           <a:p>
-            <a:pPr/>
             <a:r>
               <a:t>Title Text</a:t>
             </a:r>
@@ -550,7 +559,9 @@
       <p:sp>
         <p:nvSpPr>
           <p:cNvPr id="13" name="Body Level One…"/>
-          <p:cNvSpPr txBox="1"/>
+          <p:cNvSpPr txBox="1">
+            <a:spLocks noGrp="1"/>
+          </p:cNvSpPr>
           <p:nvPr>
             <p:ph type="body" sz="quarter" idx="1"/>
           </p:nvPr>
@@ -566,11 +577,10 @@
         </p:spPr>
         <p:txBody>
           <a:bodyPr>
-            <a:normAutofit fontScale="100000" lnSpcReduction="0"/>
+            <a:normAutofit/>
           </a:bodyPr>
           <a:lstStyle/>
           <a:p>
-            <a:pPr/>
             <a:r>
               <a:t>Body Level One</a:t>
             </a:r>
@@ -604,7 +614,9 @@
       <p:sp>
         <p:nvSpPr>
           <p:cNvPr id="14" name="Slide Number"/>
-          <p:cNvSpPr txBox="1"/>
+          <p:cNvSpPr txBox="1">
+            <a:spLocks noGrp="1"/>
+          </p:cNvSpPr>
           <p:nvPr>
             <p:ph type="sldNum" sz="quarter" idx="2"/>
           </p:nvPr>
@@ -618,8 +630,10 @@
           <a:bodyPr/>
           <a:lstStyle/>
           <a:p>
-            <a:pPr/>
-            <a:fld id="{86CB4B4D-7CA3-9044-876B-883B54F8677D}" type="slidenum"/>
+            <a:fld id="{86CB4B4D-7CA3-9044-876B-883B54F8677D}" type="slidenum">
+              <a:t>‹Nº›</a:t>
+            </a:fld>
+            <a:endParaRPr/>
           </a:p>
         </p:txBody>
       </p:sp>
@@ -628,12 +642,12 @@
   <p:clrMapOvr>
     <a:masterClrMapping/>
   </p:clrMapOvr>
-  <p:transition xmlns:p14="http://schemas.microsoft.com/office/powerpoint/2010/main" spd="med" advClick="1"/>
+  <p:transition spd="med"/>
 </p:sldLayout>
 </file>
 
 <file path=ppt/slideLayouts/slideLayout2.xml><?xml version="1.0" encoding="utf-8"?>
-<p:sldLayout xmlns:a="http://schemas.openxmlformats.org/drawingml/2006/main" xmlns:r="http://schemas.openxmlformats.org/officeDocument/2006/relationships" xmlns:p="http://schemas.openxmlformats.org/presentationml/2006/main" xmlns:m="http://schemas.openxmlformats.org/officeDocument/2006/math" xmlns:a14="http://schemas.microsoft.com/office/drawing/2010/main" type="tx" showMasterSp="1" showMasterPhAnim="1">
+<p:sldLayout xmlns:a="http://schemas.openxmlformats.org/drawingml/2006/main" xmlns:r="http://schemas.openxmlformats.org/officeDocument/2006/relationships" xmlns:p="http://schemas.openxmlformats.org/presentationml/2006/main" type="tx">
   <p:cSld name="Title and Content">
     <p:spTree>
       <p:nvGrpSpPr>
@@ -652,7 +666,9 @@
       <p:sp>
         <p:nvSpPr>
           <p:cNvPr id="21" name="Title Text"/>
-          <p:cNvSpPr txBox="1"/>
+          <p:cNvSpPr txBox="1">
+            <a:spLocks noGrp="1"/>
+          </p:cNvSpPr>
           <p:nvPr>
             <p:ph type="title"/>
           </p:nvPr>
@@ -668,11 +684,10 @@
         </p:spPr>
         <p:txBody>
           <a:bodyPr>
-            <a:normAutofit fontScale="100000" lnSpcReduction="0"/>
+            <a:normAutofit/>
           </a:bodyPr>
           <a:lstStyle/>
           <a:p>
-            <a:pPr/>
             <a:r>
               <a:t>Title Text</a:t>
             </a:r>
@@ -682,7 +697,9 @@
       <p:sp>
         <p:nvSpPr>
           <p:cNvPr id="22" name="Body Level One…"/>
-          <p:cNvSpPr txBox="1"/>
+          <p:cNvSpPr txBox="1">
+            <a:spLocks noGrp="1"/>
+          </p:cNvSpPr>
           <p:nvPr>
             <p:ph type="body" sz="half" idx="1"/>
           </p:nvPr>
@@ -698,11 +715,10 @@
         </p:spPr>
         <p:txBody>
           <a:bodyPr>
-            <a:normAutofit fontScale="100000" lnSpcReduction="0"/>
+            <a:normAutofit/>
           </a:bodyPr>
           <a:lstStyle/>
           <a:p>
-            <a:pPr/>
             <a:r>
               <a:t>Body Level One</a:t>
             </a:r>
@@ -736,7 +752,9 @@
       <p:sp>
         <p:nvSpPr>
           <p:cNvPr id="23" name="Slide Number"/>
-          <p:cNvSpPr txBox="1"/>
+          <p:cNvSpPr txBox="1">
+            <a:spLocks noGrp="1"/>
+          </p:cNvSpPr>
           <p:nvPr>
             <p:ph type="sldNum" sz="quarter" idx="2"/>
           </p:nvPr>
@@ -750,8 +768,10 @@
           <a:bodyPr/>
           <a:lstStyle/>
           <a:p>
-            <a:pPr/>
-            <a:fld id="{86CB4B4D-7CA3-9044-876B-883B54F8677D}" type="slidenum"/>
+            <a:fld id="{86CB4B4D-7CA3-9044-876B-883B54F8677D}" type="slidenum">
+              <a:t>‹Nº›</a:t>
+            </a:fld>
+            <a:endParaRPr/>
           </a:p>
         </p:txBody>
       </p:sp>
@@ -760,12 +780,12 @@
   <p:clrMapOvr>
     <a:masterClrMapping/>
   </p:clrMapOvr>
-  <p:transition xmlns:p14="http://schemas.microsoft.com/office/powerpoint/2010/main" spd="med" advClick="1"/>
+  <p:transition spd="med"/>
 </p:sldLayout>
 </file>
 
 <file path=ppt/slideLayouts/slideLayout3.xml><?xml version="1.0" encoding="utf-8"?>
-<p:sldLayout xmlns:a="http://schemas.openxmlformats.org/drawingml/2006/main" xmlns:r="http://schemas.openxmlformats.org/officeDocument/2006/relationships" xmlns:p="http://schemas.openxmlformats.org/presentationml/2006/main" xmlns:m="http://schemas.openxmlformats.org/officeDocument/2006/math" xmlns:a14="http://schemas.microsoft.com/office/drawing/2010/main" type="tx" showMasterSp="1" showMasterPhAnim="1">
+<p:sldLayout xmlns:a="http://schemas.openxmlformats.org/drawingml/2006/main" xmlns:r="http://schemas.openxmlformats.org/officeDocument/2006/relationships" xmlns:p="http://schemas.openxmlformats.org/presentationml/2006/main" type="tx">
   <p:cSld name="Title and Content 0">
     <p:spTree>
       <p:nvGrpSpPr>
@@ -784,7 +804,9 @@
       <p:sp>
         <p:nvSpPr>
           <p:cNvPr id="30" name="Title Text"/>
-          <p:cNvSpPr txBox="1"/>
+          <p:cNvSpPr txBox="1">
+            <a:spLocks noGrp="1"/>
+          </p:cNvSpPr>
           <p:nvPr>
             <p:ph type="title"/>
           </p:nvPr>
@@ -800,11 +822,10 @@
         </p:spPr>
         <p:txBody>
           <a:bodyPr>
-            <a:normAutofit fontScale="100000" lnSpcReduction="0"/>
+            <a:normAutofit/>
           </a:bodyPr>
           <a:lstStyle/>
           <a:p>
-            <a:pPr/>
             <a:r>
               <a:t>Title Text</a:t>
             </a:r>
@@ -814,7 +835,9 @@
       <p:sp>
         <p:nvSpPr>
           <p:cNvPr id="31" name="Body Level One…"/>
-          <p:cNvSpPr txBox="1"/>
+          <p:cNvSpPr txBox="1">
+            <a:spLocks noGrp="1"/>
+          </p:cNvSpPr>
           <p:nvPr>
             <p:ph type="body" sz="half" idx="1"/>
           </p:nvPr>
@@ -830,11 +853,10 @@
         </p:spPr>
         <p:txBody>
           <a:bodyPr>
-            <a:normAutofit fontScale="100000" lnSpcReduction="0"/>
+            <a:normAutofit/>
           </a:bodyPr>
           <a:lstStyle/>
           <a:p>
-            <a:pPr/>
             <a:r>
               <a:t>Body Level One</a:t>
             </a:r>
@@ -868,7 +890,9 @@
       <p:sp>
         <p:nvSpPr>
           <p:cNvPr id="32" name="Slide Number"/>
-          <p:cNvSpPr txBox="1"/>
+          <p:cNvSpPr txBox="1">
+            <a:spLocks noGrp="1"/>
+          </p:cNvSpPr>
           <p:nvPr>
             <p:ph type="sldNum" sz="quarter" idx="2"/>
           </p:nvPr>
@@ -882,8 +906,10 @@
           <a:bodyPr/>
           <a:lstStyle/>
           <a:p>
-            <a:pPr/>
-            <a:fld id="{86CB4B4D-7CA3-9044-876B-883B54F8677D}" type="slidenum"/>
+            <a:fld id="{86CB4B4D-7CA3-9044-876B-883B54F8677D}" type="slidenum">
+              <a:t>‹Nº›</a:t>
+            </a:fld>
+            <a:endParaRPr/>
           </a:p>
         </p:txBody>
       </p:sp>
@@ -892,12 +918,12 @@
   <p:clrMapOvr>
     <a:masterClrMapping/>
   </p:clrMapOvr>
-  <p:transition xmlns:p14="http://schemas.microsoft.com/office/powerpoint/2010/main" spd="med" advClick="1"/>
+  <p:transition spd="med"/>
 </p:sldLayout>
 </file>
 
 <file path=ppt/slideLayouts/slideLayout4.xml><?xml version="1.0" encoding="utf-8"?>
-<p:sldLayout xmlns:a="http://schemas.openxmlformats.org/drawingml/2006/main" xmlns:r="http://schemas.openxmlformats.org/officeDocument/2006/relationships" xmlns:p="http://schemas.openxmlformats.org/presentationml/2006/main" xmlns:m="http://schemas.openxmlformats.org/officeDocument/2006/math" xmlns:a14="http://schemas.microsoft.com/office/drawing/2010/main" type="tx" showMasterSp="1" showMasterPhAnim="1">
+<p:sldLayout xmlns:a="http://schemas.openxmlformats.org/drawingml/2006/main" xmlns:r="http://schemas.openxmlformats.org/officeDocument/2006/relationships" xmlns:p="http://schemas.openxmlformats.org/presentationml/2006/main" type="tx">
   <p:cSld name="Two Content">
     <p:spTree>
       <p:nvGrpSpPr>
@@ -916,7 +942,9 @@
       <p:sp>
         <p:nvSpPr>
           <p:cNvPr id="39" name="Title Text"/>
-          <p:cNvSpPr txBox="1"/>
+          <p:cNvSpPr txBox="1">
+            <a:spLocks noGrp="1"/>
+          </p:cNvSpPr>
           <p:nvPr>
             <p:ph type="title"/>
           </p:nvPr>
@@ -932,11 +960,10 @@
         </p:spPr>
         <p:txBody>
           <a:bodyPr>
-            <a:normAutofit fontScale="100000" lnSpcReduction="0"/>
+            <a:normAutofit/>
           </a:bodyPr>
           <a:lstStyle/>
           <a:p>
-            <a:pPr/>
             <a:r>
               <a:t>Title Text</a:t>
             </a:r>
@@ -946,7 +973,9 @@
       <p:sp>
         <p:nvSpPr>
           <p:cNvPr id="40" name="Body Level One…"/>
-          <p:cNvSpPr txBox="1"/>
+          <p:cNvSpPr txBox="1">
+            <a:spLocks noGrp="1"/>
+          </p:cNvSpPr>
           <p:nvPr>
             <p:ph type="body" sz="half" idx="1"/>
           </p:nvPr>
@@ -962,11 +991,10 @@
         </p:spPr>
         <p:txBody>
           <a:bodyPr>
-            <a:normAutofit fontScale="100000" lnSpcReduction="0"/>
+            <a:normAutofit/>
           </a:bodyPr>
           <a:lstStyle/>
           <a:p>
-            <a:pPr/>
             <a:r>
               <a:t>Body Level One</a:t>
             </a:r>
@@ -1000,7 +1028,9 @@
       <p:sp>
         <p:nvSpPr>
           <p:cNvPr id="41" name="Slide Number"/>
-          <p:cNvSpPr txBox="1"/>
+          <p:cNvSpPr txBox="1">
+            <a:spLocks noGrp="1"/>
+          </p:cNvSpPr>
           <p:nvPr>
             <p:ph type="sldNum" sz="quarter" idx="2"/>
           </p:nvPr>
@@ -1014,8 +1044,10 @@
           <a:bodyPr/>
           <a:lstStyle/>
           <a:p>
-            <a:pPr/>
-            <a:fld id="{86CB4B4D-7CA3-9044-876B-883B54F8677D}" type="slidenum"/>
+            <a:fld id="{86CB4B4D-7CA3-9044-876B-883B54F8677D}" type="slidenum">
+              <a:t>‹Nº›</a:t>
+            </a:fld>
+            <a:endParaRPr/>
           </a:p>
         </p:txBody>
       </p:sp>
@@ -1024,12 +1056,12 @@
   <p:clrMapOvr>
     <a:masterClrMapping/>
   </p:clrMapOvr>
-  <p:transition xmlns:p14="http://schemas.microsoft.com/office/powerpoint/2010/main" spd="med" advClick="1"/>
+  <p:transition spd="med"/>
 </p:sldLayout>
 </file>
 
 <file path=ppt/slideLayouts/slideLayout5.xml><?xml version="1.0" encoding="utf-8"?>
-<p:sldLayout xmlns:a="http://schemas.openxmlformats.org/drawingml/2006/main" xmlns:r="http://schemas.openxmlformats.org/officeDocument/2006/relationships" xmlns:p="http://schemas.openxmlformats.org/presentationml/2006/main" xmlns:m="http://schemas.openxmlformats.org/officeDocument/2006/math" xmlns:a14="http://schemas.microsoft.com/office/drawing/2010/main" type="tx" showMasterSp="1" showMasterPhAnim="1">
+<p:sldLayout xmlns:a="http://schemas.openxmlformats.org/drawingml/2006/main" xmlns:r="http://schemas.openxmlformats.org/officeDocument/2006/relationships" xmlns:p="http://schemas.openxmlformats.org/presentationml/2006/main" type="tx">
   <p:cSld name="Title Only">
     <p:spTree>
       <p:nvGrpSpPr>
@@ -1048,7 +1080,9 @@
       <p:sp>
         <p:nvSpPr>
           <p:cNvPr id="48" name="Title Text"/>
-          <p:cNvSpPr txBox="1"/>
+          <p:cNvSpPr txBox="1">
+            <a:spLocks noGrp="1"/>
+          </p:cNvSpPr>
           <p:nvPr>
             <p:ph type="title"/>
           </p:nvPr>
@@ -1064,11 +1098,10 @@
         </p:spPr>
         <p:txBody>
           <a:bodyPr>
-            <a:normAutofit fontScale="100000" lnSpcReduction="0"/>
+            <a:normAutofit/>
           </a:bodyPr>
           <a:lstStyle/>
           <a:p>
-            <a:pPr/>
             <a:r>
               <a:t>Title Text</a:t>
             </a:r>
@@ -1078,7 +1111,9 @@
       <p:sp>
         <p:nvSpPr>
           <p:cNvPr id="49" name="Slide Number"/>
-          <p:cNvSpPr txBox="1"/>
+          <p:cNvSpPr txBox="1">
+            <a:spLocks noGrp="1"/>
+          </p:cNvSpPr>
           <p:nvPr>
             <p:ph type="sldNum" sz="quarter" idx="2"/>
           </p:nvPr>
@@ -1092,8 +1127,10 @@
           <a:bodyPr/>
           <a:lstStyle/>
           <a:p>
-            <a:pPr/>
-            <a:fld id="{86CB4B4D-7CA3-9044-876B-883B54F8677D}" type="slidenum"/>
+            <a:fld id="{86CB4B4D-7CA3-9044-876B-883B54F8677D}" type="slidenum">
+              <a:t>‹Nº›</a:t>
+            </a:fld>
+            <a:endParaRPr/>
           </a:p>
         </p:txBody>
       </p:sp>
@@ -1102,12 +1139,12 @@
   <p:clrMapOvr>
     <a:masterClrMapping/>
   </p:clrMapOvr>
-  <p:transition xmlns:p14="http://schemas.microsoft.com/office/powerpoint/2010/main" spd="med" advClick="1"/>
+  <p:transition spd="med"/>
 </p:sldLayout>
 </file>
 
 <file path=ppt/slideLayouts/slideLayout6.xml><?xml version="1.0" encoding="utf-8"?>
-<p:sldLayout xmlns:a="http://schemas.openxmlformats.org/drawingml/2006/main" xmlns:r="http://schemas.openxmlformats.org/officeDocument/2006/relationships" xmlns:p="http://schemas.openxmlformats.org/presentationml/2006/main" xmlns:m="http://schemas.openxmlformats.org/officeDocument/2006/math" xmlns:a14="http://schemas.microsoft.com/office/drawing/2010/main" type="tx" showMasterSp="1" showMasterPhAnim="1">
+<p:sldLayout xmlns:a="http://schemas.openxmlformats.org/drawingml/2006/main" xmlns:r="http://schemas.openxmlformats.org/officeDocument/2006/relationships" xmlns:p="http://schemas.openxmlformats.org/presentationml/2006/main" type="tx">
   <p:cSld name="Blank">
     <p:spTree>
       <p:nvGrpSpPr>
@@ -1126,7 +1163,9 @@
       <p:sp>
         <p:nvSpPr>
           <p:cNvPr id="56" name="Slide Number"/>
-          <p:cNvSpPr txBox="1"/>
+          <p:cNvSpPr txBox="1">
+            <a:spLocks noGrp="1"/>
+          </p:cNvSpPr>
           <p:nvPr>
             <p:ph type="sldNum" sz="quarter" idx="2"/>
           </p:nvPr>
@@ -1140,8 +1179,10 @@
           <a:bodyPr/>
           <a:lstStyle/>
           <a:p>
-            <a:pPr/>
-            <a:fld id="{86CB4B4D-7CA3-9044-876B-883B54F8677D}" type="slidenum"/>
+            <a:fld id="{86CB4B4D-7CA3-9044-876B-883B54F8677D}" type="slidenum">
+              <a:t>‹Nº›</a:t>
+            </a:fld>
+            <a:endParaRPr/>
           </a:p>
         </p:txBody>
       </p:sp>
@@ -1150,18 +1191,19 @@
   <p:clrMapOvr>
     <a:masterClrMapping/>
   </p:clrMapOvr>
-  <p:transition xmlns:p14="http://schemas.microsoft.com/office/powerpoint/2010/main" spd="med" advClick="1"/>
+  <p:transition spd="med"/>
 </p:sldLayout>
 </file>
 
 <file path=ppt/slideMasters/slideMaster1.xml><?xml version="1.0" encoding="utf-8"?>
-<p:sldMaster xmlns:a="http://schemas.openxmlformats.org/drawingml/2006/main" xmlns:r="http://schemas.openxmlformats.org/officeDocument/2006/relationships" xmlns:p="http://schemas.openxmlformats.org/presentationml/2006/main" xmlns:m="http://schemas.openxmlformats.org/officeDocument/2006/math" xmlns:a14="http://schemas.microsoft.com/office/drawing/2010/main">
+<p:sldMaster xmlns:a="http://schemas.openxmlformats.org/drawingml/2006/main" xmlns:r="http://schemas.openxmlformats.org/officeDocument/2006/relationships" xmlns:p="http://schemas.openxmlformats.org/presentationml/2006/main">
   <p:cSld>
     <p:bg>
       <p:bgPr>
         <a:solidFill>
           <a:srgbClr val="FFFFFF"/>
         </a:solidFill>
+        <a:effectLst/>
       </p:bgPr>
     </p:bg>
     <p:spTree>
@@ -1181,7 +1223,9 @@
       <p:sp>
         <p:nvSpPr>
           <p:cNvPr id="2" name="Title Text"/>
-          <p:cNvSpPr txBox="1"/>
+          <p:cNvSpPr txBox="1">
+            <a:spLocks noGrp="1"/>
+          </p:cNvSpPr>
           <p:nvPr>
             <p:ph type="title"/>
           </p:nvPr>
@@ -1199,7 +1243,7 @@
           </a:ln>
           <a:extLst>
             <a:ext uri="{C572A759-6A51-4108-AA02-DFA0A04FC94B}">
-              <ma14:wrappingTextBoxFlag xmlns:ma14="http://schemas.microsoft.com/office/mac/drawingml/2011/main" val="1"/>
+              <ma14:wrappingTextBoxFlag xmlns:ma14="http://schemas.microsoft.com/office/mac/drawingml/2011/main" xmlns:a14="http://schemas.microsoft.com/office/drawing/2010/main" xmlns:m="http://schemas.openxmlformats.org/officeDocument/2006/math" xmlns="" val="1"/>
             </a:ext>
           </a:extLst>
         </p:spPr>
@@ -1207,7 +1251,6 @@
           <a:bodyPr lIns="0" tIns="0" rIns="0" bIns="0"/>
           <a:lstStyle/>
           <a:p>
-            <a:pPr/>
             <a:r>
               <a:t>Title Text</a:t>
             </a:r>
@@ -1217,7 +1260,9 @@
       <p:sp>
         <p:nvSpPr>
           <p:cNvPr id="3" name="Body Level One…"/>
-          <p:cNvSpPr txBox="1"/>
+          <p:cNvSpPr txBox="1">
+            <a:spLocks noGrp="1"/>
+          </p:cNvSpPr>
           <p:nvPr>
             <p:ph type="body" idx="1"/>
           </p:nvPr>
@@ -1235,7 +1280,7 @@
           </a:ln>
           <a:extLst>
             <a:ext uri="{C572A759-6A51-4108-AA02-DFA0A04FC94B}">
-              <ma14:wrappingTextBoxFlag xmlns:ma14="http://schemas.microsoft.com/office/mac/drawingml/2011/main" val="1"/>
+              <ma14:wrappingTextBoxFlag xmlns:ma14="http://schemas.microsoft.com/office/mac/drawingml/2011/main" xmlns:a14="http://schemas.microsoft.com/office/drawing/2010/main" xmlns:m="http://schemas.openxmlformats.org/officeDocument/2006/math" xmlns="" val="1"/>
             </a:ext>
           </a:extLst>
         </p:spPr>
@@ -1243,7 +1288,6 @@
           <a:bodyPr lIns="0" tIns="0" rIns="0" bIns="0"/>
           <a:lstStyle/>
           <a:p>
-            <a:pPr/>
             <a:r>
               <a:t>Body Level One</a:t>
             </a:r>
@@ -1277,7 +1321,9 @@
       <p:sp>
         <p:nvSpPr>
           <p:cNvPr id="4" name="Slide Number"/>
-          <p:cNvSpPr txBox="1"/>
+          <p:cNvSpPr txBox="1">
+            <a:spLocks noGrp="1"/>
+          </p:cNvSpPr>
           <p:nvPr>
             <p:ph type="sldNum" sz="quarter" idx="2"/>
           </p:nvPr>
@@ -1312,8 +1358,10 @@
             </a:lvl1pPr>
           </a:lstStyle>
           <a:p>
-            <a:pPr/>
-            <a:fld id="{86CB4B4D-7CA3-9044-876B-883B54F8677D}" type="slidenum"/>
+            <a:fld id="{86CB4B4D-7CA3-9044-876B-883B54F8677D}" type="slidenum">
+              <a:t>‹Nº›</a:t>
+            </a:fld>
+            <a:endParaRPr/>
           </a:p>
         </p:txBody>
       </p:sp>
@@ -1321,14 +1369,14 @@
   </p:cSld>
   <p:clrMap bg1="lt1" tx1="dk1" bg2="lt2" tx2="dk2" accent1="accent1" accent2="accent2" accent3="accent3" accent4="accent4" accent5="accent5" accent6="accent6" hlink="hlink" folHlink="folHlink"/>
   <p:sldLayoutIdLst>
-    <p:sldLayoutId id="2147483649" r:id="rId2"/>
-    <p:sldLayoutId id="2147483650" r:id="rId3"/>
-    <p:sldLayoutId id="2147483651" r:id="rId4"/>
-    <p:sldLayoutId id="2147483652" r:id="rId5"/>
-    <p:sldLayoutId id="2147483653" r:id="rId6"/>
-    <p:sldLayoutId id="2147483654" r:id="rId7"/>
+    <p:sldLayoutId id="2147483649" r:id="rId1"/>
+    <p:sldLayoutId id="2147483650" r:id="rId2"/>
+    <p:sldLayoutId id="2147483651" r:id="rId3"/>
+    <p:sldLayoutId id="2147483652" r:id="rId4"/>
+    <p:sldLayoutId id="2147483653" r:id="rId5"/>
+    <p:sldLayoutId id="2147483654" r:id="rId6"/>
   </p:sldLayoutIdLst>
-  <p:transition xmlns:p14="http://schemas.microsoft.com/office/powerpoint/2010/main" spd="med" advClick="1"/>
+  <p:transition spd="med"/>
   <p:txStyles>
     <p:titleStyle>
       <a:lvl1pPr marL="0" marR="0" indent="0" algn="l" defTabSz="914400" rtl="0" latinLnBrk="0">
@@ -1346,7 +1394,7 @@
         <a:buFontTx/>
         <a:buNone/>
         <a:tabLst/>
-        <a:defRPr b="0" baseline="0" cap="none" i="0" spc="0" strike="noStrike" sz="6500" u="none">
+        <a:defRPr sz="6500" b="0" i="0" u="none" strike="noStrike" cap="none" spc="0" baseline="0">
           <a:solidFill>
             <a:srgbClr val="FFFFFF"/>
           </a:solidFill>
@@ -1372,7 +1420,7 @@
         <a:buFontTx/>
         <a:buNone/>
         <a:tabLst/>
-        <a:defRPr b="0" baseline="0" cap="none" i="0" spc="0" strike="noStrike" sz="6500" u="none">
+        <a:defRPr sz="6500" b="0" i="0" u="none" strike="noStrike" cap="none" spc="0" baseline="0">
           <a:solidFill>
             <a:srgbClr val="FFFFFF"/>
           </a:solidFill>
@@ -1398,7 +1446,7 @@
         <a:buFontTx/>
         <a:buNone/>
         <a:tabLst/>
-        <a:defRPr b="0" baseline="0" cap="none" i="0" spc="0" strike="noStrike" sz="6500" u="none">
+        <a:defRPr sz="6500" b="0" i="0" u="none" strike="noStrike" cap="none" spc="0" baseline="0">
           <a:solidFill>
             <a:srgbClr val="FFFFFF"/>
           </a:solidFill>
@@ -1424,7 +1472,7 @@
         <a:buFontTx/>
         <a:buNone/>
         <a:tabLst/>
-        <a:defRPr b="0" baseline="0" cap="none" i="0" spc="0" strike="noStrike" sz="6500" u="none">
+        <a:defRPr sz="6500" b="0" i="0" u="none" strike="noStrike" cap="none" spc="0" baseline="0">
           <a:solidFill>
             <a:srgbClr val="FFFFFF"/>
           </a:solidFill>
@@ -1450,7 +1498,7 @@
         <a:buFontTx/>
         <a:buNone/>
         <a:tabLst/>
-        <a:defRPr b="0" baseline="0" cap="none" i="0" spc="0" strike="noStrike" sz="6500" u="none">
+        <a:defRPr sz="6500" b="0" i="0" u="none" strike="noStrike" cap="none" spc="0" baseline="0">
           <a:solidFill>
             <a:srgbClr val="FFFFFF"/>
           </a:solidFill>
@@ -1476,7 +1524,7 @@
         <a:buFontTx/>
         <a:buNone/>
         <a:tabLst/>
-        <a:defRPr b="0" baseline="0" cap="none" i="0" spc="0" strike="noStrike" sz="6500" u="none">
+        <a:defRPr sz="6500" b="0" i="0" u="none" strike="noStrike" cap="none" spc="0" baseline="0">
           <a:solidFill>
             <a:srgbClr val="FFFFFF"/>
           </a:solidFill>
@@ -1502,7 +1550,7 @@
         <a:buFontTx/>
         <a:buNone/>
         <a:tabLst/>
-        <a:defRPr b="0" baseline="0" cap="none" i="0" spc="0" strike="noStrike" sz="6500" u="none">
+        <a:defRPr sz="6500" b="0" i="0" u="none" strike="noStrike" cap="none" spc="0" baseline="0">
           <a:solidFill>
             <a:srgbClr val="FFFFFF"/>
           </a:solidFill>
@@ -1528,7 +1576,7 @@
         <a:buFontTx/>
         <a:buNone/>
         <a:tabLst/>
-        <a:defRPr b="0" baseline="0" cap="none" i="0" spc="0" strike="noStrike" sz="6500" u="none">
+        <a:defRPr sz="6500" b="0" i="0" u="none" strike="noStrike" cap="none" spc="0" baseline="0">
           <a:solidFill>
             <a:srgbClr val="FFFFFF"/>
           </a:solidFill>
@@ -1554,7 +1602,7 @@
         <a:buFontTx/>
         <a:buNone/>
         <a:tabLst/>
-        <a:defRPr b="0" baseline="0" cap="none" i="0" spc="0" strike="noStrike" sz="6500" u="none">
+        <a:defRPr sz="6500" b="0" i="0" u="none" strike="noStrike" cap="none" spc="0" baseline="0">
           <a:solidFill>
             <a:srgbClr val="FFFFFF"/>
           </a:solidFill>
@@ -1582,7 +1630,7 @@
         <a:buFontTx/>
         <a:buNone/>
         <a:tabLst/>
-        <a:defRPr b="0" baseline="0" cap="none" i="0" spc="0" strike="noStrike" sz="1800" u="none">
+        <a:defRPr sz="1800" b="0" i="0" u="none" strike="noStrike" cap="none" spc="0" baseline="0">
           <a:solidFill>
             <a:srgbClr val="000000"/>
           </a:solidFill>
@@ -1608,7 +1656,7 @@
         <a:buFontTx/>
         <a:buNone/>
         <a:tabLst/>
-        <a:defRPr b="0" baseline="0" cap="none" i="0" spc="0" strike="noStrike" sz="1800" u="none">
+        <a:defRPr sz="1800" b="0" i="0" u="none" strike="noStrike" cap="none" spc="0" baseline="0">
           <a:solidFill>
             <a:srgbClr val="000000"/>
           </a:solidFill>
@@ -1634,7 +1682,7 @@
         <a:buFontTx/>
         <a:buNone/>
         <a:tabLst/>
-        <a:defRPr b="0" baseline="0" cap="none" i="0" spc="0" strike="noStrike" sz="1800" u="none">
+        <a:defRPr sz="1800" b="0" i="0" u="none" strike="noStrike" cap="none" spc="0" baseline="0">
           <a:solidFill>
             <a:srgbClr val="000000"/>
           </a:solidFill>
@@ -1660,7 +1708,7 @@
         <a:buFontTx/>
         <a:buNone/>
         <a:tabLst/>
-        <a:defRPr b="0" baseline="0" cap="none" i="0" spc="0" strike="noStrike" sz="1800" u="none">
+        <a:defRPr sz="1800" b="0" i="0" u="none" strike="noStrike" cap="none" spc="0" baseline="0">
           <a:solidFill>
             <a:srgbClr val="000000"/>
           </a:solidFill>
@@ -1686,7 +1734,7 @@
         <a:buFontTx/>
         <a:buNone/>
         <a:tabLst/>
-        <a:defRPr b="0" baseline="0" cap="none" i="0" spc="0" strike="noStrike" sz="1800" u="none">
+        <a:defRPr sz="1800" b="0" i="0" u="none" strike="noStrike" cap="none" spc="0" baseline="0">
           <a:solidFill>
             <a:srgbClr val="000000"/>
           </a:solidFill>
@@ -1712,7 +1760,7 @@
         <a:buFontTx/>
         <a:buNone/>
         <a:tabLst/>
-        <a:defRPr b="0" baseline="0" cap="none" i="0" spc="0" strike="noStrike" sz="1800" u="none">
+        <a:defRPr sz="1800" b="0" i="0" u="none" strike="noStrike" cap="none" spc="0" baseline="0">
           <a:solidFill>
             <a:srgbClr val="000000"/>
           </a:solidFill>
@@ -1738,7 +1786,7 @@
         <a:buFontTx/>
         <a:buNone/>
         <a:tabLst/>
-        <a:defRPr b="0" baseline="0" cap="none" i="0" spc="0" strike="noStrike" sz="1800" u="none">
+        <a:defRPr sz="1800" b="0" i="0" u="none" strike="noStrike" cap="none" spc="0" baseline="0">
           <a:solidFill>
             <a:srgbClr val="000000"/>
           </a:solidFill>
@@ -1764,7 +1812,7 @@
         <a:buFontTx/>
         <a:buNone/>
         <a:tabLst/>
-        <a:defRPr b="0" baseline="0" cap="none" i="0" spc="0" strike="noStrike" sz="1800" u="none">
+        <a:defRPr sz="1800" b="0" i="0" u="none" strike="noStrike" cap="none" spc="0" baseline="0">
           <a:solidFill>
             <a:srgbClr val="000000"/>
           </a:solidFill>
@@ -1790,7 +1838,7 @@
         <a:buFontTx/>
         <a:buNone/>
         <a:tabLst/>
-        <a:defRPr b="0" baseline="0" cap="none" i="0" spc="0" strike="noStrike" sz="1800" u="none">
+        <a:defRPr sz="1800" b="0" i="0" u="none" strike="noStrike" cap="none" spc="0" baseline="0">
           <a:solidFill>
             <a:srgbClr val="000000"/>
           </a:solidFill>
@@ -1818,7 +1866,7 @@
         <a:buFontTx/>
         <a:buNone/>
         <a:tabLst/>
-        <a:defRPr b="0" baseline="0" cap="none" i="0" spc="0" strike="noStrike" sz="1800" u="none">
+        <a:defRPr sz="1800" b="0" i="0" u="none" strike="noStrike" cap="none" spc="0" baseline="0">
           <a:solidFill>
             <a:schemeClr val="tx1"/>
           </a:solidFill>
@@ -1844,7 +1892,7 @@
         <a:buFontTx/>
         <a:buNone/>
         <a:tabLst/>
-        <a:defRPr b="0" baseline="0" cap="none" i="0" spc="0" strike="noStrike" sz="1800" u="none">
+        <a:defRPr sz="1800" b="0" i="0" u="none" strike="noStrike" cap="none" spc="0" baseline="0">
           <a:solidFill>
             <a:schemeClr val="tx1"/>
           </a:solidFill>
@@ -1870,7 +1918,7 @@
         <a:buFontTx/>
         <a:buNone/>
         <a:tabLst/>
-        <a:defRPr b="0" baseline="0" cap="none" i="0" spc="0" strike="noStrike" sz="1800" u="none">
+        <a:defRPr sz="1800" b="0" i="0" u="none" strike="noStrike" cap="none" spc="0" baseline="0">
           <a:solidFill>
             <a:schemeClr val="tx1"/>
           </a:solidFill>
@@ -1896,7 +1944,7 @@
         <a:buFontTx/>
         <a:buNone/>
         <a:tabLst/>
-        <a:defRPr b="0" baseline="0" cap="none" i="0" spc="0" strike="noStrike" sz="1800" u="none">
+        <a:defRPr sz="1800" b="0" i="0" u="none" strike="noStrike" cap="none" spc="0" baseline="0">
           <a:solidFill>
             <a:schemeClr val="tx1"/>
           </a:solidFill>
@@ -1922,7 +1970,7 @@
         <a:buFontTx/>
         <a:buNone/>
         <a:tabLst/>
-        <a:defRPr b="0" baseline="0" cap="none" i="0" spc="0" strike="noStrike" sz="1800" u="none">
+        <a:defRPr sz="1800" b="0" i="0" u="none" strike="noStrike" cap="none" spc="0" baseline="0">
           <a:solidFill>
             <a:schemeClr val="tx1"/>
           </a:solidFill>
@@ -1948,7 +1996,7 @@
         <a:buFontTx/>
         <a:buNone/>
         <a:tabLst/>
-        <a:defRPr b="0" baseline="0" cap="none" i="0" spc="0" strike="noStrike" sz="1800" u="none">
+        <a:defRPr sz="1800" b="0" i="0" u="none" strike="noStrike" cap="none" spc="0" baseline="0">
           <a:solidFill>
             <a:schemeClr val="tx1"/>
           </a:solidFill>
@@ -1974,7 +2022,7 @@
         <a:buFontTx/>
         <a:buNone/>
         <a:tabLst/>
-        <a:defRPr b="0" baseline="0" cap="none" i="0" spc="0" strike="noStrike" sz="1800" u="none">
+        <a:defRPr sz="1800" b="0" i="0" u="none" strike="noStrike" cap="none" spc="0" baseline="0">
           <a:solidFill>
             <a:schemeClr val="tx1"/>
           </a:solidFill>
@@ -2000,7 +2048,7 @@
         <a:buFontTx/>
         <a:buNone/>
         <a:tabLst/>
-        <a:defRPr b="0" baseline="0" cap="none" i="0" spc="0" strike="noStrike" sz="1800" u="none">
+        <a:defRPr sz="1800" b="0" i="0" u="none" strike="noStrike" cap="none" spc="0" baseline="0">
           <a:solidFill>
             <a:schemeClr val="tx1"/>
           </a:solidFill>
@@ -2026,7 +2074,7 @@
         <a:buFontTx/>
         <a:buNone/>
         <a:tabLst/>
-        <a:defRPr b="0" baseline="0" cap="none" i="0" spc="0" strike="noStrike" sz="1800" u="none">
+        <a:defRPr sz="1800" b="0" i="0" u="none" strike="noStrike" cap="none" spc="0" baseline="0">
           <a:solidFill>
             <a:schemeClr val="tx1"/>
           </a:solidFill>
@@ -2043,13 +2091,14 @@
 </file>
 
 <file path=ppt/slides/slide1.xml><?xml version="1.0" encoding="utf-8"?>
-<p:sld xmlns:a="http://schemas.openxmlformats.org/drawingml/2006/main" xmlns:r="http://schemas.openxmlformats.org/officeDocument/2006/relationships" xmlns:p="http://schemas.openxmlformats.org/presentationml/2006/main" xmlns:m="http://schemas.openxmlformats.org/officeDocument/2006/math" xmlns:a14="http://schemas.microsoft.com/office/drawing/2010/main" showMasterSp="1" showMasterPhAnim="1">
+<p:sld xmlns:a="http://schemas.openxmlformats.org/drawingml/2006/main" xmlns:r="http://schemas.openxmlformats.org/officeDocument/2006/relationships" xmlns:p="http://schemas.openxmlformats.org/presentationml/2006/main">
   <p:cSld>
     <p:bg>
       <p:bgPr>
         <a:solidFill>
           <a:srgbClr val="000000"/>
         </a:solidFill>
+        <a:effectLst/>
       </p:bgPr>
     </p:bg>
     <p:spTree>
@@ -2091,14 +2140,16 @@
           <a:bodyPr lIns="45719" rIns="45719"/>
           <a:lstStyle/>
           <a:p>
-            <a:pPr/>
+            <a:endParaRPr/>
           </a:p>
         </p:txBody>
       </p:sp>
       <p:sp>
         <p:nvSpPr>
           <p:cNvPr id="66" name="object 3"/>
-          <p:cNvSpPr txBox="1"/>
+          <p:cNvSpPr txBox="1">
+            <a:spLocks noGrp="1"/>
+          </p:cNvSpPr>
           <p:nvPr>
             <p:ph type="title"/>
           </p:nvPr>
@@ -2117,7 +2168,7 @@
           <a:lstStyle/>
           <a:p>
             <a:pPr indent="11429" defTabSz="822959">
-              <a:defRPr spc="-90" sz="8190">
+              <a:defRPr sz="8190" spc="-90">
                 <a:latin typeface="Avenir Book"/>
                 <a:ea typeface="Avenir Book"/>
                 <a:cs typeface="Avenir Book"/>
@@ -2191,7 +2242,7 @@
           <a:bodyPr lIns="45719" rIns="45719"/>
           <a:lstStyle/>
           <a:p>
-            <a:pPr/>
+            <a:endParaRPr/>
           </a:p>
         </p:txBody>
       </p:sp>
@@ -2214,7 +2265,7 @@
           </a:ln>
           <a:extLst>
             <a:ext uri="{C572A759-6A51-4108-AA02-DFA0A04FC94B}">
-              <ma14:wrappingTextBoxFlag xmlns:ma14="http://schemas.microsoft.com/office/mac/drawingml/2011/main" val="1"/>
+              <ma14:wrappingTextBoxFlag xmlns:ma14="http://schemas.microsoft.com/office/mac/drawingml/2011/main" xmlns:a14="http://schemas.microsoft.com/office/drawing/2010/main" xmlns:m="http://schemas.openxmlformats.org/officeDocument/2006/math" xmlns="" val="1"/>
             </a:ext>
           </a:extLst>
         </p:spPr>
@@ -2227,7 +2278,7 @@
               <a:spcBef>
                 <a:spcPts val="100"/>
               </a:spcBef>
-              <a:defRPr spc="-950" sz="9200">
+              <a:defRPr sz="9200" spc="-950">
                 <a:solidFill>
                   <a:srgbClr val="FFFFFF"/>
                 </a:solidFill>
@@ -2239,7 +2290,6 @@
             </a:lvl1pPr>
           </a:lstStyle>
           <a:p>
-            <a:pPr/>
             <a:r>
               <a:t>GBA</a:t>
             </a:r>
@@ -2271,7 +2321,7 @@
           <a:bodyPr lIns="45719" rIns="45719"/>
           <a:lstStyle/>
           <a:p>
-            <a:pPr/>
+            <a:endParaRPr/>
           </a:p>
         </p:txBody>
       </p:sp>
@@ -2294,7 +2344,7 @@
           </a:ln>
           <a:extLst>
             <a:ext uri="{C572A759-6A51-4108-AA02-DFA0A04FC94B}">
-              <ma14:wrappingTextBoxFlag xmlns:ma14="http://schemas.microsoft.com/office/mac/drawingml/2011/main" val="1"/>
+              <ma14:wrappingTextBoxFlag xmlns:ma14="http://schemas.microsoft.com/office/mac/drawingml/2011/main" xmlns:a14="http://schemas.microsoft.com/office/drawing/2010/main" xmlns:m="http://schemas.openxmlformats.org/officeDocument/2006/math" xmlns="" val="1"/>
             </a:ext>
           </a:extLst>
         </p:spPr>
@@ -2308,7 +2358,7 @@
               <a:spcBef>
                 <a:spcPts val="100"/>
               </a:spcBef>
-              <a:defRPr spc="-60" sz="2500">
+              <a:defRPr sz="2500" spc="-60">
                 <a:solidFill>
                   <a:srgbClr val="FFFFFF"/>
                 </a:solidFill>
@@ -2382,10 +2432,11 @@
                 <a:sym typeface="Avenir Book"/>
               </a:defRPr>
             </a:pPr>
+            <a:endParaRPr spc="-10"/>
           </a:p>
           <a:p>
             <a:pPr algn="ctr">
-              <a:defRPr spc="-120" sz="2400">
+              <a:defRPr sz="2400" spc="-120">
                 <a:solidFill>
                   <a:srgbClr val="FFFFFF"/>
                 </a:solidFill>
@@ -2458,11 +2509,10 @@
               <a:rPr spc="-35"/>
               <a:t> Learning</a:t>
             </a:r>
-            <a:endParaRPr spc="-35"/>
           </a:p>
           <a:p>
             <a:pPr algn="ctr">
-              <a:defRPr spc="-120" sz="2400">
+              <a:defRPr sz="2400" spc="-120">
                 <a:solidFill>
                   <a:srgbClr val="FFFFFF"/>
                 </a:solidFill>
@@ -2476,7 +2526,7 @@
           </a:p>
           <a:p>
             <a:pPr>
-              <a:defRPr spc="-120" sz="2400">
+              <a:defRPr sz="2400" spc="-120">
                 <a:solidFill>
                   <a:srgbClr val="FFFFFF"/>
                 </a:solidFill>
@@ -2541,7 +2591,7 @@
           </a:p>
           <a:p>
             <a:pPr algn="ctr">
-              <a:defRPr spc="-120" sz="2400">
+              <a:defRPr sz="2400" spc="-120">
                 <a:solidFill>
                   <a:srgbClr val="FFFFFF"/>
                 </a:solidFill>
@@ -2564,9 +2614,7 @@
           <p:nvPr/>
         </p:nvPicPr>
         <p:blipFill>
-          <a:blip r:embed="rId2">
-            <a:extLst/>
-          </a:blip>
+          <a:blip r:embed="rId2"/>
           <a:stretch>
             <a:fillRect/>
           </a:stretch>
@@ -2589,18 +2637,795 @@
   <p:clrMapOvr>
     <a:masterClrMapping/>
   </p:clrMapOvr>
-  <p:transition xmlns:p14="http://schemas.microsoft.com/office/powerpoint/2010/main" spd="med" advClick="1"/>
+  <p:transition spd="med"/>
 </p:sld>
 </file>
 
-<file path=ppt/slides/slide2.xml><?xml version="1.0" encoding="utf-8"?>
-<p:sld xmlns:a="http://schemas.openxmlformats.org/drawingml/2006/main" xmlns:r="http://schemas.openxmlformats.org/officeDocument/2006/relationships" xmlns:p="http://schemas.openxmlformats.org/presentationml/2006/main" xmlns:m="http://schemas.openxmlformats.org/officeDocument/2006/math" xmlns:a14="http://schemas.microsoft.com/office/drawing/2010/main" showMasterSp="1" showMasterPhAnim="1">
+<file path=ppt/slides/slide10.xml><?xml version="1.0" encoding="utf-8"?>
+<p:sld xmlns:a="http://schemas.openxmlformats.org/drawingml/2006/main" xmlns:r="http://schemas.openxmlformats.org/officeDocument/2006/relationships" xmlns:p="http://schemas.openxmlformats.org/presentationml/2006/main">
   <p:cSld>
     <p:bg>
       <p:bgPr>
         <a:solidFill>
           <a:srgbClr val="000000"/>
         </a:solidFill>
+        <a:effectLst/>
+      </p:bgPr>
+    </p:bg>
+    <p:spTree>
+      <p:nvGrpSpPr>
+        <p:cNvPr id="1" name=""/>
+        <p:cNvGrpSpPr/>
+        <p:nvPr/>
+      </p:nvGrpSpPr>
+      <p:grpSpPr>
+        <a:xfrm>
+          <a:off x="0" y="0"/>
+          <a:ext cx="0" cy="0"/>
+          <a:chOff x="0" y="0"/>
+          <a:chExt cx="0" cy="0"/>
+        </a:xfrm>
+      </p:grpSpPr>
+      <p:sp>
+        <p:nvSpPr>
+          <p:cNvPr id="111" name="object 8"/>
+          <p:cNvSpPr/>
+          <p:nvPr/>
+        </p:nvSpPr>
+        <p:spPr>
+          <a:xfrm>
+            <a:off x="15707" y="769609"/>
+            <a:ext cx="20080539" cy="636108"/>
+          </a:xfrm>
+          <a:prstGeom prst="rect">
+            <a:avLst/>
+          </a:prstGeom>
+          <a:solidFill>
+            <a:srgbClr val="000000"/>
+          </a:solidFill>
+          <a:ln w="12700">
+            <a:miter lim="400000"/>
+          </a:ln>
+        </p:spPr>
+        <p:txBody>
+          <a:bodyPr lIns="45719" rIns="45719"/>
+          <a:lstStyle/>
+          <a:p>
+            <a:endParaRPr/>
+          </a:p>
+        </p:txBody>
+      </p:sp>
+      <p:sp>
+        <p:nvSpPr>
+          <p:cNvPr id="112" name="object 9"/>
+          <p:cNvSpPr txBox="1">
+            <a:spLocks noGrp="1"/>
+          </p:cNvSpPr>
+          <p:nvPr>
+            <p:ph type="title"/>
+          </p:nvPr>
+        </p:nvSpPr>
+        <p:spPr>
+          <a:xfrm>
+            <a:off x="932197" y="551417"/>
+            <a:ext cx="8392160" cy="1007112"/>
+          </a:xfrm>
+          <a:prstGeom prst="rect">
+            <a:avLst/>
+          </a:prstGeom>
+        </p:spPr>
+        <p:txBody>
+          <a:bodyPr/>
+          <a:lstStyle/>
+          <a:p>
+            <a:pPr indent="11557" defTabSz="832104">
+              <a:defRPr sz="5824" spc="-182">
+                <a:latin typeface="Avenir Book"/>
+                <a:ea typeface="Avenir Book"/>
+                <a:cs typeface="Avenir Book"/>
+                <a:sym typeface="Avenir Book"/>
+              </a:defRPr>
+            </a:pPr>
+            <a:r>
+              <a:t>Simulación</a:t>
+            </a:r>
+            <a:r>
+              <a:rPr spc="-273"/>
+              <a:t> </a:t>
+            </a:r>
+            <a:r>
+              <a:rPr spc="-91">
+                <a:solidFill>
+                  <a:srgbClr val="DBFFA1"/>
+                </a:solidFill>
+              </a:rPr>
+              <a:t>Monte</a:t>
+            </a:r>
+            <a:r>
+              <a:rPr spc="-455">
+                <a:solidFill>
+                  <a:srgbClr val="DBFFA1"/>
+                </a:solidFill>
+              </a:rPr>
+              <a:t> </a:t>
+            </a:r>
+            <a:r>
+              <a:rPr spc="-91">
+                <a:solidFill>
+                  <a:srgbClr val="DFFF97"/>
+                </a:solidFill>
+              </a:rPr>
+              <a:t>Carlo</a:t>
+            </a:r>
+          </a:p>
+        </p:txBody>
+      </p:sp>
+      <p:sp>
+        <p:nvSpPr>
+          <p:cNvPr id="113" name="object 10"/>
+          <p:cNvSpPr txBox="1"/>
+          <p:nvPr/>
+        </p:nvSpPr>
+        <p:spPr>
+          <a:xfrm>
+            <a:off x="10930983" y="2561465"/>
+            <a:ext cx="8458201" cy="4832550"/>
+          </a:xfrm>
+          <a:prstGeom prst="rect">
+            <a:avLst/>
+          </a:prstGeom>
+          <a:solidFill>
+            <a:srgbClr val="000000"/>
+          </a:solidFill>
+          <a:ln w="12700">
+            <a:miter lim="400000"/>
+          </a:ln>
+          <a:extLst>
+            <a:ext uri="{C572A759-6A51-4108-AA02-DFA0A04FC94B}">
+              <ma14:wrappingTextBoxFlag xmlns:ma14="http://schemas.microsoft.com/office/mac/drawingml/2011/main" xmlns:a14="http://schemas.microsoft.com/office/drawing/2010/main" xmlns:m="http://schemas.openxmlformats.org/officeDocument/2006/math" xmlns="" val="1"/>
+            </a:ext>
+          </a:extLst>
+        </p:spPr>
+        <p:txBody>
+          <a:bodyPr lIns="0" tIns="0" rIns="0" bIns="0" anchor="ctr">
+            <a:spAutoFit/>
+          </a:bodyPr>
+          <a:lstStyle/>
+          <a:p>
+            <a:pPr>
+              <a:defRPr sz="2200">
+                <a:latin typeface="Avenir Book"/>
+                <a:ea typeface="Avenir Book"/>
+                <a:cs typeface="Avenir Book"/>
+                <a:sym typeface="Avenir Book"/>
+              </a:defRPr>
+            </a:pPr>
+            <a:endParaRPr/>
+          </a:p>
+          <a:p>
+            <a:pPr>
+              <a:spcBef>
+                <a:spcPts val="2000"/>
+              </a:spcBef>
+              <a:defRPr sz="2200">
+                <a:latin typeface="Avenir Book"/>
+                <a:ea typeface="Avenir Book"/>
+                <a:cs typeface="Avenir Book"/>
+                <a:sym typeface="Avenir Book"/>
+              </a:defRPr>
+            </a:pPr>
+            <a:endParaRPr/>
+          </a:p>
+          <a:p>
+            <a:pPr indent="635">
+              <a:defRPr sz="2400">
+                <a:solidFill>
+                  <a:srgbClr val="FFFFFF"/>
+                </a:solidFill>
+                <a:latin typeface="Avenir Heavy"/>
+                <a:ea typeface="Avenir Heavy"/>
+                <a:cs typeface="Avenir Heavy"/>
+                <a:sym typeface="Avenir Heavy"/>
+              </a:defRPr>
+            </a:pPr>
+            <a:r>
+              <a:t>   Gestión</a:t>
+            </a:r>
+            <a:r>
+              <a:rPr spc="49"/>
+              <a:t> </a:t>
+            </a:r>
+            <a:r>
+              <a:t>de</a:t>
+            </a:r>
+            <a:r>
+              <a:rPr spc="234"/>
+              <a:t> </a:t>
+            </a:r>
+            <a:r>
+              <a:rPr spc="92"/>
+              <a:t>Incertidumbre</a:t>
+            </a:r>
+          </a:p>
+          <a:p>
+            <a:pPr indent="635">
+              <a:defRPr sz="2400">
+                <a:solidFill>
+                  <a:srgbClr val="FFFFFF"/>
+                </a:solidFill>
+                <a:latin typeface="Avenir Heavy"/>
+                <a:ea typeface="Avenir Heavy"/>
+                <a:cs typeface="Avenir Heavy"/>
+                <a:sym typeface="Avenir Heavy"/>
+              </a:defRPr>
+            </a:pPr>
+            <a:endParaRPr spc="92"/>
+          </a:p>
+          <a:p>
+            <a:pPr marL="541019" indent="-228600">
+              <a:lnSpc>
+                <a:spcPct val="200000"/>
+              </a:lnSpc>
+              <a:buClr>
+                <a:srgbClr val="DBFFDF"/>
+              </a:buClr>
+              <a:buSzPct val="100000"/>
+              <a:buChar char="•"/>
+              <a:defRPr sz="2400">
+                <a:solidFill>
+                  <a:srgbClr val="FFFFFF"/>
+                </a:solidFill>
+              </a:defRPr>
+            </a:pPr>
+            <a:r>
+              <a:t>1000</a:t>
+            </a:r>
+            <a:r>
+              <a:rPr spc="225"/>
+              <a:t> </a:t>
+            </a:r>
+            <a:r>
+              <a:t>trayectorias</a:t>
+            </a:r>
+            <a:r>
+              <a:rPr spc="344"/>
+              <a:t> </a:t>
+            </a:r>
+            <a:r>
+              <a:rPr spc="-10"/>
+              <a:t>simuladas</a:t>
+            </a:r>
+            <a:r>
+              <a:rPr spc="229"/>
+              <a:t> </a:t>
+            </a:r>
+            <a:r>
+              <a:t>basadas</a:t>
+            </a:r>
+            <a:r>
+              <a:rPr spc="195"/>
+              <a:t> </a:t>
+            </a:r>
+            <a:r>
+              <a:t>en</a:t>
+            </a:r>
+            <a:r>
+              <a:rPr spc="-70"/>
+              <a:t> </a:t>
+            </a:r>
+            <a:r>
+              <a:t>la</a:t>
+            </a:r>
+            <a:r>
+              <a:rPr spc="120"/>
+              <a:t> </a:t>
+            </a:r>
+            <a:r>
+              <a:rPr spc="-10"/>
+              <a:t>volatilidad 	histórica.</a:t>
+            </a:r>
+          </a:p>
+          <a:p>
+            <a:pPr marL="539648" indent="-227228">
+              <a:lnSpc>
+                <a:spcPct val="200000"/>
+              </a:lnSpc>
+              <a:buClr>
+                <a:srgbClr val="D1FFDD"/>
+              </a:buClr>
+              <a:buSzPct val="100000"/>
+              <a:buChar char="•"/>
+              <a:defRPr sz="2400">
+                <a:solidFill>
+                  <a:srgbClr val="FFFFFF"/>
+                </a:solidFill>
+              </a:defRPr>
+            </a:pPr>
+            <a:r>
+              <a:rPr b="1"/>
+              <a:t>Confianza</a:t>
+            </a:r>
+            <a:r>
+              <a:t>:</a:t>
+            </a:r>
+            <a:r>
+              <a:rPr spc="-134"/>
+              <a:t> </a:t>
+            </a:r>
+            <a:r>
+              <a:rPr spc="-240"/>
+              <a:t>El</a:t>
+            </a:r>
+            <a:r>
+              <a:rPr spc="-24"/>
+              <a:t> </a:t>
+            </a:r>
+            <a:r>
+              <a:rPr spc="-219"/>
+              <a:t>70 %</a:t>
+            </a:r>
+            <a:r>
+              <a:rPr spc="-38"/>
+              <a:t> </a:t>
+            </a:r>
+            <a:r>
+              <a:t>de</a:t>
+            </a:r>
+            <a:r>
+              <a:rPr spc="-172"/>
+              <a:t> </a:t>
+            </a:r>
+            <a:r>
+              <a:rPr spc="-96"/>
+              <a:t>los</a:t>
+            </a:r>
+            <a:r>
+              <a:rPr spc="-72"/>
+              <a:t> </a:t>
+            </a:r>
+            <a:r>
+              <a:t>datos</a:t>
+            </a:r>
+            <a:r>
+              <a:rPr spc="-62"/>
+              <a:t> reales</a:t>
+            </a:r>
+            <a:r>
+              <a:rPr spc="-9"/>
+              <a:t> </a:t>
+            </a:r>
+            <a:r>
+              <a:rPr spc="-62"/>
+              <a:t>cayeron</a:t>
+            </a:r>
+            <a:r>
+              <a:rPr spc="-33"/>
+              <a:t> </a:t>
+            </a:r>
+            <a:r>
+              <a:t>dentro</a:t>
+            </a:r>
+            <a:r>
+              <a:rPr spc="-81"/>
+              <a:t> </a:t>
+            </a:r>
+            <a:r>
+              <a:rPr spc="-24"/>
+              <a:t>del </a:t>
+            </a:r>
+            <a:r>
+              <a:t>intervalo</a:t>
+            </a:r>
+            <a:r>
+              <a:rPr spc="55"/>
+              <a:t> </a:t>
+            </a:r>
+            <a:r>
+              <a:rPr spc="-95"/>
+              <a:t>25-</a:t>
+            </a:r>
+            <a:r>
+              <a:rPr spc="-25"/>
+              <a:t>75%</a:t>
+            </a:r>
+          </a:p>
+          <a:p>
+            <a:pPr marL="535355" indent="-223570">
+              <a:lnSpc>
+                <a:spcPct val="200000"/>
+              </a:lnSpc>
+              <a:buSzPct val="100000"/>
+              <a:buChar char="•"/>
+              <a:defRPr sz="2400">
+                <a:solidFill>
+                  <a:srgbClr val="FFFFFF"/>
+                </a:solidFill>
+              </a:defRPr>
+            </a:pPr>
+            <a:r>
+              <a:rPr b="1" spc="-72"/>
+              <a:t>Conclusión</a:t>
+            </a:r>
+            <a:r>
+              <a:rPr spc="-72"/>
+              <a:t>:</a:t>
+            </a:r>
+            <a:r>
+              <a:rPr spc="-100"/>
+              <a:t> </a:t>
+            </a:r>
+            <a:r>
+              <a:rPr spc="-235"/>
+              <a:t>El</a:t>
+            </a:r>
+            <a:r>
+              <a:rPr spc="-14"/>
+              <a:t> </a:t>
+            </a:r>
+            <a:r>
+              <a:rPr spc="-9"/>
+              <a:t>modelo</a:t>
+            </a:r>
+            <a:r>
+              <a:rPr spc="-163"/>
+              <a:t> </a:t>
+            </a:r>
+            <a:r>
+              <a:rPr spc="-129"/>
+              <a:t>es</a:t>
+            </a:r>
+            <a:r>
+              <a:rPr spc="-38"/>
+              <a:t> </a:t>
+            </a:r>
+            <a:r>
+              <a:rPr spc="-67"/>
+              <a:t>conservador,</a:t>
+            </a:r>
+            <a:r>
+              <a:rPr spc="4"/>
+              <a:t> </a:t>
+            </a:r>
+            <a:r>
+              <a:rPr spc="-9"/>
+              <a:t>ideal</a:t>
+            </a:r>
+            <a:r>
+              <a:rPr spc="-100"/>
+              <a:t> </a:t>
+            </a:r>
+            <a:r>
+              <a:rPr spc="-19"/>
+              <a:t>para planificación</a:t>
+            </a:r>
+            <a:r>
+              <a:rPr spc="-52"/>
+              <a:t> </a:t>
+            </a:r>
+            <a:r>
+              <a:rPr spc="-9"/>
+              <a:t>energética.</a:t>
+            </a:r>
+          </a:p>
+        </p:txBody>
+      </p:sp>
+      <p:pic>
+        <p:nvPicPr>
+          <p:cNvPr id="114" name="Screenshot 2026-06-15 at 2.21.56 PM.png" descr="Screenshot 2026-06-15 at 2.21.56 PM.png"/>
+          <p:cNvPicPr>
+            <a:picLocks noChangeAspect="1"/>
+          </p:cNvPicPr>
+          <p:nvPr/>
+        </p:nvPicPr>
+        <p:blipFill>
+          <a:blip r:embed="rId2"/>
+          <a:stretch>
+            <a:fillRect/>
+          </a:stretch>
+        </p:blipFill>
+        <p:spPr>
+          <a:xfrm>
+            <a:off x="692353" y="2225795"/>
+            <a:ext cx="10130652" cy="7965982"/>
+          </a:xfrm>
+          <a:prstGeom prst="rect">
+            <a:avLst/>
+          </a:prstGeom>
+          <a:ln w="12700">
+            <a:miter lim="400000"/>
+          </a:ln>
+        </p:spPr>
+      </p:pic>
+    </p:spTree>
+  </p:cSld>
+  <p:clrMapOvr>
+    <a:masterClrMapping/>
+  </p:clrMapOvr>
+  <p:transition spd="med"/>
+</p:sld>
+</file>
+
+<file path=ppt/slides/slide11.xml><?xml version="1.0" encoding="utf-8"?>
+<p:sld xmlns:a="http://schemas.openxmlformats.org/drawingml/2006/main" xmlns:r="http://schemas.openxmlformats.org/officeDocument/2006/relationships" xmlns:p="http://schemas.openxmlformats.org/presentationml/2006/main">
+  <p:cSld>
+    <p:bg>
+      <p:bgPr>
+        <a:solidFill>
+          <a:srgbClr val="000000"/>
+        </a:solidFill>
+        <a:effectLst/>
+      </p:bgPr>
+    </p:bg>
+    <p:spTree>
+      <p:nvGrpSpPr>
+        <p:cNvPr id="1" name=""/>
+        <p:cNvGrpSpPr/>
+        <p:nvPr/>
+      </p:nvGrpSpPr>
+      <p:grpSpPr>
+        <a:xfrm>
+          <a:off x="0" y="0"/>
+          <a:ext cx="0" cy="0"/>
+          <a:chOff x="0" y="0"/>
+          <a:chExt cx="0" cy="0"/>
+        </a:xfrm>
+      </p:grpSpPr>
+      <p:sp>
+        <p:nvSpPr>
+          <p:cNvPr id="116" name="object 2"/>
+          <p:cNvSpPr txBox="1">
+            <a:spLocks noGrp="1"/>
+          </p:cNvSpPr>
+          <p:nvPr>
+            <p:ph type="ctrTitle"/>
+          </p:nvPr>
+        </p:nvSpPr>
+        <p:spPr>
+          <a:xfrm>
+            <a:off x="6466985" y="3362850"/>
+            <a:ext cx="6955791" cy="1478280"/>
+          </a:xfrm>
+          <a:prstGeom prst="rect">
+            <a:avLst/>
+          </a:prstGeom>
+        </p:spPr>
+        <p:txBody>
+          <a:bodyPr/>
+          <a:lstStyle>
+            <a:lvl1pPr indent="12700">
+              <a:spcBef>
+                <a:spcPts val="100"/>
+              </a:spcBef>
+              <a:defRPr sz="9500" spc="-100"/>
+            </a:lvl1pPr>
+          </a:lstStyle>
+          <a:p>
+            <a:r>
+              <a:t>¿Preguntas?</a:t>
+            </a:r>
+          </a:p>
+        </p:txBody>
+      </p:sp>
+      <p:sp>
+        <p:nvSpPr>
+          <p:cNvPr id="117" name="object 3"/>
+          <p:cNvSpPr/>
+          <p:nvPr/>
+        </p:nvSpPr>
+        <p:spPr>
+          <a:xfrm>
+            <a:off x="6109761" y="5324445"/>
+            <a:ext cx="7892431" cy="306275"/>
+          </a:xfrm>
+          <a:prstGeom prst="rect">
+            <a:avLst/>
+          </a:prstGeom>
+          <a:solidFill>
+            <a:srgbClr val="000000"/>
+          </a:solidFill>
+          <a:ln w="12700">
+            <a:miter lim="400000"/>
+          </a:ln>
+        </p:spPr>
+        <p:txBody>
+          <a:bodyPr lIns="45719" rIns="45719"/>
+          <a:lstStyle/>
+          <a:p>
+            <a:endParaRPr/>
+          </a:p>
+        </p:txBody>
+      </p:sp>
+      <p:sp>
+        <p:nvSpPr>
+          <p:cNvPr id="118" name="object 4"/>
+          <p:cNvSpPr txBox="1"/>
+          <p:nvPr/>
+        </p:nvSpPr>
+        <p:spPr>
+          <a:xfrm>
+            <a:off x="6105395" y="5228145"/>
+            <a:ext cx="7887970" cy="357915"/>
+          </a:xfrm>
+          <a:prstGeom prst="rect">
+            <a:avLst/>
+          </a:prstGeom>
+          <a:ln w="12700">
+            <a:miter lim="400000"/>
+          </a:ln>
+          <a:extLst>
+            <a:ext uri="{C572A759-6A51-4108-AA02-DFA0A04FC94B}">
+              <ma14:wrappingTextBoxFlag xmlns:ma14="http://schemas.microsoft.com/office/mac/drawingml/2011/main" xmlns:a14="http://schemas.microsoft.com/office/drawing/2010/main" xmlns:m="http://schemas.openxmlformats.org/officeDocument/2006/math" xmlns="" val="1"/>
+            </a:ext>
+          </a:extLst>
+        </p:spPr>
+        <p:txBody>
+          <a:bodyPr lIns="0" tIns="0" rIns="0" bIns="0">
+            <a:spAutoFit/>
+          </a:bodyPr>
+          <a:lstStyle/>
+          <a:p>
+            <a:pPr indent="12700">
+              <a:spcBef>
+                <a:spcPts val="100"/>
+              </a:spcBef>
+              <a:defRPr sz="2500" spc="-90">
+                <a:solidFill>
+                  <a:srgbClr val="E4E4E4"/>
+                </a:solidFill>
+                <a:latin typeface="Arial"/>
+                <a:ea typeface="Arial"/>
+                <a:cs typeface="Arial"/>
+                <a:sym typeface="Arial"/>
+              </a:defRPr>
+            </a:pPr>
+            <a:r>
+              <a:t>Análisis</a:t>
+            </a:r>
+            <a:r>
+              <a:rPr spc="-45"/>
+              <a:t> </a:t>
+            </a:r>
+            <a:r>
+              <a:rPr spc="0">
+                <a:solidFill>
+                  <a:srgbClr val="E9E9E9"/>
+                </a:solidFill>
+              </a:rPr>
+              <a:t>de</a:t>
+            </a:r>
+            <a:r>
+              <a:rPr spc="-160">
+                <a:solidFill>
+                  <a:srgbClr val="E9E9E9"/>
+                </a:solidFill>
+              </a:rPr>
+              <a:t> s</a:t>
+            </a:r>
+            <a:r>
+              <a:rPr spc="-104">
+                <a:solidFill>
+                  <a:srgbClr val="EBEBEB"/>
+                </a:solidFill>
+              </a:rPr>
+              <a:t>eries</a:t>
+            </a:r>
+            <a:r>
+              <a:rPr spc="-40">
+                <a:solidFill>
+                  <a:srgbClr val="EBEBEB"/>
+                </a:solidFill>
+              </a:rPr>
+              <a:t> </a:t>
+            </a:r>
+            <a:r>
+              <a:rPr spc="0">
+                <a:solidFill>
+                  <a:srgbClr val="E9E9E9"/>
+                </a:solidFill>
+              </a:rPr>
+              <a:t>de</a:t>
+            </a:r>
+            <a:r>
+              <a:rPr spc="-110">
+                <a:solidFill>
+                  <a:srgbClr val="E9E9E9"/>
+                </a:solidFill>
+              </a:rPr>
+              <a:t> t</a:t>
+            </a:r>
+            <a:r>
+              <a:rPr spc="0">
+                <a:solidFill>
+                  <a:srgbClr val="F6F6F6"/>
+                </a:solidFill>
+              </a:rPr>
+              <a:t>iempo</a:t>
+            </a:r>
+            <a:r>
+              <a:rPr spc="30">
+                <a:solidFill>
+                  <a:srgbClr val="F6F6F6"/>
+                </a:solidFill>
+              </a:rPr>
+              <a:t> a</a:t>
+            </a:r>
+            <a:r>
+              <a:rPr spc="-20">
+                <a:solidFill>
+                  <a:srgbClr val="EFEFEF"/>
+                </a:solidFill>
+              </a:rPr>
+              <a:t>plicado</a:t>
+            </a:r>
+            <a:r>
+              <a:rPr spc="-55">
+                <a:solidFill>
+                  <a:srgbClr val="EFEFEF"/>
+                </a:solidFill>
+              </a:rPr>
+              <a:t> </a:t>
+            </a:r>
+            <a:r>
+              <a:rPr spc="0">
+                <a:solidFill>
+                  <a:srgbClr val="EFEFEF"/>
+                </a:solidFill>
+              </a:rPr>
+              <a:t>al</a:t>
+            </a:r>
+            <a:r>
+              <a:rPr spc="-125">
+                <a:solidFill>
+                  <a:srgbClr val="EFEFEF"/>
+                </a:solidFill>
+              </a:rPr>
+              <a:t> s</a:t>
+            </a:r>
+            <a:r>
+              <a:rPr spc="-40">
+                <a:solidFill>
+                  <a:srgbClr val="F6F6F6"/>
+                </a:solidFill>
+              </a:rPr>
+              <a:t>ector</a:t>
+            </a:r>
+            <a:r>
+              <a:rPr>
+                <a:solidFill>
+                  <a:srgbClr val="F6F6F6"/>
+                </a:solidFill>
+              </a:rPr>
+              <a:t> e</a:t>
+            </a:r>
+            <a:r>
+              <a:rPr spc="-45">
+                <a:solidFill>
+                  <a:srgbClr val="EBEBEB"/>
+                </a:solidFill>
+              </a:rPr>
+              <a:t>léctrico</a:t>
+            </a:r>
+          </a:p>
+        </p:txBody>
+      </p:sp>
+    </p:spTree>
+  </p:cSld>
+  <p:clrMapOvr>
+    <a:masterClrMapping/>
+  </p:clrMapOvr>
+  <p:transition spd="med"/>
+</p:sld>
+</file>
+
+<file path=ppt/slides/slide2.xml><?xml version="1.0" encoding="utf-8"?>
+<p:sld xmlns:a="http://schemas.openxmlformats.org/drawingml/2006/main" xmlns:r="http://schemas.openxmlformats.org/officeDocument/2006/relationships" xmlns:p="http://schemas.openxmlformats.org/presentationml/2006/main">
+  <p:cSld>
+    <p:bg>
+      <p:bgPr>
+        <a:solidFill>
+          <a:srgbClr val="000000"/>
+        </a:solidFill>
+        <a:effectLst/>
       </p:bgPr>
     </p:bg>
     <p:spTree>
@@ -2642,14 +3467,16 @@
           <a:bodyPr lIns="45719" rIns="45719"/>
           <a:lstStyle/>
           <a:p>
-            <a:pPr/>
+            <a:endParaRPr/>
           </a:p>
         </p:txBody>
       </p:sp>
       <p:sp>
         <p:nvSpPr>
           <p:cNvPr id="74" name="object 9"/>
-          <p:cNvSpPr txBox="1"/>
+          <p:cNvSpPr txBox="1">
+            <a:spLocks noGrp="1"/>
+          </p:cNvSpPr>
           <p:nvPr>
             <p:ph type="title"/>
           </p:nvPr>
@@ -2668,7 +3495,7 @@
           <a:lstStyle/>
           <a:p>
             <a:pPr indent="12268" defTabSz="841247">
-              <a:defRPr spc="-92" sz="5888">
+              <a:defRPr sz="5888" spc="-92">
                 <a:latin typeface="Avenir Book"/>
                 <a:ea typeface="Avenir Book"/>
                 <a:cs typeface="Avenir Book"/>
@@ -2723,7 +3550,7 @@
           </a:ln>
           <a:extLst>
             <a:ext uri="{C572A759-6A51-4108-AA02-DFA0A04FC94B}">
-              <ma14:wrappingTextBoxFlag xmlns:ma14="http://schemas.microsoft.com/office/mac/drawingml/2011/main" val="1"/>
+              <ma14:wrappingTextBoxFlag xmlns:ma14="http://schemas.microsoft.com/office/mac/drawingml/2011/main" xmlns:a14="http://schemas.microsoft.com/office/drawing/2010/main" xmlns:m="http://schemas.openxmlformats.org/officeDocument/2006/math" xmlns="" val="1"/>
             </a:ext>
           </a:extLst>
         </p:spPr>
@@ -2741,6 +3568,7 @@
                 <a:sym typeface="Times New Roman"/>
               </a:defRPr>
             </a:pPr>
+            <a:endParaRPr/>
           </a:p>
           <a:p>
             <a:pPr>
@@ -2757,6 +3585,7 @@
                 <a:sym typeface="Times New Roman"/>
               </a:defRPr>
             </a:pPr>
+            <a:endParaRPr/>
           </a:p>
           <a:p>
             <a:pPr marL="254467" marR="129539" indent="-250657">
@@ -2765,7 +3594,7 @@
               </a:lnSpc>
               <a:buSzPct val="100000"/>
               <a:buChar char="•"/>
-              <a:defRPr spc="-20" sz="2500">
+              <a:defRPr sz="2500" spc="-20">
                 <a:solidFill>
                   <a:srgbClr val="FFFFFF"/>
                 </a:solidFill>
@@ -2843,7 +3672,7 @@
               </a:lnSpc>
               <a:buSzPct val="100000"/>
               <a:buChar char="•"/>
-              <a:defRPr spc="-10" sz="2500">
+              <a:defRPr sz="2500" spc="-10">
                 <a:solidFill>
                   <a:srgbClr val="FFFFFF"/>
                 </a:solidFill>
@@ -2911,7 +3740,7 @@
               </a:lnSpc>
               <a:buSzPct val="100000"/>
               <a:buChar char="•"/>
-              <a:defRPr spc="-10" sz="2500">
+              <a:defRPr sz="2500" spc="-10">
                 <a:solidFill>
                   <a:srgbClr val="FFFFFF"/>
                 </a:solidFill>
@@ -3066,9 +3895,7 @@
           <p:nvPr/>
         </p:nvPicPr>
         <p:blipFill>
-          <a:blip r:embed="rId2">
-            <a:extLst/>
-          </a:blip>
+          <a:blip r:embed="rId2"/>
           <a:stretch>
             <a:fillRect/>
           </a:stretch>
@@ -3091,18 +3918,19 @@
   <p:clrMapOvr>
     <a:masterClrMapping/>
   </p:clrMapOvr>
-  <p:transition xmlns:p14="http://schemas.microsoft.com/office/powerpoint/2010/main" spd="med" advClick="1"/>
+  <p:transition spd="med"/>
 </p:sld>
 </file>
 
 <file path=ppt/slides/slide3.xml><?xml version="1.0" encoding="utf-8"?>
-<p:sld xmlns:a="http://schemas.openxmlformats.org/drawingml/2006/main" xmlns:r="http://schemas.openxmlformats.org/officeDocument/2006/relationships" xmlns:p="http://schemas.openxmlformats.org/presentationml/2006/main" xmlns:m="http://schemas.openxmlformats.org/officeDocument/2006/math" xmlns:a14="http://schemas.microsoft.com/office/drawing/2010/main" showMasterSp="1" showMasterPhAnim="1">
+<p:sld xmlns:a="http://schemas.openxmlformats.org/drawingml/2006/main" xmlns:r="http://schemas.openxmlformats.org/officeDocument/2006/relationships" xmlns:p="http://schemas.openxmlformats.org/presentationml/2006/main">
   <p:cSld>
     <p:bg>
       <p:bgPr>
         <a:solidFill>
           <a:srgbClr val="000000"/>
         </a:solidFill>
+        <a:effectLst/>
       </p:bgPr>
     </p:bg>
     <p:spTree>
@@ -3144,14 +3972,16 @@
           <a:bodyPr lIns="45719" rIns="45719"/>
           <a:lstStyle/>
           <a:p>
-            <a:pPr/>
+            <a:endParaRPr/>
           </a:p>
         </p:txBody>
       </p:sp>
       <p:sp>
         <p:nvSpPr>
           <p:cNvPr id="79" name="object 9"/>
-          <p:cNvSpPr txBox="1"/>
+          <p:cNvSpPr txBox="1">
+            <a:spLocks noGrp="1"/>
+          </p:cNvSpPr>
           <p:nvPr>
             <p:ph type="title"/>
           </p:nvPr>
@@ -3170,7 +4000,7 @@
           <a:lstStyle/>
           <a:p>
             <a:pPr indent="12268" defTabSz="841247">
-              <a:defRPr spc="-184" sz="5888">
+              <a:defRPr sz="5888" spc="-184">
                 <a:latin typeface="Avenir Book"/>
                 <a:ea typeface="Avenir Book"/>
                 <a:cs typeface="Avenir Book"/>
@@ -3221,7 +4051,7 @@
           </a:ln>
           <a:extLst>
             <a:ext uri="{C572A759-6A51-4108-AA02-DFA0A04FC94B}">
-              <ma14:wrappingTextBoxFlag xmlns:ma14="http://schemas.microsoft.com/office/mac/drawingml/2011/main" val="1"/>
+              <ma14:wrappingTextBoxFlag xmlns:ma14="http://schemas.microsoft.com/office/mac/drawingml/2011/main" xmlns:a14="http://schemas.microsoft.com/office/drawing/2010/main" xmlns:m="http://schemas.openxmlformats.org/officeDocument/2006/math" xmlns="" val="1"/>
             </a:ext>
           </a:extLst>
         </p:spPr>
@@ -3239,6 +4069,7 @@
                 <a:sym typeface="Avenir Book"/>
               </a:defRPr>
             </a:pPr>
+            <a:endParaRPr/>
           </a:p>
           <a:p>
             <a:pPr>
@@ -3255,10 +4086,11 @@
                 <a:sym typeface="Avenir Book"/>
               </a:defRPr>
             </a:pPr>
+            <a:endParaRPr/>
           </a:p>
           <a:p>
             <a:pPr>
-              <a:defRPr spc="80" sz="2300">
+              <a:defRPr sz="2300" spc="80">
                 <a:solidFill>
                   <a:srgbClr val="FFFFFF"/>
                 </a:solidFill>
@@ -3316,10 +4148,11 @@
                 <a:sym typeface="Avenir Book"/>
               </a:defRPr>
             </a:pPr>
+            <a:endParaRPr spc="125"/>
           </a:p>
           <a:p>
             <a:pPr indent="1270">
-              <a:defRPr spc="-114" sz="2400">
+              <a:defRPr sz="2400" spc="-114">
                 <a:solidFill>
                   <a:srgbClr val="FFFFFF"/>
                 </a:solidFill>
@@ -3412,6 +4245,7 @@
                 <a:sym typeface="Avenir Book"/>
               </a:defRPr>
             </a:pPr>
+            <a:endParaRPr spc="-10"/>
           </a:p>
           <a:p>
             <a:pPr marL="614680" indent="-316229">
@@ -3638,9 +4472,7 @@
           <p:nvPr/>
         </p:nvPicPr>
         <p:blipFill>
-          <a:blip r:embed="rId2">
-            <a:extLst/>
-          </a:blip>
+          <a:blip r:embed="rId2"/>
           <a:stretch>
             <a:fillRect/>
           </a:stretch>
@@ -3663,18 +4495,19 @@
   <p:clrMapOvr>
     <a:masterClrMapping/>
   </p:clrMapOvr>
-  <p:transition xmlns:p14="http://schemas.microsoft.com/office/powerpoint/2010/main" spd="med" advClick="1"/>
+  <p:transition spd="med"/>
 </p:sld>
 </file>
 
 <file path=ppt/slides/slide4.xml><?xml version="1.0" encoding="utf-8"?>
-<p:sld xmlns:a="http://schemas.openxmlformats.org/drawingml/2006/main" xmlns:r="http://schemas.openxmlformats.org/officeDocument/2006/relationships" xmlns:p="http://schemas.openxmlformats.org/presentationml/2006/main" xmlns:m="http://schemas.openxmlformats.org/officeDocument/2006/math" xmlns:a14="http://schemas.microsoft.com/office/drawing/2010/main" showMasterSp="1" showMasterPhAnim="1">
+<p:sld xmlns:a="http://schemas.openxmlformats.org/drawingml/2006/main" xmlns:r="http://schemas.openxmlformats.org/officeDocument/2006/relationships" xmlns:p="http://schemas.openxmlformats.org/presentationml/2006/main">
   <p:cSld>
     <p:bg>
       <p:bgPr>
         <a:solidFill>
           <a:srgbClr val="000000"/>
         </a:solidFill>
+        <a:effectLst/>
       </p:bgPr>
     </p:bg>
     <p:spTree>
@@ -3716,14 +4549,16 @@
           <a:bodyPr lIns="45719" rIns="45719"/>
           <a:lstStyle/>
           <a:p>
-            <a:pPr/>
+            <a:endParaRPr/>
           </a:p>
         </p:txBody>
       </p:sp>
       <p:sp>
         <p:nvSpPr>
           <p:cNvPr id="84" name="object 3"/>
-          <p:cNvSpPr txBox="1"/>
+          <p:cNvSpPr txBox="1">
+            <a:spLocks noGrp="1"/>
+          </p:cNvSpPr>
           <p:nvPr>
             <p:ph type="title"/>
           </p:nvPr>
@@ -3742,7 +4577,7 @@
           <a:lstStyle/>
           <a:p>
             <a:pPr indent="11557" defTabSz="832104">
-              <a:defRPr spc="-273" sz="5915">
+              <a:defRPr sz="5915" spc="-273">
                 <a:latin typeface="Avenir Book"/>
                 <a:ea typeface="Avenir Book"/>
                 <a:cs typeface="Avenir Book"/>
@@ -3764,35 +4599,6 @@
               </a:rPr>
               <a:t>Estacional</a:t>
             </a:r>
-          </a:p>
-        </p:txBody>
-      </p:sp>
-      <p:sp>
-        <p:nvSpPr>
-          <p:cNvPr id="85" name="object 4"/>
-          <p:cNvSpPr/>
-          <p:nvPr/>
-        </p:nvSpPr>
-        <p:spPr>
-          <a:xfrm>
-            <a:off x="15707" y="4413477"/>
-            <a:ext cx="20080539" cy="3431833"/>
-          </a:xfrm>
-          <a:prstGeom prst="rect">
-            <a:avLst/>
-          </a:prstGeom>
-          <a:solidFill>
-            <a:srgbClr val="000000"/>
-          </a:solidFill>
-          <a:ln w="12700">
-            <a:miter lim="400000"/>
-          </a:ln>
-        </p:spPr>
-        <p:txBody>
-          <a:bodyPr lIns="45719" rIns="45719"/>
-          <a:lstStyle/>
-          <a:p>
-            <a:pPr/>
           </a:p>
         </p:txBody>
       </p:sp>
@@ -3804,7 +4610,7 @@
         </p:nvSpPr>
         <p:spPr>
           <a:xfrm>
-            <a:off x="1470964" y="4890421"/>
+            <a:off x="1316327" y="2018775"/>
             <a:ext cx="1756411" cy="482601"/>
           </a:xfrm>
           <a:prstGeom prst="rect">
@@ -3815,7 +4621,7 @@
           </a:ln>
           <a:extLst>
             <a:ext uri="{C572A759-6A51-4108-AA02-DFA0A04FC94B}">
-              <ma14:wrappingTextBoxFlag xmlns:ma14="http://schemas.microsoft.com/office/mac/drawingml/2011/main" val="1"/>
+              <ma14:wrappingTextBoxFlag xmlns:ma14="http://schemas.microsoft.com/office/mac/drawingml/2011/main" xmlns:a14="http://schemas.microsoft.com/office/drawing/2010/main" xmlns:m="http://schemas.openxmlformats.org/officeDocument/2006/math" xmlns="" val="1"/>
             </a:ext>
           </a:extLst>
         </p:spPr>
@@ -3828,7 +4634,7 @@
               <a:spcBef>
                 <a:spcPts val="100"/>
               </a:spcBef>
-              <a:defRPr spc="-10" sz="2800">
+              <a:defRPr sz="2800" spc="-10">
                 <a:solidFill>
                   <a:srgbClr val="E4F997"/>
                 </a:solidFill>
@@ -3840,7 +4646,6 @@
             </a:lvl1pPr>
           </a:lstStyle>
           <a:p>
-            <a:pPr/>
             <a:r>
               <a:t>Tendencia</a:t>
             </a:r>
@@ -3855,7 +4660,7 @@
         </p:nvSpPr>
         <p:spPr>
           <a:xfrm>
-            <a:off x="1453294" y="5582944"/>
+            <a:off x="1298657" y="2711298"/>
             <a:ext cx="4751706" cy="1476910"/>
           </a:xfrm>
           <a:prstGeom prst="rect">
@@ -3866,7 +4671,7 @@
           </a:ln>
           <a:extLst>
             <a:ext uri="{C572A759-6A51-4108-AA02-DFA0A04FC94B}">
-              <ma14:wrappingTextBoxFlag xmlns:ma14="http://schemas.microsoft.com/office/mac/drawingml/2011/main" val="1"/>
+              <ma14:wrappingTextBoxFlag xmlns:ma14="http://schemas.microsoft.com/office/mac/drawingml/2011/main" xmlns:a14="http://schemas.microsoft.com/office/drawing/2010/main" xmlns:m="http://schemas.openxmlformats.org/officeDocument/2006/math" xmlns="" val="1"/>
             </a:ext>
           </a:extLst>
         </p:spPr>
@@ -3883,7 +4688,7 @@
               <a:spcBef>
                 <a:spcPts val="100"/>
               </a:spcBef>
-              <a:defRPr spc="80" sz="2400">
+              <a:defRPr sz="2400" spc="80">
                 <a:solidFill>
                   <a:srgbClr val="F2F2F2"/>
                 </a:solidFill>
@@ -3894,14 +4699,15 @@
               </a:defRPr>
             </a:pPr>
             <a:r>
+              <a:rPr dirty="0" err="1"/>
               <a:t>Muestra</a:t>
             </a:r>
             <a:r>
-              <a:rPr spc="65"/>
-              <a:t> </a:t>
-            </a:r>
-            <a:r>
-              <a:rPr spc="0">
+              <a:rPr spc="65" dirty="0"/>
+              <a:t> </a:t>
+            </a:r>
+            <a:r>
+              <a:rPr spc="0" dirty="0">
                 <a:solidFill>
                   <a:srgbClr val="F6F6F6"/>
                 </a:solidFill>
@@ -3909,7 +4715,7 @@
               <a:t>un</a:t>
             </a:r>
             <a:r>
-              <a:rPr spc="25">
+              <a:rPr spc="25" dirty="0">
                 <a:solidFill>
                   <a:srgbClr val="F6F6F6"/>
                 </a:solidFill>
@@ -3917,7 +4723,7 @@
               <a:t> </a:t>
             </a:r>
             <a:r>
-              <a:rPr spc="60">
+              <a:rPr spc="60" dirty="0" err="1">
                 <a:solidFill>
                   <a:srgbClr val="F7F7F7"/>
                 </a:solidFill>
@@ -3925,7 +4731,7 @@
               <a:t>crecimiento</a:t>
             </a:r>
             <a:r>
-              <a:rPr spc="265">
+              <a:rPr spc="265" dirty="0">
                 <a:solidFill>
                   <a:srgbClr val="F7F7F7"/>
                 </a:solidFill>
@@ -3933,15 +4739,23 @@
               <a:t> </a:t>
             </a:r>
             <a:r>
-              <a:rPr spc="45">
+              <a:rPr spc="45" dirty="0" err="1">
                 <a:solidFill>
                   <a:srgbClr val="F4F4F4"/>
                 </a:solidFill>
               </a:rPr>
-              <a:t>sostenido </a:t>
-            </a:r>
-            <a:r>
-              <a:rPr spc="70">
+              <a:t>sostenido</a:t>
+            </a:r>
+            <a:r>
+              <a:rPr spc="45" dirty="0">
+                <a:solidFill>
+                  <a:srgbClr val="F4F4F4"/>
+                </a:solidFill>
+              </a:rPr>
+              <a:t> </a:t>
+            </a:r>
+            <a:r>
+              <a:rPr spc="70" dirty="0">
                 <a:solidFill>
                   <a:srgbClr val="F0F0F0"/>
                 </a:solidFill>
@@ -3949,7 +4763,7 @@
               <a:t>de</a:t>
             </a:r>
             <a:r>
-              <a:rPr spc="275">
+              <a:rPr spc="275" dirty="0">
                 <a:solidFill>
                   <a:srgbClr val="F0F0F0"/>
                 </a:solidFill>
@@ -3957,7 +4771,7 @@
               <a:t> </a:t>
             </a:r>
             <a:r>
-              <a:rPr spc="50">
+              <a:rPr spc="50" dirty="0">
                 <a:solidFill>
                   <a:srgbClr val="EDEDED"/>
                 </a:solidFill>
@@ -3965,7 +4779,7 @@
               <a:t>la</a:t>
             </a:r>
             <a:r>
-              <a:rPr spc="234">
+              <a:rPr spc="234" dirty="0">
                 <a:solidFill>
                   <a:srgbClr val="EDEDED"/>
                 </a:solidFill>
@@ -3973,7 +4787,7 @@
               <a:t> </a:t>
             </a:r>
             <a:r>
-              <a:rPr spc="200">
+              <a:rPr spc="200" dirty="0" err="1">
                 <a:solidFill>
                   <a:srgbClr val="FFFFFF"/>
                 </a:solidFill>
@@ -3981,7 +4795,7 @@
               <a:t>demanda</a:t>
             </a:r>
             <a:r>
-              <a:rPr spc="104">
+              <a:rPr spc="104" dirty="0">
                 <a:solidFill>
                   <a:srgbClr val="FFFFFF"/>
                 </a:solidFill>
@@ -3989,7 +4803,7 @@
               <a:t> </a:t>
             </a:r>
             <a:r>
-              <a:rPr spc="114">
+              <a:rPr spc="114" dirty="0">
                 <a:solidFill>
                   <a:srgbClr val="F6F6F6"/>
                 </a:solidFill>
@@ -3997,7 +4811,7 @@
               <a:t>bas</a:t>
             </a:r>
             <a:r>
-              <a:rPr spc="-465">
+              <a:rPr spc="-465" dirty="0">
                 <a:solidFill>
                   <a:srgbClr val="F6F6F6"/>
                 </a:solidFill>
@@ -4005,7 +4819,7 @@
               <a:t>e</a:t>
             </a:r>
             <a:r>
-              <a:rPr spc="120">
+              <a:rPr spc="120" dirty="0">
                 <a:solidFill>
                   <a:srgbClr val="001100"/>
                 </a:solidFill>
@@ -4013,7 +4827,7 @@
               <a:t> </a:t>
             </a:r>
             <a:r>
-              <a:rPr spc="120">
+              <a:rPr spc="120" dirty="0">
                 <a:solidFill>
                   <a:srgbClr val="FFFFFF"/>
                 </a:solidFill>
@@ -4021,7 +4835,7 @@
               <a:t>a </a:t>
             </a:r>
             <a:r>
-              <a:rPr spc="0">
+              <a:rPr spc="0" dirty="0">
                 <a:solidFill>
                   <a:srgbClr val="EFEFEF"/>
                 </a:solidFill>
@@ -4029,7 +4843,7 @@
               <a:t>lo</a:t>
             </a:r>
             <a:r>
-              <a:rPr spc="5">
+              <a:rPr spc="5" dirty="0">
                 <a:solidFill>
                   <a:srgbClr val="EFEFEF"/>
                 </a:solidFill>
@@ -4037,7 +4851,7 @@
               <a:t> </a:t>
             </a:r>
             <a:r>
-              <a:rPr spc="114">
+              <a:rPr spc="114" dirty="0">
                 <a:solidFill>
                   <a:srgbClr val="EFEFEF"/>
                 </a:solidFill>
@@ -4045,7 +4859,7 @@
               <a:t>largo</a:t>
             </a:r>
             <a:r>
-              <a:rPr spc="40">
+              <a:rPr spc="40" dirty="0">
                 <a:solidFill>
                   <a:srgbClr val="EFEFEF"/>
                 </a:solidFill>
@@ -4053,7 +4867,7 @@
               <a:t> </a:t>
             </a:r>
             <a:r>
-              <a:rPr spc="104">
+              <a:rPr spc="104" dirty="0">
                 <a:solidFill>
                   <a:srgbClr val="E6E6E6"/>
                 </a:solidFill>
@@ -4061,7 +4875,7 @@
               <a:t>de </a:t>
             </a:r>
             <a:r>
-              <a:rPr spc="0">
+              <a:rPr spc="0" dirty="0" err="1">
                 <a:solidFill>
                   <a:srgbClr val="EFEFEF"/>
                 </a:solidFill>
@@ -4069,7 +4883,7 @@
               <a:t>los</a:t>
             </a:r>
             <a:r>
-              <a:rPr spc="195">
+              <a:rPr spc="195" dirty="0">
                 <a:solidFill>
                   <a:srgbClr val="EFEFEF"/>
                 </a:solidFill>
@@ -4077,12 +4891,20 @@
               <a:t> </a:t>
             </a:r>
             <a:r>
-              <a:rPr spc="70">
+              <a:rPr spc="70" dirty="0" err="1">
                 <a:solidFill>
                   <a:srgbClr val="EFEFEF"/>
                 </a:solidFill>
               </a:rPr>
-              <a:t>años.</a:t>
+              <a:t>años</a:t>
+            </a:r>
+            <a:r>
+              <a:rPr spc="70" dirty="0">
+                <a:solidFill>
+                  <a:srgbClr val="EFEFEF"/>
+                </a:solidFill>
+              </a:rPr>
+              <a:t>.</a:t>
             </a:r>
           </a:p>
         </p:txBody>
@@ -4095,7 +4917,7 @@
         </p:nvSpPr>
         <p:spPr>
           <a:xfrm>
-            <a:off x="7913990" y="4890421"/>
+            <a:off x="1659244" y="5204832"/>
             <a:ext cx="3438173" cy="482601"/>
           </a:xfrm>
           <a:prstGeom prst="rect">
@@ -4106,7 +4928,7 @@
           </a:ln>
           <a:extLst>
             <a:ext uri="{C572A759-6A51-4108-AA02-DFA0A04FC94B}">
-              <ma14:wrappingTextBoxFlag xmlns:ma14="http://schemas.microsoft.com/office/mac/drawingml/2011/main" val="1"/>
+              <ma14:wrappingTextBoxFlag xmlns:ma14="http://schemas.microsoft.com/office/mac/drawingml/2011/main" xmlns:a14="http://schemas.microsoft.com/office/drawing/2010/main" xmlns:m="http://schemas.openxmlformats.org/officeDocument/2006/math" xmlns="" val="1"/>
             </a:ext>
           </a:extLst>
         </p:spPr>
@@ -4119,7 +4941,7 @@
               <a:spcBef>
                 <a:spcPts val="100"/>
               </a:spcBef>
-              <a:defRPr spc="100" sz="2800">
+              <a:defRPr sz="2800" spc="100">
                 <a:solidFill>
                   <a:srgbClr val="E9F6AB"/>
                 </a:solidFill>
@@ -4131,7 +4953,6 @@
             </a:lvl1pPr>
           </a:lstStyle>
           <a:p>
-            <a:pPr/>
             <a:r>
               <a:t>Estacionalidad</a:t>
             </a:r>
@@ -4146,7 +4967,7 @@
         </p:nvSpPr>
         <p:spPr>
           <a:xfrm>
-            <a:off x="7910104" y="5548413"/>
+            <a:off x="1655358" y="5862824"/>
             <a:ext cx="4546601" cy="1545972"/>
           </a:xfrm>
           <a:prstGeom prst="rect">
@@ -4157,7 +4978,7 @@
           </a:ln>
           <a:extLst>
             <a:ext uri="{C572A759-6A51-4108-AA02-DFA0A04FC94B}">
-              <ma14:wrappingTextBoxFlag xmlns:ma14="http://schemas.microsoft.com/office/mac/drawingml/2011/main" val="1"/>
+              <ma14:wrappingTextBoxFlag xmlns:ma14="http://schemas.microsoft.com/office/mac/drawingml/2011/main" xmlns:a14="http://schemas.microsoft.com/office/drawing/2010/main" xmlns:m="http://schemas.openxmlformats.org/officeDocument/2006/math" xmlns="" val="1"/>
             </a:ext>
           </a:extLst>
         </p:spPr>
@@ -4337,8 +5158,8 @@
         </p:nvSpPr>
         <p:spPr>
           <a:xfrm>
-            <a:off x="13811986" y="4890421"/>
-            <a:ext cx="1332866" cy="482601"/>
+            <a:off x="1717173" y="8107298"/>
+            <a:ext cx="1392134" cy="430887"/>
           </a:xfrm>
           <a:prstGeom prst="rect">
             <a:avLst/>
@@ -4348,12 +5169,12 @@
           </a:ln>
           <a:extLst>
             <a:ext uri="{C572A759-6A51-4108-AA02-DFA0A04FC94B}">
-              <ma14:wrappingTextBoxFlag xmlns:ma14="http://schemas.microsoft.com/office/mac/drawingml/2011/main" val="1"/>
+              <ma14:wrappingTextBoxFlag xmlns:ma14="http://schemas.microsoft.com/office/mac/drawingml/2011/main" xmlns:a14="http://schemas.microsoft.com/office/drawing/2010/main" xmlns:m="http://schemas.openxmlformats.org/officeDocument/2006/math" xmlns="" val="1"/>
             </a:ext>
           </a:extLst>
         </p:spPr>
         <p:txBody>
-          <a:bodyPr lIns="0" tIns="0" rIns="0" bIns="0">
+          <a:bodyPr wrap="square" lIns="0" tIns="0" rIns="0" bIns="0">
             <a:spAutoFit/>
           </a:bodyPr>
           <a:lstStyle>
@@ -4361,7 +5182,7 @@
               <a:spcBef>
                 <a:spcPts val="100"/>
               </a:spcBef>
-              <a:defRPr spc="-10" sz="2800">
+              <a:defRPr sz="2800" spc="-10">
                 <a:solidFill>
                   <a:srgbClr val="E2FDB1"/>
                 </a:solidFill>
@@ -4373,7 +5194,6 @@
             </a:lvl1pPr>
           </a:lstStyle>
           <a:p>
-            <a:pPr/>
             <a:r>
               <a:t>Residuo</a:t>
             </a:r>
@@ -4388,8 +5208,8 @@
         </p:nvSpPr>
         <p:spPr>
           <a:xfrm>
-            <a:off x="13804949" y="5585582"/>
-            <a:ext cx="3954146" cy="2001825"/>
+            <a:off x="1710135" y="8802459"/>
+            <a:ext cx="4129973" cy="1362489"/>
           </a:xfrm>
           <a:prstGeom prst="rect">
             <a:avLst/>
@@ -4399,12 +5219,12 @@
           </a:ln>
           <a:extLst>
             <a:ext uri="{C572A759-6A51-4108-AA02-DFA0A04FC94B}">
-              <ma14:wrappingTextBoxFlag xmlns:ma14="http://schemas.microsoft.com/office/mac/drawingml/2011/main" val="1"/>
+              <ma14:wrappingTextBoxFlag xmlns:ma14="http://schemas.microsoft.com/office/mac/drawingml/2011/main" xmlns:a14="http://schemas.microsoft.com/office/drawing/2010/main" xmlns:m="http://schemas.openxmlformats.org/officeDocument/2006/math" xmlns="" val="1"/>
             </a:ext>
           </a:extLst>
         </p:spPr>
         <p:txBody>
-          <a:bodyPr lIns="0" tIns="0" rIns="0" bIns="0">
+          <a:bodyPr wrap="square" lIns="0" tIns="0" rIns="0" bIns="0">
             <a:spAutoFit/>
           </a:bodyPr>
           <a:lstStyle/>
@@ -4577,8 +5397,8 @@
         </p:nvSpPr>
         <p:spPr>
           <a:xfrm>
-            <a:off x="1067055" y="4496721"/>
-            <a:ext cx="5524183" cy="3265346"/>
+            <a:off x="912418" y="1625075"/>
+            <a:ext cx="5524183" cy="2795698"/>
           </a:xfrm>
           <a:custGeom>
             <a:avLst/>
@@ -4600,7 +5420,7 @@
             </a:cxnLst>
             <a:rect l="0" t="0" r="r" b="b"/>
             <a:pathLst>
-              <a:path w="21600" h="21600" fill="norm" stroke="1" extrusionOk="0">
+              <a:path w="21600" h="21600" extrusionOk="0">
                 <a:moveTo>
                   <a:pt x="2928" y="0"/>
                 </a:moveTo>
@@ -4746,7 +5566,7 @@
             </a:solidFill>
           </a:ln>
           <a:effectLst>
-            <a:outerShdw sx="100000" sy="100000" kx="0" ky="0" algn="b" rotWithShape="0" blurRad="38100" dist="23000" dir="5400000">
+            <a:outerShdw blurRad="38100" dist="23000" dir="5400000" rotWithShape="0">
               <a:srgbClr val="000000">
                 <a:alpha val="35000"/>
               </a:srgbClr>
@@ -4757,7 +5577,7 @@
           <a:bodyPr lIns="45719" rIns="45719" anchor="ctr"/>
           <a:lstStyle/>
           <a:p>
-            <a:pPr/>
+            <a:endParaRPr/>
           </a:p>
         </p:txBody>
       </p:sp>
@@ -4769,8 +5589,8 @@
         </p:nvSpPr>
         <p:spPr>
           <a:xfrm>
-            <a:off x="7167164" y="4502833"/>
-            <a:ext cx="5276841" cy="3253122"/>
+            <a:off x="912418" y="4817244"/>
+            <a:ext cx="5524183" cy="2416892"/>
           </a:xfrm>
           <a:custGeom>
             <a:avLst/>
@@ -4792,7 +5612,7 @@
             </a:cxnLst>
             <a:rect l="0" t="0" r="r" b="b"/>
             <a:pathLst>
-              <a:path w="21600" h="21600" fill="norm" stroke="1" extrusionOk="0">
+              <a:path w="21600" h="21600" extrusionOk="0">
                 <a:moveTo>
                   <a:pt x="2928" y="0"/>
                 </a:moveTo>
@@ -4938,7 +5758,7 @@
             </a:solidFill>
           </a:ln>
           <a:effectLst>
-            <a:outerShdw sx="100000" sy="100000" kx="0" ky="0" algn="b" rotWithShape="0" blurRad="38100" dist="23000" dir="5400000">
+            <a:outerShdw blurRad="38100" dist="23000" dir="5400000" rotWithShape="0">
               <a:srgbClr val="000000">
                 <a:alpha val="35000"/>
               </a:srgbClr>
@@ -4949,7 +5769,7 @@
           <a:bodyPr lIns="45719" rIns="45719" anchor="ctr"/>
           <a:lstStyle/>
           <a:p>
-            <a:pPr/>
+            <a:endParaRPr/>
           </a:p>
         </p:txBody>
       </p:sp>
@@ -4961,8 +5781,8 @@
         </p:nvSpPr>
         <p:spPr>
           <a:xfrm>
-            <a:off x="13019931" y="4496721"/>
-            <a:ext cx="5276841" cy="3265346"/>
+            <a:off x="925118" y="7713598"/>
+            <a:ext cx="5511483" cy="2819792"/>
           </a:xfrm>
           <a:custGeom>
             <a:avLst/>
@@ -4984,7 +5804,7 @@
             </a:cxnLst>
             <a:rect l="0" t="0" r="r" b="b"/>
             <a:pathLst>
-              <a:path w="21600" h="21600" fill="norm" stroke="1" extrusionOk="0">
+              <a:path w="21600" h="21600" extrusionOk="0">
                 <a:moveTo>
                   <a:pt x="2928" y="0"/>
                 </a:moveTo>
@@ -5130,7 +5950,7 @@
             </a:solidFill>
           </a:ln>
           <a:effectLst>
-            <a:outerShdw sx="100000" sy="100000" kx="0" ky="0" algn="b" rotWithShape="0" blurRad="38100" dist="23000" dir="5400000">
+            <a:outerShdw blurRad="38100" dist="23000" dir="5400000" rotWithShape="0">
               <a:srgbClr val="000000">
                 <a:alpha val="35000"/>
               </a:srgbClr>
@@ -5141,27 +5961,58 @@
           <a:bodyPr lIns="45719" rIns="45719" anchor="ctr"/>
           <a:lstStyle/>
           <a:p>
-            <a:pPr/>
+            <a:endParaRPr/>
           </a:p>
         </p:txBody>
       </p:sp>
+      <p:pic>
+        <p:nvPicPr>
+          <p:cNvPr id="3" name="Imagen 2">
+            <a:extLst>
+              <a:ext uri="{FF2B5EF4-FFF2-40B4-BE49-F238E27FC236}">
+                <a16:creationId xmlns:a16="http://schemas.microsoft.com/office/drawing/2014/main" id="{56DAC8F0-840E-918F-7717-F38300CB92C1}"/>
+              </a:ext>
+            </a:extLst>
+          </p:cNvPr>
+          <p:cNvPicPr>
+            <a:picLocks noChangeAspect="1"/>
+          </p:cNvPicPr>
+          <p:nvPr/>
+        </p:nvPicPr>
+        <p:blipFill>
+          <a:blip r:embed="rId2"/>
+          <a:stretch>
+            <a:fillRect/>
+          </a:stretch>
+        </p:blipFill>
+        <p:spPr>
+          <a:xfrm>
+            <a:off x="7228656" y="1740312"/>
+            <a:ext cx="12094772" cy="8570756"/>
+          </a:xfrm>
+          <a:prstGeom prst="rect">
+            <a:avLst/>
+          </a:prstGeom>
+        </p:spPr>
+      </p:pic>
     </p:spTree>
   </p:cSld>
   <p:clrMapOvr>
     <a:masterClrMapping/>
   </p:clrMapOvr>
-  <p:transition xmlns:p14="http://schemas.microsoft.com/office/powerpoint/2010/main" spd="med" advClick="1"/>
+  <p:transition spd="med"/>
 </p:sld>
 </file>
 
 <file path=ppt/slides/slide5.xml><?xml version="1.0" encoding="utf-8"?>
-<p:sld xmlns:a="http://schemas.openxmlformats.org/drawingml/2006/main" xmlns:r="http://schemas.openxmlformats.org/officeDocument/2006/relationships" xmlns:p="http://schemas.openxmlformats.org/presentationml/2006/main" xmlns:m="http://schemas.openxmlformats.org/officeDocument/2006/math" xmlns:a14="http://schemas.microsoft.com/office/drawing/2010/main" showMasterSp="1" showMasterPhAnim="1">
+<p:sld xmlns:a="http://schemas.openxmlformats.org/drawingml/2006/main" xmlns:r="http://schemas.openxmlformats.org/officeDocument/2006/relationships" xmlns:p="http://schemas.openxmlformats.org/presentationml/2006/main">
   <p:cSld>
     <p:bg>
       <p:bgPr>
         <a:solidFill>
           <a:srgbClr val="000000"/>
         </a:solidFill>
+        <a:effectLst/>
       </p:bgPr>
     </p:bg>
     <p:spTree>
@@ -5203,14 +6054,16 @@
           <a:bodyPr lIns="45719" rIns="45719"/>
           <a:lstStyle/>
           <a:p>
-            <a:pPr/>
+            <a:endParaRPr/>
           </a:p>
         </p:txBody>
       </p:sp>
       <p:sp>
         <p:nvSpPr>
           <p:cNvPr id="97" name="object 9"/>
-          <p:cNvSpPr txBox="1"/>
+          <p:cNvSpPr txBox="1">
+            <a:spLocks noGrp="1"/>
+          </p:cNvSpPr>
           <p:nvPr>
             <p:ph type="title"/>
           </p:nvPr>
@@ -5229,7 +6082,7 @@
           <a:lstStyle/>
           <a:p>
             <a:pPr indent="11557" defTabSz="832104">
-              <a:defRPr spc="-91" sz="5915">
+              <a:defRPr sz="5915" spc="-91">
                 <a:latin typeface="Avenir Book"/>
                 <a:ea typeface="Avenir Book"/>
                 <a:cs typeface="Avenir Book"/>
@@ -5280,7 +6133,7 @@
           </a:ln>
           <a:extLst>
             <a:ext uri="{C572A759-6A51-4108-AA02-DFA0A04FC94B}">
-              <ma14:wrappingTextBoxFlag xmlns:ma14="http://schemas.microsoft.com/office/mac/drawingml/2011/main" val="1"/>
+              <ma14:wrappingTextBoxFlag xmlns:ma14="http://schemas.microsoft.com/office/mac/drawingml/2011/main" xmlns:a14="http://schemas.microsoft.com/office/drawing/2010/main" xmlns:m="http://schemas.openxmlformats.org/officeDocument/2006/math" xmlns="" val="1"/>
             </a:ext>
           </a:extLst>
         </p:spPr>
@@ -5298,6 +6151,7 @@
                 <a:sym typeface="Avenir Book"/>
               </a:defRPr>
             </a:pPr>
+            <a:endParaRPr/>
           </a:p>
           <a:p>
             <a:pPr>
@@ -5311,10 +6165,11 @@
                 <a:sym typeface="Avenir Book"/>
               </a:defRPr>
             </a:pPr>
+            <a:endParaRPr/>
           </a:p>
           <a:p>
             <a:pPr indent="1905">
-              <a:defRPr spc="180" sz="2200">
+              <a:defRPr sz="2200" spc="180">
                 <a:solidFill>
                   <a:srgbClr val="FFFFFF"/>
                 </a:solidFill>
@@ -5356,10 +6211,11 @@
                 <a:sym typeface="Avenir Book"/>
               </a:defRPr>
             </a:pPr>
+            <a:endParaRPr spc="155"/>
           </a:p>
           <a:p>
             <a:pPr>
-              <a:defRPr spc="225" sz="2300">
+              <a:defRPr sz="2300" spc="225">
                 <a:solidFill>
                   <a:srgbClr val="EBEBEB"/>
                 </a:solidFill>
@@ -5500,6 +6356,11 @@
                 <a:sym typeface="Avenir Book"/>
               </a:defRPr>
             </a:pPr>
+            <a:endParaRPr spc="-20">
+              <a:solidFill>
+                <a:srgbClr val="F2F2F2"/>
+              </a:solidFill>
+            </a:endParaRPr>
           </a:p>
           <a:p>
             <a:pPr marL="616585" indent="-316230">
@@ -5511,7 +6372,7 @@
               <a:tabLst>
                 <a:tab pos="609600" algn="l"/>
               </a:tabLst>
-              <a:defRPr spc="65" sz="2400">
+              <a:defRPr sz="2400" spc="65">
                 <a:solidFill>
                   <a:srgbClr val="EDEDED"/>
                 </a:solidFill>
@@ -5803,10 +6664,15 @@
                 <a:sym typeface="Avenir Book"/>
               </a:defRPr>
             </a:pPr>
+            <a:endParaRPr spc="-10">
+              <a:solidFill>
+                <a:srgbClr val="FFFFFF"/>
+              </a:solidFill>
+            </a:endParaRPr>
           </a:p>
           <a:p>
             <a:pPr indent="3810">
-              <a:defRPr spc="-185" sz="2700">
+              <a:defRPr sz="2700" spc="-185">
                 <a:solidFill>
                   <a:srgbClr val="F2F2F2"/>
                 </a:solidFill>
@@ -5931,9 +6797,7 @@
           <p:nvPr/>
         </p:nvPicPr>
         <p:blipFill>
-          <a:blip r:embed="rId2">
-            <a:extLst/>
-          </a:blip>
+          <a:blip r:embed="rId2"/>
           <a:stretch>
             <a:fillRect/>
           </a:stretch>
@@ -5956,18 +6820,19 @@
   <p:clrMapOvr>
     <a:masterClrMapping/>
   </p:clrMapOvr>
-  <p:transition xmlns:p14="http://schemas.microsoft.com/office/powerpoint/2010/main" spd="med" advClick="1"/>
+  <p:transition spd="med"/>
 </p:sld>
 </file>
 
 <file path=ppt/slides/slide6.xml><?xml version="1.0" encoding="utf-8"?>
-<p:sld xmlns:a="http://schemas.openxmlformats.org/drawingml/2006/main" xmlns:r="http://schemas.openxmlformats.org/officeDocument/2006/relationships" xmlns:p="http://schemas.openxmlformats.org/presentationml/2006/main" xmlns:m="http://schemas.openxmlformats.org/officeDocument/2006/math" xmlns:a14="http://schemas.microsoft.com/office/drawing/2010/main" showMasterSp="1" showMasterPhAnim="1">
+<p:sld xmlns:a="http://schemas.openxmlformats.org/drawingml/2006/main" xmlns:r="http://schemas.openxmlformats.org/officeDocument/2006/relationships" xmlns:p="http://schemas.openxmlformats.org/presentationml/2006/main">
   <p:cSld>
     <p:bg>
       <p:bgPr>
         <a:solidFill>
           <a:srgbClr val="000000"/>
         </a:solidFill>
+        <a:effectLst/>
       </p:bgPr>
     </p:bg>
     <p:spTree>
@@ -6009,14 +6874,16 @@
           <a:bodyPr lIns="45719" rIns="45719"/>
           <a:lstStyle/>
           <a:p>
-            <a:pPr/>
+            <a:endParaRPr/>
           </a:p>
         </p:txBody>
       </p:sp>
       <p:sp>
         <p:nvSpPr>
           <p:cNvPr id="102" name="object 3"/>
-          <p:cNvSpPr txBox="1"/>
+          <p:cNvSpPr txBox="1">
+            <a:spLocks noGrp="1"/>
+          </p:cNvSpPr>
           <p:nvPr>
             <p:ph type="title"/>
           </p:nvPr>
@@ -6090,9 +6957,7 @@
             <p:nvPr/>
           </p:nvPicPr>
           <p:blipFill>
-            <a:blip r:embed="rId2">
-              <a:extLst/>
-            </a:blip>
+            <a:blip r:embed="rId2"/>
             <a:stretch>
               <a:fillRect/>
             </a:stretch>
@@ -6141,7 +7006,7 @@
             </a:bodyPr>
             <a:lstStyle/>
             <a:p>
-              <a:pPr/>
+              <a:endParaRPr/>
             </a:p>
           </p:txBody>
         </p:sp>
@@ -6171,7 +7036,7 @@
           <a:bodyPr lIns="45719" rIns="45719"/>
           <a:lstStyle/>
           <a:p>
-            <a:pPr/>
+            <a:endParaRPr/>
           </a:p>
         </p:txBody>
       </p:sp>
@@ -6200,7 +7065,7 @@
           <a:bodyPr lIns="45719" rIns="45719"/>
           <a:lstStyle/>
           <a:p>
-            <a:pPr/>
+            <a:endParaRPr/>
           </a:p>
         </p:txBody>
       </p:sp>
@@ -6223,7 +7088,7 @@
           </a:ln>
           <a:extLst>
             <a:ext uri="{C572A759-6A51-4108-AA02-DFA0A04FC94B}">
-              <ma14:wrappingTextBoxFlag xmlns:ma14="http://schemas.microsoft.com/office/mac/drawingml/2011/main" val="1"/>
+              <ma14:wrappingTextBoxFlag xmlns:ma14="http://schemas.microsoft.com/office/mac/drawingml/2011/main" xmlns:a14="http://schemas.microsoft.com/office/drawing/2010/main" xmlns:m="http://schemas.openxmlformats.org/officeDocument/2006/math" xmlns="" val="1"/>
             </a:ext>
           </a:extLst>
         </p:spPr>
@@ -6237,7 +7102,7 @@
               <a:spcBef>
                 <a:spcPts val="900"/>
               </a:spcBef>
-              <a:defRPr spc="-245" sz="2500">
+              <a:defRPr sz="2500" spc="-245">
                 <a:solidFill>
                   <a:srgbClr val="FFFFFF"/>
                 </a:solidFill>
@@ -6407,7 +7272,7 @@
               <a:spcBef>
                 <a:spcPts val="700"/>
               </a:spcBef>
-              <a:defRPr spc="50" sz="2400">
+              <a:defRPr sz="2400" spc="50">
                 <a:solidFill>
                   <a:srgbClr val="FFFFFF"/>
                 </a:solidFill>
@@ -6447,9 +7312,7 @@
           <p:nvPr/>
         </p:nvPicPr>
         <p:blipFill>
-          <a:blip r:embed="rId3">
-            <a:extLst/>
-          </a:blip>
+          <a:blip r:embed="rId3"/>
           <a:stretch>
             <a:fillRect/>
           </a:stretch>
@@ -6472,23 +7335,30 @@
   <p:clrMapOvr>
     <a:masterClrMapping/>
   </p:clrMapOvr>
-  <p:transition xmlns:p14="http://schemas.microsoft.com/office/powerpoint/2010/main" spd="med" advClick="1"/>
+  <p:transition spd="med"/>
 </p:sld>
 </file>
 
 <file path=ppt/slides/slide7.xml><?xml version="1.0" encoding="utf-8"?>
-<p:sld xmlns:a="http://schemas.openxmlformats.org/drawingml/2006/main" xmlns:r="http://schemas.openxmlformats.org/officeDocument/2006/relationships" xmlns:p="http://schemas.openxmlformats.org/presentationml/2006/main" xmlns:m="http://schemas.openxmlformats.org/officeDocument/2006/math" xmlns:a14="http://schemas.microsoft.com/office/drawing/2010/main" showMasterSp="1" showMasterPhAnim="1">
+<p:sld xmlns:a="http://schemas.openxmlformats.org/drawingml/2006/main" xmlns:r="http://schemas.openxmlformats.org/officeDocument/2006/relationships" xmlns:p="http://schemas.openxmlformats.org/presentationml/2006/main">
   <p:cSld>
     <p:bg>
       <p:bgPr>
         <a:solidFill>
           <a:srgbClr val="000000"/>
         </a:solidFill>
+        <a:effectLst/>
       </p:bgPr>
     </p:bg>
     <p:spTree>
       <p:nvGrpSpPr>
-        <p:cNvPr id="1" name=""/>
+        <p:cNvPr id="1" name="">
+          <a:extLst>
+            <a:ext uri="{FF2B5EF4-FFF2-40B4-BE49-F238E27FC236}">
+              <a16:creationId xmlns:a16="http://schemas.microsoft.com/office/drawing/2014/main" id="{FDE38DF0-03C3-6A39-5B06-9C9320CEDAC0}"/>
+            </a:ext>
+          </a:extLst>
+        </p:cNvPr>
         <p:cNvGrpSpPr/>
         <p:nvPr/>
       </p:nvGrpSpPr>
@@ -6502,13 +7372,19 @@
       </p:grpSpPr>
       <p:sp>
         <p:nvSpPr>
-          <p:cNvPr id="111" name="object 8"/>
+          <p:cNvPr id="101" name="object 2">
+            <a:extLst>
+              <a:ext uri="{FF2B5EF4-FFF2-40B4-BE49-F238E27FC236}">
+                <a16:creationId xmlns:a16="http://schemas.microsoft.com/office/drawing/2014/main" id="{B9F6969B-9B18-CB9C-648A-82F8D1DF022B}"/>
+              </a:ext>
+            </a:extLst>
+          </p:cNvPr>
           <p:cNvSpPr/>
           <p:nvPr/>
         </p:nvSpPr>
         <p:spPr>
           <a:xfrm>
-            <a:off x="15707" y="769609"/>
+            <a:off x="15707" y="2340242"/>
             <a:ext cx="20080539" cy="636108"/>
           </a:xfrm>
           <a:prstGeom prst="rect">
@@ -6525,22 +7401,30 @@
           <a:bodyPr lIns="45719" rIns="45719"/>
           <a:lstStyle/>
           <a:p>
-            <a:pPr/>
+            <a:endParaRPr/>
           </a:p>
         </p:txBody>
       </p:sp>
       <p:sp>
         <p:nvSpPr>
-          <p:cNvPr id="112" name="object 9"/>
-          <p:cNvSpPr txBox="1"/>
+          <p:cNvPr id="102" name="object 3">
+            <a:extLst>
+              <a:ext uri="{FF2B5EF4-FFF2-40B4-BE49-F238E27FC236}">
+                <a16:creationId xmlns:a16="http://schemas.microsoft.com/office/drawing/2014/main" id="{0299B1C3-E53D-04C9-F63B-3BC6C00D1DED}"/>
+              </a:ext>
+            </a:extLst>
+          </p:cNvPr>
+          <p:cNvSpPr txBox="1">
+            <a:spLocks noGrp="1"/>
+          </p:cNvSpPr>
           <p:nvPr>
             <p:ph type="title"/>
           </p:nvPr>
         </p:nvSpPr>
         <p:spPr>
           <a:xfrm>
-            <a:off x="932197" y="551417"/>
-            <a:ext cx="8392160" cy="1007112"/>
+            <a:off x="975994" y="1179945"/>
+            <a:ext cx="8140067" cy="1026795"/>
           </a:xfrm>
           <a:prstGeom prst="rect">
             <a:avLst/>
@@ -6551,7 +7435,7 @@
           <a:lstStyle/>
           <a:p>
             <a:pPr indent="11557" defTabSz="832104">
-              <a:defRPr spc="-182" sz="5824">
+              <a:defRPr sz="5915">
                 <a:latin typeface="Avenir Book"/>
                 <a:ea typeface="Avenir Book"/>
                 <a:cs typeface="Avenir Book"/>
@@ -6559,493 +7443,148 @@
               </a:defRPr>
             </a:pPr>
             <a:r>
-              <a:t>Simulación</a:t>
-            </a:r>
-            <a:r>
-              <a:rPr spc="-273"/>
-              <a:t> </a:t>
-            </a:r>
-            <a:r>
-              <a:rPr spc="-91">
-                <a:solidFill>
-                  <a:srgbClr val="DBFFA1"/>
-                </a:solidFill>
-              </a:rPr>
-              <a:t>Monte</a:t>
-            </a:r>
-            <a:r>
-              <a:rPr spc="-455">
-                <a:solidFill>
-                  <a:srgbClr val="DBFFA1"/>
-                </a:solidFill>
-              </a:rPr>
-              <a:t> </a:t>
-            </a:r>
-            <a:r>
-              <a:rPr spc="-91">
-                <a:solidFill>
-                  <a:srgbClr val="DFFF97"/>
-                </a:solidFill>
-              </a:rPr>
-              <a:t>Carlo</a:t>
-            </a:r>
+              <a:rPr dirty="0" err="1"/>
+              <a:t>Evaluación</a:t>
+            </a:r>
+            <a:r>
+              <a:rPr spc="273" dirty="0"/>
+              <a:t> </a:t>
+            </a:r>
+            <a:r>
+              <a:rPr dirty="0"/>
+              <a:t>de</a:t>
+            </a:r>
+            <a:r>
+              <a:rPr spc="364" dirty="0"/>
+              <a:t> </a:t>
+            </a:r>
+            <a:r>
+              <a:rPr spc="-91" dirty="0" err="1">
+                <a:solidFill>
+                  <a:srgbClr val="D4F789"/>
+                </a:solidFill>
+              </a:rPr>
+              <a:t>Modelos</a:t>
+            </a:r>
+            <a:endParaRPr spc="-91" dirty="0">
+              <a:solidFill>
+                <a:srgbClr val="D4F789"/>
+              </a:solidFill>
+            </a:endParaRPr>
           </a:p>
         </p:txBody>
       </p:sp>
+      <p:grpSp>
+        <p:nvGrpSpPr>
+          <p:cNvPr id="105" name="object 14">
+            <a:extLst>
+              <a:ext uri="{FF2B5EF4-FFF2-40B4-BE49-F238E27FC236}">
+                <a16:creationId xmlns:a16="http://schemas.microsoft.com/office/drawing/2014/main" id="{7EEF65D0-048D-3A97-617A-A5A22CF26F28}"/>
+              </a:ext>
+            </a:extLst>
+          </p:cNvPr>
+          <p:cNvGrpSpPr/>
+          <p:nvPr/>
+        </p:nvGrpSpPr>
+        <p:grpSpPr>
+          <a:xfrm>
+            <a:off x="15704" y="5497214"/>
+            <a:ext cx="20080546" cy="494750"/>
+            <a:chOff x="0" y="0"/>
+            <a:chExt cx="20080544" cy="494749"/>
+          </a:xfrm>
+        </p:grpSpPr>
+        <p:pic>
+          <p:nvPicPr>
+            <p:cNvPr id="103" name="object 15" descr="object 15">
+              <a:extLst>
+                <a:ext uri="{FF2B5EF4-FFF2-40B4-BE49-F238E27FC236}">
+                  <a16:creationId xmlns:a16="http://schemas.microsoft.com/office/drawing/2014/main" id="{F6F0CF20-93FE-69C6-5920-84FE024287B1}"/>
+                </a:ext>
+              </a:extLst>
+            </p:cNvPr>
+            <p:cNvPicPr>
+              <a:picLocks noChangeAspect="1"/>
+            </p:cNvPicPr>
+            <p:nvPr/>
+          </p:nvPicPr>
+          <p:blipFill>
+            <a:blip r:embed="rId2"/>
+            <a:stretch>
+              <a:fillRect/>
+            </a:stretch>
+          </p:blipFill>
+          <p:spPr>
+            <a:xfrm>
+              <a:off x="6266826" y="15706"/>
+              <a:ext cx="5465803" cy="471191"/>
+            </a:xfrm>
+            <a:prstGeom prst="rect">
+              <a:avLst/>
+            </a:prstGeom>
+            <a:ln w="12700" cap="flat">
+              <a:noFill/>
+              <a:miter lim="400000"/>
+            </a:ln>
+            <a:effectLst/>
+          </p:spPr>
+        </p:pic>
+        <p:sp>
+          <p:nvSpPr>
+            <p:cNvPr id="104" name="object 16">
+              <a:extLst>
+                <a:ext uri="{FF2B5EF4-FFF2-40B4-BE49-F238E27FC236}">
+                  <a16:creationId xmlns:a16="http://schemas.microsoft.com/office/drawing/2014/main" id="{5B236504-9624-6B28-D233-3E7E6382C74B}"/>
+                </a:ext>
+              </a:extLst>
+            </p:cNvPr>
+            <p:cNvSpPr/>
+            <p:nvPr/>
+          </p:nvSpPr>
+          <p:spPr>
+            <a:xfrm>
+              <a:off x="0" y="0"/>
+              <a:ext cx="20080545" cy="494750"/>
+            </a:xfrm>
+            <a:prstGeom prst="rect">
+              <a:avLst/>
+            </a:prstGeom>
+            <a:solidFill>
+              <a:srgbClr val="000000"/>
+            </a:solidFill>
+            <a:ln w="12700" cap="flat">
+              <a:noFill/>
+              <a:miter lim="400000"/>
+            </a:ln>
+            <a:effectLst/>
+          </p:spPr>
+          <p:txBody>
+            <a:bodyPr wrap="square" lIns="45719" tIns="45719" rIns="45719" bIns="45719" numCol="1" anchor="t">
+              <a:noAutofit/>
+            </a:bodyPr>
+            <a:lstStyle/>
+            <a:p>
+              <a:endParaRPr/>
+            </a:p>
+          </p:txBody>
+        </p:sp>
+      </p:grpSp>
       <p:sp>
         <p:nvSpPr>
-          <p:cNvPr id="113" name="object 10"/>
-          <p:cNvSpPr txBox="1"/>
-          <p:nvPr/>
-        </p:nvSpPr>
-        <p:spPr>
-          <a:xfrm>
-            <a:off x="10930983" y="2561465"/>
-            <a:ext cx="8458201" cy="4832550"/>
-          </a:xfrm>
-          <a:prstGeom prst="rect">
-            <a:avLst/>
-          </a:prstGeom>
-          <a:solidFill>
-            <a:srgbClr val="000000"/>
-          </a:solidFill>
-          <a:ln w="12700">
-            <a:miter lim="400000"/>
-          </a:ln>
-          <a:extLst>
-            <a:ext uri="{C572A759-6A51-4108-AA02-DFA0A04FC94B}">
-              <ma14:wrappingTextBoxFlag xmlns:ma14="http://schemas.microsoft.com/office/mac/drawingml/2011/main" val="1"/>
-            </a:ext>
-          </a:extLst>
-        </p:spPr>
-        <p:txBody>
-          <a:bodyPr lIns="0" tIns="0" rIns="0" bIns="0" anchor="ctr">
-            <a:spAutoFit/>
-          </a:bodyPr>
-          <a:lstStyle/>
-          <a:p>
-            <a:pPr>
-              <a:defRPr sz="2200">
-                <a:latin typeface="Avenir Book"/>
-                <a:ea typeface="Avenir Book"/>
-                <a:cs typeface="Avenir Book"/>
-                <a:sym typeface="Avenir Book"/>
-              </a:defRPr>
-            </a:pPr>
-          </a:p>
-          <a:p>
-            <a:pPr>
-              <a:spcBef>
-                <a:spcPts val="2000"/>
-              </a:spcBef>
-              <a:defRPr sz="2200">
-                <a:latin typeface="Avenir Book"/>
-                <a:ea typeface="Avenir Book"/>
-                <a:cs typeface="Avenir Book"/>
-                <a:sym typeface="Avenir Book"/>
-              </a:defRPr>
-            </a:pPr>
-          </a:p>
-          <a:p>
-            <a:pPr indent="635">
-              <a:defRPr sz="2400">
-                <a:solidFill>
-                  <a:srgbClr val="FFFFFF"/>
-                </a:solidFill>
-                <a:latin typeface="Avenir Heavy"/>
-                <a:ea typeface="Avenir Heavy"/>
-                <a:cs typeface="Avenir Heavy"/>
-                <a:sym typeface="Avenir Heavy"/>
-              </a:defRPr>
-            </a:pPr>
-            <a:r>
-              <a:t>   Gestión</a:t>
-            </a:r>
-            <a:r>
-              <a:rPr spc="49"/>
-              <a:t> </a:t>
-            </a:r>
-            <a:r>
-              <a:t>de</a:t>
-            </a:r>
-            <a:r>
-              <a:rPr spc="234"/>
-              <a:t> </a:t>
-            </a:r>
-            <a:r>
-              <a:rPr spc="92"/>
-              <a:t>Incertidumbre</a:t>
-            </a:r>
-            <a:endParaRPr spc="92"/>
-          </a:p>
-          <a:p>
-            <a:pPr indent="635">
-              <a:defRPr sz="2400">
-                <a:solidFill>
-                  <a:srgbClr val="FFFFFF"/>
-                </a:solidFill>
-                <a:latin typeface="Avenir Heavy"/>
-                <a:ea typeface="Avenir Heavy"/>
-                <a:cs typeface="Avenir Heavy"/>
-                <a:sym typeface="Avenir Heavy"/>
-              </a:defRPr>
-            </a:pPr>
-          </a:p>
-          <a:p>
-            <a:pPr marL="541019" indent="-228600">
-              <a:lnSpc>
-                <a:spcPct val="200000"/>
-              </a:lnSpc>
-              <a:buClr>
-                <a:srgbClr val="DBFFDF"/>
-              </a:buClr>
-              <a:buSzPct val="100000"/>
-              <a:buChar char="•"/>
-              <a:defRPr sz="2400">
-                <a:solidFill>
-                  <a:srgbClr val="FFFFFF"/>
-                </a:solidFill>
-              </a:defRPr>
-            </a:pPr>
-            <a:r>
-              <a:t>1000</a:t>
-            </a:r>
-            <a:r>
-              <a:rPr spc="225"/>
-              <a:t> </a:t>
-            </a:r>
-            <a:r>
-              <a:t>trayectorias</a:t>
-            </a:r>
-            <a:r>
-              <a:rPr spc="344"/>
-              <a:t> </a:t>
-            </a:r>
-            <a:r>
-              <a:rPr spc="-10"/>
-              <a:t>simuladas</a:t>
-            </a:r>
-            <a:r>
-              <a:rPr spc="229"/>
-              <a:t> </a:t>
-            </a:r>
-            <a:r>
-              <a:t>basadas</a:t>
-            </a:r>
-            <a:r>
-              <a:rPr spc="195"/>
-              <a:t> </a:t>
-            </a:r>
-            <a:r>
-              <a:t>en</a:t>
-            </a:r>
-            <a:r>
-              <a:rPr spc="-70"/>
-              <a:t> </a:t>
-            </a:r>
-            <a:r>
-              <a:t>la</a:t>
-            </a:r>
-            <a:r>
-              <a:rPr spc="120"/>
-              <a:t> </a:t>
-            </a:r>
-            <a:r>
-              <a:rPr spc="-10"/>
-              <a:t>volatilidad 	histórica.</a:t>
-            </a:r>
-          </a:p>
-          <a:p>
-            <a:pPr marL="539648" indent="-227228">
-              <a:lnSpc>
-                <a:spcPct val="200000"/>
-              </a:lnSpc>
-              <a:buClr>
-                <a:srgbClr val="D1FFDD"/>
-              </a:buClr>
-              <a:buSzPct val="100000"/>
-              <a:buChar char="•"/>
-              <a:defRPr sz="2400">
-                <a:solidFill>
-                  <a:srgbClr val="FFFFFF"/>
-                </a:solidFill>
-              </a:defRPr>
-            </a:pPr>
-            <a:r>
-              <a:rPr b="1"/>
-              <a:t>Confianza</a:t>
-            </a:r>
-            <a:r>
-              <a:t>:</a:t>
-            </a:r>
-            <a:r>
-              <a:rPr spc="-134"/>
-              <a:t> </a:t>
-            </a:r>
-            <a:r>
-              <a:rPr spc="-240"/>
-              <a:t>El</a:t>
-            </a:r>
-            <a:r>
-              <a:rPr spc="-24"/>
-              <a:t> </a:t>
-            </a:r>
-            <a:r>
-              <a:rPr spc="-219"/>
-              <a:t>70 %</a:t>
-            </a:r>
-            <a:r>
-              <a:rPr spc="-38"/>
-              <a:t> </a:t>
-            </a:r>
-            <a:r>
-              <a:t>de</a:t>
-            </a:r>
-            <a:r>
-              <a:rPr spc="-172"/>
-              <a:t> </a:t>
-            </a:r>
-            <a:r>
-              <a:rPr spc="-96"/>
-              <a:t>los</a:t>
-            </a:r>
-            <a:r>
-              <a:rPr spc="-72"/>
-              <a:t> </a:t>
-            </a:r>
-            <a:r>
-              <a:t>datos</a:t>
-            </a:r>
-            <a:r>
-              <a:rPr spc="-62"/>
-              <a:t> reales</a:t>
-            </a:r>
-            <a:r>
-              <a:rPr spc="-9"/>
-              <a:t> </a:t>
-            </a:r>
-            <a:r>
-              <a:rPr spc="-62"/>
-              <a:t>cayeron</a:t>
-            </a:r>
-            <a:r>
-              <a:rPr spc="-33"/>
-              <a:t> </a:t>
-            </a:r>
-            <a:r>
-              <a:t>dentro</a:t>
-            </a:r>
-            <a:r>
-              <a:rPr spc="-81"/>
-              <a:t> </a:t>
-            </a:r>
-            <a:r>
-              <a:rPr spc="-24"/>
-              <a:t>del </a:t>
-            </a:r>
-            <a:r>
-              <a:t>intervalo</a:t>
-            </a:r>
-            <a:r>
-              <a:rPr spc="55"/>
-              <a:t> </a:t>
-            </a:r>
-            <a:r>
-              <a:rPr spc="-95"/>
-              <a:t>25-</a:t>
-            </a:r>
-            <a:r>
-              <a:rPr spc="-25"/>
-              <a:t>75%</a:t>
-            </a:r>
-          </a:p>
-          <a:p>
-            <a:pPr marL="535355" indent="-223570">
-              <a:lnSpc>
-                <a:spcPct val="200000"/>
-              </a:lnSpc>
-              <a:buSzPct val="100000"/>
-              <a:buChar char="•"/>
-              <a:defRPr sz="2400">
-                <a:solidFill>
-                  <a:srgbClr val="FFFFFF"/>
-                </a:solidFill>
-              </a:defRPr>
-            </a:pPr>
-            <a:r>
-              <a:rPr b="1" spc="-72"/>
-              <a:t>Conclusión</a:t>
-            </a:r>
-            <a:r>
-              <a:rPr spc="-72"/>
-              <a:t>:</a:t>
-            </a:r>
-            <a:r>
-              <a:rPr spc="-100"/>
-              <a:t> </a:t>
-            </a:r>
-            <a:r>
-              <a:rPr spc="-235"/>
-              <a:t>El</a:t>
-            </a:r>
-            <a:r>
-              <a:rPr spc="-14"/>
-              <a:t> </a:t>
-            </a:r>
-            <a:r>
-              <a:rPr spc="-9"/>
-              <a:t>modelo</a:t>
-            </a:r>
-            <a:r>
-              <a:rPr spc="-163"/>
-              <a:t> </a:t>
-            </a:r>
-            <a:r>
-              <a:rPr spc="-129"/>
-              <a:t>es</a:t>
-            </a:r>
-            <a:r>
-              <a:rPr spc="-38"/>
-              <a:t> </a:t>
-            </a:r>
-            <a:r>
-              <a:rPr spc="-67"/>
-              <a:t>conservador,</a:t>
-            </a:r>
-            <a:r>
-              <a:rPr spc="4"/>
-              <a:t> </a:t>
-            </a:r>
-            <a:r>
-              <a:rPr spc="-9"/>
-              <a:t>ideal</a:t>
-            </a:r>
-            <a:r>
-              <a:rPr spc="-100"/>
-              <a:t> </a:t>
-            </a:r>
-            <a:r>
-              <a:rPr spc="-19"/>
-              <a:t>para planificación</a:t>
-            </a:r>
-            <a:r>
-              <a:rPr spc="-52"/>
-              <a:t> </a:t>
-            </a:r>
-            <a:r>
-              <a:rPr spc="-9"/>
-              <a:t>energética.</a:t>
-            </a:r>
-          </a:p>
-        </p:txBody>
-      </p:sp>
-      <p:pic>
-        <p:nvPicPr>
-          <p:cNvPr id="114" name="Screenshot 2026-06-15 at 2.21.56 PM.png" descr="Screenshot 2026-06-15 at 2.21.56 PM.png"/>
-          <p:cNvPicPr>
-            <a:picLocks noChangeAspect="1"/>
-          </p:cNvPicPr>
-          <p:nvPr/>
-        </p:nvPicPr>
-        <p:blipFill>
-          <a:blip r:embed="rId2">
-            <a:extLst/>
-          </a:blip>
-          <a:stretch>
-            <a:fillRect/>
-          </a:stretch>
-        </p:blipFill>
-        <p:spPr>
-          <a:xfrm>
-            <a:off x="692353" y="2225795"/>
-            <a:ext cx="10130652" cy="7965982"/>
-          </a:xfrm>
-          <a:prstGeom prst="rect">
-            <a:avLst/>
-          </a:prstGeom>
-          <a:ln w="12700">
-            <a:miter lim="400000"/>
-          </a:ln>
-        </p:spPr>
-      </p:pic>
-    </p:spTree>
-  </p:cSld>
-  <p:clrMapOvr>
-    <a:masterClrMapping/>
-  </p:clrMapOvr>
-  <p:transition xmlns:p14="http://schemas.microsoft.com/office/powerpoint/2010/main" spd="med" advClick="1"/>
-</p:sld>
-</file>
-
-<file path=ppt/slides/slide8.xml><?xml version="1.0" encoding="utf-8"?>
-<p:sld xmlns:a="http://schemas.openxmlformats.org/drawingml/2006/main" xmlns:r="http://schemas.openxmlformats.org/officeDocument/2006/relationships" xmlns:p="http://schemas.openxmlformats.org/presentationml/2006/main" xmlns:m="http://schemas.openxmlformats.org/officeDocument/2006/math" xmlns:a14="http://schemas.microsoft.com/office/drawing/2010/main" showMasterSp="1" showMasterPhAnim="1">
-  <p:cSld>
-    <p:bg>
-      <p:bgPr>
-        <a:solidFill>
-          <a:srgbClr val="000000"/>
-        </a:solidFill>
-      </p:bgPr>
-    </p:bg>
-    <p:spTree>
-      <p:nvGrpSpPr>
-        <p:cNvPr id="1" name=""/>
-        <p:cNvGrpSpPr/>
-        <p:nvPr/>
-      </p:nvGrpSpPr>
-      <p:grpSpPr>
-        <a:xfrm>
-          <a:off x="0" y="0"/>
-          <a:ext cx="0" cy="0"/>
-          <a:chOff x="0" y="0"/>
-          <a:chExt cx="0" cy="0"/>
-        </a:xfrm>
-      </p:grpSpPr>
-      <p:sp>
-        <p:nvSpPr>
-          <p:cNvPr id="116" name="object 2"/>
-          <p:cNvSpPr txBox="1"/>
-          <p:nvPr>
-            <p:ph type="ctrTitle"/>
-          </p:nvPr>
-        </p:nvSpPr>
-        <p:spPr>
-          <a:xfrm>
-            <a:off x="6466985" y="3362850"/>
-            <a:ext cx="6955791" cy="1478280"/>
-          </a:xfrm>
-          <a:prstGeom prst="rect">
-            <a:avLst/>
-          </a:prstGeom>
-        </p:spPr>
-        <p:txBody>
-          <a:bodyPr/>
-          <a:lstStyle>
-            <a:lvl1pPr indent="12700">
-              <a:spcBef>
-                <a:spcPts val="100"/>
-              </a:spcBef>
-              <a:defRPr spc="-100" sz="9500"/>
-            </a:lvl1pPr>
-          </a:lstStyle>
-          <a:p>
-            <a:pPr/>
-            <a:r>
-              <a:t>¿Preguntas?</a:t>
-            </a:r>
-          </a:p>
-        </p:txBody>
-      </p:sp>
-      <p:sp>
-        <p:nvSpPr>
-          <p:cNvPr id="117" name="object 3"/>
+          <p:cNvPr id="106" name="object 19">
+            <a:extLst>
+              <a:ext uri="{FF2B5EF4-FFF2-40B4-BE49-F238E27FC236}">
+                <a16:creationId xmlns:a16="http://schemas.microsoft.com/office/drawing/2014/main" id="{2272C61F-E772-551D-446D-E7CC5A4B5D40}"/>
+              </a:ext>
+            </a:extLst>
+          </p:cNvPr>
           <p:cNvSpPr/>
           <p:nvPr/>
         </p:nvSpPr>
         <p:spPr>
           <a:xfrm>
-            <a:off x="6109761" y="5324445"/>
-            <a:ext cx="7892431" cy="306275"/>
+            <a:off x="15707" y="7020728"/>
+            <a:ext cx="20080539" cy="337687"/>
           </a:xfrm>
           <a:prstGeom prst="rect">
             <a:avLst/>
@@ -7061,194 +7600,779 @@
           <a:bodyPr lIns="45719" rIns="45719"/>
           <a:lstStyle/>
           <a:p>
-            <a:pPr/>
+            <a:endParaRPr/>
           </a:p>
         </p:txBody>
       </p:sp>
       <p:sp>
         <p:nvSpPr>
-          <p:cNvPr id="118" name="object 4"/>
-          <p:cNvSpPr txBox="1"/>
+          <p:cNvPr id="107" name="object 20">
+            <a:extLst>
+              <a:ext uri="{FF2B5EF4-FFF2-40B4-BE49-F238E27FC236}">
+                <a16:creationId xmlns:a16="http://schemas.microsoft.com/office/drawing/2014/main" id="{F204440D-6868-AAE7-C003-E2277197E716}"/>
+              </a:ext>
+            </a:extLst>
+          </p:cNvPr>
+          <p:cNvSpPr/>
           <p:nvPr/>
         </p:nvSpPr>
         <p:spPr>
           <a:xfrm>
-            <a:off x="6105395" y="5228145"/>
-            <a:ext cx="7887970" cy="357915"/>
+            <a:off x="15707" y="7491917"/>
+            <a:ext cx="20080539" cy="337687"/>
           </a:xfrm>
           <a:prstGeom prst="rect">
             <a:avLst/>
           </a:prstGeom>
+          <a:solidFill>
+            <a:srgbClr val="000000"/>
+          </a:solidFill>
           <a:ln w="12700">
             <a:miter lim="400000"/>
           </a:ln>
-          <a:extLst>
-            <a:ext uri="{C572A759-6A51-4108-AA02-DFA0A04FC94B}">
-              <ma14:wrappingTextBoxFlag xmlns:ma14="http://schemas.microsoft.com/office/mac/drawingml/2011/main" val="1"/>
-            </a:ext>
-          </a:extLst>
         </p:spPr>
         <p:txBody>
-          <a:bodyPr lIns="0" tIns="0" rIns="0" bIns="0">
-            <a:spAutoFit/>
-          </a:bodyPr>
+          <a:bodyPr lIns="45719" rIns="45719"/>
           <a:lstStyle/>
           <a:p>
-            <a:pPr indent="12700">
-              <a:spcBef>
-                <a:spcPts val="100"/>
-              </a:spcBef>
-              <a:defRPr spc="-90" sz="2500">
-                <a:solidFill>
-                  <a:srgbClr val="E4E4E4"/>
-                </a:solidFill>
-                <a:latin typeface="Arial"/>
-                <a:ea typeface="Arial"/>
-                <a:cs typeface="Arial"/>
-                <a:sym typeface="Arial"/>
-              </a:defRPr>
-            </a:pPr>
-            <a:r>
-              <a:t>Análisis</a:t>
-            </a:r>
-            <a:r>
-              <a:rPr spc="-45"/>
-              <a:t> </a:t>
-            </a:r>
-            <a:r>
-              <a:rPr spc="0">
-                <a:solidFill>
-                  <a:srgbClr val="E9E9E9"/>
-                </a:solidFill>
-              </a:rPr>
-              <a:t>de</a:t>
-            </a:r>
-            <a:r>
-              <a:rPr spc="-160">
-                <a:solidFill>
-                  <a:srgbClr val="E9E9E9"/>
-                </a:solidFill>
-              </a:rPr>
-              <a:t> s</a:t>
-            </a:r>
-            <a:r>
-              <a:rPr spc="-104">
-                <a:solidFill>
-                  <a:srgbClr val="EBEBEB"/>
-                </a:solidFill>
-              </a:rPr>
-              <a:t>eries</a:t>
-            </a:r>
-            <a:r>
-              <a:rPr spc="-40">
-                <a:solidFill>
-                  <a:srgbClr val="EBEBEB"/>
-                </a:solidFill>
-              </a:rPr>
-              <a:t> </a:t>
-            </a:r>
-            <a:r>
-              <a:rPr spc="0">
-                <a:solidFill>
-                  <a:srgbClr val="E9E9E9"/>
-                </a:solidFill>
-              </a:rPr>
-              <a:t>de</a:t>
-            </a:r>
-            <a:r>
-              <a:rPr spc="-110">
-                <a:solidFill>
-                  <a:srgbClr val="E9E9E9"/>
-                </a:solidFill>
-              </a:rPr>
-              <a:t> t</a:t>
-            </a:r>
-            <a:r>
-              <a:rPr spc="0">
-                <a:solidFill>
-                  <a:srgbClr val="F6F6F6"/>
-                </a:solidFill>
-              </a:rPr>
-              <a:t>iempo</a:t>
-            </a:r>
-            <a:r>
-              <a:rPr spc="30">
-                <a:solidFill>
-                  <a:srgbClr val="F6F6F6"/>
-                </a:solidFill>
-              </a:rPr>
-              <a:t> a</a:t>
-            </a:r>
-            <a:r>
-              <a:rPr spc="-20">
-                <a:solidFill>
-                  <a:srgbClr val="EFEFEF"/>
-                </a:solidFill>
-              </a:rPr>
-              <a:t>plicado</a:t>
-            </a:r>
-            <a:r>
-              <a:rPr spc="-55">
-                <a:solidFill>
-                  <a:srgbClr val="EFEFEF"/>
-                </a:solidFill>
-              </a:rPr>
-              <a:t> </a:t>
-            </a:r>
-            <a:r>
-              <a:rPr spc="0">
-                <a:solidFill>
-                  <a:srgbClr val="EFEFEF"/>
-                </a:solidFill>
-              </a:rPr>
-              <a:t>al</a:t>
-            </a:r>
-            <a:r>
-              <a:rPr spc="-125">
-                <a:solidFill>
-                  <a:srgbClr val="EFEFEF"/>
-                </a:solidFill>
-              </a:rPr>
-              <a:t> s</a:t>
-            </a:r>
-            <a:r>
-              <a:rPr spc="-40">
-                <a:solidFill>
-                  <a:srgbClr val="F6F6F6"/>
-                </a:solidFill>
-              </a:rPr>
-              <a:t>ector</a:t>
-            </a:r>
-            <a:r>
-              <a:rPr>
-                <a:solidFill>
-                  <a:srgbClr val="F6F6F6"/>
-                </a:solidFill>
-              </a:rPr>
-              <a:t> e</a:t>
-            </a:r>
-            <a:r>
-              <a:rPr spc="-45">
-                <a:solidFill>
-                  <a:srgbClr val="EBEBEB"/>
-                </a:solidFill>
-              </a:rPr>
-              <a:t>léctrico</a:t>
-            </a:r>
+            <a:endParaRPr/>
           </a:p>
         </p:txBody>
       </p:sp>
+      <p:pic>
+        <p:nvPicPr>
+          <p:cNvPr id="5" name="Imagen 4">
+            <a:extLst>
+              <a:ext uri="{FF2B5EF4-FFF2-40B4-BE49-F238E27FC236}">
+                <a16:creationId xmlns:a16="http://schemas.microsoft.com/office/drawing/2014/main" id="{B2946922-13DE-9C4B-4BC3-D100C4E4F9E3}"/>
+              </a:ext>
+            </a:extLst>
+          </p:cNvPr>
+          <p:cNvPicPr>
+            <a:picLocks noChangeAspect="1"/>
+          </p:cNvPicPr>
+          <p:nvPr/>
+        </p:nvPicPr>
+        <p:blipFill>
+          <a:blip r:embed="rId3"/>
+          <a:stretch>
+            <a:fillRect/>
+          </a:stretch>
+        </p:blipFill>
+        <p:spPr>
+          <a:xfrm>
+            <a:off x="975993" y="2450585"/>
+            <a:ext cx="17366237" cy="8217415"/>
+          </a:xfrm>
+          <a:prstGeom prst="rect">
+            <a:avLst/>
+          </a:prstGeom>
+        </p:spPr>
+      </p:pic>
     </p:spTree>
+    <p:extLst>
+      <p:ext uri="{BB962C8B-B14F-4D97-AF65-F5344CB8AC3E}">
+        <p14:creationId xmlns:p14="http://schemas.microsoft.com/office/powerpoint/2010/main" val="1501393651"/>
+      </p:ext>
+    </p:extLst>
   </p:cSld>
   <p:clrMapOvr>
     <a:masterClrMapping/>
   </p:clrMapOvr>
-  <p:transition xmlns:p14="http://schemas.microsoft.com/office/powerpoint/2010/main" spd="med" advClick="1"/>
+  <p:transition spd="med"/>
+</p:sld>
+</file>
+
+<file path=ppt/slides/slide8.xml><?xml version="1.0" encoding="utf-8"?>
+<p:sld xmlns:a="http://schemas.openxmlformats.org/drawingml/2006/main" xmlns:r="http://schemas.openxmlformats.org/officeDocument/2006/relationships" xmlns:p="http://schemas.openxmlformats.org/presentationml/2006/main">
+  <p:cSld>
+    <p:bg>
+      <p:bgPr>
+        <a:solidFill>
+          <a:srgbClr val="000000"/>
+        </a:solidFill>
+        <a:effectLst/>
+      </p:bgPr>
+    </p:bg>
+    <p:spTree>
+      <p:nvGrpSpPr>
+        <p:cNvPr id="1" name="">
+          <a:extLst>
+            <a:ext uri="{FF2B5EF4-FFF2-40B4-BE49-F238E27FC236}">
+              <a16:creationId xmlns:a16="http://schemas.microsoft.com/office/drawing/2014/main" id="{B945F333-DB80-CDB0-326F-70DB1F2C53D9}"/>
+            </a:ext>
+          </a:extLst>
+        </p:cNvPr>
+        <p:cNvGrpSpPr/>
+        <p:nvPr/>
+      </p:nvGrpSpPr>
+      <p:grpSpPr>
+        <a:xfrm>
+          <a:off x="0" y="0"/>
+          <a:ext cx="0" cy="0"/>
+          <a:chOff x="0" y="0"/>
+          <a:chExt cx="0" cy="0"/>
+        </a:xfrm>
+      </p:grpSpPr>
+      <p:sp>
+        <p:nvSpPr>
+          <p:cNvPr id="101" name="object 2">
+            <a:extLst>
+              <a:ext uri="{FF2B5EF4-FFF2-40B4-BE49-F238E27FC236}">
+                <a16:creationId xmlns:a16="http://schemas.microsoft.com/office/drawing/2014/main" id="{CECEE100-8EC0-91C9-D455-DC50A9D6EF72}"/>
+              </a:ext>
+            </a:extLst>
+          </p:cNvPr>
+          <p:cNvSpPr/>
+          <p:nvPr/>
+        </p:nvSpPr>
+        <p:spPr>
+          <a:xfrm>
+            <a:off x="15707" y="2340242"/>
+            <a:ext cx="20080539" cy="636108"/>
+          </a:xfrm>
+          <a:prstGeom prst="rect">
+            <a:avLst/>
+          </a:prstGeom>
+          <a:solidFill>
+            <a:srgbClr val="000000"/>
+          </a:solidFill>
+          <a:ln w="12700">
+            <a:miter lim="400000"/>
+          </a:ln>
+        </p:spPr>
+        <p:txBody>
+          <a:bodyPr lIns="45719" rIns="45719"/>
+          <a:lstStyle/>
+          <a:p>
+            <a:endParaRPr/>
+          </a:p>
+        </p:txBody>
+      </p:sp>
+      <p:sp>
+        <p:nvSpPr>
+          <p:cNvPr id="102" name="object 3">
+            <a:extLst>
+              <a:ext uri="{FF2B5EF4-FFF2-40B4-BE49-F238E27FC236}">
+                <a16:creationId xmlns:a16="http://schemas.microsoft.com/office/drawing/2014/main" id="{4A6FBD74-99B5-C141-A393-74558C9596E9}"/>
+              </a:ext>
+            </a:extLst>
+          </p:cNvPr>
+          <p:cNvSpPr txBox="1">
+            <a:spLocks noGrp="1"/>
+          </p:cNvSpPr>
+          <p:nvPr>
+            <p:ph type="title"/>
+          </p:nvPr>
+        </p:nvSpPr>
+        <p:spPr>
+          <a:xfrm>
+            <a:off x="975994" y="1179945"/>
+            <a:ext cx="8140067" cy="1026795"/>
+          </a:xfrm>
+          <a:prstGeom prst="rect">
+            <a:avLst/>
+          </a:prstGeom>
+        </p:spPr>
+        <p:txBody>
+          <a:bodyPr/>
+          <a:lstStyle/>
+          <a:p>
+            <a:pPr indent="11557" defTabSz="832104">
+              <a:defRPr sz="5915">
+                <a:latin typeface="Avenir Book"/>
+                <a:ea typeface="Avenir Book"/>
+                <a:cs typeface="Avenir Book"/>
+                <a:sym typeface="Avenir Book"/>
+              </a:defRPr>
+            </a:pPr>
+            <a:r>
+              <a:rPr dirty="0" err="1"/>
+              <a:t>Evaluación</a:t>
+            </a:r>
+            <a:r>
+              <a:rPr spc="273" dirty="0"/>
+              <a:t> </a:t>
+            </a:r>
+            <a:r>
+              <a:rPr dirty="0"/>
+              <a:t>de</a:t>
+            </a:r>
+            <a:r>
+              <a:rPr spc="364" dirty="0"/>
+              <a:t> </a:t>
+            </a:r>
+            <a:r>
+              <a:rPr spc="-91" dirty="0" err="1">
+                <a:solidFill>
+                  <a:srgbClr val="D4F789"/>
+                </a:solidFill>
+              </a:rPr>
+              <a:t>Modelos</a:t>
+            </a:r>
+            <a:endParaRPr spc="-91" dirty="0">
+              <a:solidFill>
+                <a:srgbClr val="D4F789"/>
+              </a:solidFill>
+            </a:endParaRPr>
+          </a:p>
+        </p:txBody>
+      </p:sp>
+      <p:grpSp>
+        <p:nvGrpSpPr>
+          <p:cNvPr id="105" name="object 14">
+            <a:extLst>
+              <a:ext uri="{FF2B5EF4-FFF2-40B4-BE49-F238E27FC236}">
+                <a16:creationId xmlns:a16="http://schemas.microsoft.com/office/drawing/2014/main" id="{80263F1B-2C81-E7C9-957A-2FD5C326B0E8}"/>
+              </a:ext>
+            </a:extLst>
+          </p:cNvPr>
+          <p:cNvGrpSpPr/>
+          <p:nvPr/>
+        </p:nvGrpSpPr>
+        <p:grpSpPr>
+          <a:xfrm>
+            <a:off x="15704" y="5497214"/>
+            <a:ext cx="20080546" cy="494750"/>
+            <a:chOff x="0" y="0"/>
+            <a:chExt cx="20080544" cy="494749"/>
+          </a:xfrm>
+        </p:grpSpPr>
+        <p:pic>
+          <p:nvPicPr>
+            <p:cNvPr id="103" name="object 15" descr="object 15">
+              <a:extLst>
+                <a:ext uri="{FF2B5EF4-FFF2-40B4-BE49-F238E27FC236}">
+                  <a16:creationId xmlns:a16="http://schemas.microsoft.com/office/drawing/2014/main" id="{8AF214C2-7914-72B8-8443-763EAB9D3A0A}"/>
+                </a:ext>
+              </a:extLst>
+            </p:cNvPr>
+            <p:cNvPicPr>
+              <a:picLocks noChangeAspect="1"/>
+            </p:cNvPicPr>
+            <p:nvPr/>
+          </p:nvPicPr>
+          <p:blipFill>
+            <a:blip r:embed="rId2"/>
+            <a:stretch>
+              <a:fillRect/>
+            </a:stretch>
+          </p:blipFill>
+          <p:spPr>
+            <a:xfrm>
+              <a:off x="6266826" y="15706"/>
+              <a:ext cx="5465803" cy="471191"/>
+            </a:xfrm>
+            <a:prstGeom prst="rect">
+              <a:avLst/>
+            </a:prstGeom>
+            <a:ln w="12700" cap="flat">
+              <a:noFill/>
+              <a:miter lim="400000"/>
+            </a:ln>
+            <a:effectLst/>
+          </p:spPr>
+        </p:pic>
+        <p:sp>
+          <p:nvSpPr>
+            <p:cNvPr id="104" name="object 16">
+              <a:extLst>
+                <a:ext uri="{FF2B5EF4-FFF2-40B4-BE49-F238E27FC236}">
+                  <a16:creationId xmlns:a16="http://schemas.microsoft.com/office/drawing/2014/main" id="{40021B71-4C29-E2F1-DF44-908AC0D9E515}"/>
+                </a:ext>
+              </a:extLst>
+            </p:cNvPr>
+            <p:cNvSpPr/>
+            <p:nvPr/>
+          </p:nvSpPr>
+          <p:spPr>
+            <a:xfrm>
+              <a:off x="0" y="0"/>
+              <a:ext cx="20080545" cy="494750"/>
+            </a:xfrm>
+            <a:prstGeom prst="rect">
+              <a:avLst/>
+            </a:prstGeom>
+            <a:solidFill>
+              <a:srgbClr val="000000"/>
+            </a:solidFill>
+            <a:ln w="12700" cap="flat">
+              <a:noFill/>
+              <a:miter lim="400000"/>
+            </a:ln>
+            <a:effectLst/>
+          </p:spPr>
+          <p:txBody>
+            <a:bodyPr wrap="square" lIns="45719" tIns="45719" rIns="45719" bIns="45719" numCol="1" anchor="t">
+              <a:noAutofit/>
+            </a:bodyPr>
+            <a:lstStyle/>
+            <a:p>
+              <a:endParaRPr/>
+            </a:p>
+          </p:txBody>
+        </p:sp>
+      </p:grpSp>
+      <p:sp>
+        <p:nvSpPr>
+          <p:cNvPr id="106" name="object 19">
+            <a:extLst>
+              <a:ext uri="{FF2B5EF4-FFF2-40B4-BE49-F238E27FC236}">
+                <a16:creationId xmlns:a16="http://schemas.microsoft.com/office/drawing/2014/main" id="{C725C30E-7053-CA9D-F5D9-F2B3A091F0B1}"/>
+              </a:ext>
+            </a:extLst>
+          </p:cNvPr>
+          <p:cNvSpPr/>
+          <p:nvPr/>
+        </p:nvSpPr>
+        <p:spPr>
+          <a:xfrm>
+            <a:off x="15707" y="7020728"/>
+            <a:ext cx="20080539" cy="337687"/>
+          </a:xfrm>
+          <a:prstGeom prst="rect">
+            <a:avLst/>
+          </a:prstGeom>
+          <a:solidFill>
+            <a:srgbClr val="000000"/>
+          </a:solidFill>
+          <a:ln w="12700">
+            <a:miter lim="400000"/>
+          </a:ln>
+        </p:spPr>
+        <p:txBody>
+          <a:bodyPr lIns="45719" rIns="45719"/>
+          <a:lstStyle/>
+          <a:p>
+            <a:endParaRPr/>
+          </a:p>
+        </p:txBody>
+      </p:sp>
+      <p:sp>
+        <p:nvSpPr>
+          <p:cNvPr id="107" name="object 20">
+            <a:extLst>
+              <a:ext uri="{FF2B5EF4-FFF2-40B4-BE49-F238E27FC236}">
+                <a16:creationId xmlns:a16="http://schemas.microsoft.com/office/drawing/2014/main" id="{E7210FEC-175E-28A3-97E8-690291EB23DD}"/>
+              </a:ext>
+            </a:extLst>
+          </p:cNvPr>
+          <p:cNvSpPr/>
+          <p:nvPr/>
+        </p:nvSpPr>
+        <p:spPr>
+          <a:xfrm>
+            <a:off x="15707" y="7491917"/>
+            <a:ext cx="20080539" cy="337687"/>
+          </a:xfrm>
+          <a:prstGeom prst="rect">
+            <a:avLst/>
+          </a:prstGeom>
+          <a:solidFill>
+            <a:srgbClr val="000000"/>
+          </a:solidFill>
+          <a:ln w="12700">
+            <a:miter lim="400000"/>
+          </a:ln>
+        </p:spPr>
+        <p:txBody>
+          <a:bodyPr lIns="45719" rIns="45719"/>
+          <a:lstStyle/>
+          <a:p>
+            <a:endParaRPr/>
+          </a:p>
+        </p:txBody>
+      </p:sp>
+      <p:pic>
+        <p:nvPicPr>
+          <p:cNvPr id="3" name="Imagen 2">
+            <a:extLst>
+              <a:ext uri="{FF2B5EF4-FFF2-40B4-BE49-F238E27FC236}">
+                <a16:creationId xmlns:a16="http://schemas.microsoft.com/office/drawing/2014/main" id="{900173F1-90FE-35A4-2137-66E08CE92B1C}"/>
+              </a:ext>
+            </a:extLst>
+          </p:cNvPr>
+          <p:cNvPicPr>
+            <a:picLocks noChangeAspect="1"/>
+          </p:cNvPicPr>
+          <p:nvPr/>
+        </p:nvPicPr>
+        <p:blipFill>
+          <a:blip r:embed="rId3"/>
+          <a:stretch>
+            <a:fillRect/>
+          </a:stretch>
+        </p:blipFill>
+        <p:spPr>
+          <a:xfrm>
+            <a:off x="776864" y="2340241"/>
+            <a:ext cx="18322589" cy="7782813"/>
+          </a:xfrm>
+          <a:prstGeom prst="rect">
+            <a:avLst/>
+          </a:prstGeom>
+        </p:spPr>
+      </p:pic>
+    </p:spTree>
+    <p:extLst>
+      <p:ext uri="{BB962C8B-B14F-4D97-AF65-F5344CB8AC3E}">
+        <p14:creationId xmlns:p14="http://schemas.microsoft.com/office/powerpoint/2010/main" val="2319460513"/>
+      </p:ext>
+    </p:extLst>
+  </p:cSld>
+  <p:clrMapOvr>
+    <a:masterClrMapping/>
+  </p:clrMapOvr>
+  <p:transition spd="med"/>
+</p:sld>
+</file>
+
+<file path=ppt/slides/slide9.xml><?xml version="1.0" encoding="utf-8"?>
+<p:sld xmlns:a="http://schemas.openxmlformats.org/drawingml/2006/main" xmlns:r="http://schemas.openxmlformats.org/officeDocument/2006/relationships" xmlns:p="http://schemas.openxmlformats.org/presentationml/2006/main">
+  <p:cSld>
+    <p:bg>
+      <p:bgPr>
+        <a:solidFill>
+          <a:srgbClr val="000000"/>
+        </a:solidFill>
+        <a:effectLst/>
+      </p:bgPr>
+    </p:bg>
+    <p:spTree>
+      <p:nvGrpSpPr>
+        <p:cNvPr id="1" name="">
+          <a:extLst>
+            <a:ext uri="{FF2B5EF4-FFF2-40B4-BE49-F238E27FC236}">
+              <a16:creationId xmlns:a16="http://schemas.microsoft.com/office/drawing/2014/main" id="{58800D80-DDDE-FE97-BD00-CA67E68299DC}"/>
+            </a:ext>
+          </a:extLst>
+        </p:cNvPr>
+        <p:cNvGrpSpPr/>
+        <p:nvPr/>
+      </p:nvGrpSpPr>
+      <p:grpSpPr>
+        <a:xfrm>
+          <a:off x="0" y="0"/>
+          <a:ext cx="0" cy="0"/>
+          <a:chOff x="0" y="0"/>
+          <a:chExt cx="0" cy="0"/>
+        </a:xfrm>
+      </p:grpSpPr>
+      <p:sp>
+        <p:nvSpPr>
+          <p:cNvPr id="101" name="object 2">
+            <a:extLst>
+              <a:ext uri="{FF2B5EF4-FFF2-40B4-BE49-F238E27FC236}">
+                <a16:creationId xmlns:a16="http://schemas.microsoft.com/office/drawing/2014/main" id="{3AC4F59B-81AC-9EEA-1646-321A4DEFFB13}"/>
+              </a:ext>
+            </a:extLst>
+          </p:cNvPr>
+          <p:cNvSpPr/>
+          <p:nvPr/>
+        </p:nvSpPr>
+        <p:spPr>
+          <a:xfrm>
+            <a:off x="15707" y="2340242"/>
+            <a:ext cx="20080539" cy="636108"/>
+          </a:xfrm>
+          <a:prstGeom prst="rect">
+            <a:avLst/>
+          </a:prstGeom>
+          <a:solidFill>
+            <a:srgbClr val="000000"/>
+          </a:solidFill>
+          <a:ln w="12700">
+            <a:miter lim="400000"/>
+          </a:ln>
+        </p:spPr>
+        <p:txBody>
+          <a:bodyPr lIns="45719" rIns="45719"/>
+          <a:lstStyle/>
+          <a:p>
+            <a:endParaRPr/>
+          </a:p>
+        </p:txBody>
+      </p:sp>
+      <p:sp>
+        <p:nvSpPr>
+          <p:cNvPr id="102" name="object 3">
+            <a:extLst>
+              <a:ext uri="{FF2B5EF4-FFF2-40B4-BE49-F238E27FC236}">
+                <a16:creationId xmlns:a16="http://schemas.microsoft.com/office/drawing/2014/main" id="{F97F2A40-99D4-0BC6-4EA5-E89F9E0B33B0}"/>
+              </a:ext>
+            </a:extLst>
+          </p:cNvPr>
+          <p:cNvSpPr txBox="1">
+            <a:spLocks noGrp="1"/>
+          </p:cNvSpPr>
+          <p:nvPr>
+            <p:ph type="title"/>
+          </p:nvPr>
+        </p:nvSpPr>
+        <p:spPr>
+          <a:xfrm>
+            <a:off x="975994" y="1179945"/>
+            <a:ext cx="8140067" cy="1026795"/>
+          </a:xfrm>
+          <a:prstGeom prst="rect">
+            <a:avLst/>
+          </a:prstGeom>
+        </p:spPr>
+        <p:txBody>
+          <a:bodyPr/>
+          <a:lstStyle/>
+          <a:p>
+            <a:pPr indent="11557" defTabSz="832104">
+              <a:defRPr sz="5915">
+                <a:latin typeface="Avenir Book"/>
+                <a:ea typeface="Avenir Book"/>
+                <a:cs typeface="Avenir Book"/>
+                <a:sym typeface="Avenir Book"/>
+              </a:defRPr>
+            </a:pPr>
+            <a:r>
+              <a:rPr dirty="0" err="1"/>
+              <a:t>Evaluación</a:t>
+            </a:r>
+            <a:r>
+              <a:rPr spc="273" dirty="0"/>
+              <a:t> </a:t>
+            </a:r>
+            <a:r>
+              <a:rPr dirty="0"/>
+              <a:t>de</a:t>
+            </a:r>
+            <a:r>
+              <a:rPr spc="364" dirty="0"/>
+              <a:t> </a:t>
+            </a:r>
+            <a:r>
+              <a:rPr spc="-91" dirty="0" err="1">
+                <a:solidFill>
+                  <a:srgbClr val="D4F789"/>
+                </a:solidFill>
+              </a:rPr>
+              <a:t>Modelos</a:t>
+            </a:r>
+            <a:endParaRPr spc="-91" dirty="0">
+              <a:solidFill>
+                <a:srgbClr val="D4F789"/>
+              </a:solidFill>
+            </a:endParaRPr>
+          </a:p>
+        </p:txBody>
+      </p:sp>
+      <p:grpSp>
+        <p:nvGrpSpPr>
+          <p:cNvPr id="105" name="object 14">
+            <a:extLst>
+              <a:ext uri="{FF2B5EF4-FFF2-40B4-BE49-F238E27FC236}">
+                <a16:creationId xmlns:a16="http://schemas.microsoft.com/office/drawing/2014/main" id="{025FB8A6-4635-A64B-598B-87C17F3E1E5E}"/>
+              </a:ext>
+            </a:extLst>
+          </p:cNvPr>
+          <p:cNvGrpSpPr/>
+          <p:nvPr/>
+        </p:nvGrpSpPr>
+        <p:grpSpPr>
+          <a:xfrm>
+            <a:off x="15704" y="5497214"/>
+            <a:ext cx="20080546" cy="494750"/>
+            <a:chOff x="0" y="0"/>
+            <a:chExt cx="20080544" cy="494749"/>
+          </a:xfrm>
+        </p:grpSpPr>
+        <p:pic>
+          <p:nvPicPr>
+            <p:cNvPr id="103" name="object 15" descr="object 15">
+              <a:extLst>
+                <a:ext uri="{FF2B5EF4-FFF2-40B4-BE49-F238E27FC236}">
+                  <a16:creationId xmlns:a16="http://schemas.microsoft.com/office/drawing/2014/main" id="{D27F2C46-E1FD-0E08-FE47-116173225CE5}"/>
+                </a:ext>
+              </a:extLst>
+            </p:cNvPr>
+            <p:cNvPicPr>
+              <a:picLocks noChangeAspect="1"/>
+            </p:cNvPicPr>
+            <p:nvPr/>
+          </p:nvPicPr>
+          <p:blipFill>
+            <a:blip r:embed="rId2"/>
+            <a:stretch>
+              <a:fillRect/>
+            </a:stretch>
+          </p:blipFill>
+          <p:spPr>
+            <a:xfrm>
+              <a:off x="6266826" y="15706"/>
+              <a:ext cx="5465803" cy="471191"/>
+            </a:xfrm>
+            <a:prstGeom prst="rect">
+              <a:avLst/>
+            </a:prstGeom>
+            <a:ln w="12700" cap="flat">
+              <a:noFill/>
+              <a:miter lim="400000"/>
+            </a:ln>
+            <a:effectLst/>
+          </p:spPr>
+        </p:pic>
+        <p:sp>
+          <p:nvSpPr>
+            <p:cNvPr id="104" name="object 16">
+              <a:extLst>
+                <a:ext uri="{FF2B5EF4-FFF2-40B4-BE49-F238E27FC236}">
+                  <a16:creationId xmlns:a16="http://schemas.microsoft.com/office/drawing/2014/main" id="{35EF9FA4-0195-0F4A-C92A-6EF9D66EDB3C}"/>
+                </a:ext>
+              </a:extLst>
+            </p:cNvPr>
+            <p:cNvSpPr/>
+            <p:nvPr/>
+          </p:nvSpPr>
+          <p:spPr>
+            <a:xfrm>
+              <a:off x="0" y="0"/>
+              <a:ext cx="20080545" cy="494750"/>
+            </a:xfrm>
+            <a:prstGeom prst="rect">
+              <a:avLst/>
+            </a:prstGeom>
+            <a:solidFill>
+              <a:srgbClr val="000000"/>
+            </a:solidFill>
+            <a:ln w="12700" cap="flat">
+              <a:noFill/>
+              <a:miter lim="400000"/>
+            </a:ln>
+            <a:effectLst/>
+          </p:spPr>
+          <p:txBody>
+            <a:bodyPr wrap="square" lIns="45719" tIns="45719" rIns="45719" bIns="45719" numCol="1" anchor="t">
+              <a:noAutofit/>
+            </a:bodyPr>
+            <a:lstStyle/>
+            <a:p>
+              <a:endParaRPr/>
+            </a:p>
+          </p:txBody>
+        </p:sp>
+      </p:grpSp>
+      <p:sp>
+        <p:nvSpPr>
+          <p:cNvPr id="106" name="object 19">
+            <a:extLst>
+              <a:ext uri="{FF2B5EF4-FFF2-40B4-BE49-F238E27FC236}">
+                <a16:creationId xmlns:a16="http://schemas.microsoft.com/office/drawing/2014/main" id="{3EC824D8-C452-C14A-5CCC-14165FE37E73}"/>
+              </a:ext>
+            </a:extLst>
+          </p:cNvPr>
+          <p:cNvSpPr/>
+          <p:nvPr/>
+        </p:nvSpPr>
+        <p:spPr>
+          <a:xfrm>
+            <a:off x="15707" y="7020728"/>
+            <a:ext cx="20080539" cy="337687"/>
+          </a:xfrm>
+          <a:prstGeom prst="rect">
+            <a:avLst/>
+          </a:prstGeom>
+          <a:solidFill>
+            <a:srgbClr val="000000"/>
+          </a:solidFill>
+          <a:ln w="12700">
+            <a:miter lim="400000"/>
+          </a:ln>
+        </p:spPr>
+        <p:txBody>
+          <a:bodyPr lIns="45719" rIns="45719"/>
+          <a:lstStyle/>
+          <a:p>
+            <a:endParaRPr/>
+          </a:p>
+        </p:txBody>
+      </p:sp>
+      <p:sp>
+        <p:nvSpPr>
+          <p:cNvPr id="107" name="object 20">
+            <a:extLst>
+              <a:ext uri="{FF2B5EF4-FFF2-40B4-BE49-F238E27FC236}">
+                <a16:creationId xmlns:a16="http://schemas.microsoft.com/office/drawing/2014/main" id="{25C7A245-96B3-3E21-51A2-38F8395A88F0}"/>
+              </a:ext>
+            </a:extLst>
+          </p:cNvPr>
+          <p:cNvSpPr/>
+          <p:nvPr/>
+        </p:nvSpPr>
+        <p:spPr>
+          <a:xfrm>
+            <a:off x="15707" y="7491917"/>
+            <a:ext cx="20080539" cy="337687"/>
+          </a:xfrm>
+          <a:prstGeom prst="rect">
+            <a:avLst/>
+          </a:prstGeom>
+          <a:solidFill>
+            <a:srgbClr val="000000"/>
+          </a:solidFill>
+          <a:ln w="12700">
+            <a:miter lim="400000"/>
+          </a:ln>
+        </p:spPr>
+        <p:txBody>
+          <a:bodyPr lIns="45719" rIns="45719"/>
+          <a:lstStyle/>
+          <a:p>
+            <a:endParaRPr/>
+          </a:p>
+        </p:txBody>
+      </p:sp>
+      <p:pic>
+        <p:nvPicPr>
+          <p:cNvPr id="4" name="Imagen 3">
+            <a:extLst>
+              <a:ext uri="{FF2B5EF4-FFF2-40B4-BE49-F238E27FC236}">
+                <a16:creationId xmlns:a16="http://schemas.microsoft.com/office/drawing/2014/main" id="{E31FADCB-AD7B-262D-DB02-12E7A34E814A}"/>
+              </a:ext>
+            </a:extLst>
+          </p:cNvPr>
+          <p:cNvPicPr>
+            <a:picLocks noChangeAspect="1"/>
+          </p:cNvPicPr>
+          <p:nvPr/>
+        </p:nvPicPr>
+        <p:blipFill>
+          <a:blip r:embed="rId3"/>
+          <a:stretch>
+            <a:fillRect/>
+          </a:stretch>
+        </p:blipFill>
+        <p:spPr>
+          <a:xfrm>
+            <a:off x="789419" y="2305853"/>
+            <a:ext cx="18627271" cy="5799056"/>
+          </a:xfrm>
+          <a:prstGeom prst="rect">
+            <a:avLst/>
+          </a:prstGeom>
+        </p:spPr>
+      </p:pic>
+    </p:spTree>
+    <p:extLst>
+      <p:ext uri="{BB962C8B-B14F-4D97-AF65-F5344CB8AC3E}">
+        <p14:creationId xmlns:p14="http://schemas.microsoft.com/office/powerpoint/2010/main" val="105535711"/>
+      </p:ext>
+    </p:extLst>
+  </p:cSld>
+  <p:clrMapOvr>
+    <a:masterClrMapping/>
+  </p:clrMapOvr>
+  <p:transition spd="med"/>
 </p:sld>
 </file>
 
 <file path=ppt/theme/theme1.xml><?xml version="1.0" encoding="utf-8"?>
-<a:theme xmlns:a="http://schemas.openxmlformats.org/drawingml/2006/main" xmlns:r="http://schemas.openxmlformats.org/officeDocument/2006/relationships" name="Office Theme">
+<a:theme xmlns:a="http://schemas.openxmlformats.org/drawingml/2006/main" name="Office Theme">
   <a:themeElements>
     <a:clrScheme name="Office Theme">
       <a:dk1>
@@ -7374,7 +8498,7 @@
       <a:effectStyleLst>
         <a:effectStyle>
           <a:effectLst>
-            <a:outerShdw sx="100000" sy="100000" kx="0" ky="0" algn="b" rotWithShape="0" blurRad="38100" dist="23000" dir="5400000">
+            <a:outerShdw blurRad="38100" dist="23000" dir="5400000" rotWithShape="0">
               <a:srgbClr val="000000">
                 <a:alpha val="35000"/>
               </a:srgbClr>
@@ -7383,7 +8507,7 @@
         </a:effectStyle>
         <a:effectStyle>
           <a:effectLst>
-            <a:outerShdw sx="100000" sy="100000" kx="0" ky="0" algn="b" rotWithShape="0" blurRad="38100" dist="23000" dir="5400000">
+            <a:outerShdw blurRad="38100" dist="23000" dir="5400000" rotWithShape="0">
               <a:srgbClr val="000000">
                 <a:alpha val="35000"/>
               </a:srgbClr>
@@ -7392,7 +8516,7 @@
         </a:effectStyle>
         <a:effectStyle>
           <a:effectLst>
-            <a:outerShdw sx="100000" sy="100000" kx="0" ky="0" algn="b" rotWithShape="0" blurRad="38100" dist="20000" dir="5400000">
+            <a:outerShdw blurRad="38100" dist="20000" dir="5400000" rotWithShape="0">
               <a:srgbClr val="000000">
                 <a:alpha val="38000"/>
               </a:srgbClr>
@@ -7466,7 +8590,7 @@
           <a:round/>
         </a:ln>
         <a:effectLst>
-          <a:outerShdw sx="100000" sy="100000" kx="0" ky="0" algn="b" rotWithShape="0" blurRad="38100" dist="23000" dir="5400000">
+          <a:outerShdw blurRad="38100" dist="23000" dir="5400000" rotWithShape="0">
             <a:srgbClr val="000000">
               <a:alpha val="35000"/>
             </a:srgbClr>
@@ -7474,7 +8598,7 @@
         </a:effectLst>
         <a:sp3d/>
       </a:spPr>
-      <a:bodyPr rot="0" spcFirstLastPara="1" vertOverflow="overflow" horzOverflow="overflow" vert="horz" wrap="square" lIns="45719" tIns="45719" rIns="45719" bIns="45719" numCol="1" spcCol="38100" rtlCol="0" anchor="ctr" upright="0">
+      <a:bodyPr rot="0" spcFirstLastPara="1" vertOverflow="overflow" horzOverflow="overflow" vert="horz" wrap="square" lIns="45719" tIns="45719" rIns="45719" bIns="45719" numCol="1" spcCol="38100" rtlCol="0" anchor="ctr">
         <a:spAutoFit/>
       </a:bodyPr>
       <a:lstStyle>
@@ -7493,7 +8617,7 @@
           <a:buFontTx/>
           <a:buNone/>
           <a:tabLst/>
-          <a:defRPr b="0" baseline="0" cap="none" i="0" spc="0" strike="noStrike" sz="1800" u="none" kumimoji="0" normalizeH="0">
+          <a:defRPr kumimoji="0" sz="1800" b="0" i="0" u="none" strike="noStrike" cap="none" spc="0" normalizeH="0" baseline="0">
             <a:ln>
               <a:noFill/>
             </a:ln>
@@ -7523,7 +8647,7 @@
           <a:buFontTx/>
           <a:buNone/>
           <a:tabLst/>
-          <a:defRPr b="0" baseline="0" cap="none" i="0" spc="0" strike="noStrike" sz="1800" u="none" kumimoji="0" normalizeH="0">
+          <a:defRPr kumimoji="0" sz="1800" b="0" i="0" u="none" strike="noStrike" cap="none" spc="0" normalizeH="0" baseline="0">
             <a:ln>
               <a:noFill/>
             </a:ln>
@@ -7549,7 +8673,7 @@
           <a:buFontTx/>
           <a:buNone/>
           <a:tabLst/>
-          <a:defRPr b="0" baseline="0" cap="none" i="0" spc="0" strike="noStrike" sz="1800" u="none" kumimoji="0" normalizeH="0">
+          <a:defRPr kumimoji="0" sz="1800" b="0" i="0" u="none" strike="noStrike" cap="none" spc="0" normalizeH="0" baseline="0">
             <a:ln>
               <a:noFill/>
             </a:ln>
@@ -7575,7 +8699,7 @@
           <a:buFontTx/>
           <a:buNone/>
           <a:tabLst/>
-          <a:defRPr b="0" baseline="0" cap="none" i="0" spc="0" strike="noStrike" sz="1800" u="none" kumimoji="0" normalizeH="0">
+          <a:defRPr kumimoji="0" sz="1800" b="0" i="0" u="none" strike="noStrike" cap="none" spc="0" normalizeH="0" baseline="0">
             <a:ln>
               <a:noFill/>
             </a:ln>
@@ -7601,7 +8725,7 @@
           <a:buFontTx/>
           <a:buNone/>
           <a:tabLst/>
-          <a:defRPr b="0" baseline="0" cap="none" i="0" spc="0" strike="noStrike" sz="1800" u="none" kumimoji="0" normalizeH="0">
+          <a:defRPr kumimoji="0" sz="1800" b="0" i="0" u="none" strike="noStrike" cap="none" spc="0" normalizeH="0" baseline="0">
             <a:ln>
               <a:noFill/>
             </a:ln>
@@ -7627,7 +8751,7 @@
           <a:buFontTx/>
           <a:buNone/>
           <a:tabLst/>
-          <a:defRPr b="0" baseline="0" cap="none" i="0" spc="0" strike="noStrike" sz="1800" u="none" kumimoji="0" normalizeH="0">
+          <a:defRPr kumimoji="0" sz="1800" b="0" i="0" u="none" strike="noStrike" cap="none" spc="0" normalizeH="0" baseline="0">
             <a:ln>
               <a:noFill/>
             </a:ln>
@@ -7653,7 +8777,7 @@
           <a:buFontTx/>
           <a:buNone/>
           <a:tabLst/>
-          <a:defRPr b="0" baseline="0" cap="none" i="0" spc="0" strike="noStrike" sz="1800" u="none" kumimoji="0" normalizeH="0">
+          <a:defRPr kumimoji="0" sz="1800" b="0" i="0" u="none" strike="noStrike" cap="none" spc="0" normalizeH="0" baseline="0">
             <a:ln>
               <a:noFill/>
             </a:ln>
@@ -7679,7 +8803,7 @@
           <a:buFontTx/>
           <a:buNone/>
           <a:tabLst/>
-          <a:defRPr b="0" baseline="0" cap="none" i="0" spc="0" strike="noStrike" sz="1800" u="none" kumimoji="0" normalizeH="0">
+          <a:defRPr kumimoji="0" sz="1800" b="0" i="0" u="none" strike="noStrike" cap="none" spc="0" normalizeH="0" baseline="0">
             <a:ln>
               <a:noFill/>
             </a:ln>
@@ -7705,7 +8829,7 @@
           <a:buFontTx/>
           <a:buNone/>
           <a:tabLst/>
-          <a:defRPr b="0" baseline="0" cap="none" i="0" spc="0" strike="noStrike" sz="1800" u="none" kumimoji="0" normalizeH="0">
+          <a:defRPr kumimoji="0" sz="1800" b="0" i="0" u="none" strike="noStrike" cap="none" spc="0" normalizeH="0" baseline="0">
             <a:ln>
               <a:noFill/>
             </a:ln>
@@ -7731,7 +8855,7 @@
           <a:buFontTx/>
           <a:buNone/>
           <a:tabLst/>
-          <a:defRPr b="0" baseline="0" cap="none" i="0" spc="0" strike="noStrike" sz="1800" u="none" kumimoji="0" normalizeH="0">
+          <a:defRPr kumimoji="0" sz="1800" b="0" i="0" u="none" strike="noStrike" cap="none" spc="0" normalizeH="0" baseline="0">
             <a:ln>
               <a:noFill/>
             </a:ln>
@@ -7744,9 +8868,15 @@
         </a:lvl9pPr>
       </a:lstStyle>
       <a:style>
-        <a:lnRef idx="0"/>
-        <a:fillRef idx="0"/>
-        <a:effectRef idx="0"/>
+        <a:lnRef idx="0">
+          <a:scrgbClr r="0" g="0" b="0"/>
+        </a:lnRef>
+        <a:fillRef idx="0">
+          <a:scrgbClr r="0" g="0" b="0"/>
+        </a:fillRef>
+        <a:effectRef idx="0">
+          <a:scrgbClr r="0" g="0" b="0"/>
+        </a:effectRef>
         <a:fontRef idx="none"/>
       </a:style>
     </a:spDef>
@@ -7761,7 +8891,7 @@
           <a:round/>
         </a:ln>
         <a:effectLst>
-          <a:outerShdw sx="100000" sy="100000" kx="0" ky="0" algn="b" rotWithShape="0" blurRad="38100" dist="20000" dir="5400000">
+          <a:outerShdw blurRad="38100" dist="20000" dir="5400000" rotWithShape="0">
             <a:srgbClr val="000000">
               <a:alpha val="38000"/>
             </a:srgbClr>
@@ -7769,7 +8899,7 @@
         </a:effectLst>
         <a:sp3d/>
       </a:spPr>
-      <a:bodyPr rot="0" spcFirstLastPara="1" vertOverflow="overflow" horzOverflow="overflow" vert="horz" wrap="square" lIns="91439" tIns="45719" rIns="91439" bIns="45719" numCol="1" spcCol="38100" rtlCol="0" anchor="t" upright="0">
+      <a:bodyPr rot="0" spcFirstLastPara="1" vertOverflow="overflow" horzOverflow="overflow" vert="horz" wrap="square" lIns="91439" tIns="45719" rIns="91439" bIns="45719" numCol="1" spcCol="38100" rtlCol="0" anchor="t">
         <a:noAutofit/>
       </a:bodyPr>
       <a:lstStyle>
@@ -7788,7 +8918,7 @@
           <a:buFontTx/>
           <a:buNone/>
           <a:tabLst/>
-          <a:defRPr b="0" baseline="0" cap="none" i="0" spc="0" strike="noStrike" sz="1800" u="none" kumimoji="0" normalizeH="0">
+          <a:defRPr kumimoji="0" sz="1800" b="0" i="0" u="none" strike="noStrike" cap="none" spc="0" normalizeH="0" baseline="0">
             <a:ln>
               <a:noFill/>
             </a:ln>
@@ -7814,7 +8944,7 @@
           <a:buFontTx/>
           <a:buNone/>
           <a:tabLst/>
-          <a:defRPr b="0" baseline="0" cap="none" i="0" spc="0" strike="noStrike" sz="1800" u="none" kumimoji="0" normalizeH="0">
+          <a:defRPr kumimoji="0" sz="1800" b="0" i="0" u="none" strike="noStrike" cap="none" spc="0" normalizeH="0" baseline="0">
             <a:ln>
               <a:noFill/>
             </a:ln>
@@ -7840,7 +8970,7 @@
           <a:buFontTx/>
           <a:buNone/>
           <a:tabLst/>
-          <a:defRPr b="0" baseline="0" cap="none" i="0" spc="0" strike="noStrike" sz="1800" u="none" kumimoji="0" normalizeH="0">
+          <a:defRPr kumimoji="0" sz="1800" b="0" i="0" u="none" strike="noStrike" cap="none" spc="0" normalizeH="0" baseline="0">
             <a:ln>
               <a:noFill/>
             </a:ln>
@@ -7866,7 +8996,7 @@
           <a:buFontTx/>
           <a:buNone/>
           <a:tabLst/>
-          <a:defRPr b="0" baseline="0" cap="none" i="0" spc="0" strike="noStrike" sz="1800" u="none" kumimoji="0" normalizeH="0">
+          <a:defRPr kumimoji="0" sz="1800" b="0" i="0" u="none" strike="noStrike" cap="none" spc="0" normalizeH="0" baseline="0">
             <a:ln>
               <a:noFill/>
             </a:ln>
@@ -7892,7 +9022,7 @@
           <a:buFontTx/>
           <a:buNone/>
           <a:tabLst/>
-          <a:defRPr b="0" baseline="0" cap="none" i="0" spc="0" strike="noStrike" sz="1800" u="none" kumimoji="0" normalizeH="0">
+          <a:defRPr kumimoji="0" sz="1800" b="0" i="0" u="none" strike="noStrike" cap="none" spc="0" normalizeH="0" baseline="0">
             <a:ln>
               <a:noFill/>
             </a:ln>
@@ -7918,7 +9048,7 @@
           <a:buFontTx/>
           <a:buNone/>
           <a:tabLst/>
-          <a:defRPr b="0" baseline="0" cap="none" i="0" spc="0" strike="noStrike" sz="1800" u="none" kumimoji="0" normalizeH="0">
+          <a:defRPr kumimoji="0" sz="1800" b="0" i="0" u="none" strike="noStrike" cap="none" spc="0" normalizeH="0" baseline="0">
             <a:ln>
               <a:noFill/>
             </a:ln>
@@ -7944,7 +9074,7 @@
           <a:buFontTx/>
           <a:buNone/>
           <a:tabLst/>
-          <a:defRPr b="0" baseline="0" cap="none" i="0" spc="0" strike="noStrike" sz="1800" u="none" kumimoji="0" normalizeH="0">
+          <a:defRPr kumimoji="0" sz="1800" b="0" i="0" u="none" strike="noStrike" cap="none" spc="0" normalizeH="0" baseline="0">
             <a:ln>
               <a:noFill/>
             </a:ln>
@@ -7970,7 +9100,7 @@
           <a:buFontTx/>
           <a:buNone/>
           <a:tabLst/>
-          <a:defRPr b="0" baseline="0" cap="none" i="0" spc="0" strike="noStrike" sz="1800" u="none" kumimoji="0" normalizeH="0">
+          <a:defRPr kumimoji="0" sz="1800" b="0" i="0" u="none" strike="noStrike" cap="none" spc="0" normalizeH="0" baseline="0">
             <a:ln>
               <a:noFill/>
             </a:ln>
@@ -7996,7 +9126,7 @@
           <a:buFontTx/>
           <a:buNone/>
           <a:tabLst/>
-          <a:defRPr b="0" baseline="0" cap="none" i="0" spc="0" strike="noStrike" sz="1800" u="none" kumimoji="0" normalizeH="0">
+          <a:defRPr kumimoji="0" sz="1800" b="0" i="0" u="none" strike="noStrike" cap="none" spc="0" normalizeH="0" baseline="0">
             <a:ln>
               <a:noFill/>
             </a:ln>
@@ -8022,7 +9152,7 @@
           <a:buFontTx/>
           <a:buNone/>
           <a:tabLst/>
-          <a:defRPr b="0" baseline="0" cap="none" i="0" spc="0" strike="noStrike" sz="1800" u="none" kumimoji="0" normalizeH="0">
+          <a:defRPr kumimoji="0" sz="1800" b="0" i="0" u="none" strike="noStrike" cap="none" spc="0" normalizeH="0" baseline="0">
             <a:ln>
               <a:noFill/>
             </a:ln>
@@ -8035,9 +9165,15 @@
         </a:lvl9pPr>
       </a:lstStyle>
       <a:style>
-        <a:lnRef idx="0"/>
-        <a:fillRef idx="0"/>
-        <a:effectRef idx="0"/>
+        <a:lnRef idx="0">
+          <a:scrgbClr r="0" g="0" b="0"/>
+        </a:lnRef>
+        <a:fillRef idx="0">
+          <a:scrgbClr r="0" g="0" b="0"/>
+        </a:fillRef>
+        <a:effectRef idx="0">
+          <a:scrgbClr r="0" g="0" b="0"/>
+        </a:effectRef>
         <a:fontRef idx="none"/>
       </a:style>
     </a:lnDef>
@@ -8051,7 +9187,7 @@
         <a:effectLst/>
         <a:sp3d/>
       </a:spPr>
-      <a:bodyPr rot="0" spcFirstLastPara="1" vertOverflow="overflow" horzOverflow="overflow" vert="horz" wrap="square" lIns="45719" tIns="45719" rIns="45719" bIns="45719" numCol="1" spcCol="38100" rtlCol="0" anchor="t" upright="0">
+      <a:bodyPr rot="0" spcFirstLastPara="1" vertOverflow="overflow" horzOverflow="overflow" vert="horz" wrap="square" lIns="45719" tIns="45719" rIns="45719" bIns="45719" numCol="1" spcCol="38100" rtlCol="0" anchor="t">
         <a:spAutoFit/>
       </a:bodyPr>
       <a:lstStyle>
@@ -8070,7 +9206,7 @@
           <a:buFontTx/>
           <a:buNone/>
           <a:tabLst/>
-          <a:defRPr b="0" baseline="0" cap="none" i="0" spc="0" strike="noStrike" sz="1800" u="none" kumimoji="0" normalizeH="0">
+          <a:defRPr kumimoji="0" sz="1800" b="0" i="0" u="none" strike="noStrike" cap="none" spc="0" normalizeH="0" baseline="0">
             <a:ln>
               <a:noFill/>
             </a:ln>
@@ -8100,7 +9236,7 @@
           <a:buFontTx/>
           <a:buNone/>
           <a:tabLst/>
-          <a:defRPr b="0" baseline="0" cap="none" i="0" spc="0" strike="noStrike" sz="1800" u="none" kumimoji="0" normalizeH="0">
+          <a:defRPr kumimoji="0" sz="1800" b="0" i="0" u="none" strike="noStrike" cap="none" spc="0" normalizeH="0" baseline="0">
             <a:ln>
               <a:noFill/>
             </a:ln>
@@ -8126,7 +9262,7 @@
           <a:buFontTx/>
           <a:buNone/>
           <a:tabLst/>
-          <a:defRPr b="0" baseline="0" cap="none" i="0" spc="0" strike="noStrike" sz="1800" u="none" kumimoji="0" normalizeH="0">
+          <a:defRPr kumimoji="0" sz="1800" b="0" i="0" u="none" strike="noStrike" cap="none" spc="0" normalizeH="0" baseline="0">
             <a:ln>
               <a:noFill/>
             </a:ln>
@@ -8152,7 +9288,7 @@
           <a:buFontTx/>
           <a:buNone/>
           <a:tabLst/>
-          <a:defRPr b="0" baseline="0" cap="none" i="0" spc="0" strike="noStrike" sz="1800" u="none" kumimoji="0" normalizeH="0">
+          <a:defRPr kumimoji="0" sz="1800" b="0" i="0" u="none" strike="noStrike" cap="none" spc="0" normalizeH="0" baseline="0">
             <a:ln>
               <a:noFill/>
             </a:ln>
@@ -8178,7 +9314,7 @@
           <a:buFontTx/>
           <a:buNone/>
           <a:tabLst/>
-          <a:defRPr b="0" baseline="0" cap="none" i="0" spc="0" strike="noStrike" sz="1800" u="none" kumimoji="0" normalizeH="0">
+          <a:defRPr kumimoji="0" sz="1800" b="0" i="0" u="none" strike="noStrike" cap="none" spc="0" normalizeH="0" baseline="0">
             <a:ln>
               <a:noFill/>
             </a:ln>
@@ -8204,7 +9340,7 @@
           <a:buFontTx/>
           <a:buNone/>
           <a:tabLst/>
-          <a:defRPr b="0" baseline="0" cap="none" i="0" spc="0" strike="noStrike" sz="1800" u="none" kumimoji="0" normalizeH="0">
+          <a:defRPr kumimoji="0" sz="1800" b="0" i="0" u="none" strike="noStrike" cap="none" spc="0" normalizeH="0" baseline="0">
             <a:ln>
               <a:noFill/>
             </a:ln>
@@ -8230,7 +9366,7 @@
           <a:buFontTx/>
           <a:buNone/>
           <a:tabLst/>
-          <a:defRPr b="0" baseline="0" cap="none" i="0" spc="0" strike="noStrike" sz="1800" u="none" kumimoji="0" normalizeH="0">
+          <a:defRPr kumimoji="0" sz="1800" b="0" i="0" u="none" strike="noStrike" cap="none" spc="0" normalizeH="0" baseline="0">
             <a:ln>
               <a:noFill/>
             </a:ln>
@@ -8256,7 +9392,7 @@
           <a:buFontTx/>
           <a:buNone/>
           <a:tabLst/>
-          <a:defRPr b="0" baseline="0" cap="none" i="0" spc="0" strike="noStrike" sz="1800" u="none" kumimoji="0" normalizeH="0">
+          <a:defRPr kumimoji="0" sz="1800" b="0" i="0" u="none" strike="noStrike" cap="none" spc="0" normalizeH="0" baseline="0">
             <a:ln>
               <a:noFill/>
             </a:ln>
@@ -8282,7 +9418,7 @@
           <a:buFontTx/>
           <a:buNone/>
           <a:tabLst/>
-          <a:defRPr b="0" baseline="0" cap="none" i="0" spc="0" strike="noStrike" sz="1800" u="none" kumimoji="0" normalizeH="0">
+          <a:defRPr kumimoji="0" sz="1800" b="0" i="0" u="none" strike="noStrike" cap="none" spc="0" normalizeH="0" baseline="0">
             <a:ln>
               <a:noFill/>
             </a:ln>
@@ -8308,7 +9444,7 @@
           <a:buFontTx/>
           <a:buNone/>
           <a:tabLst/>
-          <a:defRPr b="0" baseline="0" cap="none" i="0" spc="0" strike="noStrike" sz="1800" u="none" kumimoji="0" normalizeH="0">
+          <a:defRPr kumimoji="0" sz="1800" b="0" i="0" u="none" strike="noStrike" cap="none" spc="0" normalizeH="0" baseline="0">
             <a:ln>
               <a:noFill/>
             </a:ln>
@@ -8321,18 +9457,25 @@
         </a:lvl9pPr>
       </a:lstStyle>
       <a:style>
-        <a:lnRef idx="0"/>
-        <a:fillRef idx="0"/>
-        <a:effectRef idx="0"/>
+        <a:lnRef idx="0">
+          <a:scrgbClr r="0" g="0" b="0"/>
+        </a:lnRef>
+        <a:fillRef idx="0">
+          <a:scrgbClr r="0" g="0" b="0"/>
+        </a:fillRef>
+        <a:effectRef idx="0">
+          <a:scrgbClr r="0" g="0" b="0"/>
+        </a:effectRef>
         <a:fontRef idx="none"/>
       </a:style>
     </a:txDef>
   </a:objectDefaults>
+  <a:extraClrSchemeLst/>
 </a:theme>
 </file>
 
 <file path=ppt/theme/theme2.xml><?xml version="1.0" encoding="utf-8"?>
-<a:theme xmlns:a="http://schemas.openxmlformats.org/drawingml/2006/main" xmlns:r="http://schemas.openxmlformats.org/officeDocument/2006/relationships" name="Office Theme">
+<a:theme xmlns:a="http://schemas.openxmlformats.org/drawingml/2006/main" name="Office Theme">
   <a:themeElements>
     <a:clrScheme name="Office Theme">
       <a:dk1>
@@ -8458,7 +9601,7 @@
       <a:effectStyleLst>
         <a:effectStyle>
           <a:effectLst>
-            <a:outerShdw sx="100000" sy="100000" kx="0" ky="0" algn="b" rotWithShape="0" blurRad="38100" dist="23000" dir="5400000">
+            <a:outerShdw blurRad="38100" dist="23000" dir="5400000" rotWithShape="0">
               <a:srgbClr val="000000">
                 <a:alpha val="35000"/>
               </a:srgbClr>
@@ -8467,7 +9610,7 @@
         </a:effectStyle>
         <a:effectStyle>
           <a:effectLst>
-            <a:outerShdw sx="100000" sy="100000" kx="0" ky="0" algn="b" rotWithShape="0" blurRad="38100" dist="23000" dir="5400000">
+            <a:outerShdw blurRad="38100" dist="23000" dir="5400000" rotWithShape="0">
               <a:srgbClr val="000000">
                 <a:alpha val="35000"/>
               </a:srgbClr>
@@ -8476,7 +9619,7 @@
         </a:effectStyle>
         <a:effectStyle>
           <a:effectLst>
-            <a:outerShdw sx="100000" sy="100000" kx="0" ky="0" algn="b" rotWithShape="0" blurRad="38100" dist="20000" dir="5400000">
+            <a:outerShdw blurRad="38100" dist="20000" dir="5400000" rotWithShape="0">
               <a:srgbClr val="000000">
                 <a:alpha val="38000"/>
               </a:srgbClr>
@@ -8550,7 +9693,7 @@
           <a:round/>
         </a:ln>
         <a:effectLst>
-          <a:outerShdw sx="100000" sy="100000" kx="0" ky="0" algn="b" rotWithShape="0" blurRad="38100" dist="23000" dir="5400000">
+          <a:outerShdw blurRad="38100" dist="23000" dir="5400000" rotWithShape="0">
             <a:srgbClr val="000000">
               <a:alpha val="35000"/>
             </a:srgbClr>
@@ -8558,7 +9701,7 @@
         </a:effectLst>
         <a:sp3d/>
       </a:spPr>
-      <a:bodyPr rot="0" spcFirstLastPara="1" vertOverflow="overflow" horzOverflow="overflow" vert="horz" wrap="square" lIns="45719" tIns="45719" rIns="45719" bIns="45719" numCol="1" spcCol="38100" rtlCol="0" anchor="ctr" upright="0">
+      <a:bodyPr rot="0" spcFirstLastPara="1" vertOverflow="overflow" horzOverflow="overflow" vert="horz" wrap="square" lIns="45719" tIns="45719" rIns="45719" bIns="45719" numCol="1" spcCol="38100" rtlCol="0" anchor="ctr">
         <a:spAutoFit/>
       </a:bodyPr>
       <a:lstStyle>
@@ -8577,7 +9720,7 @@
           <a:buFontTx/>
           <a:buNone/>
           <a:tabLst/>
-          <a:defRPr b="0" baseline="0" cap="none" i="0" spc="0" strike="noStrike" sz="1800" u="none" kumimoji="0" normalizeH="0">
+          <a:defRPr kumimoji="0" sz="1800" b="0" i="0" u="none" strike="noStrike" cap="none" spc="0" normalizeH="0" baseline="0">
             <a:ln>
               <a:noFill/>
             </a:ln>
@@ -8607,7 +9750,7 @@
           <a:buFontTx/>
           <a:buNone/>
           <a:tabLst/>
-          <a:defRPr b="0" baseline="0" cap="none" i="0" spc="0" strike="noStrike" sz="1800" u="none" kumimoji="0" normalizeH="0">
+          <a:defRPr kumimoji="0" sz="1800" b="0" i="0" u="none" strike="noStrike" cap="none" spc="0" normalizeH="0" baseline="0">
             <a:ln>
               <a:noFill/>
             </a:ln>
@@ -8633,7 +9776,7 @@
           <a:buFontTx/>
           <a:buNone/>
           <a:tabLst/>
-          <a:defRPr b="0" baseline="0" cap="none" i="0" spc="0" strike="noStrike" sz="1800" u="none" kumimoji="0" normalizeH="0">
+          <a:defRPr kumimoji="0" sz="1800" b="0" i="0" u="none" strike="noStrike" cap="none" spc="0" normalizeH="0" baseline="0">
             <a:ln>
               <a:noFill/>
             </a:ln>
@@ -8659,7 +9802,7 @@
           <a:buFontTx/>
           <a:buNone/>
           <a:tabLst/>
-          <a:defRPr b="0" baseline="0" cap="none" i="0" spc="0" strike="noStrike" sz="1800" u="none" kumimoji="0" normalizeH="0">
+          <a:defRPr kumimoji="0" sz="1800" b="0" i="0" u="none" strike="noStrike" cap="none" spc="0" normalizeH="0" baseline="0">
             <a:ln>
               <a:noFill/>
             </a:ln>
@@ -8685,7 +9828,7 @@
           <a:buFontTx/>
           <a:buNone/>
           <a:tabLst/>
-          <a:defRPr b="0" baseline="0" cap="none" i="0" spc="0" strike="noStrike" sz="1800" u="none" kumimoji="0" normalizeH="0">
+          <a:defRPr kumimoji="0" sz="1800" b="0" i="0" u="none" strike="noStrike" cap="none" spc="0" normalizeH="0" baseline="0">
             <a:ln>
               <a:noFill/>
             </a:ln>
@@ -8711,7 +9854,7 @@
           <a:buFontTx/>
           <a:buNone/>
           <a:tabLst/>
-          <a:defRPr b="0" baseline="0" cap="none" i="0" spc="0" strike="noStrike" sz="1800" u="none" kumimoji="0" normalizeH="0">
+          <a:defRPr kumimoji="0" sz="1800" b="0" i="0" u="none" strike="noStrike" cap="none" spc="0" normalizeH="0" baseline="0">
             <a:ln>
               <a:noFill/>
             </a:ln>
@@ -8737,7 +9880,7 @@
           <a:buFontTx/>
           <a:buNone/>
           <a:tabLst/>
-          <a:defRPr b="0" baseline="0" cap="none" i="0" spc="0" strike="noStrike" sz="1800" u="none" kumimoji="0" normalizeH="0">
+          <a:defRPr kumimoji="0" sz="1800" b="0" i="0" u="none" strike="noStrike" cap="none" spc="0" normalizeH="0" baseline="0">
             <a:ln>
               <a:noFill/>
             </a:ln>
@@ -8763,7 +9906,7 @@
           <a:buFontTx/>
           <a:buNone/>
           <a:tabLst/>
-          <a:defRPr b="0" baseline="0" cap="none" i="0" spc="0" strike="noStrike" sz="1800" u="none" kumimoji="0" normalizeH="0">
+          <a:defRPr kumimoji="0" sz="1800" b="0" i="0" u="none" strike="noStrike" cap="none" spc="0" normalizeH="0" baseline="0">
             <a:ln>
               <a:noFill/>
             </a:ln>
@@ -8789,7 +9932,7 @@
           <a:buFontTx/>
           <a:buNone/>
           <a:tabLst/>
-          <a:defRPr b="0" baseline="0" cap="none" i="0" spc="0" strike="noStrike" sz="1800" u="none" kumimoji="0" normalizeH="0">
+          <a:defRPr kumimoji="0" sz="1800" b="0" i="0" u="none" strike="noStrike" cap="none" spc="0" normalizeH="0" baseline="0">
             <a:ln>
               <a:noFill/>
             </a:ln>
@@ -8815,7 +9958,7 @@
           <a:buFontTx/>
           <a:buNone/>
           <a:tabLst/>
-          <a:defRPr b="0" baseline="0" cap="none" i="0" spc="0" strike="noStrike" sz="1800" u="none" kumimoji="0" normalizeH="0">
+          <a:defRPr kumimoji="0" sz="1800" b="0" i="0" u="none" strike="noStrike" cap="none" spc="0" normalizeH="0" baseline="0">
             <a:ln>
               <a:noFill/>
             </a:ln>
@@ -8828,9 +9971,15 @@
         </a:lvl9pPr>
       </a:lstStyle>
       <a:style>
-        <a:lnRef idx="0"/>
-        <a:fillRef idx="0"/>
-        <a:effectRef idx="0"/>
+        <a:lnRef idx="0">
+          <a:scrgbClr r="0" g="0" b="0"/>
+        </a:lnRef>
+        <a:fillRef idx="0">
+          <a:scrgbClr r="0" g="0" b="0"/>
+        </a:fillRef>
+        <a:effectRef idx="0">
+          <a:scrgbClr r="0" g="0" b="0"/>
+        </a:effectRef>
         <a:fontRef idx="none"/>
       </a:style>
     </a:spDef>
@@ -8845,7 +9994,7 @@
           <a:round/>
         </a:ln>
         <a:effectLst>
-          <a:outerShdw sx="100000" sy="100000" kx="0" ky="0" algn="b" rotWithShape="0" blurRad="38100" dist="20000" dir="5400000">
+          <a:outerShdw blurRad="38100" dist="20000" dir="5400000" rotWithShape="0">
             <a:srgbClr val="000000">
               <a:alpha val="38000"/>
             </a:srgbClr>
@@ -8853,7 +10002,7 @@
         </a:effectLst>
         <a:sp3d/>
       </a:spPr>
-      <a:bodyPr rot="0" spcFirstLastPara="1" vertOverflow="overflow" horzOverflow="overflow" vert="horz" wrap="square" lIns="91439" tIns="45719" rIns="91439" bIns="45719" numCol="1" spcCol="38100" rtlCol="0" anchor="t" upright="0">
+      <a:bodyPr rot="0" spcFirstLastPara="1" vertOverflow="overflow" horzOverflow="overflow" vert="horz" wrap="square" lIns="91439" tIns="45719" rIns="91439" bIns="45719" numCol="1" spcCol="38100" rtlCol="0" anchor="t">
         <a:noAutofit/>
       </a:bodyPr>
       <a:lstStyle>
@@ -8872,7 +10021,7 @@
           <a:buFontTx/>
           <a:buNone/>
           <a:tabLst/>
-          <a:defRPr b="0" baseline="0" cap="none" i="0" spc="0" strike="noStrike" sz="1800" u="none" kumimoji="0" normalizeH="0">
+          <a:defRPr kumimoji="0" sz="1800" b="0" i="0" u="none" strike="noStrike" cap="none" spc="0" normalizeH="0" baseline="0">
             <a:ln>
               <a:noFill/>
             </a:ln>
@@ -8898,7 +10047,7 @@
           <a:buFontTx/>
           <a:buNone/>
           <a:tabLst/>
-          <a:defRPr b="0" baseline="0" cap="none" i="0" spc="0" strike="noStrike" sz="1800" u="none" kumimoji="0" normalizeH="0">
+          <a:defRPr kumimoji="0" sz="1800" b="0" i="0" u="none" strike="noStrike" cap="none" spc="0" normalizeH="0" baseline="0">
             <a:ln>
               <a:noFill/>
             </a:ln>
@@ -8924,7 +10073,7 @@
           <a:buFontTx/>
           <a:buNone/>
           <a:tabLst/>
-          <a:defRPr b="0" baseline="0" cap="none" i="0" spc="0" strike="noStrike" sz="1800" u="none" kumimoji="0" normalizeH="0">
+          <a:defRPr kumimoji="0" sz="1800" b="0" i="0" u="none" strike="noStrike" cap="none" spc="0" normalizeH="0" baseline="0">
             <a:ln>
               <a:noFill/>
             </a:ln>
@@ -8950,7 +10099,7 @@
           <a:buFontTx/>
           <a:buNone/>
           <a:tabLst/>
-          <a:defRPr b="0" baseline="0" cap="none" i="0" spc="0" strike="noStrike" sz="1800" u="none" kumimoji="0" normalizeH="0">
+          <a:defRPr kumimoji="0" sz="1800" b="0" i="0" u="none" strike="noStrike" cap="none" spc="0" normalizeH="0" baseline="0">
             <a:ln>
               <a:noFill/>
             </a:ln>
@@ -8976,7 +10125,7 @@
           <a:buFontTx/>
           <a:buNone/>
           <a:tabLst/>
-          <a:defRPr b="0" baseline="0" cap="none" i="0" spc="0" strike="noStrike" sz="1800" u="none" kumimoji="0" normalizeH="0">
+          <a:defRPr kumimoji="0" sz="1800" b="0" i="0" u="none" strike="noStrike" cap="none" spc="0" normalizeH="0" baseline="0">
             <a:ln>
               <a:noFill/>
             </a:ln>
@@ -9002,7 +10151,7 @@
           <a:buFontTx/>
           <a:buNone/>
           <a:tabLst/>
-          <a:defRPr b="0" baseline="0" cap="none" i="0" spc="0" strike="noStrike" sz="1800" u="none" kumimoji="0" normalizeH="0">
+          <a:defRPr kumimoji="0" sz="1800" b="0" i="0" u="none" strike="noStrike" cap="none" spc="0" normalizeH="0" baseline="0">
             <a:ln>
               <a:noFill/>
             </a:ln>
@@ -9028,7 +10177,7 @@
           <a:buFontTx/>
           <a:buNone/>
           <a:tabLst/>
-          <a:defRPr b="0" baseline="0" cap="none" i="0" spc="0" strike="noStrike" sz="1800" u="none" kumimoji="0" normalizeH="0">
+          <a:defRPr kumimoji="0" sz="1800" b="0" i="0" u="none" strike="noStrike" cap="none" spc="0" normalizeH="0" baseline="0">
             <a:ln>
               <a:noFill/>
             </a:ln>
@@ -9054,7 +10203,7 @@
           <a:buFontTx/>
           <a:buNone/>
           <a:tabLst/>
-          <a:defRPr b="0" baseline="0" cap="none" i="0" spc="0" strike="noStrike" sz="1800" u="none" kumimoji="0" normalizeH="0">
+          <a:defRPr kumimoji="0" sz="1800" b="0" i="0" u="none" strike="noStrike" cap="none" spc="0" normalizeH="0" baseline="0">
             <a:ln>
               <a:noFill/>
             </a:ln>
@@ -9080,7 +10229,7 @@
           <a:buFontTx/>
           <a:buNone/>
           <a:tabLst/>
-          <a:defRPr b="0" baseline="0" cap="none" i="0" spc="0" strike="noStrike" sz="1800" u="none" kumimoji="0" normalizeH="0">
+          <a:defRPr kumimoji="0" sz="1800" b="0" i="0" u="none" strike="noStrike" cap="none" spc="0" normalizeH="0" baseline="0">
             <a:ln>
               <a:noFill/>
             </a:ln>
@@ -9106,7 +10255,7 @@
           <a:buFontTx/>
           <a:buNone/>
           <a:tabLst/>
-          <a:defRPr b="0" baseline="0" cap="none" i="0" spc="0" strike="noStrike" sz="1800" u="none" kumimoji="0" normalizeH="0">
+          <a:defRPr kumimoji="0" sz="1800" b="0" i="0" u="none" strike="noStrike" cap="none" spc="0" normalizeH="0" baseline="0">
             <a:ln>
               <a:noFill/>
             </a:ln>
@@ -9119,9 +10268,15 @@
         </a:lvl9pPr>
       </a:lstStyle>
       <a:style>
-        <a:lnRef idx="0"/>
-        <a:fillRef idx="0"/>
-        <a:effectRef idx="0"/>
+        <a:lnRef idx="0">
+          <a:scrgbClr r="0" g="0" b="0"/>
+        </a:lnRef>
+        <a:fillRef idx="0">
+          <a:scrgbClr r="0" g="0" b="0"/>
+        </a:fillRef>
+        <a:effectRef idx="0">
+          <a:scrgbClr r="0" g="0" b="0"/>
+        </a:effectRef>
         <a:fontRef idx="none"/>
       </a:style>
     </a:lnDef>
@@ -9135,7 +10290,7 @@
         <a:effectLst/>
         <a:sp3d/>
       </a:spPr>
-      <a:bodyPr rot="0" spcFirstLastPara="1" vertOverflow="overflow" horzOverflow="overflow" vert="horz" wrap="square" lIns="45719" tIns="45719" rIns="45719" bIns="45719" numCol="1" spcCol="38100" rtlCol="0" anchor="t" upright="0">
+      <a:bodyPr rot="0" spcFirstLastPara="1" vertOverflow="overflow" horzOverflow="overflow" vert="horz" wrap="square" lIns="45719" tIns="45719" rIns="45719" bIns="45719" numCol="1" spcCol="38100" rtlCol="0" anchor="t">
         <a:spAutoFit/>
       </a:bodyPr>
       <a:lstStyle>
@@ -9154,7 +10309,7 @@
           <a:buFontTx/>
           <a:buNone/>
           <a:tabLst/>
-          <a:defRPr b="0" baseline="0" cap="none" i="0" spc="0" strike="noStrike" sz="1800" u="none" kumimoji="0" normalizeH="0">
+          <a:defRPr kumimoji="0" sz="1800" b="0" i="0" u="none" strike="noStrike" cap="none" spc="0" normalizeH="0" baseline="0">
             <a:ln>
               <a:noFill/>
             </a:ln>
@@ -9184,7 +10339,7 @@
           <a:buFontTx/>
           <a:buNone/>
           <a:tabLst/>
-          <a:defRPr b="0" baseline="0" cap="none" i="0" spc="0" strike="noStrike" sz="1800" u="none" kumimoji="0" normalizeH="0">
+          <a:defRPr kumimoji="0" sz="1800" b="0" i="0" u="none" strike="noStrike" cap="none" spc="0" normalizeH="0" baseline="0">
             <a:ln>
               <a:noFill/>
             </a:ln>
@@ -9210,7 +10365,7 @@
           <a:buFontTx/>
           <a:buNone/>
           <a:tabLst/>
-          <a:defRPr b="0" baseline="0" cap="none" i="0" spc="0" strike="noStrike" sz="1800" u="none" kumimoji="0" normalizeH="0">
+          <a:defRPr kumimoji="0" sz="1800" b="0" i="0" u="none" strike="noStrike" cap="none" spc="0" normalizeH="0" baseline="0">
             <a:ln>
               <a:noFill/>
             </a:ln>
@@ -9236,7 +10391,7 @@
           <a:buFontTx/>
           <a:buNone/>
           <a:tabLst/>
-          <a:defRPr b="0" baseline="0" cap="none" i="0" spc="0" strike="noStrike" sz="1800" u="none" kumimoji="0" normalizeH="0">
+          <a:defRPr kumimoji="0" sz="1800" b="0" i="0" u="none" strike="noStrike" cap="none" spc="0" normalizeH="0" baseline="0">
             <a:ln>
               <a:noFill/>
             </a:ln>
@@ -9262,7 +10417,7 @@
           <a:buFontTx/>
           <a:buNone/>
           <a:tabLst/>
-          <a:defRPr b="0" baseline="0" cap="none" i="0" spc="0" strike="noStrike" sz="1800" u="none" kumimoji="0" normalizeH="0">
+          <a:defRPr kumimoji="0" sz="1800" b="0" i="0" u="none" strike="noStrike" cap="none" spc="0" normalizeH="0" baseline="0">
             <a:ln>
               <a:noFill/>
             </a:ln>
@@ -9288,7 +10443,7 @@
           <a:buFontTx/>
           <a:buNone/>
           <a:tabLst/>
-          <a:defRPr b="0" baseline="0" cap="none" i="0" spc="0" strike="noStrike" sz="1800" u="none" kumimoji="0" normalizeH="0">
+          <a:defRPr kumimoji="0" sz="1800" b="0" i="0" u="none" strike="noStrike" cap="none" spc="0" normalizeH="0" baseline="0">
             <a:ln>
               <a:noFill/>
             </a:ln>
@@ -9314,7 +10469,7 @@
           <a:buFontTx/>
           <a:buNone/>
           <a:tabLst/>
-          <a:defRPr b="0" baseline="0" cap="none" i="0" spc="0" strike="noStrike" sz="1800" u="none" kumimoji="0" normalizeH="0">
+          <a:defRPr kumimoji="0" sz="1800" b="0" i="0" u="none" strike="noStrike" cap="none" spc="0" normalizeH="0" baseline="0">
             <a:ln>
               <a:noFill/>
             </a:ln>
@@ -9340,7 +10495,7 @@
           <a:buFontTx/>
           <a:buNone/>
           <a:tabLst/>
-          <a:defRPr b="0" baseline="0" cap="none" i="0" spc="0" strike="noStrike" sz="1800" u="none" kumimoji="0" normalizeH="0">
+          <a:defRPr kumimoji="0" sz="1800" b="0" i="0" u="none" strike="noStrike" cap="none" spc="0" normalizeH="0" baseline="0">
             <a:ln>
               <a:noFill/>
             </a:ln>
@@ -9366,7 +10521,7 @@
           <a:buFontTx/>
           <a:buNone/>
           <a:tabLst/>
-          <a:defRPr b="0" baseline="0" cap="none" i="0" spc="0" strike="noStrike" sz="1800" u="none" kumimoji="0" normalizeH="0">
+          <a:defRPr kumimoji="0" sz="1800" b="0" i="0" u="none" strike="noStrike" cap="none" spc="0" normalizeH="0" baseline="0">
             <a:ln>
               <a:noFill/>
             </a:ln>
@@ -9392,7 +10547,7 @@
           <a:buFontTx/>
           <a:buNone/>
           <a:tabLst/>
-          <a:defRPr b="0" baseline="0" cap="none" i="0" spc="0" strike="noStrike" sz="1800" u="none" kumimoji="0" normalizeH="0">
+          <a:defRPr kumimoji="0" sz="1800" b="0" i="0" u="none" strike="noStrike" cap="none" spc="0" normalizeH="0" baseline="0">
             <a:ln>
               <a:noFill/>
             </a:ln>
@@ -9405,12 +10560,19 @@
         </a:lvl9pPr>
       </a:lstStyle>
       <a:style>
-        <a:lnRef idx="0"/>
-        <a:fillRef idx="0"/>
-        <a:effectRef idx="0"/>
+        <a:lnRef idx="0">
+          <a:scrgbClr r="0" g="0" b="0"/>
+        </a:lnRef>
+        <a:fillRef idx="0">
+          <a:scrgbClr r="0" g="0" b="0"/>
+        </a:fillRef>
+        <a:effectRef idx="0">
+          <a:scrgbClr r="0" g="0" b="0"/>
+        </a:effectRef>
         <a:fontRef idx="none"/>
       </a:style>
     </a:txDef>
   </a:objectDefaults>
+  <a:extraClrSchemeLst/>
 </a:theme>
 </file>
--- a/Pronóstico de Demanda Eléctrica GBA.pptx
+++ b/Pronóstico de Demanda Eléctrica GBA.pptx
@@ -1,24 +1,24 @@
 
 <file path=ppt/presentation.xml><?xml version="1.0" encoding="utf-8"?>
-<p:presentation xmlns:a="http://schemas.openxmlformats.org/drawingml/2006/main" xmlns:r="http://schemas.openxmlformats.org/officeDocument/2006/relationships" xmlns:p="http://schemas.openxmlformats.org/presentationml/2006/main">
+<p:presentation xmlns:a="http://schemas.openxmlformats.org/drawingml/2006/main" xmlns:r="http://schemas.openxmlformats.org/officeDocument/2006/relationships" xmlns:p="http://schemas.openxmlformats.org/presentationml/2006/main" xmlns:m="http://schemas.openxmlformats.org/officeDocument/2006/math" xmlns:a14="http://schemas.microsoft.com/office/drawing/2010/main">
   <p:sldMasterIdLst>
-    <p:sldMasterId id="2147483648" r:id="rId1"/>
+    <p:sldMasterId id="2147483648" r:id="rId5"/>
   </p:sldMasterIdLst>
   <p:notesMasterIdLst>
-    <p:notesMasterId r:id="rId13"/>
+    <p:notesMasterId r:id="rId7"/>
   </p:notesMasterIdLst>
   <p:sldIdLst>
-    <p:sldId id="256" r:id="rId2"/>
-    <p:sldId id="257" r:id="rId3"/>
-    <p:sldId id="258" r:id="rId4"/>
-    <p:sldId id="259" r:id="rId5"/>
-    <p:sldId id="260" r:id="rId6"/>
-    <p:sldId id="261" r:id="rId7"/>
-    <p:sldId id="264" r:id="rId8"/>
-    <p:sldId id="265" r:id="rId9"/>
-    <p:sldId id="266" r:id="rId10"/>
-    <p:sldId id="262" r:id="rId11"/>
-    <p:sldId id="263" r:id="rId12"/>
+    <p:sldId id="256" r:id="rId8"/>
+    <p:sldId id="257" r:id="rId9"/>
+    <p:sldId id="258" r:id="rId10"/>
+    <p:sldId id="259" r:id="rId11"/>
+    <p:sldId id="260" r:id="rId12"/>
+    <p:sldId id="261" r:id="rId13"/>
+    <p:sldId id="262" r:id="rId14"/>
+    <p:sldId id="263" r:id="rId15"/>
+    <p:sldId id="264" r:id="rId16"/>
+    <p:sldId id="265" r:id="rId17"/>
+    <p:sldId id="266" r:id="rId18"/>
   </p:sldIdLst>
   <p:sldSz cx="20104100" cy="11303000"/>
   <p:notesSz cx="6858000" cy="9144000"/>
@@ -38,7 +38,7 @@
       <a:buFontTx/>
       <a:buNone/>
       <a:tabLst/>
-      <a:defRPr kumimoji="0" sz="1800" b="0" i="0" u="none" strike="noStrike" cap="none" spc="0" normalizeH="0" baseline="0">
+      <a:defRPr b="0" baseline="0" cap="none" i="0" spc="0" strike="noStrike" sz="1800" u="none" kumimoji="0" normalizeH="0">
         <a:ln>
           <a:noFill/>
         </a:ln>
@@ -64,7 +64,7 @@
       <a:buFontTx/>
       <a:buNone/>
       <a:tabLst/>
-      <a:defRPr kumimoji="0" sz="1800" b="0" i="0" u="none" strike="noStrike" cap="none" spc="0" normalizeH="0" baseline="0">
+      <a:defRPr b="0" baseline="0" cap="none" i="0" spc="0" strike="noStrike" sz="1800" u="none" kumimoji="0" normalizeH="0">
         <a:ln>
           <a:noFill/>
         </a:ln>
@@ -73,10 +73,10 @@
         </a:solidFill>
         <a:effectLst/>
         <a:uFillTx/>
-        <a:latin typeface="Calibri"/>
-        <a:ea typeface="Calibri"/>
-        <a:cs typeface="Calibri"/>
-        <a:sym typeface="Calibri"/>
+        <a:latin typeface="+mn-lt"/>
+        <a:ea typeface="+mn-ea"/>
+        <a:cs typeface="+mn-cs"/>
+        <a:sym typeface="Helvetica Neue"/>
       </a:defRPr>
     </a:lvl1pPr>
     <a:lvl2pPr marL="0" marR="0" indent="0" algn="l" defTabSz="914400" rtl="0" fontAlgn="auto" latinLnBrk="0" hangingPunct="0">
@@ -94,7 +94,7 @@
       <a:buFontTx/>
       <a:buNone/>
       <a:tabLst/>
-      <a:defRPr kumimoji="0" sz="1800" b="0" i="0" u="none" strike="noStrike" cap="none" spc="0" normalizeH="0" baseline="0">
+      <a:defRPr b="0" baseline="0" cap="none" i="0" spc="0" strike="noStrike" sz="1800" u="none" kumimoji="0" normalizeH="0">
         <a:ln>
           <a:noFill/>
         </a:ln>
@@ -103,10 +103,10 @@
         </a:solidFill>
         <a:effectLst/>
         <a:uFillTx/>
-        <a:latin typeface="Calibri"/>
-        <a:ea typeface="Calibri"/>
-        <a:cs typeface="Calibri"/>
-        <a:sym typeface="Calibri"/>
+        <a:latin typeface="+mn-lt"/>
+        <a:ea typeface="+mn-ea"/>
+        <a:cs typeface="+mn-cs"/>
+        <a:sym typeface="Helvetica Neue"/>
       </a:defRPr>
     </a:lvl2pPr>
     <a:lvl3pPr marL="0" marR="0" indent="0" algn="l" defTabSz="914400" rtl="0" fontAlgn="auto" latinLnBrk="0" hangingPunct="0">
@@ -124,7 +124,7 @@
       <a:buFontTx/>
       <a:buNone/>
       <a:tabLst/>
-      <a:defRPr kumimoji="0" sz="1800" b="0" i="0" u="none" strike="noStrike" cap="none" spc="0" normalizeH="0" baseline="0">
+      <a:defRPr b="0" baseline="0" cap="none" i="0" spc="0" strike="noStrike" sz="1800" u="none" kumimoji="0" normalizeH="0">
         <a:ln>
           <a:noFill/>
         </a:ln>
@@ -133,10 +133,10 @@
         </a:solidFill>
         <a:effectLst/>
         <a:uFillTx/>
-        <a:latin typeface="Calibri"/>
-        <a:ea typeface="Calibri"/>
-        <a:cs typeface="Calibri"/>
-        <a:sym typeface="Calibri"/>
+        <a:latin typeface="+mn-lt"/>
+        <a:ea typeface="+mn-ea"/>
+        <a:cs typeface="+mn-cs"/>
+        <a:sym typeface="Helvetica Neue"/>
       </a:defRPr>
     </a:lvl3pPr>
     <a:lvl4pPr marL="0" marR="0" indent="0" algn="l" defTabSz="914400" rtl="0" fontAlgn="auto" latinLnBrk="0" hangingPunct="0">
@@ -154,7 +154,7 @@
       <a:buFontTx/>
       <a:buNone/>
       <a:tabLst/>
-      <a:defRPr kumimoji="0" sz="1800" b="0" i="0" u="none" strike="noStrike" cap="none" spc="0" normalizeH="0" baseline="0">
+      <a:defRPr b="0" baseline="0" cap="none" i="0" spc="0" strike="noStrike" sz="1800" u="none" kumimoji="0" normalizeH="0">
         <a:ln>
           <a:noFill/>
         </a:ln>
@@ -163,10 +163,10 @@
         </a:solidFill>
         <a:effectLst/>
         <a:uFillTx/>
-        <a:latin typeface="Calibri"/>
-        <a:ea typeface="Calibri"/>
-        <a:cs typeface="Calibri"/>
-        <a:sym typeface="Calibri"/>
+        <a:latin typeface="+mn-lt"/>
+        <a:ea typeface="+mn-ea"/>
+        <a:cs typeface="+mn-cs"/>
+        <a:sym typeface="Helvetica Neue"/>
       </a:defRPr>
     </a:lvl4pPr>
     <a:lvl5pPr marL="0" marR="0" indent="0" algn="l" defTabSz="914400" rtl="0" fontAlgn="auto" latinLnBrk="0" hangingPunct="0">
@@ -184,7 +184,7 @@
       <a:buFontTx/>
       <a:buNone/>
       <a:tabLst/>
-      <a:defRPr kumimoji="0" sz="1800" b="0" i="0" u="none" strike="noStrike" cap="none" spc="0" normalizeH="0" baseline="0">
+      <a:defRPr b="0" baseline="0" cap="none" i="0" spc="0" strike="noStrike" sz="1800" u="none" kumimoji="0" normalizeH="0">
         <a:ln>
           <a:noFill/>
         </a:ln>
@@ -193,10 +193,10 @@
         </a:solidFill>
         <a:effectLst/>
         <a:uFillTx/>
-        <a:latin typeface="Calibri"/>
-        <a:ea typeface="Calibri"/>
-        <a:cs typeface="Calibri"/>
-        <a:sym typeface="Calibri"/>
+        <a:latin typeface="+mn-lt"/>
+        <a:ea typeface="+mn-ea"/>
+        <a:cs typeface="+mn-cs"/>
+        <a:sym typeface="Helvetica Neue"/>
       </a:defRPr>
     </a:lvl5pPr>
     <a:lvl6pPr marL="0" marR="0" indent="0" algn="l" defTabSz="914400" rtl="0" fontAlgn="auto" latinLnBrk="0" hangingPunct="0">
@@ -214,7 +214,7 @@
       <a:buFontTx/>
       <a:buNone/>
       <a:tabLst/>
-      <a:defRPr kumimoji="0" sz="1800" b="0" i="0" u="none" strike="noStrike" cap="none" spc="0" normalizeH="0" baseline="0">
+      <a:defRPr b="0" baseline="0" cap="none" i="0" spc="0" strike="noStrike" sz="1800" u="none" kumimoji="0" normalizeH="0">
         <a:ln>
           <a:noFill/>
         </a:ln>
@@ -223,10 +223,10 @@
         </a:solidFill>
         <a:effectLst/>
         <a:uFillTx/>
-        <a:latin typeface="Calibri"/>
-        <a:ea typeface="Calibri"/>
-        <a:cs typeface="Calibri"/>
-        <a:sym typeface="Calibri"/>
+        <a:latin typeface="+mn-lt"/>
+        <a:ea typeface="+mn-ea"/>
+        <a:cs typeface="+mn-cs"/>
+        <a:sym typeface="Helvetica Neue"/>
       </a:defRPr>
     </a:lvl6pPr>
     <a:lvl7pPr marL="0" marR="0" indent="0" algn="l" defTabSz="914400" rtl="0" fontAlgn="auto" latinLnBrk="0" hangingPunct="0">
@@ -244,7 +244,7 @@
       <a:buFontTx/>
       <a:buNone/>
       <a:tabLst/>
-      <a:defRPr kumimoji="0" sz="1800" b="0" i="0" u="none" strike="noStrike" cap="none" spc="0" normalizeH="0" baseline="0">
+      <a:defRPr b="0" baseline="0" cap="none" i="0" spc="0" strike="noStrike" sz="1800" u="none" kumimoji="0" normalizeH="0">
         <a:ln>
           <a:noFill/>
         </a:ln>
@@ -253,10 +253,10 @@
         </a:solidFill>
         <a:effectLst/>
         <a:uFillTx/>
-        <a:latin typeface="Calibri"/>
-        <a:ea typeface="Calibri"/>
-        <a:cs typeface="Calibri"/>
-        <a:sym typeface="Calibri"/>
+        <a:latin typeface="+mn-lt"/>
+        <a:ea typeface="+mn-ea"/>
+        <a:cs typeface="+mn-cs"/>
+        <a:sym typeface="Helvetica Neue"/>
       </a:defRPr>
     </a:lvl7pPr>
     <a:lvl8pPr marL="0" marR="0" indent="0" algn="l" defTabSz="914400" rtl="0" fontAlgn="auto" latinLnBrk="0" hangingPunct="0">
@@ -274,7 +274,7 @@
       <a:buFontTx/>
       <a:buNone/>
       <a:tabLst/>
-      <a:defRPr kumimoji="0" sz="1800" b="0" i="0" u="none" strike="noStrike" cap="none" spc="0" normalizeH="0" baseline="0">
+      <a:defRPr b="0" baseline="0" cap="none" i="0" spc="0" strike="noStrike" sz="1800" u="none" kumimoji="0" normalizeH="0">
         <a:ln>
           <a:noFill/>
         </a:ln>
@@ -283,10 +283,10 @@
         </a:solidFill>
         <a:effectLst/>
         <a:uFillTx/>
-        <a:latin typeface="Calibri"/>
-        <a:ea typeface="Calibri"/>
-        <a:cs typeface="Calibri"/>
-        <a:sym typeface="Calibri"/>
+        <a:latin typeface="+mn-lt"/>
+        <a:ea typeface="+mn-ea"/>
+        <a:cs typeface="+mn-cs"/>
+        <a:sym typeface="Helvetica Neue"/>
       </a:defRPr>
     </a:lvl8pPr>
     <a:lvl9pPr marL="0" marR="0" indent="0" algn="l" defTabSz="914400" rtl="0" fontAlgn="auto" latinLnBrk="0" hangingPunct="0">
@@ -304,7 +304,7 @@
       <a:buFontTx/>
       <a:buNone/>
       <a:tabLst/>
-      <a:defRPr kumimoji="0" sz="1800" b="0" i="0" u="none" strike="noStrike" cap="none" spc="0" normalizeH="0" baseline="0">
+      <a:defRPr b="0" baseline="0" cap="none" i="0" spc="0" strike="noStrike" sz="1800" u="none" kumimoji="0" normalizeH="0">
         <a:ln>
           <a:noFill/>
         </a:ln>
@@ -313,24 +313,23 @@
         </a:solidFill>
         <a:effectLst/>
         <a:uFillTx/>
-        <a:latin typeface="Calibri"/>
-        <a:ea typeface="Calibri"/>
-        <a:cs typeface="Calibri"/>
-        <a:sym typeface="Calibri"/>
+        <a:latin typeface="+mn-lt"/>
+        <a:ea typeface="+mn-ea"/>
+        <a:cs typeface="+mn-cs"/>
+        <a:sym typeface="Helvetica Neue"/>
       </a:defRPr>
     </a:lvl9pPr>
   </p:defaultTextStyle>
 </p:presentation>
 </file>
 
+<file path=ppt/commentAuthors.xml><?xml version="1.0" encoding="utf-8"?>
+<p:cmAuthorLst xmlns:a="http://schemas.openxmlformats.org/drawingml/2006/main" xmlns:r="http://schemas.openxmlformats.org/officeDocument/2006/relationships" xmlns:p="http://schemas.openxmlformats.org/presentationml/2006/main" xmlns:m="http://schemas.openxmlformats.org/officeDocument/2006/math" xmlns:a14="http://schemas.microsoft.com/office/drawing/2010/main"/>
+</file>
+
 <file path=ppt/notesMasters/notesMaster1.xml><?xml version="1.0" encoding="utf-8"?>
-<p:notesMaster xmlns:a="http://schemas.openxmlformats.org/drawingml/2006/main" xmlns:r="http://schemas.openxmlformats.org/officeDocument/2006/relationships" xmlns:p="http://schemas.openxmlformats.org/presentationml/2006/main">
+<p:notesMaster xmlns:a="http://schemas.openxmlformats.org/drawingml/2006/main" xmlns:r="http://schemas.openxmlformats.org/officeDocument/2006/relationships" xmlns:p="http://schemas.openxmlformats.org/presentationml/2006/main" xmlns:m="http://schemas.openxmlformats.org/officeDocument/2006/math" xmlns:a14="http://schemas.microsoft.com/office/drawing/2010/main">
   <p:cSld>
-    <p:bg>
-      <p:bgRef idx="1001">
-        <a:schemeClr val="bg1"/>
-      </p:bgRef>
-    </p:bg>
     <p:spTree>
       <p:nvGrpSpPr>
         <p:cNvPr id="1" name=""/>
@@ -348,9 +347,7 @@
       <p:sp>
         <p:nvSpPr>
           <p:cNvPr id="62" name="Shape 62"/>
-          <p:cNvSpPr>
-            <a:spLocks noGrp="1" noRot="1" noChangeAspect="1"/>
-          </p:cNvSpPr>
+          <p:cNvSpPr/>
           <p:nvPr>
             <p:ph type="sldImg"/>
           </p:nvPr>
@@ -368,16 +365,14 @@
           <a:bodyPr/>
           <a:lstStyle/>
           <a:p>
-            <a:endParaRPr/>
+            <a:pPr/>
           </a:p>
         </p:txBody>
       </p:sp>
       <p:sp>
         <p:nvSpPr>
           <p:cNvPr id="63" name="Shape 63"/>
-          <p:cNvSpPr>
-            <a:spLocks noGrp="1"/>
-          </p:cNvSpPr>
+          <p:cNvSpPr/>
           <p:nvPr>
             <p:ph type="body" sz="quarter" idx="1"/>
           </p:nvPr>
@@ -395,7 +390,7 @@
           <a:bodyPr/>
           <a:lstStyle/>
           <a:p>
-            <a:endParaRPr/>
+            <a:pPr/>
           </a:p>
         </p:txBody>
       </p:sp>
@@ -480,7 +475,7 @@
 </file>
 
 <file path=ppt/slideLayouts/slideLayout1.xml><?xml version="1.0" encoding="utf-8"?>
-<p:sldLayout xmlns:a="http://schemas.openxmlformats.org/drawingml/2006/main" xmlns:r="http://schemas.openxmlformats.org/officeDocument/2006/relationships" xmlns:p="http://schemas.openxmlformats.org/presentationml/2006/main" type="title">
+<p:sldLayout xmlns:a="http://schemas.openxmlformats.org/drawingml/2006/main" xmlns:r="http://schemas.openxmlformats.org/officeDocument/2006/relationships" xmlns:p="http://schemas.openxmlformats.org/presentationml/2006/main" xmlns:m="http://schemas.openxmlformats.org/officeDocument/2006/math" xmlns:a14="http://schemas.microsoft.com/office/drawing/2010/main" type="title" showMasterSp="1" showMasterPhAnim="1">
   <p:cSld name="Title Slide">
     <p:spTree>
       <p:nvGrpSpPr>
@@ -505,7 +500,7 @@
         <p:spPr>
           <a:xfrm>
             <a:off x="6573097" y="3683134"/>
-            <a:ext cx="6934346" cy="1217241"/>
+            <a:ext cx="6934346" cy="1217242"/>
           </a:xfrm>
           <a:prstGeom prst="rect">
             <a:avLst/>
@@ -518,19 +513,24 @@
           </a:ln>
         </p:spPr>
         <p:txBody>
-          <a:bodyPr lIns="45719" rIns="45719"/>
+          <a:bodyPr lIns="45718" tIns="45718" rIns="45718" bIns="45718"/>
           <a:lstStyle/>
           <a:p>
-            <a:endParaRPr/>
+            <a:pPr>
+              <a:defRPr>
+                <a:latin typeface="Calibri"/>
+                <a:ea typeface="Calibri"/>
+                <a:cs typeface="Calibri"/>
+                <a:sym typeface="Calibri"/>
+              </a:defRPr>
+            </a:pPr>
           </a:p>
         </p:txBody>
       </p:sp>
       <p:sp>
         <p:nvSpPr>
           <p:cNvPr id="12" name="Title Text"/>
-          <p:cNvSpPr txBox="1">
-            <a:spLocks noGrp="1"/>
-          </p:cNvSpPr>
+          <p:cNvSpPr txBox="1"/>
           <p:nvPr>
             <p:ph type="title"/>
           </p:nvPr>
@@ -538,18 +538,17 @@
         <p:spPr>
           <a:xfrm>
             <a:off x="6466985" y="3362850"/>
-            <a:ext cx="6955791" cy="1478280"/>
+            <a:ext cx="6955792" cy="1478281"/>
           </a:xfrm>
           <a:prstGeom prst="rect">
             <a:avLst/>
           </a:prstGeom>
         </p:spPr>
         <p:txBody>
-          <a:bodyPr>
-            <a:normAutofit/>
-          </a:bodyPr>
+          <a:bodyPr/>
           <a:lstStyle/>
           <a:p>
+            <a:pPr/>
             <a:r>
               <a:t>Title Text</a:t>
             </a:r>
@@ -559,28 +558,25 @@
       <p:sp>
         <p:nvSpPr>
           <p:cNvPr id="13" name="Body Level One…"/>
-          <p:cNvSpPr txBox="1">
-            <a:spLocks noGrp="1"/>
-          </p:cNvSpPr>
+          <p:cNvSpPr txBox="1"/>
           <p:nvPr>
             <p:ph type="body" sz="quarter" idx="1"/>
           </p:nvPr>
         </p:nvSpPr>
         <p:spPr>
           <a:xfrm>
-            <a:off x="3015614" y="6333235"/>
-            <a:ext cx="14072871" cy="2827338"/>
+            <a:off x="3015613" y="6333235"/>
+            <a:ext cx="14072873" cy="2827339"/>
           </a:xfrm>
           <a:prstGeom prst="rect">
             <a:avLst/>
           </a:prstGeom>
         </p:spPr>
         <p:txBody>
-          <a:bodyPr>
-            <a:normAutofit/>
-          </a:bodyPr>
+          <a:bodyPr/>
           <a:lstStyle/>
           <a:p>
+            <a:pPr/>
             <a:r>
               <a:t>Body Level One</a:t>
             </a:r>
@@ -614,9 +610,7 @@
       <p:sp>
         <p:nvSpPr>
           <p:cNvPr id="14" name="Slide Number"/>
-          <p:cNvSpPr txBox="1">
-            <a:spLocks noGrp="1"/>
-          </p:cNvSpPr>
+          <p:cNvSpPr txBox="1"/>
           <p:nvPr>
             <p:ph type="sldNum" sz="quarter" idx="2"/>
           </p:nvPr>
@@ -630,10 +624,8 @@
           <a:bodyPr/>
           <a:lstStyle/>
           <a:p>
-            <a:fld id="{86CB4B4D-7CA3-9044-876B-883B54F8677D}" type="slidenum">
-              <a:t>‹Nº›</a:t>
-            </a:fld>
-            <a:endParaRPr/>
+            <a:pPr/>
+            <a:fld id="{86CB4B4D-7CA3-9044-876B-883B54F8677D}" type="slidenum"/>
           </a:p>
         </p:txBody>
       </p:sp>
@@ -642,12 +634,12 @@
   <p:clrMapOvr>
     <a:masterClrMapping/>
   </p:clrMapOvr>
-  <p:transition spd="med"/>
+  <p:transition xmlns:p14="http://schemas.microsoft.com/office/powerpoint/2010/main" spd="med" advClick="1"/>
 </p:sldLayout>
 </file>
 
 <file path=ppt/slideLayouts/slideLayout2.xml><?xml version="1.0" encoding="utf-8"?>
-<p:sldLayout xmlns:a="http://schemas.openxmlformats.org/drawingml/2006/main" xmlns:r="http://schemas.openxmlformats.org/officeDocument/2006/relationships" xmlns:p="http://schemas.openxmlformats.org/presentationml/2006/main" type="tx">
+<p:sldLayout xmlns:a="http://schemas.openxmlformats.org/drawingml/2006/main" xmlns:r="http://schemas.openxmlformats.org/officeDocument/2006/relationships" xmlns:p="http://schemas.openxmlformats.org/presentationml/2006/main" xmlns:m="http://schemas.openxmlformats.org/officeDocument/2006/math" xmlns:a14="http://schemas.microsoft.com/office/drawing/2010/main" type="tx" showMasterSp="1" showMasterPhAnim="1">
   <p:cSld name="Title and Content">
     <p:spTree>
       <p:nvGrpSpPr>
@@ -666,28 +658,21 @@
       <p:sp>
         <p:nvSpPr>
           <p:cNvPr id="21" name="Title Text"/>
-          <p:cNvSpPr txBox="1">
-            <a:spLocks noGrp="1"/>
-          </p:cNvSpPr>
+          <p:cNvSpPr txBox="1"/>
           <p:nvPr>
             <p:ph type="title"/>
           </p:nvPr>
         </p:nvSpPr>
         <p:spPr>
-          <a:xfrm>
-            <a:off x="912419" y="535057"/>
-            <a:ext cx="10010768" cy="1026795"/>
-          </a:xfrm>
           <a:prstGeom prst="rect">
             <a:avLst/>
           </a:prstGeom>
         </p:spPr>
         <p:txBody>
-          <a:bodyPr>
-            <a:normAutofit/>
-          </a:bodyPr>
+          <a:bodyPr/>
           <a:lstStyle/>
           <a:p>
+            <a:pPr/>
             <a:r>
               <a:t>Title Text</a:t>
             </a:r>
@@ -697,9 +682,7 @@
       <p:sp>
         <p:nvSpPr>
           <p:cNvPr id="22" name="Body Level One…"/>
-          <p:cNvSpPr txBox="1">
-            <a:spLocks noGrp="1"/>
-          </p:cNvSpPr>
+          <p:cNvSpPr txBox="1"/>
           <p:nvPr>
             <p:ph type="body" sz="half" idx="1"/>
           </p:nvPr>
@@ -707,18 +690,17 @@
         <p:spPr>
           <a:xfrm>
             <a:off x="10366175" y="3376860"/>
-            <a:ext cx="8458201" cy="5505451"/>
+            <a:ext cx="8458201" cy="5505452"/>
           </a:xfrm>
           <a:prstGeom prst="rect">
             <a:avLst/>
           </a:prstGeom>
         </p:spPr>
         <p:txBody>
-          <a:bodyPr>
-            <a:normAutofit/>
-          </a:bodyPr>
+          <a:bodyPr/>
           <a:lstStyle/>
           <a:p>
+            <a:pPr/>
             <a:r>
               <a:t>Body Level One</a:t>
             </a:r>
@@ -752,9 +734,7 @@
       <p:sp>
         <p:nvSpPr>
           <p:cNvPr id="23" name="Slide Number"/>
-          <p:cNvSpPr txBox="1">
-            <a:spLocks noGrp="1"/>
-          </p:cNvSpPr>
+          <p:cNvSpPr txBox="1"/>
           <p:nvPr>
             <p:ph type="sldNum" sz="quarter" idx="2"/>
           </p:nvPr>
@@ -768,10 +748,8 @@
           <a:bodyPr/>
           <a:lstStyle/>
           <a:p>
-            <a:fld id="{86CB4B4D-7CA3-9044-876B-883B54F8677D}" type="slidenum">
-              <a:t>‹Nº›</a:t>
-            </a:fld>
-            <a:endParaRPr/>
+            <a:pPr/>
+            <a:fld id="{86CB4B4D-7CA3-9044-876B-883B54F8677D}" type="slidenum"/>
           </a:p>
         </p:txBody>
       </p:sp>
@@ -780,12 +758,12 @@
   <p:clrMapOvr>
     <a:masterClrMapping/>
   </p:clrMapOvr>
-  <p:transition spd="med"/>
+  <p:transition xmlns:p14="http://schemas.microsoft.com/office/powerpoint/2010/main" spd="med" advClick="1"/>
 </p:sldLayout>
 </file>
 
 <file path=ppt/slideLayouts/slideLayout3.xml><?xml version="1.0" encoding="utf-8"?>
-<p:sldLayout xmlns:a="http://schemas.openxmlformats.org/drawingml/2006/main" xmlns:r="http://schemas.openxmlformats.org/officeDocument/2006/relationships" xmlns:p="http://schemas.openxmlformats.org/presentationml/2006/main" type="tx">
+<p:sldLayout xmlns:a="http://schemas.openxmlformats.org/drawingml/2006/main" xmlns:r="http://schemas.openxmlformats.org/officeDocument/2006/relationships" xmlns:p="http://schemas.openxmlformats.org/presentationml/2006/main" xmlns:m="http://schemas.openxmlformats.org/officeDocument/2006/math" xmlns:a14="http://schemas.microsoft.com/office/drawing/2010/main" type="tx" showMasterSp="1" showMasterPhAnim="1">
   <p:cSld name="Title and Content 0">
     <p:spTree>
       <p:nvGrpSpPr>
@@ -804,28 +782,21 @@
       <p:sp>
         <p:nvSpPr>
           <p:cNvPr id="30" name="Title Text"/>
-          <p:cNvSpPr txBox="1">
-            <a:spLocks noGrp="1"/>
-          </p:cNvSpPr>
+          <p:cNvSpPr txBox="1"/>
           <p:nvPr>
             <p:ph type="title"/>
           </p:nvPr>
         </p:nvSpPr>
         <p:spPr>
-          <a:xfrm>
-            <a:off x="912419" y="535057"/>
-            <a:ext cx="10010768" cy="1026795"/>
-          </a:xfrm>
           <a:prstGeom prst="rect">
             <a:avLst/>
           </a:prstGeom>
         </p:spPr>
         <p:txBody>
-          <a:bodyPr>
-            <a:normAutofit/>
-          </a:bodyPr>
+          <a:bodyPr/>
           <a:lstStyle/>
           <a:p>
+            <a:pPr/>
             <a:r>
               <a:t>Title Text</a:t>
             </a:r>
@@ -835,9 +806,7 @@
       <p:sp>
         <p:nvSpPr>
           <p:cNvPr id="31" name="Body Level One…"/>
-          <p:cNvSpPr txBox="1">
-            <a:spLocks noGrp="1"/>
-          </p:cNvSpPr>
+          <p:cNvSpPr txBox="1"/>
           <p:nvPr>
             <p:ph type="body" sz="half" idx="1"/>
           </p:nvPr>
@@ -845,18 +814,17 @@
         <p:spPr>
           <a:xfrm>
             <a:off x="10366175" y="3376860"/>
-            <a:ext cx="8458201" cy="5505451"/>
+            <a:ext cx="8458201" cy="5505452"/>
           </a:xfrm>
           <a:prstGeom prst="rect">
             <a:avLst/>
           </a:prstGeom>
         </p:spPr>
         <p:txBody>
-          <a:bodyPr>
-            <a:normAutofit/>
-          </a:bodyPr>
+          <a:bodyPr/>
           <a:lstStyle/>
           <a:p>
+            <a:pPr/>
             <a:r>
               <a:t>Body Level One</a:t>
             </a:r>
@@ -890,9 +858,7 @@
       <p:sp>
         <p:nvSpPr>
           <p:cNvPr id="32" name="Slide Number"/>
-          <p:cNvSpPr txBox="1">
-            <a:spLocks noGrp="1"/>
-          </p:cNvSpPr>
+          <p:cNvSpPr txBox="1"/>
           <p:nvPr>
             <p:ph type="sldNum" sz="quarter" idx="2"/>
           </p:nvPr>
@@ -906,10 +872,8 @@
           <a:bodyPr/>
           <a:lstStyle/>
           <a:p>
-            <a:fld id="{86CB4B4D-7CA3-9044-876B-883B54F8677D}" type="slidenum">
-              <a:t>‹Nº›</a:t>
-            </a:fld>
-            <a:endParaRPr/>
+            <a:pPr/>
+            <a:fld id="{86CB4B4D-7CA3-9044-876B-883B54F8677D}" type="slidenum"/>
           </a:p>
         </p:txBody>
       </p:sp>
@@ -918,12 +882,12 @@
   <p:clrMapOvr>
     <a:masterClrMapping/>
   </p:clrMapOvr>
-  <p:transition spd="med"/>
+  <p:transition xmlns:p14="http://schemas.microsoft.com/office/powerpoint/2010/main" spd="med" advClick="1"/>
 </p:sldLayout>
 </file>
 
 <file path=ppt/slideLayouts/slideLayout4.xml><?xml version="1.0" encoding="utf-8"?>
-<p:sldLayout xmlns:a="http://schemas.openxmlformats.org/drawingml/2006/main" xmlns:r="http://schemas.openxmlformats.org/officeDocument/2006/relationships" xmlns:p="http://schemas.openxmlformats.org/presentationml/2006/main" type="tx">
+<p:sldLayout xmlns:a="http://schemas.openxmlformats.org/drawingml/2006/main" xmlns:r="http://schemas.openxmlformats.org/officeDocument/2006/relationships" xmlns:p="http://schemas.openxmlformats.org/presentationml/2006/main" xmlns:m="http://schemas.openxmlformats.org/officeDocument/2006/math" xmlns:a14="http://schemas.microsoft.com/office/drawing/2010/main" type="tx" showMasterSp="1" showMasterPhAnim="1">
   <p:cSld name="Two Content">
     <p:spTree>
       <p:nvGrpSpPr>
@@ -942,28 +906,21 @@
       <p:sp>
         <p:nvSpPr>
           <p:cNvPr id="39" name="Title Text"/>
-          <p:cNvSpPr txBox="1">
-            <a:spLocks noGrp="1"/>
-          </p:cNvSpPr>
+          <p:cNvSpPr txBox="1"/>
           <p:nvPr>
             <p:ph type="title"/>
           </p:nvPr>
         </p:nvSpPr>
         <p:spPr>
-          <a:xfrm>
-            <a:off x="912419" y="535057"/>
-            <a:ext cx="10010768" cy="1026795"/>
-          </a:xfrm>
           <a:prstGeom prst="rect">
             <a:avLst/>
           </a:prstGeom>
         </p:spPr>
         <p:txBody>
-          <a:bodyPr>
-            <a:normAutofit/>
-          </a:bodyPr>
+          <a:bodyPr/>
           <a:lstStyle/>
           <a:p>
+            <a:pPr/>
             <a:r>
               <a:t>Title Text</a:t>
             </a:r>
@@ -973,28 +930,21 @@
       <p:sp>
         <p:nvSpPr>
           <p:cNvPr id="40" name="Body Level One…"/>
-          <p:cNvSpPr txBox="1">
-            <a:spLocks noGrp="1"/>
-          </p:cNvSpPr>
+          <p:cNvSpPr txBox="1"/>
           <p:nvPr>
             <p:ph type="body" sz="half" idx="1"/>
           </p:nvPr>
         </p:nvSpPr>
         <p:spPr>
-          <a:xfrm>
-            <a:off x="1005205" y="2601149"/>
-            <a:ext cx="8745285" cy="7464172"/>
-          </a:xfrm>
           <a:prstGeom prst="rect">
             <a:avLst/>
           </a:prstGeom>
         </p:spPr>
         <p:txBody>
-          <a:bodyPr>
-            <a:normAutofit/>
-          </a:bodyPr>
+          <a:bodyPr/>
           <a:lstStyle/>
           <a:p>
+            <a:pPr/>
             <a:r>
               <a:t>Body Level One</a:t>
             </a:r>
@@ -1028,9 +978,7 @@
       <p:sp>
         <p:nvSpPr>
           <p:cNvPr id="41" name="Slide Number"/>
-          <p:cNvSpPr txBox="1">
-            <a:spLocks noGrp="1"/>
-          </p:cNvSpPr>
+          <p:cNvSpPr txBox="1"/>
           <p:nvPr>
             <p:ph type="sldNum" sz="quarter" idx="2"/>
           </p:nvPr>
@@ -1044,10 +992,8 @@
           <a:bodyPr/>
           <a:lstStyle/>
           <a:p>
-            <a:fld id="{86CB4B4D-7CA3-9044-876B-883B54F8677D}" type="slidenum">
-              <a:t>‹Nº›</a:t>
-            </a:fld>
-            <a:endParaRPr/>
+            <a:pPr/>
+            <a:fld id="{86CB4B4D-7CA3-9044-876B-883B54F8677D}" type="slidenum"/>
           </a:p>
         </p:txBody>
       </p:sp>
@@ -1056,12 +1002,12 @@
   <p:clrMapOvr>
     <a:masterClrMapping/>
   </p:clrMapOvr>
-  <p:transition spd="med"/>
+  <p:transition xmlns:p14="http://schemas.microsoft.com/office/powerpoint/2010/main" spd="med" advClick="1"/>
 </p:sldLayout>
 </file>
 
 <file path=ppt/slideLayouts/slideLayout5.xml><?xml version="1.0" encoding="utf-8"?>
-<p:sldLayout xmlns:a="http://schemas.openxmlformats.org/drawingml/2006/main" xmlns:r="http://schemas.openxmlformats.org/officeDocument/2006/relationships" xmlns:p="http://schemas.openxmlformats.org/presentationml/2006/main" type="tx">
+<p:sldLayout xmlns:a="http://schemas.openxmlformats.org/drawingml/2006/main" xmlns:r="http://schemas.openxmlformats.org/officeDocument/2006/relationships" xmlns:p="http://schemas.openxmlformats.org/presentationml/2006/main" xmlns:m="http://schemas.openxmlformats.org/officeDocument/2006/math" xmlns:a14="http://schemas.microsoft.com/office/drawing/2010/main" type="tx" showMasterSp="1" showMasterPhAnim="1">
   <p:cSld name="Title Only">
     <p:spTree>
       <p:nvGrpSpPr>
@@ -1080,28 +1026,21 @@
       <p:sp>
         <p:nvSpPr>
           <p:cNvPr id="48" name="Title Text"/>
-          <p:cNvSpPr txBox="1">
-            <a:spLocks noGrp="1"/>
-          </p:cNvSpPr>
+          <p:cNvSpPr txBox="1"/>
           <p:nvPr>
             <p:ph type="title"/>
           </p:nvPr>
         </p:nvSpPr>
         <p:spPr>
-          <a:xfrm>
-            <a:off x="912419" y="535057"/>
-            <a:ext cx="10010768" cy="1026795"/>
-          </a:xfrm>
           <a:prstGeom prst="rect">
             <a:avLst/>
           </a:prstGeom>
         </p:spPr>
         <p:txBody>
-          <a:bodyPr>
-            <a:normAutofit/>
-          </a:bodyPr>
+          <a:bodyPr/>
           <a:lstStyle/>
           <a:p>
+            <a:pPr/>
             <a:r>
               <a:t>Title Text</a:t>
             </a:r>
@@ -1111,9 +1050,7 @@
       <p:sp>
         <p:nvSpPr>
           <p:cNvPr id="49" name="Slide Number"/>
-          <p:cNvSpPr txBox="1">
-            <a:spLocks noGrp="1"/>
-          </p:cNvSpPr>
+          <p:cNvSpPr txBox="1"/>
           <p:nvPr>
             <p:ph type="sldNum" sz="quarter" idx="2"/>
           </p:nvPr>
@@ -1127,10 +1064,8 @@
           <a:bodyPr/>
           <a:lstStyle/>
           <a:p>
-            <a:fld id="{86CB4B4D-7CA3-9044-876B-883B54F8677D}" type="slidenum">
-              <a:t>‹Nº›</a:t>
-            </a:fld>
-            <a:endParaRPr/>
+            <a:pPr/>
+            <a:fld id="{86CB4B4D-7CA3-9044-876B-883B54F8677D}" type="slidenum"/>
           </a:p>
         </p:txBody>
       </p:sp>
@@ -1139,12 +1074,12 @@
   <p:clrMapOvr>
     <a:masterClrMapping/>
   </p:clrMapOvr>
-  <p:transition spd="med"/>
+  <p:transition xmlns:p14="http://schemas.microsoft.com/office/powerpoint/2010/main" spd="med" advClick="1"/>
 </p:sldLayout>
 </file>
 
 <file path=ppt/slideLayouts/slideLayout6.xml><?xml version="1.0" encoding="utf-8"?>
-<p:sldLayout xmlns:a="http://schemas.openxmlformats.org/drawingml/2006/main" xmlns:r="http://schemas.openxmlformats.org/officeDocument/2006/relationships" xmlns:p="http://schemas.openxmlformats.org/presentationml/2006/main" type="tx">
+<p:sldLayout xmlns:a="http://schemas.openxmlformats.org/drawingml/2006/main" xmlns:r="http://schemas.openxmlformats.org/officeDocument/2006/relationships" xmlns:p="http://schemas.openxmlformats.org/presentationml/2006/main" xmlns:m="http://schemas.openxmlformats.org/officeDocument/2006/math" xmlns:a14="http://schemas.microsoft.com/office/drawing/2010/main" type="tx" showMasterSp="1" showMasterPhAnim="1">
   <p:cSld name="Blank">
     <p:spTree>
       <p:nvGrpSpPr>
@@ -1163,9 +1098,7 @@
       <p:sp>
         <p:nvSpPr>
           <p:cNvPr id="56" name="Slide Number"/>
-          <p:cNvSpPr txBox="1">
-            <a:spLocks noGrp="1"/>
-          </p:cNvSpPr>
+          <p:cNvSpPr txBox="1"/>
           <p:nvPr>
             <p:ph type="sldNum" sz="quarter" idx="2"/>
           </p:nvPr>
@@ -1179,10 +1112,8 @@
           <a:bodyPr/>
           <a:lstStyle/>
           <a:p>
-            <a:fld id="{86CB4B4D-7CA3-9044-876B-883B54F8677D}" type="slidenum">
-              <a:t>‹Nº›</a:t>
-            </a:fld>
-            <a:endParaRPr/>
+            <a:pPr/>
+            <a:fld id="{86CB4B4D-7CA3-9044-876B-883B54F8677D}" type="slidenum"/>
           </a:p>
         </p:txBody>
       </p:sp>
@@ -1191,19 +1122,18 @@
   <p:clrMapOvr>
     <a:masterClrMapping/>
   </p:clrMapOvr>
-  <p:transition spd="med"/>
+  <p:transition xmlns:p14="http://schemas.microsoft.com/office/powerpoint/2010/main" spd="med" advClick="1"/>
 </p:sldLayout>
 </file>
 
 <file path=ppt/slideMasters/slideMaster1.xml><?xml version="1.0" encoding="utf-8"?>
-<p:sldMaster xmlns:a="http://schemas.openxmlformats.org/drawingml/2006/main" xmlns:r="http://schemas.openxmlformats.org/officeDocument/2006/relationships" xmlns:p="http://schemas.openxmlformats.org/presentationml/2006/main">
+<p:sldMaster xmlns:a="http://schemas.openxmlformats.org/drawingml/2006/main" xmlns:r="http://schemas.openxmlformats.org/officeDocument/2006/relationships" xmlns:p="http://schemas.openxmlformats.org/presentationml/2006/main" xmlns:m="http://schemas.openxmlformats.org/officeDocument/2006/math" xmlns:a14="http://schemas.microsoft.com/office/drawing/2010/main">
   <p:cSld>
     <p:bg>
       <p:bgPr>
         <a:solidFill>
           <a:srgbClr val="FFFFFF"/>
         </a:solidFill>
-        <a:effectLst/>
       </p:bgPr>
     </p:bg>
     <p:spTree>
@@ -1223,17 +1153,15 @@
       <p:sp>
         <p:nvSpPr>
           <p:cNvPr id="2" name="Title Text"/>
-          <p:cNvSpPr txBox="1">
-            <a:spLocks noGrp="1"/>
-          </p:cNvSpPr>
+          <p:cNvSpPr txBox="1"/>
           <p:nvPr>
             <p:ph type="title"/>
           </p:nvPr>
         </p:nvSpPr>
         <p:spPr>
           <a:xfrm>
-            <a:off x="1005205" y="452643"/>
-            <a:ext cx="18093690" cy="2184724"/>
+            <a:off x="912419" y="535057"/>
+            <a:ext cx="10010769" cy="1026796"/>
           </a:xfrm>
           <a:prstGeom prst="rect">
             <a:avLst/>
@@ -1243,14 +1171,17 @@
           </a:ln>
           <a:extLst>
             <a:ext uri="{C572A759-6A51-4108-AA02-DFA0A04FC94B}">
-              <ma14:wrappingTextBoxFlag xmlns:ma14="http://schemas.microsoft.com/office/mac/drawingml/2011/main" xmlns:a14="http://schemas.microsoft.com/office/drawing/2010/main" xmlns:m="http://schemas.openxmlformats.org/officeDocument/2006/math" xmlns="" val="1"/>
+              <ma14:wrappingTextBoxFlag xmlns:ma14="http://schemas.microsoft.com/office/mac/drawingml/2011/main" val="1"/>
             </a:ext>
           </a:extLst>
         </p:spPr>
         <p:txBody>
-          <a:bodyPr lIns="0" tIns="0" rIns="0" bIns="0"/>
+          <a:bodyPr lIns="0" tIns="0" rIns="0" bIns="0">
+            <a:normAutofit fontScale="100000" lnSpcReduction="0"/>
+          </a:bodyPr>
           <a:lstStyle/>
           <a:p>
+            <a:pPr/>
             <a:r>
               <a:t>Title Text</a:t>
             </a:r>
@@ -1260,17 +1191,15 @@
       <p:sp>
         <p:nvSpPr>
           <p:cNvPr id="3" name="Body Level One…"/>
-          <p:cNvSpPr txBox="1">
-            <a:spLocks noGrp="1"/>
-          </p:cNvSpPr>
+          <p:cNvSpPr txBox="1"/>
           <p:nvPr>
             <p:ph type="body" idx="1"/>
           </p:nvPr>
         </p:nvSpPr>
         <p:spPr>
           <a:xfrm>
-            <a:off x="1005205" y="2637366"/>
-            <a:ext cx="18093690" cy="8665635"/>
+            <a:off x="1005205" y="2601148"/>
+            <a:ext cx="8745285" cy="7464174"/>
           </a:xfrm>
           <a:prstGeom prst="rect">
             <a:avLst/>
@@ -1280,14 +1209,17 @@
           </a:ln>
           <a:extLst>
             <a:ext uri="{C572A759-6A51-4108-AA02-DFA0A04FC94B}">
-              <ma14:wrappingTextBoxFlag xmlns:ma14="http://schemas.microsoft.com/office/mac/drawingml/2011/main" xmlns:a14="http://schemas.microsoft.com/office/drawing/2010/main" xmlns:m="http://schemas.openxmlformats.org/officeDocument/2006/math" xmlns="" val="1"/>
+              <ma14:wrappingTextBoxFlag xmlns:ma14="http://schemas.microsoft.com/office/mac/drawingml/2011/main" val="1"/>
             </a:ext>
           </a:extLst>
         </p:spPr>
         <p:txBody>
-          <a:bodyPr lIns="0" tIns="0" rIns="0" bIns="0"/>
+          <a:bodyPr lIns="0" tIns="0" rIns="0" bIns="0">
+            <a:normAutofit fontScale="100000" lnSpcReduction="0"/>
+          </a:bodyPr>
           <a:lstStyle/>
           <a:p>
+            <a:pPr/>
             <a:r>
               <a:t>Body Level One</a:t>
             </a:r>
@@ -1321,16 +1253,14 @@
       <p:sp>
         <p:nvSpPr>
           <p:cNvPr id="4" name="Slide Number"/>
-          <p:cNvSpPr txBox="1">
-            <a:spLocks noGrp="1"/>
-          </p:cNvSpPr>
+          <p:cNvSpPr txBox="1"/>
           <p:nvPr>
             <p:ph type="sldNum" sz="quarter" idx="2"/>
           </p:nvPr>
         </p:nvSpPr>
         <p:spPr>
           <a:xfrm>
-            <a:off x="18831923" y="10517695"/>
+            <a:off x="18831924" y="10517695"/>
             <a:ext cx="266974" cy="279401"/>
           </a:xfrm>
           <a:prstGeom prst="rect">
@@ -1358,10 +1288,8 @@
             </a:lvl1pPr>
           </a:lstStyle>
           <a:p>
-            <a:fld id="{86CB4B4D-7CA3-9044-876B-883B54F8677D}" type="slidenum">
-              <a:t>‹Nº›</a:t>
-            </a:fld>
-            <a:endParaRPr/>
+            <a:pPr/>
+            <a:fld id="{86CB4B4D-7CA3-9044-876B-883B54F8677D}" type="slidenum"/>
           </a:p>
         </p:txBody>
       </p:sp>
@@ -1369,14 +1297,14 @@
   </p:cSld>
   <p:clrMap bg1="lt1" tx1="dk1" bg2="lt2" tx2="dk2" accent1="accent1" accent2="accent2" accent3="accent3" accent4="accent4" accent5="accent5" accent6="accent6" hlink="hlink" folHlink="folHlink"/>
   <p:sldLayoutIdLst>
-    <p:sldLayoutId id="2147483649" r:id="rId1"/>
-    <p:sldLayoutId id="2147483650" r:id="rId2"/>
-    <p:sldLayoutId id="2147483651" r:id="rId3"/>
-    <p:sldLayoutId id="2147483652" r:id="rId4"/>
-    <p:sldLayoutId id="2147483653" r:id="rId5"/>
-    <p:sldLayoutId id="2147483654" r:id="rId6"/>
+    <p:sldLayoutId id="2147483649" r:id="rId2"/>
+    <p:sldLayoutId id="2147483650" r:id="rId3"/>
+    <p:sldLayoutId id="2147483651" r:id="rId4"/>
+    <p:sldLayoutId id="2147483652" r:id="rId5"/>
+    <p:sldLayoutId id="2147483653" r:id="rId6"/>
+    <p:sldLayoutId id="2147483654" r:id="rId7"/>
   </p:sldLayoutIdLst>
-  <p:transition spd="med"/>
+  <p:transition xmlns:p14="http://schemas.microsoft.com/office/powerpoint/2010/main" spd="med" advClick="1"/>
   <p:txStyles>
     <p:titleStyle>
       <a:lvl1pPr marL="0" marR="0" indent="0" algn="l" defTabSz="914400" rtl="0" latinLnBrk="0">
@@ -1394,7 +1322,7 @@
         <a:buFontTx/>
         <a:buNone/>
         <a:tabLst/>
-        <a:defRPr sz="6500" b="0" i="0" u="none" strike="noStrike" cap="none" spc="0" baseline="0">
+        <a:defRPr b="0" baseline="0" cap="none" i="0" spc="0" strike="noStrike" sz="6500" u="none">
           <a:solidFill>
             <a:srgbClr val="FFFFFF"/>
           </a:solidFill>
@@ -1420,7 +1348,7 @@
         <a:buFontTx/>
         <a:buNone/>
         <a:tabLst/>
-        <a:defRPr sz="6500" b="0" i="0" u="none" strike="noStrike" cap="none" spc="0" baseline="0">
+        <a:defRPr b="0" baseline="0" cap="none" i="0" spc="0" strike="noStrike" sz="6500" u="none">
           <a:solidFill>
             <a:srgbClr val="FFFFFF"/>
           </a:solidFill>
@@ -1446,7 +1374,7 @@
         <a:buFontTx/>
         <a:buNone/>
         <a:tabLst/>
-        <a:defRPr sz="6500" b="0" i="0" u="none" strike="noStrike" cap="none" spc="0" baseline="0">
+        <a:defRPr b="0" baseline="0" cap="none" i="0" spc="0" strike="noStrike" sz="6500" u="none">
           <a:solidFill>
             <a:srgbClr val="FFFFFF"/>
           </a:solidFill>
@@ -1472,7 +1400,7 @@
         <a:buFontTx/>
         <a:buNone/>
         <a:tabLst/>
-        <a:defRPr sz="6500" b="0" i="0" u="none" strike="noStrike" cap="none" spc="0" baseline="0">
+        <a:defRPr b="0" baseline="0" cap="none" i="0" spc="0" strike="noStrike" sz="6500" u="none">
           <a:solidFill>
             <a:srgbClr val="FFFFFF"/>
           </a:solidFill>
@@ -1498,7 +1426,7 @@
         <a:buFontTx/>
         <a:buNone/>
         <a:tabLst/>
-        <a:defRPr sz="6500" b="0" i="0" u="none" strike="noStrike" cap="none" spc="0" baseline="0">
+        <a:defRPr b="0" baseline="0" cap="none" i="0" spc="0" strike="noStrike" sz="6500" u="none">
           <a:solidFill>
             <a:srgbClr val="FFFFFF"/>
           </a:solidFill>
@@ -1524,7 +1452,7 @@
         <a:buFontTx/>
         <a:buNone/>
         <a:tabLst/>
-        <a:defRPr sz="6500" b="0" i="0" u="none" strike="noStrike" cap="none" spc="0" baseline="0">
+        <a:defRPr b="0" baseline="0" cap="none" i="0" spc="0" strike="noStrike" sz="6500" u="none">
           <a:solidFill>
             <a:srgbClr val="FFFFFF"/>
           </a:solidFill>
@@ -1550,7 +1478,7 @@
         <a:buFontTx/>
         <a:buNone/>
         <a:tabLst/>
-        <a:defRPr sz="6500" b="0" i="0" u="none" strike="noStrike" cap="none" spc="0" baseline="0">
+        <a:defRPr b="0" baseline="0" cap="none" i="0" spc="0" strike="noStrike" sz="6500" u="none">
           <a:solidFill>
             <a:srgbClr val="FFFFFF"/>
           </a:solidFill>
@@ -1576,7 +1504,7 @@
         <a:buFontTx/>
         <a:buNone/>
         <a:tabLst/>
-        <a:defRPr sz="6500" b="0" i="0" u="none" strike="noStrike" cap="none" spc="0" baseline="0">
+        <a:defRPr b="0" baseline="0" cap="none" i="0" spc="0" strike="noStrike" sz="6500" u="none">
           <a:solidFill>
             <a:srgbClr val="FFFFFF"/>
           </a:solidFill>
@@ -1602,7 +1530,7 @@
         <a:buFontTx/>
         <a:buNone/>
         <a:tabLst/>
-        <a:defRPr sz="6500" b="0" i="0" u="none" strike="noStrike" cap="none" spc="0" baseline="0">
+        <a:defRPr b="0" baseline="0" cap="none" i="0" spc="0" strike="noStrike" sz="6500" u="none">
           <a:solidFill>
             <a:srgbClr val="FFFFFF"/>
           </a:solidFill>
@@ -1630,7 +1558,7 @@
         <a:buFontTx/>
         <a:buNone/>
         <a:tabLst/>
-        <a:defRPr sz="1800" b="0" i="0" u="none" strike="noStrike" cap="none" spc="0" baseline="0">
+        <a:defRPr b="0" baseline="0" cap="none" i="0" spc="0" strike="noStrike" sz="1800" u="none">
           <a:solidFill>
             <a:srgbClr val="000000"/>
           </a:solidFill>
@@ -1641,7 +1569,7 @@
           <a:sym typeface="Calibri"/>
         </a:defRPr>
       </a:lvl1pPr>
-      <a:lvl2pPr marL="0" marR="0" indent="457200" algn="l" defTabSz="914400" rtl="0" latinLnBrk="0">
+      <a:lvl2pPr marL="0" marR="0" indent="0" algn="l" defTabSz="914400" rtl="0" latinLnBrk="0">
         <a:lnSpc>
           <a:spcPct val="100000"/>
         </a:lnSpc>
@@ -1656,7 +1584,7 @@
         <a:buFontTx/>
         <a:buNone/>
         <a:tabLst/>
-        <a:defRPr sz="1800" b="0" i="0" u="none" strike="noStrike" cap="none" spc="0" baseline="0">
+        <a:defRPr b="0" baseline="0" cap="none" i="0" spc="0" strike="noStrike" sz="1800" u="none">
           <a:solidFill>
             <a:srgbClr val="000000"/>
           </a:solidFill>
@@ -1667,7 +1595,7 @@
           <a:sym typeface="Calibri"/>
         </a:defRPr>
       </a:lvl2pPr>
-      <a:lvl3pPr marL="0" marR="0" indent="914400" algn="l" defTabSz="914400" rtl="0" latinLnBrk="0">
+      <a:lvl3pPr marL="0" marR="0" indent="0" algn="l" defTabSz="914400" rtl="0" latinLnBrk="0">
         <a:lnSpc>
           <a:spcPct val="100000"/>
         </a:lnSpc>
@@ -1682,7 +1610,7 @@
         <a:buFontTx/>
         <a:buNone/>
         <a:tabLst/>
-        <a:defRPr sz="1800" b="0" i="0" u="none" strike="noStrike" cap="none" spc="0" baseline="0">
+        <a:defRPr b="0" baseline="0" cap="none" i="0" spc="0" strike="noStrike" sz="1800" u="none">
           <a:solidFill>
             <a:srgbClr val="000000"/>
           </a:solidFill>
@@ -1693,7 +1621,7 @@
           <a:sym typeface="Calibri"/>
         </a:defRPr>
       </a:lvl3pPr>
-      <a:lvl4pPr marL="0" marR="0" indent="1371600" algn="l" defTabSz="914400" rtl="0" latinLnBrk="0">
+      <a:lvl4pPr marL="0" marR="0" indent="0" algn="l" defTabSz="914400" rtl="0" latinLnBrk="0">
         <a:lnSpc>
           <a:spcPct val="100000"/>
         </a:lnSpc>
@@ -1708,7 +1636,7 @@
         <a:buFontTx/>
         <a:buNone/>
         <a:tabLst/>
-        <a:defRPr sz="1800" b="0" i="0" u="none" strike="noStrike" cap="none" spc="0" baseline="0">
+        <a:defRPr b="0" baseline="0" cap="none" i="0" spc="0" strike="noStrike" sz="1800" u="none">
           <a:solidFill>
             <a:srgbClr val="000000"/>
           </a:solidFill>
@@ -1719,7 +1647,7 @@
           <a:sym typeface="Calibri"/>
         </a:defRPr>
       </a:lvl4pPr>
-      <a:lvl5pPr marL="0" marR="0" indent="1828800" algn="l" defTabSz="914400" rtl="0" latinLnBrk="0">
+      <a:lvl5pPr marL="0" marR="0" indent="0" algn="l" defTabSz="914400" rtl="0" latinLnBrk="0">
         <a:lnSpc>
           <a:spcPct val="100000"/>
         </a:lnSpc>
@@ -1734,7 +1662,7 @@
         <a:buFontTx/>
         <a:buNone/>
         <a:tabLst/>
-        <a:defRPr sz="1800" b="0" i="0" u="none" strike="noStrike" cap="none" spc="0" baseline="0">
+        <a:defRPr b="0" baseline="0" cap="none" i="0" spc="0" strike="noStrike" sz="1800" u="none">
           <a:solidFill>
             <a:srgbClr val="000000"/>
           </a:solidFill>
@@ -1745,7 +1673,7 @@
           <a:sym typeface="Calibri"/>
         </a:defRPr>
       </a:lvl5pPr>
-      <a:lvl6pPr marL="0" marR="0" indent="2286000" algn="l" defTabSz="914400" rtl="0" latinLnBrk="0">
+      <a:lvl6pPr marL="0" marR="0" indent="0" algn="l" defTabSz="914400" rtl="0" latinLnBrk="0">
         <a:lnSpc>
           <a:spcPct val="100000"/>
         </a:lnSpc>
@@ -1760,7 +1688,7 @@
         <a:buFontTx/>
         <a:buNone/>
         <a:tabLst/>
-        <a:defRPr sz="1800" b="0" i="0" u="none" strike="noStrike" cap="none" spc="0" baseline="0">
+        <a:defRPr b="0" baseline="0" cap="none" i="0" spc="0" strike="noStrike" sz="1800" u="none">
           <a:solidFill>
             <a:srgbClr val="000000"/>
           </a:solidFill>
@@ -1771,7 +1699,7 @@
           <a:sym typeface="Calibri"/>
         </a:defRPr>
       </a:lvl6pPr>
-      <a:lvl7pPr marL="0" marR="0" indent="2743200" algn="l" defTabSz="914400" rtl="0" latinLnBrk="0">
+      <a:lvl7pPr marL="0" marR="0" indent="0" algn="l" defTabSz="914400" rtl="0" latinLnBrk="0">
         <a:lnSpc>
           <a:spcPct val="100000"/>
         </a:lnSpc>
@@ -1786,7 +1714,7 @@
         <a:buFontTx/>
         <a:buNone/>
         <a:tabLst/>
-        <a:defRPr sz="1800" b="0" i="0" u="none" strike="noStrike" cap="none" spc="0" baseline="0">
+        <a:defRPr b="0" baseline="0" cap="none" i="0" spc="0" strike="noStrike" sz="1800" u="none">
           <a:solidFill>
             <a:srgbClr val="000000"/>
           </a:solidFill>
@@ -1797,7 +1725,7 @@
           <a:sym typeface="Calibri"/>
         </a:defRPr>
       </a:lvl7pPr>
-      <a:lvl8pPr marL="0" marR="0" indent="3200400" algn="l" defTabSz="914400" rtl="0" latinLnBrk="0">
+      <a:lvl8pPr marL="0" marR="0" indent="0" algn="l" defTabSz="914400" rtl="0" latinLnBrk="0">
         <a:lnSpc>
           <a:spcPct val="100000"/>
         </a:lnSpc>
@@ -1812,7 +1740,7 @@
         <a:buFontTx/>
         <a:buNone/>
         <a:tabLst/>
-        <a:defRPr sz="1800" b="0" i="0" u="none" strike="noStrike" cap="none" spc="0" baseline="0">
+        <a:defRPr b="0" baseline="0" cap="none" i="0" spc="0" strike="noStrike" sz="1800" u="none">
           <a:solidFill>
             <a:srgbClr val="000000"/>
           </a:solidFill>
@@ -1823,7 +1751,7 @@
           <a:sym typeface="Calibri"/>
         </a:defRPr>
       </a:lvl8pPr>
-      <a:lvl9pPr marL="0" marR="0" indent="3657600" algn="l" defTabSz="914400" rtl="0" latinLnBrk="0">
+      <a:lvl9pPr marL="0" marR="0" indent="0" algn="l" defTabSz="914400" rtl="0" latinLnBrk="0">
         <a:lnSpc>
           <a:spcPct val="100000"/>
         </a:lnSpc>
@@ -1838,7 +1766,7 @@
         <a:buFontTx/>
         <a:buNone/>
         <a:tabLst/>
-        <a:defRPr sz="1800" b="0" i="0" u="none" strike="noStrike" cap="none" spc="0" baseline="0">
+        <a:defRPr b="0" baseline="0" cap="none" i="0" spc="0" strike="noStrike" sz="1800" u="none">
           <a:solidFill>
             <a:srgbClr val="000000"/>
           </a:solidFill>
@@ -1866,7 +1794,7 @@
         <a:buFontTx/>
         <a:buNone/>
         <a:tabLst/>
-        <a:defRPr sz="1800" b="0" i="0" u="none" strike="noStrike" cap="none" spc="0" baseline="0">
+        <a:defRPr b="0" baseline="0" cap="none" i="0" spc="0" strike="noStrike" sz="1800" u="none">
           <a:solidFill>
             <a:schemeClr val="tx1"/>
           </a:solidFill>
@@ -1892,7 +1820,7 @@
         <a:buFontTx/>
         <a:buNone/>
         <a:tabLst/>
-        <a:defRPr sz="1800" b="0" i="0" u="none" strike="noStrike" cap="none" spc="0" baseline="0">
+        <a:defRPr b="0" baseline="0" cap="none" i="0" spc="0" strike="noStrike" sz="1800" u="none">
           <a:solidFill>
             <a:schemeClr val="tx1"/>
           </a:solidFill>
@@ -1918,7 +1846,7 @@
         <a:buFontTx/>
         <a:buNone/>
         <a:tabLst/>
-        <a:defRPr sz="1800" b="0" i="0" u="none" strike="noStrike" cap="none" spc="0" baseline="0">
+        <a:defRPr b="0" baseline="0" cap="none" i="0" spc="0" strike="noStrike" sz="1800" u="none">
           <a:solidFill>
             <a:schemeClr val="tx1"/>
           </a:solidFill>
@@ -1944,7 +1872,7 @@
         <a:buFontTx/>
         <a:buNone/>
         <a:tabLst/>
-        <a:defRPr sz="1800" b="0" i="0" u="none" strike="noStrike" cap="none" spc="0" baseline="0">
+        <a:defRPr b="0" baseline="0" cap="none" i="0" spc="0" strike="noStrike" sz="1800" u="none">
           <a:solidFill>
             <a:schemeClr val="tx1"/>
           </a:solidFill>
@@ -1970,7 +1898,7 @@
         <a:buFontTx/>
         <a:buNone/>
         <a:tabLst/>
-        <a:defRPr sz="1800" b="0" i="0" u="none" strike="noStrike" cap="none" spc="0" baseline="0">
+        <a:defRPr b="0" baseline="0" cap="none" i="0" spc="0" strike="noStrike" sz="1800" u="none">
           <a:solidFill>
             <a:schemeClr val="tx1"/>
           </a:solidFill>
@@ -1996,7 +1924,7 @@
         <a:buFontTx/>
         <a:buNone/>
         <a:tabLst/>
-        <a:defRPr sz="1800" b="0" i="0" u="none" strike="noStrike" cap="none" spc="0" baseline="0">
+        <a:defRPr b="0" baseline="0" cap="none" i="0" spc="0" strike="noStrike" sz="1800" u="none">
           <a:solidFill>
             <a:schemeClr val="tx1"/>
           </a:solidFill>
@@ -2022,7 +1950,7 @@
         <a:buFontTx/>
         <a:buNone/>
         <a:tabLst/>
-        <a:defRPr sz="1800" b="0" i="0" u="none" strike="noStrike" cap="none" spc="0" baseline="0">
+        <a:defRPr b="0" baseline="0" cap="none" i="0" spc="0" strike="noStrike" sz="1800" u="none">
           <a:solidFill>
             <a:schemeClr val="tx1"/>
           </a:solidFill>
@@ -2048,7 +1976,7 @@
         <a:buFontTx/>
         <a:buNone/>
         <a:tabLst/>
-        <a:defRPr sz="1800" b="0" i="0" u="none" strike="noStrike" cap="none" spc="0" baseline="0">
+        <a:defRPr b="0" baseline="0" cap="none" i="0" spc="0" strike="noStrike" sz="1800" u="none">
           <a:solidFill>
             <a:schemeClr val="tx1"/>
           </a:solidFill>
@@ -2074,7 +2002,7 @@
         <a:buFontTx/>
         <a:buNone/>
         <a:tabLst/>
-        <a:defRPr sz="1800" b="0" i="0" u="none" strike="noStrike" cap="none" spc="0" baseline="0">
+        <a:defRPr b="0" baseline="0" cap="none" i="0" spc="0" strike="noStrike" sz="1800" u="none">
           <a:solidFill>
             <a:schemeClr val="tx1"/>
           </a:solidFill>
@@ -2091,14 +2019,13 @@
 </file>
 
 <file path=ppt/slides/slide1.xml><?xml version="1.0" encoding="utf-8"?>
-<p:sld xmlns:a="http://schemas.openxmlformats.org/drawingml/2006/main" xmlns:r="http://schemas.openxmlformats.org/officeDocument/2006/relationships" xmlns:p="http://schemas.openxmlformats.org/presentationml/2006/main">
+<p:sld xmlns:a="http://schemas.openxmlformats.org/drawingml/2006/main" xmlns:r="http://schemas.openxmlformats.org/officeDocument/2006/relationships" xmlns:p="http://schemas.openxmlformats.org/presentationml/2006/main" xmlns:m="http://schemas.openxmlformats.org/officeDocument/2006/math" xmlns:a14="http://schemas.microsoft.com/office/drawing/2010/main" showMasterSp="1" showMasterPhAnim="1">
   <p:cSld>
     <p:bg>
       <p:bgPr>
         <a:solidFill>
           <a:srgbClr val="000000"/>
         </a:solidFill>
-        <a:effectLst/>
       </p:bgPr>
     </p:bg>
     <p:spTree>
@@ -2123,8 +2050,8 @@
         </p:nvSpPr>
         <p:spPr>
           <a:xfrm>
-            <a:off x="15707" y="2874258"/>
-            <a:ext cx="20080539" cy="871703"/>
+            <a:off x="15706" y="2874258"/>
+            <a:ext cx="20080540" cy="871704"/>
           </a:xfrm>
           <a:prstGeom prst="rect">
             <a:avLst/>
@@ -2137,27 +2064,32 @@
           </a:ln>
         </p:spPr>
         <p:txBody>
-          <a:bodyPr lIns="45719" rIns="45719"/>
+          <a:bodyPr lIns="45718" tIns="45718" rIns="45718" bIns="45718"/>
           <a:lstStyle/>
           <a:p>
-            <a:endParaRPr/>
+            <a:pPr>
+              <a:defRPr>
+                <a:latin typeface="Calibri"/>
+                <a:ea typeface="Calibri"/>
+                <a:cs typeface="Calibri"/>
+                <a:sym typeface="Calibri"/>
+              </a:defRPr>
+            </a:pPr>
           </a:p>
         </p:txBody>
       </p:sp>
       <p:sp>
         <p:nvSpPr>
           <p:cNvPr id="66" name="object 3"/>
-          <p:cNvSpPr txBox="1">
-            <a:spLocks noGrp="1"/>
-          </p:cNvSpPr>
+          <p:cNvSpPr txBox="1"/>
           <p:nvPr>
             <p:ph type="title"/>
           </p:nvPr>
         </p:nvSpPr>
         <p:spPr>
           <a:xfrm>
-            <a:off x="1900151" y="2548084"/>
-            <a:ext cx="16188691" cy="1419861"/>
+            <a:off x="1900151" y="2548083"/>
+            <a:ext cx="16188692" cy="1419863"/>
           </a:xfrm>
           <a:prstGeom prst="rect">
             <a:avLst/>
@@ -2167,8 +2099,8 @@
           <a:bodyPr/>
           <a:lstStyle/>
           <a:p>
-            <a:pPr indent="11429" defTabSz="822959">
-              <a:defRPr sz="8190" spc="-90">
+            <a:pPr indent="11428" defTabSz="822958">
+              <a:defRPr spc="-100" sz="8100">
                 <a:latin typeface="Avenir Book"/>
                 <a:ea typeface="Avenir Book"/>
                 <a:cs typeface="Avenir Book"/>
@@ -2179,19 +2111,19 @@
               <a:t>Pronóstico</a:t>
             </a:r>
             <a:r>
-              <a:rPr spc="270"/>
-              <a:t> </a:t>
-            </a:r>
-            <a:r>
-              <a:rPr spc="360"/>
+              <a:rPr spc="200"/>
+              <a:t> </a:t>
+            </a:r>
+            <a:r>
+              <a:rPr spc="300"/>
               <a:t>de</a:t>
             </a:r>
             <a:r>
-              <a:rPr spc="-450"/>
-              <a:t> </a:t>
-            </a:r>
-            <a:r>
-              <a:rPr spc="90">
+              <a:rPr spc="-500"/>
+              <a:t> </a:t>
+            </a:r>
+            <a:r>
+              <a:rPr spc="0">
                 <a:solidFill>
                   <a:srgbClr val="DFFF9A"/>
                 </a:solidFill>
@@ -2199,7 +2131,7 @@
               <a:t>Demanda</a:t>
             </a:r>
             <a:r>
-              <a:rPr spc="180">
+              <a:rPr spc="100">
                 <a:solidFill>
                   <a:srgbClr val="DFFF9A"/>
                 </a:solidFill>
@@ -2225,8 +2157,8 @@
         </p:nvSpPr>
         <p:spPr>
           <a:xfrm>
-            <a:off x="15707" y="4256413"/>
-            <a:ext cx="20080539" cy="824584"/>
+            <a:off x="15706" y="4256413"/>
+            <a:ext cx="20080540" cy="824585"/>
           </a:xfrm>
           <a:prstGeom prst="rect">
             <a:avLst/>
@@ -2239,10 +2171,17 @@
           </a:ln>
         </p:spPr>
         <p:txBody>
-          <a:bodyPr lIns="45719" rIns="45719"/>
+          <a:bodyPr lIns="45718" tIns="45718" rIns="45718" bIns="45718"/>
           <a:lstStyle/>
           <a:p>
-            <a:endParaRPr/>
+            <a:pPr>
+              <a:defRPr>
+                <a:latin typeface="Calibri"/>
+                <a:ea typeface="Calibri"/>
+                <a:cs typeface="Calibri"/>
+                <a:sym typeface="Calibri"/>
+              </a:defRPr>
+            </a:pPr>
           </a:p>
         </p:txBody>
       </p:sp>
@@ -2265,7 +2204,7 @@
           </a:ln>
           <a:extLst>
             <a:ext uri="{C572A759-6A51-4108-AA02-DFA0A04FC94B}">
-              <ma14:wrappingTextBoxFlag xmlns:ma14="http://schemas.microsoft.com/office/mac/drawingml/2011/main" xmlns:a14="http://schemas.microsoft.com/office/drawing/2010/main" xmlns:m="http://schemas.openxmlformats.org/officeDocument/2006/math" xmlns="" val="1"/>
+              <ma14:wrappingTextBoxFlag xmlns:ma14="http://schemas.microsoft.com/office/mac/drawingml/2011/main" val="1"/>
             </a:ext>
           </a:extLst>
         </p:spPr>
@@ -2278,7 +2217,7 @@
               <a:spcBef>
                 <a:spcPts val="100"/>
               </a:spcBef>
-              <a:defRPr sz="9200" spc="-950">
+              <a:defRPr spc="-950" sz="9200">
                 <a:solidFill>
                   <a:srgbClr val="FFFFFF"/>
                 </a:solidFill>
@@ -2290,6 +2229,7 @@
             </a:lvl1pPr>
           </a:lstStyle>
           <a:p>
+            <a:pPr/>
             <a:r>
               <a:t>GBA</a:t>
             </a:r>
@@ -2304,8 +2244,8 @@
         </p:nvSpPr>
         <p:spPr>
           <a:xfrm>
-            <a:off x="15707" y="5748516"/>
-            <a:ext cx="20080539" cy="337687"/>
+            <a:off x="15706" y="5748516"/>
+            <a:ext cx="20080540" cy="337688"/>
           </a:xfrm>
           <a:prstGeom prst="rect">
             <a:avLst/>
@@ -2318,10 +2258,17 @@
           </a:ln>
         </p:spPr>
         <p:txBody>
-          <a:bodyPr lIns="45719" rIns="45719"/>
+          <a:bodyPr lIns="45718" tIns="45718" rIns="45718" bIns="45718"/>
           <a:lstStyle/>
           <a:p>
-            <a:endParaRPr/>
+            <a:pPr>
+              <a:defRPr>
+                <a:latin typeface="Calibri"/>
+                <a:ea typeface="Calibri"/>
+                <a:cs typeface="Calibri"/>
+                <a:sym typeface="Calibri"/>
+              </a:defRPr>
+            </a:pPr>
           </a:p>
         </p:txBody>
       </p:sp>
@@ -2333,8 +2280,8 @@
         </p:nvSpPr>
         <p:spPr>
           <a:xfrm>
-            <a:off x="5428665" y="5667922"/>
-            <a:ext cx="9222742" cy="4216401"/>
+            <a:off x="5428665" y="5667921"/>
+            <a:ext cx="9222742" cy="3797301"/>
           </a:xfrm>
           <a:prstGeom prst="rect">
             <a:avLst/>
@@ -2344,7 +2291,7 @@
           </a:ln>
           <a:extLst>
             <a:ext uri="{C572A759-6A51-4108-AA02-DFA0A04FC94B}">
-              <ma14:wrappingTextBoxFlag xmlns:ma14="http://schemas.microsoft.com/office/mac/drawingml/2011/main" xmlns:a14="http://schemas.microsoft.com/office/drawing/2010/main" xmlns:m="http://schemas.openxmlformats.org/officeDocument/2006/math" xmlns="" val="1"/>
+              <ma14:wrappingTextBoxFlag xmlns:ma14="http://schemas.microsoft.com/office/mac/drawingml/2011/main" val="1"/>
             </a:ext>
           </a:extLst>
         </p:spPr>
@@ -2358,7 +2305,7 @@
               <a:spcBef>
                 <a:spcPts val="100"/>
               </a:spcBef>
-              <a:defRPr sz="2500" spc="-60">
+              <a:defRPr spc="-60" sz="2500">
                 <a:solidFill>
                   <a:srgbClr val="FFFFFF"/>
                 </a:solidFill>
@@ -2422,7 +2369,7 @@
           </a:p>
           <a:p>
             <a:pPr>
-              <a:defRPr sz="2500">
+              <a:defRPr spc="-10" sz="2500">
                 <a:solidFill>
                   <a:srgbClr val="FFFFFF"/>
                 </a:solidFill>
@@ -2432,11 +2379,10 @@
                 <a:sym typeface="Avenir Book"/>
               </a:defRPr>
             </a:pPr>
-            <a:endParaRPr spc="-10"/>
           </a:p>
           <a:p>
             <a:pPr algn="ctr">
-              <a:defRPr sz="2400" spc="-120">
+              <a:defRPr spc="-120" sz="2400">
                 <a:solidFill>
                   <a:srgbClr val="FFFFFF"/>
                 </a:solidFill>
@@ -2512,7 +2458,7 @@
           </a:p>
           <a:p>
             <a:pPr algn="ctr">
-              <a:defRPr sz="2400" spc="-120">
+              <a:defRPr spc="-35" sz="2400">
                 <a:solidFill>
                   <a:srgbClr val="FFFFFF"/>
                 </a:solidFill>
@@ -2522,11 +2468,37 @@
                 <a:sym typeface="Avenir Book"/>
               </a:defRPr>
             </a:pPr>
-            <a:endParaRPr spc="-35"/>
           </a:p>
           <a:p>
             <a:pPr>
-              <a:defRPr sz="2400" spc="-120">
+              <a:defRPr spc="-35" sz="2400">
+                <a:solidFill>
+                  <a:srgbClr val="FFFFFF"/>
+                </a:solidFill>
+                <a:latin typeface="Avenir Heavy"/>
+                <a:ea typeface="Avenir Heavy"/>
+                <a:cs typeface="Avenir Heavy"/>
+                <a:sym typeface="Avenir Heavy"/>
+              </a:defRPr>
+            </a:pPr>
+            <a:r>
+              <a:t>Integrantes:</a:t>
+            </a:r>
+            <a:br/>
+            <a:r>
+              <a:rPr spc="-120">
+                <a:latin typeface="Avenir Book"/>
+                <a:ea typeface="Avenir Book"/>
+                <a:cs typeface="Avenir Book"/>
+                <a:sym typeface="Avenir Book"/>
+              </a:rPr>
+              <a:t>Alexis Barniquez</a:t>
+            </a:r>
+            <a:endParaRPr spc="-120"/>
+          </a:p>
+          <a:p>
+            <a:pPr>
+              <a:defRPr sz="2400">
                 <a:solidFill>
                   <a:srgbClr val="FFFFFF"/>
                 </a:solidFill>
@@ -2537,24 +2509,7 @@
               </a:defRPr>
             </a:pPr>
             <a:r>
-              <a:rPr spc="-35">
-                <a:latin typeface="Avenir Heavy"/>
-                <a:ea typeface="Avenir Heavy"/>
-                <a:cs typeface="Avenir Heavy"/>
-                <a:sym typeface="Avenir Heavy"/>
-              </a:rPr>
-              <a:t>Integrantes:</a:t>
-            </a:r>
-            <a:br>
-              <a:rPr spc="-35">
-                <a:latin typeface="Avenir Heavy"/>
-                <a:ea typeface="Avenir Heavy"/>
-                <a:cs typeface="Avenir Heavy"/>
-                <a:sym typeface="Avenir Heavy"/>
-              </a:rPr>
-            </a:br>
-            <a:r>
-              <a:t>Alexis Barniquez</a:t>
+              <a:t>Barbara Cerezo</a:t>
             </a:r>
           </a:p>
           <a:p>
@@ -2570,38 +2525,8 @@
               </a:defRPr>
             </a:pPr>
             <a:r>
-              <a:t>Barbara Cerezo</a:t>
-            </a:r>
-          </a:p>
-          <a:p>
-            <a:pPr>
-              <a:defRPr sz="2400">
-                <a:solidFill>
-                  <a:srgbClr val="FFFFFF"/>
-                </a:solidFill>
-                <a:latin typeface="Avenir Book"/>
-                <a:ea typeface="Avenir Book"/>
-                <a:cs typeface="Avenir Book"/>
-                <a:sym typeface="Avenir Book"/>
-              </a:defRPr>
-            </a:pPr>
-            <a:r>
               <a:t>Daniel Paniagua</a:t>
             </a:r>
-          </a:p>
-          <a:p>
-            <a:pPr algn="ctr">
-              <a:defRPr sz="2400" spc="-120">
-                <a:solidFill>
-                  <a:srgbClr val="FFFFFF"/>
-                </a:solidFill>
-                <a:latin typeface="Avenir Book"/>
-                <a:ea typeface="Avenir Book"/>
-                <a:cs typeface="Avenir Book"/>
-                <a:sym typeface="Avenir Book"/>
-              </a:defRPr>
-            </a:pPr>
-            <a:endParaRPr spc="-35"/>
           </a:p>
         </p:txBody>
       </p:sp>
@@ -2614,15 +2539,17 @@
           <p:nvPr/>
         </p:nvPicPr>
         <p:blipFill>
-          <a:blip r:embed="rId2"/>
+          <a:blip r:embed="rId2">
+            <a:extLst/>
+          </a:blip>
           <a:stretch>
             <a:fillRect/>
           </a:stretch>
         </p:blipFill>
         <p:spPr>
           <a:xfrm>
-            <a:off x="11557338" y="7593374"/>
-            <a:ext cx="3427606" cy="1289284"/>
+            <a:off x="11557337" y="7593373"/>
+            <a:ext cx="3427607" cy="1289285"/>
           </a:xfrm>
           <a:prstGeom prst="rect">
             <a:avLst/>
@@ -2637,19 +2564,18 @@
   <p:clrMapOvr>
     <a:masterClrMapping/>
   </p:clrMapOvr>
-  <p:transition spd="med"/>
+  <p:transition xmlns:p14="http://schemas.microsoft.com/office/powerpoint/2010/main" spd="med" advClick="1"/>
 </p:sld>
 </file>
 
 <file path=ppt/slides/slide10.xml><?xml version="1.0" encoding="utf-8"?>
-<p:sld xmlns:a="http://schemas.openxmlformats.org/drawingml/2006/main" xmlns:r="http://schemas.openxmlformats.org/officeDocument/2006/relationships" xmlns:p="http://schemas.openxmlformats.org/presentationml/2006/main">
+<p:sld xmlns:a="http://schemas.openxmlformats.org/drawingml/2006/main" xmlns:r="http://schemas.openxmlformats.org/officeDocument/2006/relationships" xmlns:p="http://schemas.openxmlformats.org/presentationml/2006/main" xmlns:m="http://schemas.openxmlformats.org/officeDocument/2006/math" xmlns:a14="http://schemas.microsoft.com/office/drawing/2010/main" showMasterSp="1" showMasterPhAnim="1">
   <p:cSld>
     <p:bg>
       <p:bgPr>
         <a:solidFill>
           <a:srgbClr val="000000"/>
         </a:solidFill>
-        <a:effectLst/>
       </p:bgPr>
     </p:bg>
     <p:spTree>
@@ -2668,14 +2594,14 @@
       </p:grpSpPr>
       <p:sp>
         <p:nvSpPr>
-          <p:cNvPr id="111" name="object 8"/>
+          <p:cNvPr id="138" name="object 8"/>
           <p:cNvSpPr/>
           <p:nvPr/>
         </p:nvSpPr>
         <p:spPr>
           <a:xfrm>
-            <a:off x="15707" y="769609"/>
-            <a:ext cx="20080539" cy="636108"/>
+            <a:off x="15706" y="769608"/>
+            <a:ext cx="20080540" cy="636109"/>
           </a:xfrm>
           <a:prstGeom prst="rect">
             <a:avLst/>
@@ -2688,19 +2614,24 @@
           </a:ln>
         </p:spPr>
         <p:txBody>
-          <a:bodyPr lIns="45719" rIns="45719"/>
+          <a:bodyPr lIns="45718" tIns="45718" rIns="45718" bIns="45718"/>
           <a:lstStyle/>
           <a:p>
-            <a:endParaRPr/>
+            <a:pPr>
+              <a:defRPr>
+                <a:latin typeface="Calibri"/>
+                <a:ea typeface="Calibri"/>
+                <a:cs typeface="Calibri"/>
+                <a:sym typeface="Calibri"/>
+              </a:defRPr>
+            </a:pPr>
           </a:p>
         </p:txBody>
       </p:sp>
       <p:sp>
         <p:nvSpPr>
-          <p:cNvPr id="112" name="object 9"/>
-          <p:cNvSpPr txBox="1">
-            <a:spLocks noGrp="1"/>
-          </p:cNvSpPr>
+          <p:cNvPr id="139" name="object 9"/>
+          <p:cNvSpPr txBox="1"/>
           <p:nvPr>
             <p:ph type="title"/>
           </p:nvPr>
@@ -2708,7 +2639,7 @@
         <p:spPr>
           <a:xfrm>
             <a:off x="932197" y="551417"/>
-            <a:ext cx="8392160" cy="1007112"/>
+            <a:ext cx="8392160" cy="1007113"/>
           </a:xfrm>
           <a:prstGeom prst="rect">
             <a:avLst/>
@@ -2718,8 +2649,8 @@
           <a:bodyPr/>
           <a:lstStyle/>
           <a:p>
-            <a:pPr indent="11557" defTabSz="832104">
-              <a:defRPr sz="5824" spc="-182">
+            <a:pPr indent="11557" defTabSz="832103">
+              <a:defRPr spc="-200" sz="5800">
                 <a:latin typeface="Avenir Book"/>
                 <a:ea typeface="Avenir Book"/>
                 <a:cs typeface="Avenir Book"/>
@@ -2730,11 +2661,11 @@
               <a:t>Simulación</a:t>
             </a:r>
             <a:r>
-              <a:rPr spc="-273"/>
-              <a:t> </a:t>
-            </a:r>
-            <a:r>
-              <a:rPr spc="-91">
+              <a:rPr spc="-300"/>
+              <a:t> </a:t>
+            </a:r>
+            <a:r>
+              <a:rPr spc="-100">
                 <a:solidFill>
                   <a:srgbClr val="DBFFA1"/>
                 </a:solidFill>
@@ -2742,7 +2673,7 @@
               <a:t>Monte</a:t>
             </a:r>
             <a:r>
-              <a:rPr spc="-455">
+              <a:rPr spc="-500">
                 <a:solidFill>
                   <a:srgbClr val="DBFFA1"/>
                 </a:solidFill>
@@ -2750,7 +2681,7 @@
               <a:t> </a:t>
             </a:r>
             <a:r>
-              <a:rPr spc="-91">
+              <a:rPr spc="-100">
                 <a:solidFill>
                   <a:srgbClr val="DFFF97"/>
                 </a:solidFill>
@@ -2762,14 +2693,14 @@
       </p:sp>
       <p:sp>
         <p:nvSpPr>
-          <p:cNvPr id="113" name="object 10"/>
+          <p:cNvPr id="140" name="object 10"/>
           <p:cNvSpPr txBox="1"/>
           <p:nvPr/>
         </p:nvSpPr>
         <p:spPr>
           <a:xfrm>
-            <a:off x="10930983" y="2561465"/>
-            <a:ext cx="8458201" cy="4832550"/>
+            <a:off x="10930983" y="2561464"/>
+            <a:ext cx="8458202" cy="4832550"/>
           </a:xfrm>
           <a:prstGeom prst="rect">
             <a:avLst/>
@@ -2782,7 +2713,7 @@
           </a:ln>
           <a:extLst>
             <a:ext uri="{C572A759-6A51-4108-AA02-DFA0A04FC94B}">
-              <ma14:wrappingTextBoxFlag xmlns:ma14="http://schemas.microsoft.com/office/mac/drawingml/2011/main" xmlns:a14="http://schemas.microsoft.com/office/drawing/2010/main" xmlns:m="http://schemas.openxmlformats.org/officeDocument/2006/math" xmlns="" val="1"/>
+              <ma14:wrappingTextBoxFlag xmlns:ma14="http://schemas.microsoft.com/office/mac/drawingml/2011/main" val="1"/>
             </a:ext>
           </a:extLst>
         </p:spPr>
@@ -2800,7 +2731,6 @@
                 <a:sym typeface="Avenir Book"/>
               </a:defRPr>
             </a:pPr>
-            <a:endParaRPr/>
           </a:p>
           <a:p>
             <a:pPr>
@@ -2814,7 +2744,6 @@
                 <a:sym typeface="Avenir Book"/>
               </a:defRPr>
             </a:pPr>
-            <a:endParaRPr/>
           </a:p>
           <a:p>
             <a:pPr indent="635">
@@ -2839,7 +2768,7 @@
               <a:t>de</a:t>
             </a:r>
             <a:r>
-              <a:rPr spc="234"/>
+              <a:rPr spc="233"/>
               <a:t> </a:t>
             </a:r>
             <a:r>
@@ -2849,7 +2778,7 @@
           </a:p>
           <a:p>
             <a:pPr indent="635">
-              <a:defRPr sz="2400">
+              <a:defRPr spc="92" sz="2400">
                 <a:solidFill>
                   <a:srgbClr val="FFFFFF"/>
                 </a:solidFill>
@@ -2859,7 +2788,6 @@
                 <a:sym typeface="Avenir Heavy"/>
               </a:defRPr>
             </a:pPr>
-            <a:endParaRPr spc="92"/>
           </a:p>
           <a:p>
             <a:pPr marL="541019" indent="-228600">
@@ -2875,6 +2803,10 @@
                 <a:solidFill>
                   <a:srgbClr val="FFFFFF"/>
                 </a:solidFill>
+                <a:latin typeface="Calibri"/>
+                <a:ea typeface="Calibri"/>
+                <a:cs typeface="Calibri"/>
+                <a:sym typeface="Calibri"/>
               </a:defRPr>
             </a:pPr>
             <a:r>
@@ -2926,7 +2858,7 @@
             </a:r>
           </a:p>
           <a:p>
-            <a:pPr marL="539648" indent="-227228">
+            <a:pPr marL="539648" indent="-227227">
               <a:lnSpc>
                 <a:spcPct val="200000"/>
               </a:lnSpc>
@@ -2935,97 +2867,105 @@
               </a:buClr>
               <a:buSzPct val="100000"/>
               <a:buChar char="•"/>
-              <a:defRPr sz="2400">
+              <a:defRPr b="1" sz="2400">
                 <a:solidFill>
                   <a:srgbClr val="FFFFFF"/>
                 </a:solidFill>
+                <a:latin typeface="Calibri"/>
+                <a:ea typeface="Calibri"/>
+                <a:cs typeface="Calibri"/>
+                <a:sym typeface="Calibri"/>
               </a:defRPr>
             </a:pPr>
             <a:r>
-              <a:rPr b="1"/>
               <a:t>Confianza</a:t>
             </a:r>
             <a:r>
+              <a:rPr b="0"/>
               <a:t>:</a:t>
             </a:r>
             <a:r>
-              <a:rPr spc="-134"/>
-              <a:t> </a:t>
-            </a:r>
-            <a:r>
-              <a:rPr spc="-240"/>
+              <a:rPr b="0" spc="-134"/>
+              <a:t> </a:t>
+            </a:r>
+            <a:r>
+              <a:rPr b="0" spc="-240"/>
               <a:t>El</a:t>
             </a:r>
             <a:r>
-              <a:rPr spc="-24"/>
-              <a:t> </a:t>
-            </a:r>
-            <a:r>
-              <a:rPr spc="-219"/>
+              <a:rPr b="0" spc="-24"/>
+              <a:t> </a:t>
+            </a:r>
+            <a:r>
+              <a:rPr b="0" spc="-219"/>
               <a:t>70 %</a:t>
             </a:r>
             <a:r>
-              <a:rPr spc="-38"/>
-              <a:t> </a:t>
-            </a:r>
-            <a:r>
+              <a:rPr b="0" spc="-38"/>
+              <a:t> </a:t>
+            </a:r>
+            <a:r>
+              <a:rPr b="0"/>
               <a:t>de</a:t>
             </a:r>
             <a:r>
-              <a:rPr spc="-172"/>
-              <a:t> </a:t>
-            </a:r>
-            <a:r>
-              <a:rPr spc="-96"/>
+              <a:rPr b="0" spc="-172"/>
+              <a:t> </a:t>
+            </a:r>
+            <a:r>
+              <a:rPr b="0" spc="-96"/>
               <a:t>los</a:t>
             </a:r>
             <a:r>
-              <a:rPr spc="-72"/>
-              <a:t> </a:t>
-            </a:r>
-            <a:r>
+              <a:rPr b="0" spc="-72"/>
+              <a:t> </a:t>
+            </a:r>
+            <a:r>
+              <a:rPr b="0"/>
               <a:t>datos</a:t>
             </a:r>
             <a:r>
-              <a:rPr spc="-62"/>
+              <a:rPr b="0" spc="-62"/>
               <a:t> reales</a:t>
             </a:r>
             <a:r>
-              <a:rPr spc="-9"/>
-              <a:t> </a:t>
-            </a:r>
-            <a:r>
-              <a:rPr spc="-62"/>
+              <a:rPr b="0" spc="-9"/>
+              <a:t> </a:t>
+            </a:r>
+            <a:r>
+              <a:rPr b="0" spc="-62"/>
               <a:t>cayeron</a:t>
             </a:r>
             <a:r>
-              <a:rPr spc="-33"/>
-              <a:t> </a:t>
-            </a:r>
-            <a:r>
+              <a:rPr b="0" spc="-33"/>
+              <a:t> </a:t>
+            </a:r>
+            <a:r>
+              <a:rPr b="0"/>
               <a:t>dentro</a:t>
             </a:r>
             <a:r>
-              <a:rPr spc="-81"/>
-              <a:t> </a:t>
-            </a:r>
-            <a:r>
-              <a:rPr spc="-24"/>
+              <a:rPr b="0" spc="-81"/>
+              <a:t> </a:t>
+            </a:r>
+            <a:r>
+              <a:rPr b="0" spc="-24"/>
               <a:t>del </a:t>
             </a:r>
             <a:r>
+              <a:rPr b="0"/>
               <a:t>intervalo</a:t>
             </a:r>
             <a:r>
-              <a:rPr spc="55"/>
-              <a:t> </a:t>
-            </a:r>
-            <a:r>
-              <a:rPr spc="-95"/>
+              <a:rPr b="0" spc="55"/>
+              <a:t> </a:t>
+            </a:r>
+            <a:r>
+              <a:rPr b="0" spc="-95"/>
               <a:t>25-</a:t>
             </a:r>
             <a:r>
-              <a:rPr spc="-25"/>
+              <a:rPr b="0" spc="-25"/>
               <a:t>75%</a:t>
             </a:r>
           </a:p>
@@ -3036,74 +2976,77 @@
               </a:lnSpc>
               <a:buSzPct val="100000"/>
               <a:buChar char="•"/>
-              <a:defRPr sz="2400">
+              <a:defRPr b="1" spc="-72" sz="2400">
                 <a:solidFill>
                   <a:srgbClr val="FFFFFF"/>
                 </a:solidFill>
+                <a:latin typeface="Calibri"/>
+                <a:ea typeface="Calibri"/>
+                <a:cs typeface="Calibri"/>
+                <a:sym typeface="Calibri"/>
               </a:defRPr>
             </a:pPr>
             <a:r>
-              <a:rPr b="1" spc="-72"/>
               <a:t>Conclusión</a:t>
             </a:r>
             <a:r>
-              <a:rPr spc="-72"/>
+              <a:rPr b="0"/>
               <a:t>:</a:t>
             </a:r>
             <a:r>
-              <a:rPr spc="-100"/>
-              <a:t> </a:t>
-            </a:r>
-            <a:r>
-              <a:rPr spc="-235"/>
+              <a:rPr b="0" spc="-100"/>
+              <a:t> </a:t>
+            </a:r>
+            <a:r>
+              <a:rPr b="0" spc="-234"/>
               <a:t>El</a:t>
             </a:r>
             <a:r>
-              <a:rPr spc="-14"/>
-              <a:t> </a:t>
-            </a:r>
-            <a:r>
-              <a:rPr spc="-9"/>
+              <a:rPr b="0" spc="-14"/>
+              <a:t> </a:t>
+            </a:r>
+            <a:r>
+              <a:rPr b="0" spc="-9"/>
               <a:t>modelo</a:t>
             </a:r>
             <a:r>
-              <a:rPr spc="-163"/>
-              <a:t> </a:t>
-            </a:r>
-            <a:r>
-              <a:rPr spc="-129"/>
+              <a:rPr b="0" spc="-163"/>
+              <a:t> </a:t>
+            </a:r>
+            <a:r>
+              <a:rPr b="0" spc="-129"/>
               <a:t>es</a:t>
             </a:r>
             <a:r>
-              <a:rPr spc="-38"/>
-              <a:t> </a:t>
-            </a:r>
-            <a:r>
-              <a:rPr spc="-67"/>
+              <a:rPr b="0" spc="-38"/>
+              <a:t> </a:t>
+            </a:r>
+            <a:r>
+              <a:rPr b="0" spc="-67"/>
               <a:t>conservador,</a:t>
             </a:r>
             <a:r>
-              <a:rPr spc="4"/>
-              <a:t> </a:t>
-            </a:r>
-            <a:r>
-              <a:rPr spc="-9"/>
+              <a:rPr b="0" spc="4"/>
+              <a:t> </a:t>
+            </a:r>
+            <a:r>
+              <a:rPr b="0" spc="-9"/>
               <a:t>ideal</a:t>
             </a:r>
             <a:r>
-              <a:rPr spc="-100"/>
-              <a:t> </a:t>
-            </a:r>
-            <a:r>
-              <a:rPr spc="-19"/>
+              <a:rPr b="0" spc="-100"/>
+              <a:t> </a:t>
+            </a:r>
+            <a:r>
+              <a:rPr b="0" spc="-19"/>
               <a:t>para planificación</a:t>
             </a:r>
             <a:r>
-              <a:rPr spc="-52"/>
-              <a:t> </a:t>
-            </a:r>
-            <a:r>
-              <a:rPr spc="-9"/>
+              <a:rPr b="0" spc="-52"/>
+              <a:t> </a:t>
+            </a:r>
+            <a:r>
+              <a:rPr b="0" spc="-9"/>
               <a:t>energética.</a:t>
             </a:r>
           </a:p>
@@ -3111,22 +3054,24 @@
       </p:sp>
       <p:pic>
         <p:nvPicPr>
-          <p:cNvPr id="114" name="Screenshot 2026-06-15 at 2.21.56 PM.png" descr="Screenshot 2026-06-15 at 2.21.56 PM.png"/>
+          <p:cNvPr id="141" name="Screenshot 2026-06-15 at 2.21.56 PM.png" descr="Screenshot 2026-06-15 at 2.21.56 PM.png"/>
           <p:cNvPicPr>
             <a:picLocks noChangeAspect="1"/>
           </p:cNvPicPr>
           <p:nvPr/>
         </p:nvPicPr>
         <p:blipFill>
-          <a:blip r:embed="rId2"/>
+          <a:blip r:embed="rId2">
+            <a:extLst/>
+          </a:blip>
           <a:stretch>
             <a:fillRect/>
           </a:stretch>
         </p:blipFill>
         <p:spPr>
           <a:xfrm>
-            <a:off x="692353" y="2225795"/>
-            <a:ext cx="10130652" cy="7965982"/>
+            <a:off x="692352" y="2225794"/>
+            <a:ext cx="10130654" cy="7965983"/>
           </a:xfrm>
           <a:prstGeom prst="rect">
             <a:avLst/>
@@ -3141,19 +3086,18 @@
   <p:clrMapOvr>
     <a:masterClrMapping/>
   </p:clrMapOvr>
-  <p:transition spd="med"/>
+  <p:transition xmlns:p14="http://schemas.microsoft.com/office/powerpoint/2010/main" spd="med" advClick="1"/>
 </p:sld>
 </file>
 
 <file path=ppt/slides/slide11.xml><?xml version="1.0" encoding="utf-8"?>
-<p:sld xmlns:a="http://schemas.openxmlformats.org/drawingml/2006/main" xmlns:r="http://schemas.openxmlformats.org/officeDocument/2006/relationships" xmlns:p="http://schemas.openxmlformats.org/presentationml/2006/main">
+<p:sld xmlns:a="http://schemas.openxmlformats.org/drawingml/2006/main" xmlns:r="http://schemas.openxmlformats.org/officeDocument/2006/relationships" xmlns:p="http://schemas.openxmlformats.org/presentationml/2006/main" xmlns:m="http://schemas.openxmlformats.org/officeDocument/2006/math" xmlns:a14="http://schemas.microsoft.com/office/drawing/2010/main" showMasterSp="1" showMasterPhAnim="1">
   <p:cSld>
     <p:bg>
       <p:bgPr>
         <a:solidFill>
           <a:srgbClr val="000000"/>
         </a:solidFill>
-        <a:effectLst/>
       </p:bgPr>
     </p:bg>
     <p:spTree>
@@ -3172,10 +3116,8 @@
       </p:grpSpPr>
       <p:sp>
         <p:nvSpPr>
-          <p:cNvPr id="116" name="object 2"/>
-          <p:cNvSpPr txBox="1">
-            <a:spLocks noGrp="1"/>
-          </p:cNvSpPr>
+          <p:cNvPr id="143" name="object 2"/>
+          <p:cNvSpPr txBox="1"/>
           <p:nvPr>
             <p:ph type="ctrTitle"/>
           </p:nvPr>
@@ -3183,7 +3125,7 @@
         <p:spPr>
           <a:xfrm>
             <a:off x="6466985" y="3362850"/>
-            <a:ext cx="6955791" cy="1478280"/>
+            <a:ext cx="6955792" cy="1478281"/>
           </a:xfrm>
           <a:prstGeom prst="rect">
             <a:avLst/>
@@ -3196,10 +3138,11 @@
               <a:spcBef>
                 <a:spcPts val="100"/>
               </a:spcBef>
-              <a:defRPr sz="9500" spc="-100"/>
+              <a:defRPr spc="-100" sz="9500"/>
             </a:lvl1pPr>
           </a:lstStyle>
           <a:p>
+            <a:pPr/>
             <a:r>
               <a:t>¿Preguntas?</a:t>
             </a:r>
@@ -3208,14 +3151,14 @@
       </p:sp>
       <p:sp>
         <p:nvSpPr>
-          <p:cNvPr id="117" name="object 3"/>
+          <p:cNvPr id="144" name="object 3"/>
           <p:cNvSpPr/>
           <p:nvPr/>
         </p:nvSpPr>
         <p:spPr>
           <a:xfrm>
             <a:off x="6109761" y="5324445"/>
-            <a:ext cx="7892431" cy="306275"/>
+            <a:ext cx="7892431" cy="306276"/>
           </a:xfrm>
           <a:prstGeom prst="rect">
             <a:avLst/>
@@ -3228,23 +3171,30 @@
           </a:ln>
         </p:spPr>
         <p:txBody>
-          <a:bodyPr lIns="45719" rIns="45719"/>
+          <a:bodyPr lIns="45718" tIns="45718" rIns="45718" bIns="45718"/>
           <a:lstStyle/>
           <a:p>
-            <a:endParaRPr/>
+            <a:pPr>
+              <a:defRPr>
+                <a:latin typeface="Calibri"/>
+                <a:ea typeface="Calibri"/>
+                <a:cs typeface="Calibri"/>
+                <a:sym typeface="Calibri"/>
+              </a:defRPr>
+            </a:pPr>
           </a:p>
         </p:txBody>
       </p:sp>
       <p:sp>
         <p:nvSpPr>
-          <p:cNvPr id="118" name="object 4"/>
+          <p:cNvPr id="145" name="object 4"/>
           <p:cNvSpPr txBox="1"/>
           <p:nvPr/>
         </p:nvSpPr>
         <p:spPr>
           <a:xfrm>
-            <a:off x="6105395" y="5228145"/>
-            <a:ext cx="7887970" cy="357915"/>
+            <a:off x="6105395" y="5228144"/>
+            <a:ext cx="7887970" cy="357914"/>
           </a:xfrm>
           <a:prstGeom prst="rect">
             <a:avLst/>
@@ -3254,7 +3204,7 @@
           </a:ln>
           <a:extLst>
             <a:ext uri="{C572A759-6A51-4108-AA02-DFA0A04FC94B}">
-              <ma14:wrappingTextBoxFlag xmlns:ma14="http://schemas.microsoft.com/office/mac/drawingml/2011/main" xmlns:a14="http://schemas.microsoft.com/office/drawing/2010/main" xmlns:m="http://schemas.openxmlformats.org/officeDocument/2006/math" xmlns="" val="1"/>
+              <ma14:wrappingTextBoxFlag xmlns:ma14="http://schemas.microsoft.com/office/mac/drawingml/2011/main" val="1"/>
             </a:ext>
           </a:extLst>
         </p:spPr>
@@ -3268,7 +3218,7 @@
               <a:spcBef>
                 <a:spcPts val="100"/>
               </a:spcBef>
-              <a:defRPr sz="2500" spc="-90">
+              <a:defRPr spc="-90" sz="2500">
                 <a:solidFill>
                   <a:srgbClr val="E4E4E4"/>
                 </a:solidFill>
@@ -3413,19 +3363,18 @@
   <p:clrMapOvr>
     <a:masterClrMapping/>
   </p:clrMapOvr>
-  <p:transition spd="med"/>
+  <p:transition xmlns:p14="http://schemas.microsoft.com/office/powerpoint/2010/main" spd="med" advClick="1"/>
 </p:sld>
 </file>
 
 <file path=ppt/slides/slide2.xml><?xml version="1.0" encoding="utf-8"?>
-<p:sld xmlns:a="http://schemas.openxmlformats.org/drawingml/2006/main" xmlns:r="http://schemas.openxmlformats.org/officeDocument/2006/relationships" xmlns:p="http://schemas.openxmlformats.org/presentationml/2006/main">
+<p:sld xmlns:a="http://schemas.openxmlformats.org/drawingml/2006/main" xmlns:r="http://schemas.openxmlformats.org/officeDocument/2006/relationships" xmlns:p="http://schemas.openxmlformats.org/presentationml/2006/main" xmlns:m="http://schemas.openxmlformats.org/officeDocument/2006/math" xmlns:a14="http://schemas.microsoft.com/office/drawing/2010/main" showMasterSp="1" showMasterPhAnim="1">
   <p:cSld>
     <p:bg>
       <p:bgPr>
         <a:solidFill>
           <a:srgbClr val="000000"/>
         </a:solidFill>
-        <a:effectLst/>
       </p:bgPr>
     </p:bg>
     <p:spTree>
@@ -3450,8 +3399,8 @@
         </p:nvSpPr>
         <p:spPr>
           <a:xfrm>
-            <a:off x="15707" y="816729"/>
-            <a:ext cx="20080539" cy="777464"/>
+            <a:off x="15706" y="816729"/>
+            <a:ext cx="20080540" cy="777465"/>
           </a:xfrm>
           <a:prstGeom prst="rect">
             <a:avLst/>
@@ -3464,19 +3413,24 @@
           </a:ln>
         </p:spPr>
         <p:txBody>
-          <a:bodyPr lIns="45719" rIns="45719"/>
+          <a:bodyPr lIns="45718" tIns="45718" rIns="45718" bIns="45718"/>
           <a:lstStyle/>
           <a:p>
-            <a:endParaRPr/>
+            <a:pPr>
+              <a:defRPr>
+                <a:latin typeface="Calibri"/>
+                <a:ea typeface="Calibri"/>
+                <a:cs typeface="Calibri"/>
+                <a:sym typeface="Calibri"/>
+              </a:defRPr>
+            </a:pPr>
           </a:p>
         </p:txBody>
       </p:sp>
       <p:sp>
         <p:nvSpPr>
           <p:cNvPr id="74" name="object 9"/>
-          <p:cNvSpPr txBox="1">
-            <a:spLocks noGrp="1"/>
-          </p:cNvSpPr>
+          <p:cNvSpPr txBox="1"/>
           <p:nvPr>
             <p:ph type="title"/>
           </p:nvPr>
@@ -3484,7 +3438,7 @@
         <p:spPr>
           <a:xfrm>
             <a:off x="912418" y="535057"/>
-            <a:ext cx="10010769" cy="1026795"/>
+            <a:ext cx="10010769" cy="1026796"/>
           </a:xfrm>
           <a:prstGeom prst="rect">
             <a:avLst/>
@@ -3494,8 +3448,8 @@
           <a:bodyPr/>
           <a:lstStyle/>
           <a:p>
-            <a:pPr indent="12268" defTabSz="841247">
-              <a:defRPr sz="5888" spc="-92">
+            <a:pPr indent="12267" defTabSz="841247">
+              <a:defRPr spc="-100" sz="5800">
                 <a:latin typeface="Avenir Book"/>
                 <a:ea typeface="Avenir Book"/>
                 <a:cs typeface="Avenir Book"/>
@@ -3506,7 +3460,7 @@
               <a:t>Dataset</a:t>
             </a:r>
             <a:r>
-              <a:rPr spc="-184"/>
+              <a:rPr spc="-200"/>
               <a:t> </a:t>
             </a:r>
             <a:r>
@@ -3514,11 +3468,11 @@
               <a:t>y</a:t>
             </a:r>
             <a:r>
-              <a:rPr spc="-460"/>
-              <a:t> </a:t>
-            </a:r>
-            <a:r>
-              <a:rPr spc="-184">
+              <a:rPr spc="-500"/>
+              <a:t> </a:t>
+            </a:r>
+            <a:r>
+              <a:rPr spc="-200">
                 <a:solidFill>
                   <a:srgbClr val="DDFF9A"/>
                 </a:solidFill>
@@ -3536,8 +3490,8 @@
         </p:nvSpPr>
         <p:spPr>
           <a:xfrm>
-            <a:off x="1478600" y="2537281"/>
-            <a:ext cx="7311391" cy="5083150"/>
+            <a:off x="1478599" y="2537281"/>
+            <a:ext cx="7311392" cy="5083150"/>
           </a:xfrm>
           <a:prstGeom prst="rect">
             <a:avLst/>
@@ -3550,7 +3504,7 @@
           </a:ln>
           <a:extLst>
             <a:ext uri="{C572A759-6A51-4108-AA02-DFA0A04FC94B}">
-              <ma14:wrappingTextBoxFlag xmlns:ma14="http://schemas.microsoft.com/office/mac/drawingml/2011/main" xmlns:a14="http://schemas.microsoft.com/office/drawing/2010/main" xmlns:m="http://schemas.openxmlformats.org/officeDocument/2006/math" xmlns="" val="1"/>
+              <ma14:wrappingTextBoxFlag xmlns:ma14="http://schemas.microsoft.com/office/mac/drawingml/2011/main" val="1"/>
             </a:ext>
           </a:extLst>
         </p:spPr>
@@ -3568,7 +3522,6 @@
                 <a:sym typeface="Times New Roman"/>
               </a:defRPr>
             </a:pPr>
-            <a:endParaRPr/>
           </a:p>
           <a:p>
             <a:pPr>
@@ -3585,7 +3538,6 @@
                 <a:sym typeface="Times New Roman"/>
               </a:defRPr>
             </a:pPr>
-            <a:endParaRPr/>
           </a:p>
           <a:p>
             <a:pPr marL="254467" marR="129539" indent="-250657">
@@ -3594,74 +3546,134 @@
               </a:lnSpc>
               <a:buSzPct val="100000"/>
               <a:buChar char="•"/>
-              <a:defRPr sz="2500" spc="-20">
+              <a:defRPr spc="-20" sz="2500">
                 <a:solidFill>
                   <a:srgbClr val="FFFFFF"/>
                 </a:solidFill>
+                <a:latin typeface="Avenir Heavy"/>
+                <a:ea typeface="Avenir Heavy"/>
+                <a:cs typeface="Avenir Heavy"/>
+                <a:sym typeface="Avenir Heavy"/>
+              </a:defRPr>
+            </a:pPr>
+            <a:r>
+              <a:t>Origen</a:t>
+            </a:r>
+            <a:r>
+              <a:rPr>
                 <a:latin typeface="Avenir Book"/>
                 <a:ea typeface="Avenir Book"/>
                 <a:cs typeface="Avenir Book"/>
                 <a:sym typeface="Avenir Book"/>
-              </a:defRPr>
-            </a:pPr>
-            <a:r>
-              <a:rPr>
-                <a:latin typeface="Avenir Heavy"/>
-                <a:ea typeface="Avenir Heavy"/>
-                <a:cs typeface="Avenir Heavy"/>
-                <a:sym typeface="Avenir Heavy"/>
-              </a:rPr>
-              <a:t>Origen</a:t>
-            </a:r>
-            <a:r>
+              </a:rPr>
               <a:t>:</a:t>
             </a:r>
             <a:r>
-              <a:rPr spc="-160"/>
-              <a:t> </a:t>
-            </a:r>
-            <a:r>
-              <a:rPr spc="-25"/>
+              <a:rPr spc="-160">
+                <a:latin typeface="Avenir Book"/>
+                <a:ea typeface="Avenir Book"/>
+                <a:cs typeface="Avenir Book"/>
+                <a:sym typeface="Avenir Book"/>
+              </a:rPr>
+              <a:t> </a:t>
+            </a:r>
+            <a:r>
+              <a:rPr spc="-25">
+                <a:latin typeface="Avenir Book"/>
+                <a:ea typeface="Avenir Book"/>
+                <a:cs typeface="Avenir Book"/>
+                <a:sym typeface="Avenir Book"/>
+              </a:rPr>
               <a:t>Datos</a:t>
             </a:r>
             <a:r>
-              <a:rPr spc="-95"/>
-              <a:t> </a:t>
-            </a:r>
-            <a:r>
-              <a:rPr spc="0"/>
+              <a:rPr spc="-95">
+                <a:latin typeface="Avenir Book"/>
+                <a:ea typeface="Avenir Book"/>
+                <a:cs typeface="Avenir Book"/>
+                <a:sym typeface="Avenir Book"/>
+              </a:rPr>
+              <a:t> </a:t>
+            </a:r>
+            <a:r>
+              <a:rPr spc="0">
+                <a:latin typeface="Avenir Book"/>
+                <a:ea typeface="Avenir Book"/>
+                <a:cs typeface="Avenir Book"/>
+                <a:sym typeface="Avenir Book"/>
+              </a:rPr>
               <a:t>de</a:t>
             </a:r>
             <a:r>
-              <a:rPr spc="-180"/>
-              <a:t> </a:t>
-            </a:r>
-            <a:r>
-              <a:rPr spc="0"/>
+              <a:rPr spc="-180">
+                <a:latin typeface="Avenir Book"/>
+                <a:ea typeface="Avenir Book"/>
+                <a:cs typeface="Avenir Book"/>
+                <a:sym typeface="Avenir Book"/>
+              </a:rPr>
+              <a:t> </a:t>
+            </a:r>
+            <a:r>
+              <a:rPr spc="0">
+                <a:latin typeface="Avenir Book"/>
+                <a:ea typeface="Avenir Book"/>
+                <a:cs typeface="Avenir Book"/>
+                <a:sym typeface="Avenir Book"/>
+              </a:rPr>
               <a:t>demanda</a:t>
             </a:r>
             <a:r>
-              <a:rPr spc="-10"/>
-              <a:t> </a:t>
-            </a:r>
-            <a:r>
-              <a:rPr spc="0"/>
+              <a:rPr spc="-10">
+                <a:latin typeface="Avenir Book"/>
+                <a:ea typeface="Avenir Book"/>
+                <a:cs typeface="Avenir Book"/>
+                <a:sym typeface="Avenir Book"/>
+              </a:rPr>
+              <a:t> </a:t>
+            </a:r>
+            <a:r>
+              <a:rPr spc="0">
+                <a:latin typeface="Avenir Book"/>
+                <a:ea typeface="Avenir Book"/>
+                <a:cs typeface="Avenir Book"/>
+                <a:sym typeface="Avenir Book"/>
+              </a:rPr>
               <a:t>eléctrica</a:t>
             </a:r>
             <a:r>
-              <a:rPr spc="40"/>
-              <a:t> </a:t>
-            </a:r>
-            <a:r>
-              <a:rPr spc="0"/>
+              <a:rPr spc="40">
+                <a:latin typeface="Avenir Book"/>
+                <a:ea typeface="Avenir Book"/>
+                <a:cs typeface="Avenir Book"/>
+                <a:sym typeface="Avenir Book"/>
+              </a:rPr>
+              <a:t> </a:t>
+            </a:r>
+            <a:r>
+              <a:rPr spc="0">
+                <a:latin typeface="Avenir Book"/>
+                <a:ea typeface="Avenir Book"/>
+                <a:cs typeface="Avenir Book"/>
+                <a:sym typeface="Avenir Book"/>
+              </a:rPr>
               <a:t>y</a:t>
             </a:r>
             <a:r>
-              <a:rPr spc="-70"/>
+              <a:rPr spc="-70">
+                <a:latin typeface="Avenir Book"/>
+                <a:ea typeface="Avenir Book"/>
+                <a:cs typeface="Avenir Book"/>
+                <a:sym typeface="Avenir Book"/>
+              </a:rPr>
               <a:t> t</a:t>
             </a:r>
             <a:r>
-              <a:rPr spc="-10"/>
+              <a:rPr spc="-10">
+                <a:latin typeface="Avenir Book"/>
+                <a:ea typeface="Avenir Book"/>
+                <a:cs typeface="Avenir Book"/>
+                <a:sym typeface="Avenir Book"/>
+              </a:rPr>
               <a:t>emperatura aparente.</a:t>
             </a:r>
           </a:p>
@@ -3672,64 +3684,116 @@
               </a:lnSpc>
               <a:buSzPct val="100000"/>
               <a:buChar char="•"/>
-              <a:defRPr sz="2500" spc="-10">
+              <a:defRPr spc="-10" sz="2500">
                 <a:solidFill>
                   <a:srgbClr val="FFFFFF"/>
                 </a:solidFill>
+                <a:latin typeface="Avenir Heavy"/>
+                <a:ea typeface="Avenir Heavy"/>
+                <a:cs typeface="Avenir Heavy"/>
+                <a:sym typeface="Avenir Heavy"/>
+              </a:defRPr>
+            </a:pPr>
+            <a:r>
+              <a:t>Periodicidad</a:t>
+            </a:r>
+            <a:r>
+              <a:rPr>
                 <a:latin typeface="Avenir Book"/>
                 <a:ea typeface="Avenir Book"/>
                 <a:cs typeface="Avenir Book"/>
                 <a:sym typeface="Avenir Book"/>
-              </a:defRPr>
-            </a:pPr>
+              </a:rPr>
+              <a:t>:</a:t>
+            </a:r>
+            <a:r>
+              <a:rPr spc="-95">
+                <a:latin typeface="Avenir Book"/>
+                <a:ea typeface="Avenir Book"/>
+                <a:cs typeface="Avenir Book"/>
+                <a:sym typeface="Avenir Book"/>
+              </a:rPr>
+              <a:t> </a:t>
+            </a:r>
+            <a:r>
+              <a:rPr spc="-65">
+                <a:latin typeface="Avenir Book"/>
+                <a:ea typeface="Avenir Book"/>
+                <a:cs typeface="Avenir Book"/>
+                <a:sym typeface="Avenir Book"/>
+              </a:rPr>
+              <a:t>Resampleo</a:t>
+            </a:r>
+            <a:r>
+              <a:rPr spc="-25">
+                <a:latin typeface="Avenir Book"/>
+                <a:ea typeface="Avenir Book"/>
+                <a:cs typeface="Avenir Book"/>
+                <a:sym typeface="Avenir Book"/>
+              </a:rPr>
+              <a:t> </a:t>
+            </a:r>
+            <a:r>
+              <a:rPr spc="-30">
+                <a:latin typeface="Avenir Book"/>
+                <a:ea typeface="Avenir Book"/>
+                <a:cs typeface="Avenir Book"/>
+                <a:sym typeface="Avenir Book"/>
+              </a:rPr>
+              <a:t>semanal</a:t>
+            </a:r>
+            <a:r>
+              <a:rPr spc="-80">
+                <a:latin typeface="Avenir Book"/>
+                <a:ea typeface="Avenir Book"/>
+                <a:cs typeface="Avenir Book"/>
+                <a:sym typeface="Avenir Book"/>
+              </a:rPr>
+              <a:t> </a:t>
+            </a:r>
+            <a:r>
+              <a:rPr spc="0">
+                <a:latin typeface="Avenir Book"/>
+                <a:ea typeface="Avenir Book"/>
+                <a:cs typeface="Avenir Book"/>
+                <a:sym typeface="Avenir Book"/>
+              </a:rPr>
+              <a:t>para</a:t>
+            </a:r>
+            <a:r>
+              <a:rPr spc="-150">
+                <a:latin typeface="Avenir Book"/>
+                <a:ea typeface="Avenir Book"/>
+                <a:cs typeface="Avenir Book"/>
+                <a:sym typeface="Avenir Book"/>
+              </a:rPr>
+              <a:t> </a:t>
+            </a:r>
             <a:r>
               <a:rPr>
-                <a:latin typeface="Avenir Heavy"/>
-                <a:ea typeface="Avenir Heavy"/>
-                <a:cs typeface="Avenir Heavy"/>
-                <a:sym typeface="Avenir Heavy"/>
-              </a:rPr>
-              <a:t>Periodicidad</a:t>
-            </a:r>
-            <a:r>
-              <a:t>:</a:t>
-            </a:r>
-            <a:r>
-              <a:rPr spc="-95"/>
-              <a:t> </a:t>
-            </a:r>
-            <a:r>
-              <a:rPr spc="-65"/>
-              <a:t>Resampleo</a:t>
-            </a:r>
-            <a:r>
-              <a:rPr spc="-25"/>
-              <a:t> </a:t>
-            </a:r>
-            <a:r>
-              <a:rPr spc="-30"/>
-              <a:t>semanal</a:t>
-            </a:r>
-            <a:r>
-              <a:rPr spc="-80"/>
-              <a:t> </a:t>
-            </a:r>
-            <a:r>
-              <a:rPr spc="0"/>
-              <a:t>para</a:t>
-            </a:r>
-            <a:r>
-              <a:rPr spc="-150"/>
-              <a:t> </a:t>
-            </a:r>
-            <a:r>
+                <a:latin typeface="Avenir Book"/>
+                <a:ea typeface="Avenir Book"/>
+                <a:cs typeface="Avenir Book"/>
+                <a:sym typeface="Avenir Book"/>
+              </a:rPr>
               <a:t>capturar estacionalidad</a:t>
             </a:r>
             <a:r>
-              <a:rPr spc="-130"/>
-              <a:t> </a:t>
-            </a:r>
-            <a:r>
+              <a:rPr spc="-130">
+                <a:latin typeface="Avenir Book"/>
+                <a:ea typeface="Avenir Book"/>
+                <a:cs typeface="Avenir Book"/>
+                <a:sym typeface="Avenir Book"/>
+              </a:rPr>
+              <a:t> </a:t>
+            </a:r>
+            <a:r>
+              <a:rPr>
+                <a:latin typeface="Avenir Book"/>
+                <a:ea typeface="Avenir Book"/>
+                <a:cs typeface="Avenir Book"/>
+                <a:sym typeface="Avenir Book"/>
+              </a:rPr>
               <a:t>anual.</a:t>
             </a:r>
           </a:p>
@@ -3740,66 +3804,112 @@
               </a:lnSpc>
               <a:buSzPct val="100000"/>
               <a:buChar char="•"/>
-              <a:defRPr sz="2500" spc="-10">
+              <a:defRPr spc="-10" sz="2500">
                 <a:solidFill>
                   <a:srgbClr val="FFFFFF"/>
                 </a:solidFill>
+                <a:latin typeface="Avenir Heavy"/>
+                <a:ea typeface="Avenir Heavy"/>
+                <a:cs typeface="Avenir Heavy"/>
+                <a:sym typeface="Avenir Heavy"/>
+              </a:defRPr>
+            </a:pPr>
+            <a:r>
+              <a:t>Variables</a:t>
+            </a:r>
+            <a:r>
+              <a:rPr>
                 <a:latin typeface="Avenir Book"/>
                 <a:ea typeface="Avenir Book"/>
                 <a:cs typeface="Avenir Book"/>
                 <a:sym typeface="Avenir Book"/>
-              </a:defRPr>
-            </a:pPr>
+              </a:rPr>
+              <a:t>:</a:t>
+            </a:r>
+            <a:r>
+              <a:rPr spc="-170">
+                <a:latin typeface="Avenir Book"/>
+                <a:ea typeface="Avenir Book"/>
+                <a:cs typeface="Avenir Book"/>
+                <a:sym typeface="Avenir Book"/>
+              </a:rPr>
+              <a:t> </a:t>
+            </a:r>
+            <a:r>
+              <a:rPr spc="0">
+                <a:latin typeface="Avenir Book"/>
+                <a:ea typeface="Avenir Book"/>
+                <a:cs typeface="Avenir Book"/>
+                <a:sym typeface="Avenir Book"/>
+              </a:rPr>
+              <a:t>Demanda</a:t>
+            </a:r>
+            <a:r>
+              <a:rPr spc="-55">
+                <a:latin typeface="Avenir Book"/>
+                <a:ea typeface="Avenir Book"/>
+                <a:cs typeface="Avenir Book"/>
+                <a:sym typeface="Avenir Book"/>
+              </a:rPr>
+              <a:t> </a:t>
+            </a:r>
+            <a:r>
+              <a:rPr spc="-160">
+                <a:latin typeface="Avenir Book"/>
+                <a:ea typeface="Avenir Book"/>
+                <a:cs typeface="Avenir Book"/>
+                <a:sym typeface="Avenir Book"/>
+              </a:rPr>
+              <a:t>(MWh),</a:t>
+            </a:r>
+            <a:r>
+              <a:rPr spc="-15">
+                <a:latin typeface="Avenir Book"/>
+                <a:ea typeface="Avenir Book"/>
+                <a:cs typeface="Avenir Book"/>
+                <a:sym typeface="Avenir Book"/>
+              </a:rPr>
+              <a:t> </a:t>
+            </a:r>
+            <a:r>
+              <a:rPr spc="-40">
+                <a:latin typeface="Avenir Book"/>
+                <a:ea typeface="Avenir Book"/>
+                <a:cs typeface="Avenir Book"/>
+                <a:sym typeface="Avenir Book"/>
+              </a:rPr>
+              <a:t>Temperatura</a:t>
+            </a:r>
+            <a:r>
+              <a:rPr spc="-85">
+                <a:latin typeface="Avenir Book"/>
+                <a:ea typeface="Avenir Book"/>
+                <a:cs typeface="Avenir Book"/>
+                <a:sym typeface="Avenir Book"/>
+              </a:rPr>
+              <a:t> </a:t>
+            </a:r>
+            <a:r>
+              <a:rPr spc="-100">
+                <a:latin typeface="Avenir Book"/>
+                <a:ea typeface="Avenir Book"/>
+                <a:cs typeface="Avenir Book"/>
+                <a:sym typeface="Avenir Book"/>
+              </a:rPr>
+              <a:t>Promedio, </a:t>
+            </a:r>
             <a:r>
               <a:rPr>
-                <a:latin typeface="Avenir Heavy"/>
-                <a:ea typeface="Avenir Heavy"/>
-                <a:cs typeface="Avenir Heavy"/>
-                <a:sym typeface="Avenir Heavy"/>
-              </a:rPr>
-              <a:t>Variables</a:t>
-            </a:r>
-            <a:r>
-              <a:t>:</a:t>
-            </a:r>
-            <a:r>
-              <a:rPr spc="-170"/>
-              <a:t> </a:t>
-            </a:r>
-            <a:r>
-              <a:rPr spc="0"/>
-              <a:t>Demanda</a:t>
-            </a:r>
-            <a:r>
-              <a:rPr spc="-55"/>
-              <a:t> </a:t>
-            </a:r>
-            <a:r>
-              <a:rPr spc="-160"/>
-              <a:t>(MWh),</a:t>
-            </a:r>
-            <a:r>
-              <a:rPr spc="-15"/>
-              <a:t> </a:t>
-            </a:r>
-            <a:r>
-              <a:rPr spc="-40"/>
-              <a:t>Temperatura</a:t>
-            </a:r>
-            <a:r>
-              <a:rPr spc="-85"/>
-              <a:t> </a:t>
-            </a:r>
-            <a:r>
-              <a:rPr spc="-100"/>
-              <a:t>Promedio, </a:t>
-            </a:r>
-            <a:r>
+                <a:latin typeface="Avenir Book"/>
+                <a:ea typeface="Avenir Book"/>
+                <a:cs typeface="Avenir Book"/>
+                <a:sym typeface="Avenir Book"/>
+              </a:rPr>
               <a:t>Feriados</a:t>
             </a:r>
           </a:p>
           <a:p>
-            <a:pPr marL="245109" indent="-228600">
+            <a:pPr marL="245108" indent="-228600">
               <a:spcBef>
                 <a:spcPts val="600"/>
               </a:spcBef>
@@ -3809,78 +3919,148 @@
                 <a:solidFill>
                   <a:srgbClr val="FFFFFF"/>
                 </a:solidFill>
+                <a:latin typeface="Avenir Heavy"/>
+                <a:ea typeface="Avenir Heavy"/>
+                <a:cs typeface="Avenir Heavy"/>
+                <a:sym typeface="Avenir Heavy"/>
+              </a:defRPr>
+            </a:pPr>
+            <a:r>
+              <a:t>Split</a:t>
+            </a:r>
+            <a:r>
+              <a:rPr>
                 <a:latin typeface="Avenir Book"/>
                 <a:ea typeface="Avenir Book"/>
                 <a:cs typeface="Avenir Book"/>
                 <a:sym typeface="Avenir Book"/>
-              </a:defRPr>
-            </a:pPr>
-            <a:r>
-              <a:rPr>
-                <a:latin typeface="Avenir Heavy"/>
-                <a:ea typeface="Avenir Heavy"/>
-                <a:cs typeface="Avenir Heavy"/>
-                <a:sym typeface="Avenir Heavy"/>
-              </a:rPr>
-              <a:t>Split</a:t>
-            </a:r>
-            <a:r>
+              </a:rPr>
               <a:t>:</a:t>
             </a:r>
             <a:r>
-              <a:rPr spc="-180"/>
-              <a:t> </a:t>
-            </a:r>
-            <a:r>
-              <a:rPr spc="-310"/>
+              <a:rPr spc="-180">
+                <a:latin typeface="Avenir Book"/>
+                <a:ea typeface="Avenir Book"/>
+                <a:cs typeface="Avenir Book"/>
+                <a:sym typeface="Avenir Book"/>
+              </a:rPr>
+              <a:t> </a:t>
+            </a:r>
+            <a:r>
+              <a:rPr spc="-310">
+                <a:latin typeface="Avenir Book"/>
+                <a:ea typeface="Avenir Book"/>
+                <a:cs typeface="Avenir Book"/>
+                <a:sym typeface="Avenir Book"/>
+              </a:rPr>
               <a:t>85 %</a:t>
             </a:r>
             <a:r>
-              <a:rPr spc="-40"/>
-              <a:t> </a:t>
-            </a:r>
-            <a:r>
-              <a:rPr spc="-35"/>
+              <a:rPr spc="-40">
+                <a:latin typeface="Avenir Book"/>
+                <a:ea typeface="Avenir Book"/>
+                <a:cs typeface="Avenir Book"/>
+                <a:sym typeface="Avenir Book"/>
+              </a:rPr>
+              <a:t> </a:t>
+            </a:r>
+            <a:r>
+              <a:rPr spc="-35">
+                <a:latin typeface="Avenir Book"/>
+                <a:ea typeface="Avenir Book"/>
+                <a:cs typeface="Avenir Book"/>
+                <a:sym typeface="Avenir Book"/>
+              </a:rPr>
               <a:t>Entrenamiento</a:t>
             </a:r>
             <a:r>
-              <a:rPr spc="145"/>
-              <a:t> </a:t>
-            </a:r>
-            <a:r>
-              <a:rPr spc="-120"/>
+              <a:rPr spc="145">
+                <a:latin typeface="Avenir Book"/>
+                <a:ea typeface="Avenir Book"/>
+                <a:cs typeface="Avenir Book"/>
+                <a:sym typeface="Avenir Book"/>
+              </a:rPr>
+              <a:t> </a:t>
+            </a:r>
+            <a:r>
+              <a:rPr spc="-120">
+                <a:latin typeface="Avenir Book"/>
+                <a:ea typeface="Avenir Book"/>
+                <a:cs typeface="Avenir Book"/>
+                <a:sym typeface="Avenir Book"/>
+              </a:rPr>
               <a:t>/</a:t>
             </a:r>
             <a:r>
-              <a:rPr spc="-110"/>
-              <a:t> </a:t>
-            </a:r>
-            <a:r>
-              <a:rPr spc="-530"/>
+              <a:rPr spc="-110">
+                <a:latin typeface="Avenir Book"/>
+                <a:ea typeface="Avenir Book"/>
+                <a:cs typeface="Avenir Book"/>
+                <a:sym typeface="Avenir Book"/>
+              </a:rPr>
+              <a:t> </a:t>
+            </a:r>
+            <a:r>
+              <a:rPr spc="-530">
+                <a:latin typeface="Avenir Book"/>
+                <a:ea typeface="Avenir Book"/>
+                <a:cs typeface="Avenir Book"/>
+                <a:sym typeface="Avenir Book"/>
+              </a:rPr>
               <a:t>15 %</a:t>
             </a:r>
             <a:r>
-              <a:rPr spc="20"/>
-              <a:t> </a:t>
-            </a:r>
-            <a:r>
-              <a:rPr spc="-80"/>
+              <a:rPr spc="20">
+                <a:latin typeface="Avenir Book"/>
+                <a:ea typeface="Avenir Book"/>
+                <a:cs typeface="Avenir Book"/>
+                <a:sym typeface="Avenir Book"/>
+              </a:rPr>
+              <a:t> </a:t>
+            </a:r>
+            <a:r>
+              <a:rPr spc="-80">
+                <a:latin typeface="Avenir Book"/>
+                <a:ea typeface="Avenir Book"/>
+                <a:cs typeface="Avenir Book"/>
+                <a:sym typeface="Avenir Book"/>
+              </a:rPr>
               <a:t>Prueba</a:t>
             </a:r>
             <a:r>
-              <a:rPr spc="20"/>
-              <a:t> </a:t>
-            </a:r>
-            <a:r>
-              <a:rPr spc="-75"/>
+              <a:rPr spc="20">
+                <a:latin typeface="Avenir Book"/>
+                <a:ea typeface="Avenir Book"/>
+                <a:cs typeface="Avenir Book"/>
+                <a:sym typeface="Avenir Book"/>
+              </a:rPr>
+              <a:t> </a:t>
+            </a:r>
+            <a:r>
+              <a:rPr spc="-75">
+                <a:latin typeface="Avenir Book"/>
+                <a:ea typeface="Avenir Book"/>
+                <a:cs typeface="Avenir Book"/>
+                <a:sym typeface="Avenir Book"/>
+              </a:rPr>
               <a:t>(40</a:t>
             </a:r>
             <a:r>
-              <a:rPr spc="-85"/>
-              <a:t> </a:t>
-            </a:r>
-            <a:r>
-              <a:rPr spc="-10"/>
+              <a:rPr spc="-85">
+                <a:latin typeface="Avenir Book"/>
+                <a:ea typeface="Avenir Book"/>
+                <a:cs typeface="Avenir Book"/>
+                <a:sym typeface="Avenir Book"/>
+              </a:rPr>
+              <a:t> </a:t>
+            </a:r>
+            <a:r>
+              <a:rPr spc="-10">
+                <a:latin typeface="Avenir Book"/>
+                <a:ea typeface="Avenir Book"/>
+                <a:cs typeface="Avenir Book"/>
+                <a:sym typeface="Avenir Book"/>
+              </a:rPr>
               <a:t>semanas)</a:t>
             </a:r>
           </a:p>
@@ -3895,15 +4075,17 @@
           <p:nvPr/>
         </p:nvPicPr>
         <p:blipFill>
-          <a:blip r:embed="rId2"/>
+          <a:blip r:embed="rId2">
+            <a:extLst/>
+          </a:blip>
           <a:stretch>
             <a:fillRect/>
           </a:stretch>
         </p:blipFill>
         <p:spPr>
           <a:xfrm>
-            <a:off x="7970062" y="2813443"/>
-            <a:ext cx="10872391" cy="5676114"/>
+            <a:off x="7970062" y="2813442"/>
+            <a:ext cx="10872391" cy="5676116"/>
           </a:xfrm>
           <a:prstGeom prst="rect">
             <a:avLst/>
@@ -3918,19 +4100,18 @@
   <p:clrMapOvr>
     <a:masterClrMapping/>
   </p:clrMapOvr>
-  <p:transition spd="med"/>
+  <p:transition xmlns:p14="http://schemas.microsoft.com/office/powerpoint/2010/main" spd="med" advClick="1"/>
 </p:sld>
 </file>
 
 <file path=ppt/slides/slide3.xml><?xml version="1.0" encoding="utf-8"?>
-<p:sld xmlns:a="http://schemas.openxmlformats.org/drawingml/2006/main" xmlns:r="http://schemas.openxmlformats.org/officeDocument/2006/relationships" xmlns:p="http://schemas.openxmlformats.org/presentationml/2006/main">
+<p:sld xmlns:a="http://schemas.openxmlformats.org/drawingml/2006/main" xmlns:r="http://schemas.openxmlformats.org/officeDocument/2006/relationships" xmlns:p="http://schemas.openxmlformats.org/presentationml/2006/main" xmlns:m="http://schemas.openxmlformats.org/officeDocument/2006/math" xmlns:a14="http://schemas.microsoft.com/office/drawing/2010/main" showMasterSp="1" showMasterPhAnim="1">
   <p:cSld>
     <p:bg>
       <p:bgPr>
         <a:solidFill>
           <a:srgbClr val="000000"/>
         </a:solidFill>
-        <a:effectLst/>
       </p:bgPr>
     </p:bg>
     <p:spTree>
@@ -3955,8 +4136,8 @@
         </p:nvSpPr>
         <p:spPr>
           <a:xfrm>
-            <a:off x="15707" y="769609"/>
-            <a:ext cx="20080539" cy="636108"/>
+            <a:off x="15706" y="769608"/>
+            <a:ext cx="20080540" cy="636109"/>
           </a:xfrm>
           <a:prstGeom prst="rect">
             <a:avLst/>
@@ -3969,19 +4150,24 @@
           </a:ln>
         </p:spPr>
         <p:txBody>
-          <a:bodyPr lIns="45719" rIns="45719"/>
+          <a:bodyPr lIns="45718" tIns="45718" rIns="45718" bIns="45718"/>
           <a:lstStyle/>
           <a:p>
-            <a:endParaRPr/>
+            <a:pPr>
+              <a:defRPr>
+                <a:latin typeface="Calibri"/>
+                <a:ea typeface="Calibri"/>
+                <a:cs typeface="Calibri"/>
+                <a:sym typeface="Calibri"/>
+              </a:defRPr>
+            </a:pPr>
           </a:p>
         </p:txBody>
       </p:sp>
       <p:sp>
         <p:nvSpPr>
           <p:cNvPr id="79" name="object 9"/>
-          <p:cNvSpPr txBox="1">
-            <a:spLocks noGrp="1"/>
-          </p:cNvSpPr>
+          <p:cNvSpPr txBox="1"/>
           <p:nvPr>
             <p:ph type="title"/>
           </p:nvPr>
@@ -3989,7 +4175,7 @@
         <p:spPr>
           <a:xfrm>
             <a:off x="912418" y="535057"/>
-            <a:ext cx="10010769" cy="1026795"/>
+            <a:ext cx="10010769" cy="1026796"/>
           </a:xfrm>
           <a:prstGeom prst="rect">
             <a:avLst/>
@@ -3999,8 +4185,8 @@
           <a:bodyPr/>
           <a:lstStyle/>
           <a:p>
-            <a:pPr indent="12268" defTabSz="841247">
-              <a:defRPr sz="5888" spc="-184">
+            <a:pPr indent="12267" defTabSz="841247">
+              <a:defRPr spc="-200" sz="5800">
                 <a:latin typeface="Avenir Book"/>
                 <a:ea typeface="Avenir Book"/>
                 <a:cs typeface="Avenir Book"/>
@@ -4015,7 +4201,7 @@
               <a:t> de</a:t>
             </a:r>
             <a:r>
-              <a:rPr spc="-276"/>
+              <a:rPr spc="-300"/>
               <a:t> </a:t>
             </a:r>
             <a:r>
@@ -4037,8 +4223,8 @@
         </p:nvSpPr>
         <p:spPr>
           <a:xfrm>
-            <a:off x="11694237" y="2750992"/>
-            <a:ext cx="8143876" cy="4612742"/>
+            <a:off x="11694237" y="2750991"/>
+            <a:ext cx="8143877" cy="4612743"/>
           </a:xfrm>
           <a:prstGeom prst="rect">
             <a:avLst/>
@@ -4051,7 +4237,7 @@
           </a:ln>
           <a:extLst>
             <a:ext uri="{C572A759-6A51-4108-AA02-DFA0A04FC94B}">
-              <ma14:wrappingTextBoxFlag xmlns:ma14="http://schemas.microsoft.com/office/mac/drawingml/2011/main" xmlns:a14="http://schemas.microsoft.com/office/drawing/2010/main" xmlns:m="http://schemas.openxmlformats.org/officeDocument/2006/math" xmlns="" val="1"/>
+              <ma14:wrappingTextBoxFlag xmlns:ma14="http://schemas.microsoft.com/office/mac/drawingml/2011/main" val="1"/>
             </a:ext>
           </a:extLst>
         </p:spPr>
@@ -4069,7 +4255,6 @@
                 <a:sym typeface="Avenir Book"/>
               </a:defRPr>
             </a:pPr>
-            <a:endParaRPr/>
           </a:p>
           <a:p>
             <a:pPr>
@@ -4086,11 +4271,10 @@
                 <a:sym typeface="Avenir Book"/>
               </a:defRPr>
             </a:pPr>
-            <a:endParaRPr/>
           </a:p>
           <a:p>
             <a:pPr>
-              <a:defRPr sz="2300" spc="80">
+              <a:defRPr spc="80" sz="2300">
                 <a:solidFill>
                   <a:srgbClr val="FFFFFF"/>
                 </a:solidFill>
@@ -4138,7 +4322,7 @@
           </a:p>
           <a:p>
             <a:pPr>
-              <a:defRPr sz="2300">
+              <a:defRPr spc="125" sz="2300">
                 <a:solidFill>
                   <a:srgbClr val="FFFFFF"/>
                 </a:solidFill>
@@ -4148,11 +4332,10 @@
                 <a:sym typeface="Avenir Book"/>
               </a:defRPr>
             </a:pPr>
-            <a:endParaRPr spc="125"/>
           </a:p>
           <a:p>
             <a:pPr indent="1270">
-              <a:defRPr sz="2400" spc="-114">
+              <a:defRPr spc="-114" sz="2400">
                 <a:solidFill>
                   <a:srgbClr val="FFFFFF"/>
                 </a:solidFill>
@@ -4235,7 +4418,7 @@
               <a:spcBef>
                 <a:spcPts val="300"/>
               </a:spcBef>
-              <a:defRPr sz="2400">
+              <a:defRPr spc="-10" sz="2400">
                 <a:solidFill>
                   <a:srgbClr val="FFFFFF"/>
                 </a:solidFill>
@@ -4245,7 +4428,6 @@
                 <a:sym typeface="Avenir Book"/>
               </a:defRPr>
             </a:pPr>
-            <a:endParaRPr spc="-10"/>
           </a:p>
           <a:p>
             <a:pPr marL="614680" indent="-316229">
@@ -4472,15 +4654,17 @@
           <p:nvPr/>
         </p:nvPicPr>
         <p:blipFill>
-          <a:blip r:embed="rId2"/>
+          <a:blip r:embed="rId2">
+            <a:extLst/>
+          </a:blip>
           <a:stretch>
             <a:fillRect/>
           </a:stretch>
         </p:blipFill>
         <p:spPr>
           <a:xfrm>
-            <a:off x="569242" y="2606585"/>
-            <a:ext cx="10697121" cy="7755702"/>
+            <a:off x="569241" y="2606585"/>
+            <a:ext cx="10697122" cy="7755702"/>
           </a:xfrm>
           <a:prstGeom prst="rect">
             <a:avLst/>
@@ -4495,19 +4679,18 @@
   <p:clrMapOvr>
     <a:masterClrMapping/>
   </p:clrMapOvr>
-  <p:transition spd="med"/>
+  <p:transition xmlns:p14="http://schemas.microsoft.com/office/powerpoint/2010/main" spd="med" advClick="1"/>
 </p:sld>
 </file>
 
 <file path=ppt/slides/slide4.xml><?xml version="1.0" encoding="utf-8"?>
-<p:sld xmlns:a="http://schemas.openxmlformats.org/drawingml/2006/main" xmlns:r="http://schemas.openxmlformats.org/officeDocument/2006/relationships" xmlns:p="http://schemas.openxmlformats.org/presentationml/2006/main">
+<p:sld xmlns:a="http://schemas.openxmlformats.org/drawingml/2006/main" xmlns:r="http://schemas.openxmlformats.org/officeDocument/2006/relationships" xmlns:p="http://schemas.openxmlformats.org/presentationml/2006/main" xmlns:m="http://schemas.openxmlformats.org/officeDocument/2006/math" xmlns:a14="http://schemas.microsoft.com/office/drawing/2010/main" showMasterSp="1" showMasterPhAnim="1">
   <p:cSld>
     <p:bg>
       <p:bgPr>
         <a:solidFill>
           <a:srgbClr val="000000"/>
         </a:solidFill>
-        <a:effectLst/>
       </p:bgPr>
     </p:bg>
     <p:spTree>
@@ -4532,8 +4715,8 @@
         </p:nvSpPr>
         <p:spPr>
           <a:xfrm>
-            <a:off x="15707" y="769610"/>
-            <a:ext cx="20080539" cy="824582"/>
+            <a:off x="15706" y="769610"/>
+            <a:ext cx="20080540" cy="824582"/>
           </a:xfrm>
           <a:prstGeom prst="rect">
             <a:avLst/>
@@ -4546,19 +4729,24 @@
           </a:ln>
         </p:spPr>
         <p:txBody>
-          <a:bodyPr lIns="45719" rIns="45719"/>
+          <a:bodyPr lIns="45718" tIns="45718" rIns="45718" bIns="45718"/>
           <a:lstStyle/>
           <a:p>
-            <a:endParaRPr/>
+            <a:pPr>
+              <a:defRPr>
+                <a:latin typeface="Calibri"/>
+                <a:ea typeface="Calibri"/>
+                <a:cs typeface="Calibri"/>
+                <a:sym typeface="Calibri"/>
+              </a:defRPr>
+            </a:pPr>
           </a:p>
         </p:txBody>
       </p:sp>
       <p:sp>
         <p:nvSpPr>
           <p:cNvPr id="84" name="object 3"/>
-          <p:cNvSpPr txBox="1">
-            <a:spLocks noGrp="1"/>
-          </p:cNvSpPr>
+          <p:cNvSpPr txBox="1"/>
           <p:nvPr>
             <p:ph type="title"/>
           </p:nvPr>
@@ -4566,7 +4754,7 @@
         <p:spPr>
           <a:xfrm>
             <a:off x="912418" y="535057"/>
-            <a:ext cx="10010769" cy="1026795"/>
+            <a:ext cx="10010769" cy="1026796"/>
           </a:xfrm>
           <a:prstGeom prst="rect">
             <a:avLst/>
@@ -4576,8 +4764,8 @@
           <a:bodyPr/>
           <a:lstStyle/>
           <a:p>
-            <a:pPr indent="11557" defTabSz="832104">
-              <a:defRPr sz="5915" spc="-273">
+            <a:pPr indent="11557" defTabSz="832103">
+              <a:defRPr spc="-300" sz="5900">
                 <a:latin typeface="Avenir Book"/>
                 <a:ea typeface="Avenir Book"/>
                 <a:cs typeface="Avenir Book"/>
@@ -4588,7 +4776,7 @@
               <a:t>Descomposición</a:t>
             </a:r>
             <a:r>
-              <a:rPr spc="-455"/>
+              <a:rPr spc="-500"/>
               <a:t> </a:t>
             </a:r>
             <a:r>
@@ -4604,14 +4792,14 @@
       </p:sp>
       <p:sp>
         <p:nvSpPr>
-          <p:cNvPr id="86" name="object 5"/>
+          <p:cNvPr id="85" name="object 5"/>
           <p:cNvSpPr txBox="1"/>
           <p:nvPr/>
         </p:nvSpPr>
         <p:spPr>
           <a:xfrm>
             <a:off x="1316327" y="2018775"/>
-            <a:ext cx="1756411" cy="482601"/>
+            <a:ext cx="1756412" cy="482601"/>
           </a:xfrm>
           <a:prstGeom prst="rect">
             <a:avLst/>
@@ -4621,7 +4809,7 @@
           </a:ln>
           <a:extLst>
             <a:ext uri="{C572A759-6A51-4108-AA02-DFA0A04FC94B}">
-              <ma14:wrappingTextBoxFlag xmlns:ma14="http://schemas.microsoft.com/office/mac/drawingml/2011/main" xmlns:a14="http://schemas.microsoft.com/office/drawing/2010/main" xmlns:m="http://schemas.openxmlformats.org/officeDocument/2006/math" xmlns="" val="1"/>
+              <ma14:wrappingTextBoxFlag xmlns:ma14="http://schemas.microsoft.com/office/mac/drawingml/2011/main" val="1"/>
             </a:ext>
           </a:extLst>
         </p:spPr>
@@ -4634,7 +4822,7 @@
               <a:spcBef>
                 <a:spcPts val="100"/>
               </a:spcBef>
-              <a:defRPr sz="2800" spc="-10">
+              <a:defRPr spc="-10" sz="2800">
                 <a:solidFill>
                   <a:srgbClr val="E4F997"/>
                 </a:solidFill>
@@ -4646,6 +4834,7 @@
             </a:lvl1pPr>
           </a:lstStyle>
           <a:p>
+            <a:pPr/>
             <a:r>
               <a:t>Tendencia</a:t>
             </a:r>
@@ -4654,14 +4843,14 @@
       </p:sp>
       <p:sp>
         <p:nvSpPr>
-          <p:cNvPr id="87" name="object 6"/>
+          <p:cNvPr id="86" name="object 6"/>
           <p:cNvSpPr txBox="1"/>
           <p:nvPr/>
         </p:nvSpPr>
         <p:spPr>
           <a:xfrm>
-            <a:off x="1298657" y="2711298"/>
-            <a:ext cx="4751706" cy="1476910"/>
+            <a:off x="1298656" y="2711298"/>
+            <a:ext cx="4751708" cy="1476909"/>
           </a:xfrm>
           <a:prstGeom prst="rect">
             <a:avLst/>
@@ -4671,7 +4860,7 @@
           </a:ln>
           <a:extLst>
             <a:ext uri="{C572A759-6A51-4108-AA02-DFA0A04FC94B}">
-              <ma14:wrappingTextBoxFlag xmlns:ma14="http://schemas.microsoft.com/office/mac/drawingml/2011/main" xmlns:a14="http://schemas.microsoft.com/office/drawing/2010/main" xmlns:m="http://schemas.openxmlformats.org/officeDocument/2006/math" xmlns="" val="1"/>
+              <ma14:wrappingTextBoxFlag xmlns:ma14="http://schemas.microsoft.com/office/mac/drawingml/2011/main" val="1"/>
             </a:ext>
           </a:extLst>
         </p:spPr>
@@ -4681,14 +4870,14 @@
           </a:bodyPr>
           <a:lstStyle/>
           <a:p>
-            <a:pPr marL="3175" marR="5080" indent="8890" algn="just">
+            <a:pPr marR="5080" indent="12064" algn="just">
               <a:lnSpc>
                 <a:spcPct val="126200"/>
               </a:lnSpc>
               <a:spcBef>
                 <a:spcPts val="100"/>
               </a:spcBef>
-              <a:defRPr sz="2400" spc="80">
+              <a:defRPr spc="80" sz="2400">
                 <a:solidFill>
                   <a:srgbClr val="F2F2F2"/>
                 </a:solidFill>
@@ -4699,15 +4888,14 @@
               </a:defRPr>
             </a:pPr>
             <a:r>
-              <a:rPr dirty="0" err="1"/>
               <a:t>Muestra</a:t>
             </a:r>
             <a:r>
-              <a:rPr spc="65" dirty="0"/>
-              <a:t> </a:t>
-            </a:r>
-            <a:r>
-              <a:rPr spc="0" dirty="0">
+              <a:rPr spc="65"/>
+              <a:t> </a:t>
+            </a:r>
+            <a:r>
+              <a:rPr spc="0">
                 <a:solidFill>
                   <a:srgbClr val="F6F6F6"/>
                 </a:solidFill>
@@ -4715,7 +4903,7 @@
               <a:t>un</a:t>
             </a:r>
             <a:r>
-              <a:rPr spc="25" dirty="0">
+              <a:rPr spc="25">
                 <a:solidFill>
                   <a:srgbClr val="F6F6F6"/>
                 </a:solidFill>
@@ -4723,7 +4911,7 @@
               <a:t> </a:t>
             </a:r>
             <a:r>
-              <a:rPr spc="60" dirty="0" err="1">
+              <a:rPr spc="60">
                 <a:solidFill>
                   <a:srgbClr val="F7F7F7"/>
                 </a:solidFill>
@@ -4731,7 +4919,7 @@
               <a:t>crecimiento</a:t>
             </a:r>
             <a:r>
-              <a:rPr spc="265" dirty="0">
+              <a:rPr spc="265">
                 <a:solidFill>
                   <a:srgbClr val="F7F7F7"/>
                 </a:solidFill>
@@ -4739,23 +4927,15 @@
               <a:t> </a:t>
             </a:r>
             <a:r>
-              <a:rPr spc="45" dirty="0" err="1">
+              <a:rPr spc="45">
                 <a:solidFill>
                   <a:srgbClr val="F4F4F4"/>
                 </a:solidFill>
               </a:rPr>
-              <a:t>sostenido</a:t>
-            </a:r>
-            <a:r>
-              <a:rPr spc="45" dirty="0">
-                <a:solidFill>
-                  <a:srgbClr val="F4F4F4"/>
-                </a:solidFill>
-              </a:rPr>
-              <a:t> </a:t>
-            </a:r>
-            <a:r>
-              <a:rPr spc="70" dirty="0">
+              <a:t>sostenido </a:t>
+            </a:r>
+            <a:r>
+              <a:rPr spc="70">
                 <a:solidFill>
                   <a:srgbClr val="F0F0F0"/>
                 </a:solidFill>
@@ -4763,7 +4943,7 @@
               <a:t>de</a:t>
             </a:r>
             <a:r>
-              <a:rPr spc="275" dirty="0">
+              <a:rPr spc="275">
                 <a:solidFill>
                   <a:srgbClr val="F0F0F0"/>
                 </a:solidFill>
@@ -4771,7 +4951,7 @@
               <a:t> </a:t>
             </a:r>
             <a:r>
-              <a:rPr spc="50" dirty="0">
+              <a:rPr spc="50">
                 <a:solidFill>
                   <a:srgbClr val="EDEDED"/>
                 </a:solidFill>
@@ -4779,7 +4959,7 @@
               <a:t>la</a:t>
             </a:r>
             <a:r>
-              <a:rPr spc="234" dirty="0">
+              <a:rPr spc="233">
                 <a:solidFill>
                   <a:srgbClr val="EDEDED"/>
                 </a:solidFill>
@@ -4787,7 +4967,7 @@
               <a:t> </a:t>
             </a:r>
             <a:r>
-              <a:rPr spc="200" dirty="0" err="1">
+              <a:rPr spc="200">
                 <a:solidFill>
                   <a:srgbClr val="FFFFFF"/>
                 </a:solidFill>
@@ -4795,7 +4975,7 @@
               <a:t>demanda</a:t>
             </a:r>
             <a:r>
-              <a:rPr spc="104" dirty="0">
+              <a:rPr spc="104">
                 <a:solidFill>
                   <a:srgbClr val="FFFFFF"/>
                 </a:solidFill>
@@ -4803,7 +4983,7 @@
               <a:t> </a:t>
             </a:r>
             <a:r>
-              <a:rPr spc="114" dirty="0">
+              <a:rPr spc="114">
                 <a:solidFill>
                   <a:srgbClr val="F6F6F6"/>
                 </a:solidFill>
@@ -4811,7 +4991,7 @@
               <a:t>bas</a:t>
             </a:r>
             <a:r>
-              <a:rPr spc="-465" dirty="0">
+              <a:rPr spc="-465">
                 <a:solidFill>
                   <a:srgbClr val="F6F6F6"/>
                 </a:solidFill>
@@ -4819,7 +4999,7 @@
               <a:t>e</a:t>
             </a:r>
             <a:r>
-              <a:rPr spc="120" dirty="0">
+              <a:rPr spc="120">
                 <a:solidFill>
                   <a:srgbClr val="001100"/>
                 </a:solidFill>
@@ -4827,7 +5007,7 @@
               <a:t> </a:t>
             </a:r>
             <a:r>
-              <a:rPr spc="120" dirty="0">
+              <a:rPr spc="120">
                 <a:solidFill>
                   <a:srgbClr val="FFFFFF"/>
                 </a:solidFill>
@@ -4835,7 +5015,7 @@
               <a:t>a </a:t>
             </a:r>
             <a:r>
-              <a:rPr spc="0" dirty="0">
+              <a:rPr spc="0">
                 <a:solidFill>
                   <a:srgbClr val="EFEFEF"/>
                 </a:solidFill>
@@ -4843,7 +5023,7 @@
               <a:t>lo</a:t>
             </a:r>
             <a:r>
-              <a:rPr spc="5" dirty="0">
+              <a:rPr spc="5">
                 <a:solidFill>
                   <a:srgbClr val="EFEFEF"/>
                 </a:solidFill>
@@ -4851,7 +5031,7 @@
               <a:t> </a:t>
             </a:r>
             <a:r>
-              <a:rPr spc="114" dirty="0">
+              <a:rPr spc="114">
                 <a:solidFill>
                   <a:srgbClr val="EFEFEF"/>
                 </a:solidFill>
@@ -4859,7 +5039,7 @@
               <a:t>largo</a:t>
             </a:r>
             <a:r>
-              <a:rPr spc="40" dirty="0">
+              <a:rPr spc="40">
                 <a:solidFill>
                   <a:srgbClr val="EFEFEF"/>
                 </a:solidFill>
@@ -4867,7 +5047,7 @@
               <a:t> </a:t>
             </a:r>
             <a:r>
-              <a:rPr spc="104" dirty="0">
+              <a:rPr spc="104">
                 <a:solidFill>
                   <a:srgbClr val="E6E6E6"/>
                 </a:solidFill>
@@ -4875,7 +5055,7 @@
               <a:t>de </a:t>
             </a:r>
             <a:r>
-              <a:rPr spc="0" dirty="0" err="1">
+              <a:rPr spc="0">
                 <a:solidFill>
                   <a:srgbClr val="EFEFEF"/>
                 </a:solidFill>
@@ -4883,7 +5063,7 @@
               <a:t>los</a:t>
             </a:r>
             <a:r>
-              <a:rPr spc="195" dirty="0">
+              <a:rPr spc="195">
                 <a:solidFill>
                   <a:srgbClr val="EFEFEF"/>
                 </a:solidFill>
@@ -4891,34 +5071,26 @@
               <a:t> </a:t>
             </a:r>
             <a:r>
-              <a:rPr spc="70" dirty="0" err="1">
+              <a:rPr spc="70">
                 <a:solidFill>
                   <a:srgbClr val="EFEFEF"/>
                 </a:solidFill>
               </a:rPr>
-              <a:t>años</a:t>
-            </a:r>
-            <a:r>
-              <a:rPr spc="70" dirty="0">
-                <a:solidFill>
-                  <a:srgbClr val="EFEFEF"/>
-                </a:solidFill>
-              </a:rPr>
-              <a:t>.</a:t>
+              <a:t>años.</a:t>
             </a:r>
           </a:p>
         </p:txBody>
       </p:sp>
       <p:sp>
         <p:nvSpPr>
-          <p:cNvPr id="88" name="object 7"/>
+          <p:cNvPr id="87" name="object 7"/>
           <p:cNvSpPr txBox="1"/>
           <p:nvPr/>
         </p:nvSpPr>
         <p:spPr>
           <a:xfrm>
-            <a:off x="1659244" y="5204832"/>
-            <a:ext cx="3438173" cy="482601"/>
+            <a:off x="1659244" y="5204831"/>
+            <a:ext cx="3438174" cy="482601"/>
           </a:xfrm>
           <a:prstGeom prst="rect">
             <a:avLst/>
@@ -4928,7 +5100,7 @@
           </a:ln>
           <a:extLst>
             <a:ext uri="{C572A759-6A51-4108-AA02-DFA0A04FC94B}">
-              <ma14:wrappingTextBoxFlag xmlns:ma14="http://schemas.microsoft.com/office/mac/drawingml/2011/main" xmlns:a14="http://schemas.microsoft.com/office/drawing/2010/main" xmlns:m="http://schemas.openxmlformats.org/officeDocument/2006/math" xmlns="" val="1"/>
+              <ma14:wrappingTextBoxFlag xmlns:ma14="http://schemas.microsoft.com/office/mac/drawingml/2011/main" val="1"/>
             </a:ext>
           </a:extLst>
         </p:spPr>
@@ -4941,7 +5113,7 @@
               <a:spcBef>
                 <a:spcPts val="100"/>
               </a:spcBef>
-              <a:defRPr sz="2800" spc="100">
+              <a:defRPr spc="100" sz="2800">
                 <a:solidFill>
                   <a:srgbClr val="E9F6AB"/>
                 </a:solidFill>
@@ -4953,6 +5125,7 @@
             </a:lvl1pPr>
           </a:lstStyle>
           <a:p>
+            <a:pPr/>
             <a:r>
               <a:t>Estacionalidad</a:t>
             </a:r>
@@ -4961,14 +5134,14 @@
       </p:sp>
       <p:sp>
         <p:nvSpPr>
-          <p:cNvPr id="89" name="object 8"/>
+          <p:cNvPr id="88" name="object 8"/>
           <p:cNvSpPr txBox="1"/>
           <p:nvPr/>
         </p:nvSpPr>
         <p:spPr>
           <a:xfrm>
-            <a:off x="1655358" y="5862824"/>
-            <a:ext cx="4546601" cy="1545972"/>
+            <a:off x="1655357" y="5862823"/>
+            <a:ext cx="4546603" cy="1545972"/>
           </a:xfrm>
           <a:prstGeom prst="rect">
             <a:avLst/>
@@ -4978,7 +5151,7 @@
           </a:ln>
           <a:extLst>
             <a:ext uri="{C572A759-6A51-4108-AA02-DFA0A04FC94B}">
-              <ma14:wrappingTextBoxFlag xmlns:ma14="http://schemas.microsoft.com/office/mac/drawingml/2011/main" xmlns:a14="http://schemas.microsoft.com/office/drawing/2010/main" xmlns:m="http://schemas.openxmlformats.org/officeDocument/2006/math" xmlns="" val="1"/>
+              <ma14:wrappingTextBoxFlag xmlns:ma14="http://schemas.microsoft.com/office/mac/drawingml/2011/main" val="1"/>
             </a:ext>
           </a:extLst>
         </p:spPr>
@@ -5152,14 +5325,14 @@
       </p:sp>
       <p:sp>
         <p:nvSpPr>
-          <p:cNvPr id="90" name="object 9"/>
+          <p:cNvPr id="89" name="object 9"/>
           <p:cNvSpPr txBox="1"/>
           <p:nvPr/>
         </p:nvSpPr>
         <p:spPr>
           <a:xfrm>
             <a:off x="1717173" y="8107298"/>
-            <a:ext cx="1392134" cy="430887"/>
+            <a:ext cx="1392135" cy="482601"/>
           </a:xfrm>
           <a:prstGeom prst="rect">
             <a:avLst/>
@@ -5169,12 +5342,12 @@
           </a:ln>
           <a:extLst>
             <a:ext uri="{C572A759-6A51-4108-AA02-DFA0A04FC94B}">
-              <ma14:wrappingTextBoxFlag xmlns:ma14="http://schemas.microsoft.com/office/mac/drawingml/2011/main" xmlns:a14="http://schemas.microsoft.com/office/drawing/2010/main" xmlns:m="http://schemas.openxmlformats.org/officeDocument/2006/math" xmlns="" val="1"/>
+              <ma14:wrappingTextBoxFlag xmlns:ma14="http://schemas.microsoft.com/office/mac/drawingml/2011/main" val="1"/>
             </a:ext>
           </a:extLst>
         </p:spPr>
         <p:txBody>
-          <a:bodyPr wrap="square" lIns="0" tIns="0" rIns="0" bIns="0">
+          <a:bodyPr lIns="0" tIns="0" rIns="0" bIns="0">
             <a:spAutoFit/>
           </a:bodyPr>
           <a:lstStyle>
@@ -5182,7 +5355,7 @@
               <a:spcBef>
                 <a:spcPts val="100"/>
               </a:spcBef>
-              <a:defRPr sz="2800" spc="-10">
+              <a:defRPr spc="-10" sz="2800">
                 <a:solidFill>
                   <a:srgbClr val="E2FDB1"/>
                 </a:solidFill>
@@ -5194,6 +5367,7 @@
             </a:lvl1pPr>
           </a:lstStyle>
           <a:p>
+            <a:pPr/>
             <a:r>
               <a:t>Residuo</a:t>
             </a:r>
@@ -5202,14 +5376,14 @@
       </p:sp>
       <p:sp>
         <p:nvSpPr>
-          <p:cNvPr id="91" name="object 10"/>
+          <p:cNvPr id="90" name="object 10"/>
           <p:cNvSpPr txBox="1"/>
           <p:nvPr/>
         </p:nvSpPr>
         <p:spPr>
           <a:xfrm>
-            <a:off x="1710135" y="8802459"/>
-            <a:ext cx="4129973" cy="1362489"/>
+            <a:off x="1710134" y="8802458"/>
+            <a:ext cx="4129975" cy="1478485"/>
           </a:xfrm>
           <a:prstGeom prst="rect">
             <a:avLst/>
@@ -5219,17 +5393,17 @@
           </a:ln>
           <a:extLst>
             <a:ext uri="{C572A759-6A51-4108-AA02-DFA0A04FC94B}">
-              <ma14:wrappingTextBoxFlag xmlns:ma14="http://schemas.microsoft.com/office/mac/drawingml/2011/main" xmlns:a14="http://schemas.microsoft.com/office/drawing/2010/main" xmlns:m="http://schemas.openxmlformats.org/officeDocument/2006/math" xmlns="" val="1"/>
+              <ma14:wrappingTextBoxFlag xmlns:ma14="http://schemas.microsoft.com/office/mac/drawingml/2011/main" val="1"/>
             </a:ext>
           </a:extLst>
         </p:spPr>
         <p:txBody>
-          <a:bodyPr wrap="square" lIns="0" tIns="0" rIns="0" bIns="0">
+          <a:bodyPr lIns="0" tIns="0" rIns="0" bIns="0">
             <a:spAutoFit/>
           </a:bodyPr>
           <a:lstStyle/>
           <a:p>
-            <a:pPr marL="5079" marR="5080" indent="6985">
+            <a:pPr marR="5080" indent="12063">
               <a:lnSpc>
                 <a:spcPct val="121200"/>
               </a:lnSpc>
@@ -5391,14 +5565,14 @@
       </p:sp>
       <p:sp>
         <p:nvSpPr>
-          <p:cNvPr id="92" name="Shape"/>
+          <p:cNvPr id="91" name="Shape"/>
           <p:cNvSpPr/>
           <p:nvPr/>
         </p:nvSpPr>
         <p:spPr>
           <a:xfrm>
-            <a:off x="912418" y="1625075"/>
-            <a:ext cx="5524183" cy="2795698"/>
+            <a:off x="912417" y="1625075"/>
+            <a:ext cx="5524184" cy="2795699"/>
           </a:xfrm>
           <a:custGeom>
             <a:avLst/>
@@ -5420,7 +5594,7 @@
             </a:cxnLst>
             <a:rect l="0" t="0" r="r" b="b"/>
             <a:pathLst>
-              <a:path w="21600" h="21600" extrusionOk="0">
+              <a:path w="21600" h="21600" fill="norm" stroke="1" extrusionOk="0">
                 <a:moveTo>
                   <a:pt x="2928" y="0"/>
                 </a:moveTo>
@@ -5566,7 +5740,7 @@
             </a:solidFill>
           </a:ln>
           <a:effectLst>
-            <a:outerShdw blurRad="38100" dist="23000" dir="5400000" rotWithShape="0">
+            <a:outerShdw sx="100000" sy="100000" kx="0" ky="0" algn="b" rotWithShape="0" blurRad="38100" dist="23000" dir="5400000">
               <a:srgbClr val="000000">
                 <a:alpha val="35000"/>
               </a:srgbClr>
@@ -5574,23 +5748,30 @@
           </a:effectLst>
         </p:spPr>
         <p:txBody>
-          <a:bodyPr lIns="45719" rIns="45719" anchor="ctr"/>
+          <a:bodyPr lIns="45718" tIns="45718" rIns="45718" bIns="45718" anchor="ctr"/>
           <a:lstStyle/>
           <a:p>
-            <a:endParaRPr/>
+            <a:pPr>
+              <a:defRPr>
+                <a:latin typeface="Calibri"/>
+                <a:ea typeface="Calibri"/>
+                <a:cs typeface="Calibri"/>
+                <a:sym typeface="Calibri"/>
+              </a:defRPr>
+            </a:pPr>
           </a:p>
         </p:txBody>
       </p:sp>
       <p:sp>
         <p:nvSpPr>
-          <p:cNvPr id="93" name="Shape"/>
+          <p:cNvPr id="92" name="Shape"/>
           <p:cNvSpPr/>
           <p:nvPr/>
         </p:nvSpPr>
         <p:spPr>
           <a:xfrm>
-            <a:off x="912418" y="4817244"/>
-            <a:ext cx="5524183" cy="2416892"/>
+            <a:off x="912417" y="4817243"/>
+            <a:ext cx="5524184" cy="2661020"/>
           </a:xfrm>
           <a:custGeom>
             <a:avLst/>
@@ -5612,7 +5793,7 @@
             </a:cxnLst>
             <a:rect l="0" t="0" r="r" b="b"/>
             <a:pathLst>
-              <a:path w="21600" h="21600" extrusionOk="0">
+              <a:path w="21600" h="21600" fill="norm" stroke="1" extrusionOk="0">
                 <a:moveTo>
                   <a:pt x="2928" y="0"/>
                 </a:moveTo>
@@ -5758,7 +5939,7 @@
             </a:solidFill>
           </a:ln>
           <a:effectLst>
-            <a:outerShdw blurRad="38100" dist="23000" dir="5400000" rotWithShape="0">
+            <a:outerShdw sx="100000" sy="100000" kx="0" ky="0" algn="b" rotWithShape="0" blurRad="38100" dist="23000" dir="5400000">
               <a:srgbClr val="000000">
                 <a:alpha val="35000"/>
               </a:srgbClr>
@@ -5766,23 +5947,30 @@
           </a:effectLst>
         </p:spPr>
         <p:txBody>
-          <a:bodyPr lIns="45719" rIns="45719" anchor="ctr"/>
+          <a:bodyPr lIns="45718" tIns="45718" rIns="45718" bIns="45718" anchor="ctr"/>
           <a:lstStyle/>
           <a:p>
-            <a:endParaRPr/>
+            <a:pPr>
+              <a:defRPr>
+                <a:latin typeface="Calibri"/>
+                <a:ea typeface="Calibri"/>
+                <a:cs typeface="Calibri"/>
+                <a:sym typeface="Calibri"/>
+              </a:defRPr>
+            </a:pPr>
           </a:p>
         </p:txBody>
       </p:sp>
       <p:sp>
         <p:nvSpPr>
-          <p:cNvPr id="94" name="Shape"/>
+          <p:cNvPr id="93" name="Shape"/>
           <p:cNvSpPr/>
           <p:nvPr/>
         </p:nvSpPr>
         <p:spPr>
           <a:xfrm>
-            <a:off x="925118" y="7713598"/>
-            <a:ext cx="5511483" cy="2819792"/>
+            <a:off x="918768" y="7875871"/>
+            <a:ext cx="5511484" cy="2819794"/>
           </a:xfrm>
           <a:custGeom>
             <a:avLst/>
@@ -5804,7 +5992,7 @@
             </a:cxnLst>
             <a:rect l="0" t="0" r="r" b="b"/>
             <a:pathLst>
-              <a:path w="21600" h="21600" extrusionOk="0">
+              <a:path w="21600" h="21600" fill="norm" stroke="1" extrusionOk="0">
                 <a:moveTo>
                   <a:pt x="2928" y="0"/>
                 </a:moveTo>
@@ -5950,7 +6138,7 @@
             </a:solidFill>
           </a:ln>
           <a:effectLst>
-            <a:outerShdw blurRad="38100" dist="23000" dir="5400000" rotWithShape="0">
+            <a:outerShdw sx="100000" sy="100000" kx="0" ky="0" algn="b" rotWithShape="0" blurRad="38100" dist="23000" dir="5400000">
               <a:srgbClr val="000000">
                 <a:alpha val="35000"/>
               </a:srgbClr>
@@ -5958,41 +6146,47 @@
           </a:effectLst>
         </p:spPr>
         <p:txBody>
-          <a:bodyPr lIns="45719" rIns="45719" anchor="ctr"/>
+          <a:bodyPr lIns="45718" tIns="45718" rIns="45718" bIns="45718" anchor="ctr"/>
           <a:lstStyle/>
           <a:p>
-            <a:endParaRPr/>
+            <a:pPr>
+              <a:defRPr>
+                <a:latin typeface="Calibri"/>
+                <a:ea typeface="Calibri"/>
+                <a:cs typeface="Calibri"/>
+                <a:sym typeface="Calibri"/>
+              </a:defRPr>
+            </a:pPr>
           </a:p>
         </p:txBody>
       </p:sp>
       <p:pic>
         <p:nvPicPr>
-          <p:cNvPr id="3" name="Imagen 2">
-            <a:extLst>
-              <a:ext uri="{FF2B5EF4-FFF2-40B4-BE49-F238E27FC236}">
-                <a16:creationId xmlns:a16="http://schemas.microsoft.com/office/drawing/2014/main" id="{56DAC8F0-840E-918F-7717-F38300CB92C1}"/>
-              </a:ext>
-            </a:extLst>
-          </p:cNvPr>
+          <p:cNvPr id="94" name="Imagen 2" descr="Imagen 2"/>
           <p:cNvPicPr>
             <a:picLocks noChangeAspect="1"/>
           </p:cNvPicPr>
           <p:nvPr/>
         </p:nvPicPr>
         <p:blipFill>
-          <a:blip r:embed="rId2"/>
+          <a:blip r:embed="rId2">
+            <a:extLst/>
+          </a:blip>
           <a:stretch>
             <a:fillRect/>
           </a:stretch>
         </p:blipFill>
         <p:spPr>
           <a:xfrm>
-            <a:off x="7228656" y="1740312"/>
-            <a:ext cx="12094772" cy="8570756"/>
+            <a:off x="7228655" y="1740311"/>
+            <a:ext cx="12094773" cy="8570757"/>
           </a:xfrm>
           <a:prstGeom prst="rect">
             <a:avLst/>
           </a:prstGeom>
+          <a:ln w="12700">
+            <a:miter lim="400000"/>
+          </a:ln>
         </p:spPr>
       </p:pic>
     </p:spTree>
@@ -6000,19 +6194,18 @@
   <p:clrMapOvr>
     <a:masterClrMapping/>
   </p:clrMapOvr>
-  <p:transition spd="med"/>
+  <p:transition xmlns:p14="http://schemas.microsoft.com/office/powerpoint/2010/main" spd="med" advClick="1"/>
 </p:sld>
 </file>
 
 <file path=ppt/slides/slide5.xml><?xml version="1.0" encoding="utf-8"?>
-<p:sld xmlns:a="http://schemas.openxmlformats.org/drawingml/2006/main" xmlns:r="http://schemas.openxmlformats.org/officeDocument/2006/relationships" xmlns:p="http://schemas.openxmlformats.org/presentationml/2006/main">
+<p:sld xmlns:a="http://schemas.openxmlformats.org/drawingml/2006/main" xmlns:r="http://schemas.openxmlformats.org/officeDocument/2006/relationships" xmlns:p="http://schemas.openxmlformats.org/presentationml/2006/main" xmlns:m="http://schemas.openxmlformats.org/officeDocument/2006/math" xmlns:a14="http://schemas.microsoft.com/office/drawing/2010/main" showMasterSp="1" showMasterPhAnim="1">
   <p:cSld>
     <p:bg>
       <p:bgPr>
         <a:solidFill>
           <a:srgbClr val="000000"/>
         </a:solidFill>
-        <a:effectLst/>
       </p:bgPr>
     </p:bg>
     <p:spTree>
@@ -6037,8 +6230,8 @@
         </p:nvSpPr>
         <p:spPr>
           <a:xfrm>
-            <a:off x="15707" y="769610"/>
-            <a:ext cx="20080539" cy="824582"/>
+            <a:off x="15706" y="769610"/>
+            <a:ext cx="20080540" cy="824582"/>
           </a:xfrm>
           <a:prstGeom prst="rect">
             <a:avLst/>
@@ -6051,19 +6244,24 @@
           </a:ln>
         </p:spPr>
         <p:txBody>
-          <a:bodyPr lIns="45719" rIns="45719"/>
+          <a:bodyPr lIns="45718" tIns="45718" rIns="45718" bIns="45718"/>
           <a:lstStyle/>
           <a:p>
-            <a:endParaRPr/>
+            <a:pPr>
+              <a:defRPr>
+                <a:latin typeface="Calibri"/>
+                <a:ea typeface="Calibri"/>
+                <a:cs typeface="Calibri"/>
+                <a:sym typeface="Calibri"/>
+              </a:defRPr>
+            </a:pPr>
           </a:p>
         </p:txBody>
       </p:sp>
       <p:sp>
         <p:nvSpPr>
           <p:cNvPr id="97" name="object 9"/>
-          <p:cNvSpPr txBox="1">
-            <a:spLocks noGrp="1"/>
-          </p:cNvSpPr>
+          <p:cNvSpPr txBox="1"/>
           <p:nvPr>
             <p:ph type="title"/>
           </p:nvPr>
@@ -6071,7 +6269,7 @@
         <p:spPr>
           <a:xfrm>
             <a:off x="912418" y="535057"/>
-            <a:ext cx="10010769" cy="1026795"/>
+            <a:ext cx="10010769" cy="1026796"/>
           </a:xfrm>
           <a:prstGeom prst="rect">
             <a:avLst/>
@@ -6081,8 +6279,8 @@
           <a:bodyPr/>
           <a:lstStyle/>
           <a:p>
-            <a:pPr indent="11557" defTabSz="832104">
-              <a:defRPr sz="5915" spc="-91">
+            <a:pPr indent="11557" defTabSz="832103">
+              <a:defRPr spc="-100" sz="5900">
                 <a:latin typeface="Avenir Book"/>
                 <a:ea typeface="Avenir Book"/>
                 <a:cs typeface="Avenir Book"/>
@@ -6093,15 +6291,15 @@
               <a:t>Demanda</a:t>
             </a:r>
             <a:r>
-              <a:rPr spc="-364"/>
+              <a:rPr spc="-400"/>
               <a:t> vs.</a:t>
             </a:r>
             <a:r>
-              <a:rPr spc="-182"/>
-              <a:t> </a:t>
-            </a:r>
-            <a:r>
-              <a:rPr spc="-182">
+              <a:rPr spc="-200"/>
+              <a:t> </a:t>
+            </a:r>
+            <a:r>
+              <a:rPr spc="-200">
                 <a:solidFill>
                   <a:srgbClr val="DFFDA3"/>
                 </a:solidFill>
@@ -6133,7 +6331,7 @@
           </a:ln>
           <a:extLst>
             <a:ext uri="{C572A759-6A51-4108-AA02-DFA0A04FC94B}">
-              <ma14:wrappingTextBoxFlag xmlns:ma14="http://schemas.microsoft.com/office/mac/drawingml/2011/main" xmlns:a14="http://schemas.microsoft.com/office/drawing/2010/main" xmlns:m="http://schemas.openxmlformats.org/officeDocument/2006/math" xmlns="" val="1"/>
+              <ma14:wrappingTextBoxFlag xmlns:ma14="http://schemas.microsoft.com/office/mac/drawingml/2011/main" val="1"/>
             </a:ext>
           </a:extLst>
         </p:spPr>
@@ -6151,7 +6349,6 @@
                 <a:sym typeface="Avenir Book"/>
               </a:defRPr>
             </a:pPr>
-            <a:endParaRPr/>
           </a:p>
           <a:p>
             <a:pPr>
@@ -6165,11 +6362,10 @@
                 <a:sym typeface="Avenir Book"/>
               </a:defRPr>
             </a:pPr>
-            <a:endParaRPr/>
           </a:p>
           <a:p>
             <a:pPr indent="1905">
-              <a:defRPr sz="2200" spc="180">
+              <a:defRPr spc="180" sz="2200">
                 <a:solidFill>
                   <a:srgbClr val="FFFFFF"/>
                 </a:solidFill>
@@ -6204,18 +6400,17 @@
               <a:spcBef>
                 <a:spcPts val="300"/>
               </a:spcBef>
-              <a:defRPr sz="2200">
+              <a:defRPr spc="155" sz="2200">
                 <a:latin typeface="Avenir Book"/>
                 <a:ea typeface="Avenir Book"/>
                 <a:cs typeface="Avenir Book"/>
                 <a:sym typeface="Avenir Book"/>
               </a:defRPr>
             </a:pPr>
-            <a:endParaRPr spc="155"/>
           </a:p>
           <a:p>
             <a:pPr>
-              <a:defRPr sz="2300" spc="225">
+              <a:defRPr spc="225" sz="2300">
                 <a:solidFill>
                   <a:srgbClr val="EBEBEB"/>
                 </a:solidFill>
@@ -6349,18 +6544,16 @@
               <a:spcBef>
                 <a:spcPts val="400"/>
               </a:spcBef>
-              <a:defRPr sz="2300">
+              <a:defRPr spc="-20" sz="2300">
+                <a:solidFill>
+                  <a:srgbClr val="F2F2F2"/>
+                </a:solidFill>
                 <a:latin typeface="Avenir Book"/>
                 <a:ea typeface="Avenir Book"/>
                 <a:cs typeface="Avenir Book"/>
                 <a:sym typeface="Avenir Book"/>
               </a:defRPr>
             </a:pPr>
-            <a:endParaRPr spc="-20">
-              <a:solidFill>
-                <a:srgbClr val="F2F2F2"/>
-              </a:solidFill>
-            </a:endParaRPr>
           </a:p>
           <a:p>
             <a:pPr marL="616585" indent="-316230">
@@ -6372,7 +6565,7 @@
               <a:tabLst>
                 <a:tab pos="609600" algn="l"/>
               </a:tabLst>
-              <a:defRPr sz="2400" spc="65">
+              <a:defRPr spc="65" sz="2400">
                 <a:solidFill>
                   <a:srgbClr val="EDEDED"/>
                 </a:solidFill>
@@ -6657,29 +6850,27 @@
               <a:spcBef>
                 <a:spcPts val="100"/>
               </a:spcBef>
-              <a:defRPr sz="2400">
+              <a:defRPr spc="-10" sz="2400">
+                <a:solidFill>
+                  <a:srgbClr val="FFFFFF"/>
+                </a:solidFill>
                 <a:latin typeface="Avenir Book"/>
                 <a:ea typeface="Avenir Book"/>
                 <a:cs typeface="Avenir Book"/>
                 <a:sym typeface="Avenir Book"/>
               </a:defRPr>
             </a:pPr>
-            <a:endParaRPr spc="-10">
-              <a:solidFill>
-                <a:srgbClr val="FFFFFF"/>
-              </a:solidFill>
-            </a:endParaRPr>
           </a:p>
           <a:p>
             <a:pPr indent="3810">
-              <a:defRPr sz="2700" spc="-185">
+              <a:defRPr spc="-185" sz="2700">
                 <a:solidFill>
                   <a:srgbClr val="F2F2F2"/>
                 </a:solidFill>
-                <a:latin typeface="Avenir Book Oblique"/>
-                <a:ea typeface="Avenir Book Oblique"/>
-                <a:cs typeface="Avenir Book Oblique"/>
-                <a:sym typeface="Avenir Book Oblique"/>
+                <a:latin typeface="Avenir Book"/>
+                <a:ea typeface="Avenir Book"/>
+                <a:cs typeface="Avenir Book"/>
+                <a:sym typeface="Avenir Book"/>
               </a:defRPr>
             </a:pPr>
             <a:r>
@@ -6797,15 +6988,17 @@
           <p:nvPr/>
         </p:nvPicPr>
         <p:blipFill>
-          <a:blip r:embed="rId2"/>
+          <a:blip r:embed="rId2">
+            <a:extLst/>
+          </a:blip>
           <a:stretch>
             <a:fillRect/>
           </a:stretch>
         </p:blipFill>
         <p:spPr>
           <a:xfrm>
-            <a:off x="8974072" y="2645377"/>
-            <a:ext cx="10569700" cy="6314367"/>
+            <a:off x="8974071" y="2645377"/>
+            <a:ext cx="10569701" cy="6314367"/>
           </a:xfrm>
           <a:prstGeom prst="rect">
             <a:avLst/>
@@ -6820,19 +7013,18 @@
   <p:clrMapOvr>
     <a:masterClrMapping/>
   </p:clrMapOvr>
-  <p:transition spd="med"/>
+  <p:transition xmlns:p14="http://schemas.microsoft.com/office/powerpoint/2010/main" spd="med" advClick="1"/>
 </p:sld>
 </file>
 
 <file path=ppt/slides/slide6.xml><?xml version="1.0" encoding="utf-8"?>
-<p:sld xmlns:a="http://schemas.openxmlformats.org/drawingml/2006/main" xmlns:r="http://schemas.openxmlformats.org/officeDocument/2006/relationships" xmlns:p="http://schemas.openxmlformats.org/presentationml/2006/main">
+<p:sld xmlns:a="http://schemas.openxmlformats.org/drawingml/2006/main" xmlns:r="http://schemas.openxmlformats.org/officeDocument/2006/relationships" xmlns:p="http://schemas.openxmlformats.org/presentationml/2006/main" xmlns:m="http://schemas.openxmlformats.org/officeDocument/2006/math" xmlns:a14="http://schemas.microsoft.com/office/drawing/2010/main" showMasterSp="1" showMasterPhAnim="1">
   <p:cSld>
     <p:bg>
       <p:bgPr>
         <a:solidFill>
           <a:srgbClr val="000000"/>
         </a:solidFill>
-        <a:effectLst/>
       </p:bgPr>
     </p:bg>
     <p:spTree>
@@ -6857,8 +7049,8 @@
         </p:nvSpPr>
         <p:spPr>
           <a:xfrm>
-            <a:off x="15707" y="2340242"/>
-            <a:ext cx="20080539" cy="636108"/>
+            <a:off x="15706" y="2340242"/>
+            <a:ext cx="20080540" cy="636109"/>
           </a:xfrm>
           <a:prstGeom prst="rect">
             <a:avLst/>
@@ -6871,19 +7063,24 @@
           </a:ln>
         </p:spPr>
         <p:txBody>
-          <a:bodyPr lIns="45719" rIns="45719"/>
+          <a:bodyPr lIns="45718" tIns="45718" rIns="45718" bIns="45718"/>
           <a:lstStyle/>
           <a:p>
-            <a:endParaRPr/>
+            <a:pPr>
+              <a:defRPr>
+                <a:latin typeface="Calibri"/>
+                <a:ea typeface="Calibri"/>
+                <a:cs typeface="Calibri"/>
+                <a:sym typeface="Calibri"/>
+              </a:defRPr>
+            </a:pPr>
           </a:p>
         </p:txBody>
       </p:sp>
       <p:sp>
         <p:nvSpPr>
           <p:cNvPr id="102" name="object 3"/>
-          <p:cNvSpPr txBox="1">
-            <a:spLocks noGrp="1"/>
-          </p:cNvSpPr>
+          <p:cNvSpPr txBox="1"/>
           <p:nvPr>
             <p:ph type="title"/>
           </p:nvPr>
@@ -6891,7 +7088,7 @@
         <p:spPr>
           <a:xfrm>
             <a:off x="906721" y="2105690"/>
-            <a:ext cx="8140067" cy="1026795"/>
+            <a:ext cx="8140066" cy="1026796"/>
           </a:xfrm>
           <a:prstGeom prst="rect">
             <a:avLst/>
@@ -6901,8 +7098,8 @@
           <a:bodyPr/>
           <a:lstStyle/>
           <a:p>
-            <a:pPr indent="11557" defTabSz="832104">
-              <a:defRPr sz="5915">
+            <a:pPr indent="11557" defTabSz="832103">
+              <a:defRPr sz="5900">
                 <a:latin typeface="Avenir Book"/>
                 <a:ea typeface="Avenir Book"/>
                 <a:cs typeface="Avenir Book"/>
@@ -6913,18 +7110,18 @@
               <a:t>Evaluación</a:t>
             </a:r>
             <a:r>
-              <a:rPr spc="273"/>
+              <a:rPr spc="200"/>
               <a:t> </a:t>
             </a:r>
             <a:r>
               <a:t>de</a:t>
             </a:r>
             <a:r>
-              <a:rPr spc="364"/>
-              <a:t> </a:t>
-            </a:r>
-            <a:r>
-              <a:rPr spc="-91">
+              <a:rPr spc="300"/>
+              <a:t> </a:t>
+            </a:r>
+            <a:r>
+              <a:rPr spc="-100">
                 <a:solidFill>
                   <a:srgbClr val="D4F789"/>
                 </a:solidFill>
@@ -6943,9 +7140,9 @@
         <p:grpSpPr>
           <a:xfrm>
             <a:off x="15704" y="5497214"/>
-            <a:ext cx="20080546" cy="494750"/>
+            <a:ext cx="20080547" cy="494751"/>
             <a:chOff x="0" y="0"/>
-            <a:chExt cx="20080544" cy="494749"/>
+            <a:chExt cx="20080546" cy="494749"/>
           </a:xfrm>
         </p:grpSpPr>
         <p:pic>
@@ -6957,7 +7154,9 @@
             <p:nvPr/>
           </p:nvPicPr>
           <p:blipFill>
-            <a:blip r:embed="rId2"/>
+            <a:blip r:embed="rId2">
+              <a:extLst/>
+            </a:blip>
             <a:stretch>
               <a:fillRect/>
             </a:stretch>
@@ -6965,7 +7164,7 @@
           <p:spPr>
             <a:xfrm>
               <a:off x="6266826" y="15706"/>
-              <a:ext cx="5465803" cy="471191"/>
+              <a:ext cx="5465805" cy="471192"/>
             </a:xfrm>
             <a:prstGeom prst="rect">
               <a:avLst/>
@@ -6986,7 +7185,7 @@
           <p:spPr>
             <a:xfrm>
               <a:off x="0" y="0"/>
-              <a:ext cx="20080545" cy="494750"/>
+              <a:ext cx="20080547" cy="494751"/>
             </a:xfrm>
             <a:prstGeom prst="rect">
               <a:avLst/>
@@ -7001,12 +7200,19 @@
             <a:effectLst/>
           </p:spPr>
           <p:txBody>
-            <a:bodyPr wrap="square" lIns="45719" tIns="45719" rIns="45719" bIns="45719" numCol="1" anchor="t">
+            <a:bodyPr wrap="square" lIns="45718" tIns="45718" rIns="45718" bIns="45718" numCol="1" anchor="t">
               <a:noAutofit/>
             </a:bodyPr>
             <a:lstStyle/>
             <a:p>
-              <a:endParaRPr/>
+              <a:pPr>
+                <a:defRPr>
+                  <a:latin typeface="Calibri"/>
+                  <a:ea typeface="Calibri"/>
+                  <a:cs typeface="Calibri"/>
+                  <a:sym typeface="Calibri"/>
+                </a:defRPr>
+              </a:pPr>
             </a:p>
           </p:txBody>
         </p:sp>
@@ -7019,8 +7225,8 @@
         </p:nvSpPr>
         <p:spPr>
           <a:xfrm>
-            <a:off x="15707" y="7020728"/>
-            <a:ext cx="20080539" cy="337687"/>
+            <a:off x="15706" y="7020728"/>
+            <a:ext cx="20080540" cy="337688"/>
           </a:xfrm>
           <a:prstGeom prst="rect">
             <a:avLst/>
@@ -7033,10 +7239,17 @@
           </a:ln>
         </p:spPr>
         <p:txBody>
-          <a:bodyPr lIns="45719" rIns="45719"/>
+          <a:bodyPr lIns="45718" tIns="45718" rIns="45718" bIns="45718"/>
           <a:lstStyle/>
           <a:p>
-            <a:endParaRPr/>
+            <a:pPr>
+              <a:defRPr>
+                <a:latin typeface="Calibri"/>
+                <a:ea typeface="Calibri"/>
+                <a:cs typeface="Calibri"/>
+                <a:sym typeface="Calibri"/>
+              </a:defRPr>
+            </a:pPr>
           </a:p>
         </p:txBody>
       </p:sp>
@@ -7048,8 +7261,8 @@
         </p:nvSpPr>
         <p:spPr>
           <a:xfrm>
-            <a:off x="15707" y="7491917"/>
-            <a:ext cx="20080539" cy="337687"/>
+            <a:off x="15706" y="7491917"/>
+            <a:ext cx="20080540" cy="337688"/>
           </a:xfrm>
           <a:prstGeom prst="rect">
             <a:avLst/>
@@ -7062,10 +7275,17 @@
           </a:ln>
         </p:spPr>
         <p:txBody>
-          <a:bodyPr lIns="45719" rIns="45719"/>
+          <a:bodyPr lIns="45718" tIns="45718" rIns="45718" bIns="45718"/>
           <a:lstStyle/>
           <a:p>
-            <a:endParaRPr/>
+            <a:pPr>
+              <a:defRPr>
+                <a:latin typeface="Calibri"/>
+                <a:ea typeface="Calibri"/>
+                <a:cs typeface="Calibri"/>
+                <a:sym typeface="Calibri"/>
+              </a:defRPr>
+            </a:pPr>
           </a:p>
         </p:txBody>
       </p:sp>
@@ -7077,7 +7297,7 @@
         </p:nvSpPr>
         <p:spPr>
           <a:xfrm>
-            <a:off x="919500" y="6939944"/>
+            <a:off x="919500" y="6939943"/>
             <a:ext cx="17907636" cy="939801"/>
           </a:xfrm>
           <a:prstGeom prst="rect">
@@ -7088,7 +7308,7 @@
           </a:ln>
           <a:extLst>
             <a:ext uri="{C572A759-6A51-4108-AA02-DFA0A04FC94B}">
-              <ma14:wrappingTextBoxFlag xmlns:ma14="http://schemas.microsoft.com/office/mac/drawingml/2011/main" xmlns:a14="http://schemas.microsoft.com/office/drawing/2010/main" xmlns:m="http://schemas.openxmlformats.org/officeDocument/2006/math" xmlns="" val="1"/>
+              <ma14:wrappingTextBoxFlag xmlns:ma14="http://schemas.microsoft.com/office/mac/drawingml/2011/main" val="1"/>
             </a:ext>
           </a:extLst>
         </p:spPr>
@@ -7102,7 +7322,7 @@
               <a:spcBef>
                 <a:spcPts val="900"/>
               </a:spcBef>
-              <a:defRPr sz="2500" spc="-245">
+              <a:defRPr spc="-245" sz="2500">
                 <a:solidFill>
                   <a:srgbClr val="FFFFFF"/>
                 </a:solidFill>
@@ -7272,7 +7492,7 @@
               <a:spcBef>
                 <a:spcPts val="700"/>
               </a:spcBef>
-              <a:defRPr sz="2400" spc="50">
+              <a:defRPr spc="50" sz="2400">
                 <a:solidFill>
                   <a:srgbClr val="FFFFFF"/>
                 </a:solidFill>
@@ -7294,7 +7514,7 @@
               <a:t>de</a:t>
             </a:r>
             <a:r>
-              <a:rPr spc="234"/>
+              <a:rPr spc="233"/>
               <a:t> la t</a:t>
             </a:r>
             <a:r>
@@ -7312,15 +7532,17 @@
           <p:nvPr/>
         </p:nvPicPr>
         <p:blipFill>
-          <a:blip r:embed="rId3"/>
+          <a:blip r:embed="rId3">
+            <a:extLst/>
+          </a:blip>
           <a:stretch>
             <a:fillRect/>
           </a:stretch>
         </p:blipFill>
         <p:spPr>
           <a:xfrm>
-            <a:off x="735667" y="3688146"/>
-            <a:ext cx="18275301" cy="2540001"/>
+            <a:off x="735667" y="3688145"/>
+            <a:ext cx="18275302" cy="2540002"/>
           </a:xfrm>
           <a:prstGeom prst="rect">
             <a:avLst/>
@@ -7335,30 +7557,23 @@
   <p:clrMapOvr>
     <a:masterClrMapping/>
   </p:clrMapOvr>
-  <p:transition spd="med"/>
+  <p:transition xmlns:p14="http://schemas.microsoft.com/office/powerpoint/2010/main" spd="med" advClick="1"/>
 </p:sld>
 </file>
 
 <file path=ppt/slides/slide7.xml><?xml version="1.0" encoding="utf-8"?>
-<p:sld xmlns:a="http://schemas.openxmlformats.org/drawingml/2006/main" xmlns:r="http://schemas.openxmlformats.org/officeDocument/2006/relationships" xmlns:p="http://schemas.openxmlformats.org/presentationml/2006/main">
+<p:sld xmlns:a="http://schemas.openxmlformats.org/drawingml/2006/main" xmlns:r="http://schemas.openxmlformats.org/officeDocument/2006/relationships" xmlns:p="http://schemas.openxmlformats.org/presentationml/2006/main" xmlns:m="http://schemas.openxmlformats.org/officeDocument/2006/math" xmlns:a14="http://schemas.microsoft.com/office/drawing/2010/main" showMasterSp="1" showMasterPhAnim="1">
   <p:cSld>
     <p:bg>
       <p:bgPr>
         <a:solidFill>
           <a:srgbClr val="000000"/>
         </a:solidFill>
-        <a:effectLst/>
       </p:bgPr>
     </p:bg>
     <p:spTree>
       <p:nvGrpSpPr>
-        <p:cNvPr id="1" name="">
-          <a:extLst>
-            <a:ext uri="{FF2B5EF4-FFF2-40B4-BE49-F238E27FC236}">
-              <a16:creationId xmlns:a16="http://schemas.microsoft.com/office/drawing/2014/main" id="{FDE38DF0-03C3-6A39-5B06-9C9320CEDAC0}"/>
-            </a:ext>
-          </a:extLst>
-        </p:cNvPr>
+        <p:cNvPr id="1" name=""/>
         <p:cNvGrpSpPr/>
         <p:nvPr/>
       </p:nvGrpSpPr>
@@ -7372,20 +7587,14 @@
       </p:grpSpPr>
       <p:sp>
         <p:nvSpPr>
-          <p:cNvPr id="101" name="object 2">
-            <a:extLst>
-              <a:ext uri="{FF2B5EF4-FFF2-40B4-BE49-F238E27FC236}">
-                <a16:creationId xmlns:a16="http://schemas.microsoft.com/office/drawing/2014/main" id="{B9F6969B-9B18-CB9C-648A-82F8D1DF022B}"/>
-              </a:ext>
-            </a:extLst>
-          </p:cNvPr>
+          <p:cNvPr id="111" name="object 2"/>
           <p:cNvSpPr/>
           <p:nvPr/>
         </p:nvSpPr>
         <p:spPr>
           <a:xfrm>
-            <a:off x="15707" y="2340242"/>
-            <a:ext cx="20080539" cy="636108"/>
+            <a:off x="15706" y="2340242"/>
+            <a:ext cx="20080540" cy="636109"/>
           </a:xfrm>
           <a:prstGeom prst="rect">
             <a:avLst/>
@@ -7398,25 +7607,24 @@
           </a:ln>
         </p:spPr>
         <p:txBody>
-          <a:bodyPr lIns="45719" rIns="45719"/>
+          <a:bodyPr lIns="45718" tIns="45718" rIns="45718" bIns="45718"/>
           <a:lstStyle/>
           <a:p>
-            <a:endParaRPr/>
+            <a:pPr>
+              <a:defRPr>
+                <a:latin typeface="Calibri"/>
+                <a:ea typeface="Calibri"/>
+                <a:cs typeface="Calibri"/>
+                <a:sym typeface="Calibri"/>
+              </a:defRPr>
+            </a:pPr>
           </a:p>
         </p:txBody>
       </p:sp>
       <p:sp>
         <p:nvSpPr>
-          <p:cNvPr id="102" name="object 3">
-            <a:extLst>
-              <a:ext uri="{FF2B5EF4-FFF2-40B4-BE49-F238E27FC236}">
-                <a16:creationId xmlns:a16="http://schemas.microsoft.com/office/drawing/2014/main" id="{0299B1C3-E53D-04C9-F63B-3BC6C00D1DED}"/>
-              </a:ext>
-            </a:extLst>
-          </p:cNvPr>
-          <p:cNvSpPr txBox="1">
-            <a:spLocks noGrp="1"/>
-          </p:cNvSpPr>
+          <p:cNvPr id="112" name="object 3"/>
+          <p:cNvSpPr txBox="1"/>
           <p:nvPr>
             <p:ph type="title"/>
           </p:nvPr>
@@ -7424,7 +7632,7 @@
         <p:spPr>
           <a:xfrm>
             <a:off x="975994" y="1179945"/>
-            <a:ext cx="8140067" cy="1026795"/>
+            <a:ext cx="8140066" cy="1026796"/>
           </a:xfrm>
           <a:prstGeom prst="rect">
             <a:avLst/>
@@ -7434,8 +7642,8 @@
           <a:bodyPr/>
           <a:lstStyle/>
           <a:p>
-            <a:pPr indent="11557" defTabSz="832104">
-              <a:defRPr sz="5915">
+            <a:pPr indent="11557" defTabSz="832103">
+              <a:defRPr sz="5900">
                 <a:latin typeface="Avenir Book"/>
                 <a:ea typeface="Avenir Book"/>
                 <a:cs typeface="Avenir Book"/>
@@ -7443,73 +7651,56 @@
               </a:defRPr>
             </a:pPr>
             <a:r>
-              <a:rPr dirty="0" err="1"/>
               <a:t>Evaluación</a:t>
             </a:r>
             <a:r>
-              <a:rPr spc="273" dirty="0"/>
-              <a:t> </a:t>
-            </a:r>
-            <a:r>
-              <a:rPr dirty="0"/>
+              <a:rPr spc="200"/>
+              <a:t> </a:t>
+            </a:r>
+            <a:r>
               <a:t>de</a:t>
             </a:r>
             <a:r>
-              <a:rPr spc="364" dirty="0"/>
-              <a:t> </a:t>
-            </a:r>
-            <a:r>
-              <a:rPr spc="-91" dirty="0" err="1">
+              <a:rPr spc="300"/>
+              <a:t> </a:t>
+            </a:r>
+            <a:r>
+              <a:rPr spc="-100">
                 <a:solidFill>
                   <a:srgbClr val="D4F789"/>
                 </a:solidFill>
               </a:rPr>
               <a:t>Modelos</a:t>
             </a:r>
-            <a:endParaRPr spc="-91" dirty="0">
-              <a:solidFill>
-                <a:srgbClr val="D4F789"/>
-              </a:solidFill>
-            </a:endParaRPr>
           </a:p>
         </p:txBody>
       </p:sp>
       <p:grpSp>
         <p:nvGrpSpPr>
-          <p:cNvPr id="105" name="object 14">
-            <a:extLst>
-              <a:ext uri="{FF2B5EF4-FFF2-40B4-BE49-F238E27FC236}">
-                <a16:creationId xmlns:a16="http://schemas.microsoft.com/office/drawing/2014/main" id="{7EEF65D0-048D-3A97-617A-A5A22CF26F28}"/>
-              </a:ext>
-            </a:extLst>
-          </p:cNvPr>
+          <p:cNvPr id="115" name="object 14"/>
           <p:cNvGrpSpPr/>
           <p:nvPr/>
         </p:nvGrpSpPr>
         <p:grpSpPr>
           <a:xfrm>
             <a:off x="15704" y="5497214"/>
-            <a:ext cx="20080546" cy="494750"/>
+            <a:ext cx="20080547" cy="494751"/>
             <a:chOff x="0" y="0"/>
-            <a:chExt cx="20080544" cy="494749"/>
+            <a:chExt cx="20080546" cy="494749"/>
           </a:xfrm>
         </p:grpSpPr>
         <p:pic>
           <p:nvPicPr>
-            <p:cNvPr id="103" name="object 15" descr="object 15">
-              <a:extLst>
-                <a:ext uri="{FF2B5EF4-FFF2-40B4-BE49-F238E27FC236}">
-                  <a16:creationId xmlns:a16="http://schemas.microsoft.com/office/drawing/2014/main" id="{F6F0CF20-93FE-69C6-5920-84FE024287B1}"/>
-                </a:ext>
-              </a:extLst>
-            </p:cNvPr>
+            <p:cNvPr id="113" name="object 15" descr="object 15"/>
             <p:cNvPicPr>
               <a:picLocks noChangeAspect="1"/>
             </p:cNvPicPr>
             <p:nvPr/>
           </p:nvPicPr>
           <p:blipFill>
-            <a:blip r:embed="rId2"/>
+            <a:blip r:embed="rId2">
+              <a:extLst/>
+            </a:blip>
             <a:stretch>
               <a:fillRect/>
             </a:stretch>
@@ -7517,7 +7708,7 @@
           <p:spPr>
             <a:xfrm>
               <a:off x="6266826" y="15706"/>
-              <a:ext cx="5465803" cy="471191"/>
+              <a:ext cx="5465805" cy="471192"/>
             </a:xfrm>
             <a:prstGeom prst="rect">
               <a:avLst/>
@@ -7531,20 +7722,14 @@
         </p:pic>
         <p:sp>
           <p:nvSpPr>
-            <p:cNvPr id="104" name="object 16">
-              <a:extLst>
-                <a:ext uri="{FF2B5EF4-FFF2-40B4-BE49-F238E27FC236}">
-                  <a16:creationId xmlns:a16="http://schemas.microsoft.com/office/drawing/2014/main" id="{5B236504-9624-6B28-D233-3E7E6382C74B}"/>
-                </a:ext>
-              </a:extLst>
-            </p:cNvPr>
+            <p:cNvPr id="114" name="object 16"/>
             <p:cNvSpPr/>
             <p:nvPr/>
           </p:nvSpPr>
           <p:spPr>
             <a:xfrm>
               <a:off x="0" y="0"/>
-              <a:ext cx="20080545" cy="494750"/>
+              <a:ext cx="20080547" cy="494751"/>
             </a:xfrm>
             <a:prstGeom prst="rect">
               <a:avLst/>
@@ -7559,32 +7744,33 @@
             <a:effectLst/>
           </p:spPr>
           <p:txBody>
-            <a:bodyPr wrap="square" lIns="45719" tIns="45719" rIns="45719" bIns="45719" numCol="1" anchor="t">
+            <a:bodyPr wrap="square" lIns="45718" tIns="45718" rIns="45718" bIns="45718" numCol="1" anchor="t">
               <a:noAutofit/>
             </a:bodyPr>
             <a:lstStyle/>
             <a:p>
-              <a:endParaRPr/>
+              <a:pPr>
+                <a:defRPr>
+                  <a:latin typeface="Calibri"/>
+                  <a:ea typeface="Calibri"/>
+                  <a:cs typeface="Calibri"/>
+                  <a:sym typeface="Calibri"/>
+                </a:defRPr>
+              </a:pPr>
             </a:p>
           </p:txBody>
         </p:sp>
       </p:grpSp>
       <p:sp>
         <p:nvSpPr>
-          <p:cNvPr id="106" name="object 19">
-            <a:extLst>
-              <a:ext uri="{FF2B5EF4-FFF2-40B4-BE49-F238E27FC236}">
-                <a16:creationId xmlns:a16="http://schemas.microsoft.com/office/drawing/2014/main" id="{2272C61F-E772-551D-446D-E7CC5A4B5D40}"/>
-              </a:ext>
-            </a:extLst>
-          </p:cNvPr>
+          <p:cNvPr id="116" name="object 19"/>
           <p:cNvSpPr/>
           <p:nvPr/>
         </p:nvSpPr>
         <p:spPr>
           <a:xfrm>
-            <a:off x="15707" y="7020728"/>
-            <a:ext cx="20080539" cy="337687"/>
+            <a:off x="15706" y="7020728"/>
+            <a:ext cx="20080540" cy="337688"/>
           </a:xfrm>
           <a:prstGeom prst="rect">
             <a:avLst/>
@@ -7597,29 +7783,30 @@
           </a:ln>
         </p:spPr>
         <p:txBody>
-          <a:bodyPr lIns="45719" rIns="45719"/>
+          <a:bodyPr lIns="45718" tIns="45718" rIns="45718" bIns="45718"/>
           <a:lstStyle/>
           <a:p>
-            <a:endParaRPr/>
+            <a:pPr>
+              <a:defRPr>
+                <a:latin typeface="Calibri"/>
+                <a:ea typeface="Calibri"/>
+                <a:cs typeface="Calibri"/>
+                <a:sym typeface="Calibri"/>
+              </a:defRPr>
+            </a:pPr>
           </a:p>
         </p:txBody>
       </p:sp>
       <p:sp>
         <p:nvSpPr>
-          <p:cNvPr id="107" name="object 20">
-            <a:extLst>
-              <a:ext uri="{FF2B5EF4-FFF2-40B4-BE49-F238E27FC236}">
-                <a16:creationId xmlns:a16="http://schemas.microsoft.com/office/drawing/2014/main" id="{F204440D-6868-AAE7-C003-E2277197E716}"/>
-              </a:ext>
-            </a:extLst>
-          </p:cNvPr>
+          <p:cNvPr id="117" name="object 20"/>
           <p:cNvSpPr/>
           <p:nvPr/>
         </p:nvSpPr>
         <p:spPr>
           <a:xfrm>
-            <a:off x="15707" y="7491917"/>
-            <a:ext cx="20080539" cy="337687"/>
+            <a:off x="15706" y="7491917"/>
+            <a:ext cx="20080540" cy="337688"/>
           </a:xfrm>
           <a:prstGeom prst="rect">
             <a:avLst/>
@@ -7632,77 +7819,71 @@
           </a:ln>
         </p:spPr>
         <p:txBody>
-          <a:bodyPr lIns="45719" rIns="45719"/>
+          <a:bodyPr lIns="45718" tIns="45718" rIns="45718" bIns="45718"/>
           <a:lstStyle/>
           <a:p>
-            <a:endParaRPr/>
+            <a:pPr>
+              <a:defRPr>
+                <a:latin typeface="Calibri"/>
+                <a:ea typeface="Calibri"/>
+                <a:cs typeface="Calibri"/>
+                <a:sym typeface="Calibri"/>
+              </a:defRPr>
+            </a:pPr>
           </a:p>
         </p:txBody>
       </p:sp>
       <p:pic>
         <p:nvPicPr>
-          <p:cNvPr id="5" name="Imagen 4">
-            <a:extLst>
-              <a:ext uri="{FF2B5EF4-FFF2-40B4-BE49-F238E27FC236}">
-                <a16:creationId xmlns:a16="http://schemas.microsoft.com/office/drawing/2014/main" id="{B2946922-13DE-9C4B-4BC3-D100C4E4F9E3}"/>
-              </a:ext>
-            </a:extLst>
-          </p:cNvPr>
+          <p:cNvPr id="118" name="Imagen 4" descr="Imagen 4"/>
           <p:cNvPicPr>
             <a:picLocks noChangeAspect="1"/>
           </p:cNvPicPr>
           <p:nvPr/>
         </p:nvPicPr>
         <p:blipFill>
-          <a:blip r:embed="rId3"/>
+          <a:blip r:embed="rId3">
+            <a:extLst/>
+          </a:blip>
           <a:stretch>
             <a:fillRect/>
           </a:stretch>
         </p:blipFill>
         <p:spPr>
           <a:xfrm>
-            <a:off x="975993" y="2450585"/>
-            <a:ext cx="17366237" cy="8217415"/>
+            <a:off x="975993" y="2450584"/>
+            <a:ext cx="17366238" cy="8217416"/>
           </a:xfrm>
           <a:prstGeom prst="rect">
             <a:avLst/>
           </a:prstGeom>
+          <a:ln w="12700">
+            <a:miter lim="400000"/>
+          </a:ln>
         </p:spPr>
       </p:pic>
     </p:spTree>
-    <p:extLst>
-      <p:ext uri="{BB962C8B-B14F-4D97-AF65-F5344CB8AC3E}">
-        <p14:creationId xmlns:p14="http://schemas.microsoft.com/office/powerpoint/2010/main" val="1501393651"/>
-      </p:ext>
-    </p:extLst>
   </p:cSld>
   <p:clrMapOvr>
     <a:masterClrMapping/>
   </p:clrMapOvr>
-  <p:transition spd="med"/>
+  <p:transition xmlns:p14="http://schemas.microsoft.com/office/powerpoint/2010/main" spd="med" advClick="1"/>
 </p:sld>
 </file>
 
 <file path=ppt/slides/slide8.xml><?xml version="1.0" encoding="utf-8"?>
-<p:sld xmlns:a="http://schemas.openxmlformats.org/drawingml/2006/main" xmlns:r="http://schemas.openxmlformats.org/officeDocument/2006/relationships" xmlns:p="http://schemas.openxmlformats.org/presentationml/2006/main">
+<p:sld xmlns:a="http://schemas.openxmlformats.org/drawingml/2006/main" xmlns:r="http://schemas.openxmlformats.org/officeDocument/2006/relationships" xmlns:p="http://schemas.openxmlformats.org/presentationml/2006/main" xmlns:m="http://schemas.openxmlformats.org/officeDocument/2006/math" xmlns:a14="http://schemas.microsoft.com/office/drawing/2010/main" showMasterSp="1" showMasterPhAnim="1">
   <p:cSld>
     <p:bg>
       <p:bgPr>
         <a:solidFill>
           <a:srgbClr val="000000"/>
         </a:solidFill>
-        <a:effectLst/>
       </p:bgPr>
     </p:bg>
     <p:spTree>
       <p:nvGrpSpPr>
-        <p:cNvPr id="1" name="">
-          <a:extLst>
-            <a:ext uri="{FF2B5EF4-FFF2-40B4-BE49-F238E27FC236}">
-              <a16:creationId xmlns:a16="http://schemas.microsoft.com/office/drawing/2014/main" id="{B945F333-DB80-CDB0-326F-70DB1F2C53D9}"/>
-            </a:ext>
-          </a:extLst>
-        </p:cNvPr>
+        <p:cNvPr id="1" name=""/>
         <p:cNvGrpSpPr/>
         <p:nvPr/>
       </p:nvGrpSpPr>
@@ -7716,20 +7897,14 @@
       </p:grpSpPr>
       <p:sp>
         <p:nvSpPr>
-          <p:cNvPr id="101" name="object 2">
-            <a:extLst>
-              <a:ext uri="{FF2B5EF4-FFF2-40B4-BE49-F238E27FC236}">
-                <a16:creationId xmlns:a16="http://schemas.microsoft.com/office/drawing/2014/main" id="{CECEE100-8EC0-91C9-D455-DC50A9D6EF72}"/>
-              </a:ext>
-            </a:extLst>
-          </p:cNvPr>
+          <p:cNvPr id="120" name="object 2"/>
           <p:cNvSpPr/>
           <p:nvPr/>
         </p:nvSpPr>
         <p:spPr>
           <a:xfrm>
-            <a:off x="15707" y="2340242"/>
-            <a:ext cx="20080539" cy="636108"/>
+            <a:off x="15706" y="2340242"/>
+            <a:ext cx="20080540" cy="636109"/>
           </a:xfrm>
           <a:prstGeom prst="rect">
             <a:avLst/>
@@ -7742,25 +7917,24 @@
           </a:ln>
         </p:spPr>
         <p:txBody>
-          <a:bodyPr lIns="45719" rIns="45719"/>
+          <a:bodyPr lIns="45718" tIns="45718" rIns="45718" bIns="45718"/>
           <a:lstStyle/>
           <a:p>
-            <a:endParaRPr/>
+            <a:pPr>
+              <a:defRPr>
+                <a:latin typeface="Calibri"/>
+                <a:ea typeface="Calibri"/>
+                <a:cs typeface="Calibri"/>
+                <a:sym typeface="Calibri"/>
+              </a:defRPr>
+            </a:pPr>
           </a:p>
         </p:txBody>
       </p:sp>
       <p:sp>
         <p:nvSpPr>
-          <p:cNvPr id="102" name="object 3">
-            <a:extLst>
-              <a:ext uri="{FF2B5EF4-FFF2-40B4-BE49-F238E27FC236}">
-                <a16:creationId xmlns:a16="http://schemas.microsoft.com/office/drawing/2014/main" id="{4A6FBD74-99B5-C141-A393-74558C9596E9}"/>
-              </a:ext>
-            </a:extLst>
-          </p:cNvPr>
-          <p:cNvSpPr txBox="1">
-            <a:spLocks noGrp="1"/>
-          </p:cNvSpPr>
+          <p:cNvPr id="121" name="object 3"/>
+          <p:cNvSpPr txBox="1"/>
           <p:nvPr>
             <p:ph type="title"/>
           </p:nvPr>
@@ -7768,7 +7942,7 @@
         <p:spPr>
           <a:xfrm>
             <a:off x="975994" y="1179945"/>
-            <a:ext cx="8140067" cy="1026795"/>
+            <a:ext cx="8140066" cy="1026796"/>
           </a:xfrm>
           <a:prstGeom prst="rect">
             <a:avLst/>
@@ -7778,8 +7952,8 @@
           <a:bodyPr/>
           <a:lstStyle/>
           <a:p>
-            <a:pPr indent="11557" defTabSz="832104">
-              <a:defRPr sz="5915">
+            <a:pPr indent="11557" defTabSz="832103">
+              <a:defRPr sz="5900">
                 <a:latin typeface="Avenir Book"/>
                 <a:ea typeface="Avenir Book"/>
                 <a:cs typeface="Avenir Book"/>
@@ -7787,73 +7961,56 @@
               </a:defRPr>
             </a:pPr>
             <a:r>
-              <a:rPr dirty="0" err="1"/>
               <a:t>Evaluación</a:t>
             </a:r>
             <a:r>
-              <a:rPr spc="273" dirty="0"/>
-              <a:t> </a:t>
-            </a:r>
-            <a:r>
-              <a:rPr dirty="0"/>
+              <a:rPr spc="200"/>
+              <a:t> </a:t>
+            </a:r>
+            <a:r>
               <a:t>de</a:t>
             </a:r>
             <a:r>
-              <a:rPr spc="364" dirty="0"/>
-              <a:t> </a:t>
-            </a:r>
-            <a:r>
-              <a:rPr spc="-91" dirty="0" err="1">
+              <a:rPr spc="300"/>
+              <a:t> </a:t>
+            </a:r>
+            <a:r>
+              <a:rPr spc="-100">
                 <a:solidFill>
                   <a:srgbClr val="D4F789"/>
                 </a:solidFill>
               </a:rPr>
               <a:t>Modelos</a:t>
             </a:r>
-            <a:endParaRPr spc="-91" dirty="0">
-              <a:solidFill>
-                <a:srgbClr val="D4F789"/>
-              </a:solidFill>
-            </a:endParaRPr>
           </a:p>
         </p:txBody>
       </p:sp>
       <p:grpSp>
         <p:nvGrpSpPr>
-          <p:cNvPr id="105" name="object 14">
-            <a:extLst>
-              <a:ext uri="{FF2B5EF4-FFF2-40B4-BE49-F238E27FC236}">
-                <a16:creationId xmlns:a16="http://schemas.microsoft.com/office/drawing/2014/main" id="{80263F1B-2C81-E7C9-957A-2FD5C326B0E8}"/>
-              </a:ext>
-            </a:extLst>
-          </p:cNvPr>
+          <p:cNvPr id="124" name="object 14"/>
           <p:cNvGrpSpPr/>
           <p:nvPr/>
         </p:nvGrpSpPr>
         <p:grpSpPr>
           <a:xfrm>
             <a:off x="15704" y="5497214"/>
-            <a:ext cx="20080546" cy="494750"/>
+            <a:ext cx="20080547" cy="494751"/>
             <a:chOff x="0" y="0"/>
-            <a:chExt cx="20080544" cy="494749"/>
+            <a:chExt cx="20080546" cy="494749"/>
           </a:xfrm>
         </p:grpSpPr>
         <p:pic>
           <p:nvPicPr>
-            <p:cNvPr id="103" name="object 15" descr="object 15">
-              <a:extLst>
-                <a:ext uri="{FF2B5EF4-FFF2-40B4-BE49-F238E27FC236}">
-                  <a16:creationId xmlns:a16="http://schemas.microsoft.com/office/drawing/2014/main" id="{8AF214C2-7914-72B8-8443-763EAB9D3A0A}"/>
-                </a:ext>
-              </a:extLst>
-            </p:cNvPr>
+            <p:cNvPr id="122" name="object 15" descr="object 15"/>
             <p:cNvPicPr>
               <a:picLocks noChangeAspect="1"/>
             </p:cNvPicPr>
             <p:nvPr/>
           </p:nvPicPr>
           <p:blipFill>
-            <a:blip r:embed="rId2"/>
+            <a:blip r:embed="rId2">
+              <a:extLst/>
+            </a:blip>
             <a:stretch>
               <a:fillRect/>
             </a:stretch>
@@ -7861,7 +8018,7 @@
           <p:spPr>
             <a:xfrm>
               <a:off x="6266826" y="15706"/>
-              <a:ext cx="5465803" cy="471191"/>
+              <a:ext cx="5465805" cy="471192"/>
             </a:xfrm>
             <a:prstGeom prst="rect">
               <a:avLst/>
@@ -7875,20 +8032,14 @@
         </p:pic>
         <p:sp>
           <p:nvSpPr>
-            <p:cNvPr id="104" name="object 16">
-              <a:extLst>
-                <a:ext uri="{FF2B5EF4-FFF2-40B4-BE49-F238E27FC236}">
-                  <a16:creationId xmlns:a16="http://schemas.microsoft.com/office/drawing/2014/main" id="{40021B71-4C29-E2F1-DF44-908AC0D9E515}"/>
-                </a:ext>
-              </a:extLst>
-            </p:cNvPr>
+            <p:cNvPr id="123" name="object 16"/>
             <p:cNvSpPr/>
             <p:nvPr/>
           </p:nvSpPr>
           <p:spPr>
             <a:xfrm>
               <a:off x="0" y="0"/>
-              <a:ext cx="20080545" cy="494750"/>
+              <a:ext cx="20080547" cy="494751"/>
             </a:xfrm>
             <a:prstGeom prst="rect">
               <a:avLst/>
@@ -7903,32 +8054,33 @@
             <a:effectLst/>
           </p:spPr>
           <p:txBody>
-            <a:bodyPr wrap="square" lIns="45719" tIns="45719" rIns="45719" bIns="45719" numCol="1" anchor="t">
+            <a:bodyPr wrap="square" lIns="45718" tIns="45718" rIns="45718" bIns="45718" numCol="1" anchor="t">
               <a:noAutofit/>
             </a:bodyPr>
             <a:lstStyle/>
             <a:p>
-              <a:endParaRPr/>
+              <a:pPr>
+                <a:defRPr>
+                  <a:latin typeface="Calibri"/>
+                  <a:ea typeface="Calibri"/>
+                  <a:cs typeface="Calibri"/>
+                  <a:sym typeface="Calibri"/>
+                </a:defRPr>
+              </a:pPr>
             </a:p>
           </p:txBody>
         </p:sp>
       </p:grpSp>
       <p:sp>
         <p:nvSpPr>
-          <p:cNvPr id="106" name="object 19">
-            <a:extLst>
-              <a:ext uri="{FF2B5EF4-FFF2-40B4-BE49-F238E27FC236}">
-                <a16:creationId xmlns:a16="http://schemas.microsoft.com/office/drawing/2014/main" id="{C725C30E-7053-CA9D-F5D9-F2B3A091F0B1}"/>
-              </a:ext>
-            </a:extLst>
-          </p:cNvPr>
+          <p:cNvPr id="125" name="object 19"/>
           <p:cNvSpPr/>
           <p:nvPr/>
         </p:nvSpPr>
         <p:spPr>
           <a:xfrm>
-            <a:off x="15707" y="7020728"/>
-            <a:ext cx="20080539" cy="337687"/>
+            <a:off x="15706" y="7020728"/>
+            <a:ext cx="20080540" cy="337688"/>
           </a:xfrm>
           <a:prstGeom prst="rect">
             <a:avLst/>
@@ -7941,29 +8093,30 @@
           </a:ln>
         </p:spPr>
         <p:txBody>
-          <a:bodyPr lIns="45719" rIns="45719"/>
+          <a:bodyPr lIns="45718" tIns="45718" rIns="45718" bIns="45718"/>
           <a:lstStyle/>
           <a:p>
-            <a:endParaRPr/>
+            <a:pPr>
+              <a:defRPr>
+                <a:latin typeface="Calibri"/>
+                <a:ea typeface="Calibri"/>
+                <a:cs typeface="Calibri"/>
+                <a:sym typeface="Calibri"/>
+              </a:defRPr>
+            </a:pPr>
           </a:p>
         </p:txBody>
       </p:sp>
       <p:sp>
         <p:nvSpPr>
-          <p:cNvPr id="107" name="object 20">
-            <a:extLst>
-              <a:ext uri="{FF2B5EF4-FFF2-40B4-BE49-F238E27FC236}">
-                <a16:creationId xmlns:a16="http://schemas.microsoft.com/office/drawing/2014/main" id="{E7210FEC-175E-28A3-97E8-690291EB23DD}"/>
-              </a:ext>
-            </a:extLst>
-          </p:cNvPr>
+          <p:cNvPr id="126" name="object 20"/>
           <p:cNvSpPr/>
           <p:nvPr/>
         </p:nvSpPr>
         <p:spPr>
           <a:xfrm>
-            <a:off x="15707" y="7491917"/>
-            <a:ext cx="20080539" cy="337687"/>
+            <a:off x="15706" y="7491917"/>
+            <a:ext cx="20080540" cy="337688"/>
           </a:xfrm>
           <a:prstGeom prst="rect">
             <a:avLst/>
@@ -7976,29 +8129,32 @@
           </a:ln>
         </p:spPr>
         <p:txBody>
-          <a:bodyPr lIns="45719" rIns="45719"/>
+          <a:bodyPr lIns="45718" tIns="45718" rIns="45718" bIns="45718"/>
           <a:lstStyle/>
           <a:p>
-            <a:endParaRPr/>
+            <a:pPr>
+              <a:defRPr>
+                <a:latin typeface="Calibri"/>
+                <a:ea typeface="Calibri"/>
+                <a:cs typeface="Calibri"/>
+                <a:sym typeface="Calibri"/>
+              </a:defRPr>
+            </a:pPr>
           </a:p>
         </p:txBody>
       </p:sp>
       <p:pic>
         <p:nvPicPr>
-          <p:cNvPr id="3" name="Imagen 2">
-            <a:extLst>
-              <a:ext uri="{FF2B5EF4-FFF2-40B4-BE49-F238E27FC236}">
-                <a16:creationId xmlns:a16="http://schemas.microsoft.com/office/drawing/2014/main" id="{900173F1-90FE-35A4-2137-66E08CE92B1C}"/>
-              </a:ext>
-            </a:extLst>
-          </p:cNvPr>
+          <p:cNvPr id="127" name="Imagen 2" descr="Imagen 2"/>
           <p:cNvPicPr>
             <a:picLocks noChangeAspect="1"/>
           </p:cNvPicPr>
           <p:nvPr/>
         </p:nvPicPr>
         <p:blipFill>
-          <a:blip r:embed="rId3"/>
+          <a:blip r:embed="rId3">
+            <a:extLst/>
+          </a:blip>
           <a:stretch>
             <a:fillRect/>
           </a:stretch>
@@ -8006,47 +8162,38 @@
         <p:spPr>
           <a:xfrm>
             <a:off x="776864" y="2340241"/>
-            <a:ext cx="18322589" cy="7782813"/>
+            <a:ext cx="18322589" cy="7782814"/>
           </a:xfrm>
           <a:prstGeom prst="rect">
             <a:avLst/>
           </a:prstGeom>
+          <a:ln w="12700">
+            <a:miter lim="400000"/>
+          </a:ln>
         </p:spPr>
       </p:pic>
     </p:spTree>
-    <p:extLst>
-      <p:ext uri="{BB962C8B-B14F-4D97-AF65-F5344CB8AC3E}">
-        <p14:creationId xmlns:p14="http://schemas.microsoft.com/office/powerpoint/2010/main" val="2319460513"/>
-      </p:ext>
-    </p:extLst>
   </p:cSld>
   <p:clrMapOvr>
     <a:masterClrMapping/>
   </p:clrMapOvr>
-  <p:transition spd="med"/>
+  <p:transition xmlns:p14="http://schemas.microsoft.com/office/powerpoint/2010/main" spd="med" advClick="1"/>
 </p:sld>
 </file>
 
 <file path=ppt/slides/slide9.xml><?xml version="1.0" encoding="utf-8"?>
-<p:sld xmlns:a="http://schemas.openxmlformats.org/drawingml/2006/main" xmlns:r="http://schemas.openxmlformats.org/officeDocument/2006/relationships" xmlns:p="http://schemas.openxmlformats.org/presentationml/2006/main">
+<p:sld xmlns:a="http://schemas.openxmlformats.org/drawingml/2006/main" xmlns:r="http://schemas.openxmlformats.org/officeDocument/2006/relationships" xmlns:p="http://schemas.openxmlformats.org/presentationml/2006/main" xmlns:m="http://schemas.openxmlformats.org/officeDocument/2006/math" xmlns:a14="http://schemas.microsoft.com/office/drawing/2010/main" showMasterSp="1" showMasterPhAnim="1">
   <p:cSld>
     <p:bg>
       <p:bgPr>
         <a:solidFill>
           <a:srgbClr val="000000"/>
         </a:solidFill>
-        <a:effectLst/>
       </p:bgPr>
     </p:bg>
     <p:spTree>
       <p:nvGrpSpPr>
-        <p:cNvPr id="1" name="">
-          <a:extLst>
-            <a:ext uri="{FF2B5EF4-FFF2-40B4-BE49-F238E27FC236}">
-              <a16:creationId xmlns:a16="http://schemas.microsoft.com/office/drawing/2014/main" id="{58800D80-DDDE-FE97-BD00-CA67E68299DC}"/>
-            </a:ext>
-          </a:extLst>
-        </p:cNvPr>
+        <p:cNvPr id="1" name=""/>
         <p:cNvGrpSpPr/>
         <p:nvPr/>
       </p:nvGrpSpPr>
@@ -8060,20 +8207,14 @@
       </p:grpSpPr>
       <p:sp>
         <p:nvSpPr>
-          <p:cNvPr id="101" name="object 2">
-            <a:extLst>
-              <a:ext uri="{FF2B5EF4-FFF2-40B4-BE49-F238E27FC236}">
-                <a16:creationId xmlns:a16="http://schemas.microsoft.com/office/drawing/2014/main" id="{3AC4F59B-81AC-9EEA-1646-321A4DEFFB13}"/>
-              </a:ext>
-            </a:extLst>
-          </p:cNvPr>
+          <p:cNvPr id="129" name="object 2"/>
           <p:cNvSpPr/>
           <p:nvPr/>
         </p:nvSpPr>
         <p:spPr>
           <a:xfrm>
-            <a:off x="15707" y="2340242"/>
-            <a:ext cx="20080539" cy="636108"/>
+            <a:off x="15706" y="2340242"/>
+            <a:ext cx="20080540" cy="636109"/>
           </a:xfrm>
           <a:prstGeom prst="rect">
             <a:avLst/>
@@ -8086,25 +8227,24 @@
           </a:ln>
         </p:spPr>
         <p:txBody>
-          <a:bodyPr lIns="45719" rIns="45719"/>
+          <a:bodyPr lIns="45718" tIns="45718" rIns="45718" bIns="45718"/>
           <a:lstStyle/>
           <a:p>
-            <a:endParaRPr/>
+            <a:pPr>
+              <a:defRPr>
+                <a:latin typeface="Calibri"/>
+                <a:ea typeface="Calibri"/>
+                <a:cs typeface="Calibri"/>
+                <a:sym typeface="Calibri"/>
+              </a:defRPr>
+            </a:pPr>
           </a:p>
         </p:txBody>
       </p:sp>
       <p:sp>
         <p:nvSpPr>
-          <p:cNvPr id="102" name="object 3">
-            <a:extLst>
-              <a:ext uri="{FF2B5EF4-FFF2-40B4-BE49-F238E27FC236}">
-                <a16:creationId xmlns:a16="http://schemas.microsoft.com/office/drawing/2014/main" id="{F97F2A40-99D4-0BC6-4EA5-E89F9E0B33B0}"/>
-              </a:ext>
-            </a:extLst>
-          </p:cNvPr>
-          <p:cNvSpPr txBox="1">
-            <a:spLocks noGrp="1"/>
-          </p:cNvSpPr>
+          <p:cNvPr id="130" name="object 3"/>
+          <p:cNvSpPr txBox="1"/>
           <p:nvPr>
             <p:ph type="title"/>
           </p:nvPr>
@@ -8112,7 +8252,7 @@
         <p:spPr>
           <a:xfrm>
             <a:off x="975994" y="1179945"/>
-            <a:ext cx="8140067" cy="1026795"/>
+            <a:ext cx="8140066" cy="1026796"/>
           </a:xfrm>
           <a:prstGeom prst="rect">
             <a:avLst/>
@@ -8122,8 +8262,8 @@
           <a:bodyPr/>
           <a:lstStyle/>
           <a:p>
-            <a:pPr indent="11557" defTabSz="832104">
-              <a:defRPr sz="5915">
+            <a:pPr indent="11557" defTabSz="832103">
+              <a:defRPr sz="5900">
                 <a:latin typeface="Avenir Book"/>
                 <a:ea typeface="Avenir Book"/>
                 <a:cs typeface="Avenir Book"/>
@@ -8131,73 +8271,56 @@
               </a:defRPr>
             </a:pPr>
             <a:r>
-              <a:rPr dirty="0" err="1"/>
               <a:t>Evaluación</a:t>
             </a:r>
             <a:r>
-              <a:rPr spc="273" dirty="0"/>
-              <a:t> </a:t>
-            </a:r>
-            <a:r>
-              <a:rPr dirty="0"/>
+              <a:rPr spc="200"/>
+              <a:t> </a:t>
+            </a:r>
+            <a:r>
               <a:t>de</a:t>
             </a:r>
             <a:r>
-              <a:rPr spc="364" dirty="0"/>
-              <a:t> </a:t>
-            </a:r>
-            <a:r>
-              <a:rPr spc="-91" dirty="0" err="1">
+              <a:rPr spc="300"/>
+              <a:t> </a:t>
+            </a:r>
+            <a:r>
+              <a:rPr spc="-100">
                 <a:solidFill>
                   <a:srgbClr val="D4F789"/>
                 </a:solidFill>
               </a:rPr>
               <a:t>Modelos</a:t>
             </a:r>
-            <a:endParaRPr spc="-91" dirty="0">
-              <a:solidFill>
-                <a:srgbClr val="D4F789"/>
-              </a:solidFill>
-            </a:endParaRPr>
           </a:p>
         </p:txBody>
       </p:sp>
       <p:grpSp>
         <p:nvGrpSpPr>
-          <p:cNvPr id="105" name="object 14">
-            <a:extLst>
-              <a:ext uri="{FF2B5EF4-FFF2-40B4-BE49-F238E27FC236}">
-                <a16:creationId xmlns:a16="http://schemas.microsoft.com/office/drawing/2014/main" id="{025FB8A6-4635-A64B-598B-87C17F3E1E5E}"/>
-              </a:ext>
-            </a:extLst>
-          </p:cNvPr>
+          <p:cNvPr id="133" name="object 14"/>
           <p:cNvGrpSpPr/>
           <p:nvPr/>
         </p:nvGrpSpPr>
         <p:grpSpPr>
           <a:xfrm>
             <a:off x="15704" y="5497214"/>
-            <a:ext cx="20080546" cy="494750"/>
+            <a:ext cx="20080547" cy="494751"/>
             <a:chOff x="0" y="0"/>
-            <a:chExt cx="20080544" cy="494749"/>
+            <a:chExt cx="20080546" cy="494749"/>
           </a:xfrm>
         </p:grpSpPr>
         <p:pic>
           <p:nvPicPr>
-            <p:cNvPr id="103" name="object 15" descr="object 15">
-              <a:extLst>
-                <a:ext uri="{FF2B5EF4-FFF2-40B4-BE49-F238E27FC236}">
-                  <a16:creationId xmlns:a16="http://schemas.microsoft.com/office/drawing/2014/main" id="{D27F2C46-E1FD-0E08-FE47-116173225CE5}"/>
-                </a:ext>
-              </a:extLst>
-            </p:cNvPr>
+            <p:cNvPr id="131" name="object 15" descr="object 15"/>
             <p:cNvPicPr>
               <a:picLocks noChangeAspect="1"/>
             </p:cNvPicPr>
             <p:nvPr/>
           </p:nvPicPr>
           <p:blipFill>
-            <a:blip r:embed="rId2"/>
+            <a:blip r:embed="rId2">
+              <a:extLst/>
+            </a:blip>
             <a:stretch>
               <a:fillRect/>
             </a:stretch>
@@ -8205,7 +8328,7 @@
           <p:spPr>
             <a:xfrm>
               <a:off x="6266826" y="15706"/>
-              <a:ext cx="5465803" cy="471191"/>
+              <a:ext cx="5465805" cy="471192"/>
             </a:xfrm>
             <a:prstGeom prst="rect">
               <a:avLst/>
@@ -8219,20 +8342,14 @@
         </p:pic>
         <p:sp>
           <p:nvSpPr>
-            <p:cNvPr id="104" name="object 16">
-              <a:extLst>
-                <a:ext uri="{FF2B5EF4-FFF2-40B4-BE49-F238E27FC236}">
-                  <a16:creationId xmlns:a16="http://schemas.microsoft.com/office/drawing/2014/main" id="{35EF9FA4-0195-0F4A-C92A-6EF9D66EDB3C}"/>
-                </a:ext>
-              </a:extLst>
-            </p:cNvPr>
+            <p:cNvPr id="132" name="object 16"/>
             <p:cNvSpPr/>
             <p:nvPr/>
           </p:nvSpPr>
           <p:spPr>
             <a:xfrm>
               <a:off x="0" y="0"/>
-              <a:ext cx="20080545" cy="494750"/>
+              <a:ext cx="20080547" cy="494751"/>
             </a:xfrm>
             <a:prstGeom prst="rect">
               <a:avLst/>
@@ -8247,32 +8364,33 @@
             <a:effectLst/>
           </p:spPr>
           <p:txBody>
-            <a:bodyPr wrap="square" lIns="45719" tIns="45719" rIns="45719" bIns="45719" numCol="1" anchor="t">
+            <a:bodyPr wrap="square" lIns="45718" tIns="45718" rIns="45718" bIns="45718" numCol="1" anchor="t">
               <a:noAutofit/>
             </a:bodyPr>
             <a:lstStyle/>
             <a:p>
-              <a:endParaRPr/>
+              <a:pPr>
+                <a:defRPr>
+                  <a:latin typeface="Calibri"/>
+                  <a:ea typeface="Calibri"/>
+                  <a:cs typeface="Calibri"/>
+                  <a:sym typeface="Calibri"/>
+                </a:defRPr>
+              </a:pPr>
             </a:p>
           </p:txBody>
         </p:sp>
       </p:grpSp>
       <p:sp>
         <p:nvSpPr>
-          <p:cNvPr id="106" name="object 19">
-            <a:extLst>
-              <a:ext uri="{FF2B5EF4-FFF2-40B4-BE49-F238E27FC236}">
-                <a16:creationId xmlns:a16="http://schemas.microsoft.com/office/drawing/2014/main" id="{3EC824D8-C452-C14A-5CCC-14165FE37E73}"/>
-              </a:ext>
-            </a:extLst>
-          </p:cNvPr>
+          <p:cNvPr id="134" name="object 19"/>
           <p:cNvSpPr/>
           <p:nvPr/>
         </p:nvSpPr>
         <p:spPr>
           <a:xfrm>
-            <a:off x="15707" y="7020728"/>
-            <a:ext cx="20080539" cy="337687"/>
+            <a:off x="15706" y="7020728"/>
+            <a:ext cx="20080540" cy="337688"/>
           </a:xfrm>
           <a:prstGeom prst="rect">
             <a:avLst/>
@@ -8285,29 +8403,30 @@
           </a:ln>
         </p:spPr>
         <p:txBody>
-          <a:bodyPr lIns="45719" rIns="45719"/>
+          <a:bodyPr lIns="45718" tIns="45718" rIns="45718" bIns="45718"/>
           <a:lstStyle/>
           <a:p>
-            <a:endParaRPr/>
+            <a:pPr>
+              <a:defRPr>
+                <a:latin typeface="Calibri"/>
+                <a:ea typeface="Calibri"/>
+                <a:cs typeface="Calibri"/>
+                <a:sym typeface="Calibri"/>
+              </a:defRPr>
+            </a:pPr>
           </a:p>
         </p:txBody>
       </p:sp>
       <p:sp>
         <p:nvSpPr>
-          <p:cNvPr id="107" name="object 20">
-            <a:extLst>
-              <a:ext uri="{FF2B5EF4-FFF2-40B4-BE49-F238E27FC236}">
-                <a16:creationId xmlns:a16="http://schemas.microsoft.com/office/drawing/2014/main" id="{25C7A245-96B3-3E21-51A2-38F8395A88F0}"/>
-              </a:ext>
-            </a:extLst>
-          </p:cNvPr>
+          <p:cNvPr id="135" name="object 20"/>
           <p:cNvSpPr/>
           <p:nvPr/>
         </p:nvSpPr>
         <p:spPr>
           <a:xfrm>
-            <a:off x="15707" y="7491917"/>
-            <a:ext cx="20080539" cy="337687"/>
+            <a:off x="15706" y="7491917"/>
+            <a:ext cx="20080540" cy="337688"/>
           </a:xfrm>
           <a:prstGeom prst="rect">
             <a:avLst/>
@@ -8320,29 +8439,32 @@
           </a:ln>
         </p:spPr>
         <p:txBody>
-          <a:bodyPr lIns="45719" rIns="45719"/>
+          <a:bodyPr lIns="45718" tIns="45718" rIns="45718" bIns="45718"/>
           <a:lstStyle/>
           <a:p>
-            <a:endParaRPr/>
+            <a:pPr>
+              <a:defRPr>
+                <a:latin typeface="Calibri"/>
+                <a:ea typeface="Calibri"/>
+                <a:cs typeface="Calibri"/>
+                <a:sym typeface="Calibri"/>
+              </a:defRPr>
+            </a:pPr>
           </a:p>
         </p:txBody>
       </p:sp>
       <p:pic>
         <p:nvPicPr>
-          <p:cNvPr id="4" name="Imagen 3">
-            <a:extLst>
-              <a:ext uri="{FF2B5EF4-FFF2-40B4-BE49-F238E27FC236}">
-                <a16:creationId xmlns:a16="http://schemas.microsoft.com/office/drawing/2014/main" id="{E31FADCB-AD7B-262D-DB02-12E7A34E814A}"/>
-              </a:ext>
-            </a:extLst>
-          </p:cNvPr>
+          <p:cNvPr id="136" name="Imagen 3" descr="Imagen 3"/>
           <p:cNvPicPr>
             <a:picLocks noChangeAspect="1"/>
           </p:cNvPicPr>
           <p:nvPr/>
         </p:nvPicPr>
         <p:blipFill>
-          <a:blip r:embed="rId3"/>
+          <a:blip r:embed="rId3">
+            <a:extLst/>
+          </a:blip>
           <a:stretch>
             <a:fillRect/>
           </a:stretch>
@@ -8350,29 +8472,27 @@
         <p:spPr>
           <a:xfrm>
             <a:off x="789419" y="2305853"/>
-            <a:ext cx="18627271" cy="5799056"/>
+            <a:ext cx="18627271" cy="5799057"/>
           </a:xfrm>
           <a:prstGeom prst="rect">
             <a:avLst/>
           </a:prstGeom>
+          <a:ln w="12700">
+            <a:miter lim="400000"/>
+          </a:ln>
         </p:spPr>
       </p:pic>
     </p:spTree>
-    <p:extLst>
-      <p:ext uri="{BB962C8B-B14F-4D97-AF65-F5344CB8AC3E}">
-        <p14:creationId xmlns:p14="http://schemas.microsoft.com/office/powerpoint/2010/main" val="105535711"/>
-      </p:ext>
-    </p:extLst>
   </p:cSld>
   <p:clrMapOvr>
     <a:masterClrMapping/>
   </p:clrMapOvr>
-  <p:transition spd="med"/>
+  <p:transition xmlns:p14="http://schemas.microsoft.com/office/powerpoint/2010/main" spd="med" advClick="1"/>
 </p:sld>
 </file>
 
 <file path=ppt/theme/theme1.xml><?xml version="1.0" encoding="utf-8"?>
-<a:theme xmlns:a="http://schemas.openxmlformats.org/drawingml/2006/main" name="Office Theme">
+<a:theme xmlns:a="http://schemas.openxmlformats.org/drawingml/2006/main" xmlns:r="http://schemas.openxmlformats.org/officeDocument/2006/relationships" name="Office Theme">
   <a:themeElements>
     <a:clrScheme name="Office Theme">
       <a:dk1>
@@ -8498,7 +8618,7 @@
       <a:effectStyleLst>
         <a:effectStyle>
           <a:effectLst>
-            <a:outerShdw blurRad="38100" dist="23000" dir="5400000" rotWithShape="0">
+            <a:outerShdw sx="100000" sy="100000" kx="0" ky="0" algn="b" rotWithShape="0" blurRad="38100" dist="23000" dir="5400000">
               <a:srgbClr val="000000">
                 <a:alpha val="35000"/>
               </a:srgbClr>
@@ -8507,7 +8627,7 @@
         </a:effectStyle>
         <a:effectStyle>
           <a:effectLst>
-            <a:outerShdw blurRad="38100" dist="23000" dir="5400000" rotWithShape="0">
+            <a:outerShdw sx="100000" sy="100000" kx="0" ky="0" algn="b" rotWithShape="0" blurRad="38100" dist="23000" dir="5400000">
               <a:srgbClr val="000000">
                 <a:alpha val="35000"/>
               </a:srgbClr>
@@ -8516,9 +8636,9 @@
         </a:effectStyle>
         <a:effectStyle>
           <a:effectLst>
-            <a:outerShdw blurRad="38100" dist="20000" dir="5400000" rotWithShape="0">
+            <a:outerShdw sx="100000" sy="100000" kx="0" ky="0" algn="b" rotWithShape="0" blurRad="38100" dist="23000" dir="5400000">
               <a:srgbClr val="000000">
-                <a:alpha val="38000"/>
+                <a:alpha val="35000"/>
               </a:srgbClr>
             </a:outerShdw>
           </a:effectLst>
@@ -8590,7 +8710,7 @@
           <a:round/>
         </a:ln>
         <a:effectLst>
-          <a:outerShdw blurRad="38100" dist="23000" dir="5400000" rotWithShape="0">
+          <a:outerShdw sx="100000" sy="100000" kx="0" ky="0" algn="b" rotWithShape="0" blurRad="38100" dist="23000" dir="5400000">
             <a:srgbClr val="000000">
               <a:alpha val="35000"/>
             </a:srgbClr>
@@ -8598,7 +8718,7 @@
         </a:effectLst>
         <a:sp3d/>
       </a:spPr>
-      <a:bodyPr rot="0" spcFirstLastPara="1" vertOverflow="overflow" horzOverflow="overflow" vert="horz" wrap="square" lIns="45719" tIns="45719" rIns="45719" bIns="45719" numCol="1" spcCol="38100" rtlCol="0" anchor="ctr">
+      <a:bodyPr rot="0" spcFirstLastPara="1" vertOverflow="overflow" horzOverflow="overflow" vert="horz" wrap="square" lIns="45718" tIns="45718" rIns="45718" bIns="45718" numCol="1" spcCol="38100" rtlCol="0" anchor="ctr" upright="0">
         <a:spAutoFit/>
       </a:bodyPr>
       <a:lstStyle>
@@ -8617,7 +8737,7 @@
           <a:buFontTx/>
           <a:buNone/>
           <a:tabLst/>
-          <a:defRPr kumimoji="0" sz="1800" b="0" i="0" u="none" strike="noStrike" cap="none" spc="0" normalizeH="0" baseline="0">
+          <a:defRPr b="0" baseline="0" cap="none" i="0" spc="0" strike="noStrike" sz="1800" u="none" kumimoji="0" normalizeH="0">
             <a:ln>
               <a:noFill/>
             </a:ln>
@@ -8626,10 +8746,10 @@
             </a:solidFill>
             <a:effectLst/>
             <a:uFillTx/>
-            <a:latin typeface="Calibri"/>
-            <a:ea typeface="Calibri"/>
-            <a:cs typeface="Calibri"/>
-            <a:sym typeface="Calibri"/>
+            <a:latin typeface="+mn-lt"/>
+            <a:ea typeface="+mn-ea"/>
+            <a:cs typeface="+mn-cs"/>
+            <a:sym typeface="Helvetica Neue"/>
           </a:defRPr>
         </a:defPPr>
         <a:lvl1pPr marL="0" marR="0" indent="0" algn="l" defTabSz="914400" rtl="0" fontAlgn="auto" latinLnBrk="1" hangingPunct="0">
@@ -8647,7 +8767,7 @@
           <a:buFontTx/>
           <a:buNone/>
           <a:tabLst/>
-          <a:defRPr kumimoji="0" sz="1800" b="0" i="0" u="none" strike="noStrike" cap="none" spc="0" normalizeH="0" baseline="0">
+          <a:defRPr b="0" baseline="0" cap="none" i="0" spc="0" strike="noStrike" sz="1800" u="none" kumimoji="0" normalizeH="0">
             <a:ln>
               <a:noFill/>
             </a:ln>
@@ -8673,7 +8793,7 @@
           <a:buFontTx/>
           <a:buNone/>
           <a:tabLst/>
-          <a:defRPr kumimoji="0" sz="1800" b="0" i="0" u="none" strike="noStrike" cap="none" spc="0" normalizeH="0" baseline="0">
+          <a:defRPr b="0" baseline="0" cap="none" i="0" spc="0" strike="noStrike" sz="1800" u="none" kumimoji="0" normalizeH="0">
             <a:ln>
               <a:noFill/>
             </a:ln>
@@ -8699,7 +8819,7 @@
           <a:buFontTx/>
           <a:buNone/>
           <a:tabLst/>
-          <a:defRPr kumimoji="0" sz="1800" b="0" i="0" u="none" strike="noStrike" cap="none" spc="0" normalizeH="0" baseline="0">
+          <a:defRPr b="0" baseline="0" cap="none" i="0" spc="0" strike="noStrike" sz="1800" u="none" kumimoji="0" normalizeH="0">
             <a:ln>
               <a:noFill/>
             </a:ln>
@@ -8725,7 +8845,7 @@
           <a:buFontTx/>
           <a:buNone/>
           <a:tabLst/>
-          <a:defRPr kumimoji="0" sz="1800" b="0" i="0" u="none" strike="noStrike" cap="none" spc="0" normalizeH="0" baseline="0">
+          <a:defRPr b="0" baseline="0" cap="none" i="0" spc="0" strike="noStrike" sz="1800" u="none" kumimoji="0" normalizeH="0">
             <a:ln>
               <a:noFill/>
             </a:ln>
@@ -8751,7 +8871,7 @@
           <a:buFontTx/>
           <a:buNone/>
           <a:tabLst/>
-          <a:defRPr kumimoji="0" sz="1800" b="0" i="0" u="none" strike="noStrike" cap="none" spc="0" normalizeH="0" baseline="0">
+          <a:defRPr b="0" baseline="0" cap="none" i="0" spc="0" strike="noStrike" sz="1800" u="none" kumimoji="0" normalizeH="0">
             <a:ln>
               <a:noFill/>
             </a:ln>
@@ -8777,7 +8897,7 @@
           <a:buFontTx/>
           <a:buNone/>
           <a:tabLst/>
-          <a:defRPr kumimoji="0" sz="1800" b="0" i="0" u="none" strike="noStrike" cap="none" spc="0" normalizeH="0" baseline="0">
+          <a:defRPr b="0" baseline="0" cap="none" i="0" spc="0" strike="noStrike" sz="1800" u="none" kumimoji="0" normalizeH="0">
             <a:ln>
               <a:noFill/>
             </a:ln>
@@ -8803,7 +8923,7 @@
           <a:buFontTx/>
           <a:buNone/>
           <a:tabLst/>
-          <a:defRPr kumimoji="0" sz="1800" b="0" i="0" u="none" strike="noStrike" cap="none" spc="0" normalizeH="0" baseline="0">
+          <a:defRPr b="0" baseline="0" cap="none" i="0" spc="0" strike="noStrike" sz="1800" u="none" kumimoji="0" normalizeH="0">
             <a:ln>
               <a:noFill/>
             </a:ln>
@@ -8829,7 +8949,7 @@
           <a:buFontTx/>
           <a:buNone/>
           <a:tabLst/>
-          <a:defRPr kumimoji="0" sz="1800" b="0" i="0" u="none" strike="noStrike" cap="none" spc="0" normalizeH="0" baseline="0">
+          <a:defRPr b="0" baseline="0" cap="none" i="0" spc="0" strike="noStrike" sz="1800" u="none" kumimoji="0" normalizeH="0">
             <a:ln>
               <a:noFill/>
             </a:ln>
@@ -8855,7 +8975,7 @@
           <a:buFontTx/>
           <a:buNone/>
           <a:tabLst/>
-          <a:defRPr kumimoji="0" sz="1800" b="0" i="0" u="none" strike="noStrike" cap="none" spc="0" normalizeH="0" baseline="0">
+          <a:defRPr b="0" baseline="0" cap="none" i="0" spc="0" strike="noStrike" sz="1800" u="none" kumimoji="0" normalizeH="0">
             <a:ln>
               <a:noFill/>
             </a:ln>
@@ -8868,15 +8988,9 @@
         </a:lvl9pPr>
       </a:lstStyle>
       <a:style>
-        <a:lnRef idx="0">
-          <a:scrgbClr r="0" g="0" b="0"/>
-        </a:lnRef>
-        <a:fillRef idx="0">
-          <a:scrgbClr r="0" g="0" b="0"/>
-        </a:fillRef>
-        <a:effectRef idx="0">
-          <a:scrgbClr r="0" g="0" b="0"/>
-        </a:effectRef>
+        <a:lnRef idx="0"/>
+        <a:fillRef idx="0"/>
+        <a:effectRef idx="0"/>
         <a:fontRef idx="none"/>
       </a:style>
     </a:spDef>
@@ -8891,15 +9005,15 @@
           <a:round/>
         </a:ln>
         <a:effectLst>
-          <a:outerShdw blurRad="38100" dist="20000" dir="5400000" rotWithShape="0">
+          <a:outerShdw sx="100000" sy="100000" kx="0" ky="0" algn="b" rotWithShape="0" blurRad="38100" dist="23000" dir="5400000">
             <a:srgbClr val="000000">
-              <a:alpha val="38000"/>
+              <a:alpha val="35000"/>
             </a:srgbClr>
           </a:outerShdw>
         </a:effectLst>
         <a:sp3d/>
       </a:spPr>
-      <a:bodyPr rot="0" spcFirstLastPara="1" vertOverflow="overflow" horzOverflow="overflow" vert="horz" wrap="square" lIns="91439" tIns="45719" rIns="91439" bIns="45719" numCol="1" spcCol="38100" rtlCol="0" anchor="t">
+      <a:bodyPr rot="0" spcFirstLastPara="1" vertOverflow="overflow" horzOverflow="overflow" vert="horz" wrap="square" lIns="91439" tIns="45719" rIns="91439" bIns="45719" numCol="1" spcCol="38100" rtlCol="0" anchor="t" upright="0">
         <a:noAutofit/>
       </a:bodyPr>
       <a:lstStyle>
@@ -8918,7 +9032,7 @@
           <a:buFontTx/>
           <a:buNone/>
           <a:tabLst/>
-          <a:defRPr kumimoji="0" sz="1800" b="0" i="0" u="none" strike="noStrike" cap="none" spc="0" normalizeH="0" baseline="0">
+          <a:defRPr b="0" baseline="0" cap="none" i="0" spc="0" strike="noStrike" sz="1800" u="none" kumimoji="0" normalizeH="0">
             <a:ln>
               <a:noFill/>
             </a:ln>
@@ -8944,7 +9058,7 @@
           <a:buFontTx/>
           <a:buNone/>
           <a:tabLst/>
-          <a:defRPr kumimoji="0" sz="1800" b="0" i="0" u="none" strike="noStrike" cap="none" spc="0" normalizeH="0" baseline="0">
+          <a:defRPr b="0" baseline="0" cap="none" i="0" spc="0" strike="noStrike" sz="1800" u="none" kumimoji="0" normalizeH="0">
             <a:ln>
               <a:noFill/>
             </a:ln>
@@ -8970,7 +9084,7 @@
           <a:buFontTx/>
           <a:buNone/>
           <a:tabLst/>
-          <a:defRPr kumimoji="0" sz="1800" b="0" i="0" u="none" strike="noStrike" cap="none" spc="0" normalizeH="0" baseline="0">
+          <a:defRPr b="0" baseline="0" cap="none" i="0" spc="0" strike="noStrike" sz="1800" u="none" kumimoji="0" normalizeH="0">
             <a:ln>
               <a:noFill/>
             </a:ln>
@@ -8996,7 +9110,7 @@
           <a:buFontTx/>
           <a:buNone/>
           <a:tabLst/>
-          <a:defRPr kumimoji="0" sz="1800" b="0" i="0" u="none" strike="noStrike" cap="none" spc="0" normalizeH="0" baseline="0">
+          <a:defRPr b="0" baseline="0" cap="none" i="0" spc="0" strike="noStrike" sz="1800" u="none" kumimoji="0" normalizeH="0">
             <a:ln>
               <a:noFill/>
             </a:ln>
@@ -9022,7 +9136,7 @@
           <a:buFontTx/>
           <a:buNone/>
           <a:tabLst/>
-          <a:defRPr kumimoji="0" sz="1800" b="0" i="0" u="none" strike="noStrike" cap="none" spc="0" normalizeH="0" baseline="0">
+          <a:defRPr b="0" baseline="0" cap="none" i="0" spc="0" strike="noStrike" sz="1800" u="none" kumimoji="0" normalizeH="0">
             <a:ln>
               <a:noFill/>
             </a:ln>
@@ -9048,7 +9162,7 @@
           <a:buFontTx/>
           <a:buNone/>
           <a:tabLst/>
-          <a:defRPr kumimoji="0" sz="1800" b="0" i="0" u="none" strike="noStrike" cap="none" spc="0" normalizeH="0" baseline="0">
+          <a:defRPr b="0" baseline="0" cap="none" i="0" spc="0" strike="noStrike" sz="1800" u="none" kumimoji="0" normalizeH="0">
             <a:ln>
               <a:noFill/>
             </a:ln>
@@ -9074,7 +9188,7 @@
           <a:buFontTx/>
           <a:buNone/>
           <a:tabLst/>
-          <a:defRPr kumimoji="0" sz="1800" b="0" i="0" u="none" strike="noStrike" cap="none" spc="0" normalizeH="0" baseline="0">
+          <a:defRPr b="0" baseline="0" cap="none" i="0" spc="0" strike="noStrike" sz="1800" u="none" kumimoji="0" normalizeH="0">
             <a:ln>
               <a:noFill/>
             </a:ln>
@@ -9100,7 +9214,7 @@
           <a:buFontTx/>
           <a:buNone/>
           <a:tabLst/>
-          <a:defRPr kumimoji="0" sz="1800" b="0" i="0" u="none" strike="noStrike" cap="none" spc="0" normalizeH="0" baseline="0">
+          <a:defRPr b="0" baseline="0" cap="none" i="0" spc="0" strike="noStrike" sz="1800" u="none" kumimoji="0" normalizeH="0">
             <a:ln>
               <a:noFill/>
             </a:ln>
@@ -9126,7 +9240,7 @@
           <a:buFontTx/>
           <a:buNone/>
           <a:tabLst/>
-          <a:defRPr kumimoji="0" sz="1800" b="0" i="0" u="none" strike="noStrike" cap="none" spc="0" normalizeH="0" baseline="0">
+          <a:defRPr b="0" baseline="0" cap="none" i="0" spc="0" strike="noStrike" sz="1800" u="none" kumimoji="0" normalizeH="0">
             <a:ln>
               <a:noFill/>
             </a:ln>
@@ -9152,7 +9266,7 @@
           <a:buFontTx/>
           <a:buNone/>
           <a:tabLst/>
-          <a:defRPr kumimoji="0" sz="1800" b="0" i="0" u="none" strike="noStrike" cap="none" spc="0" normalizeH="0" baseline="0">
+          <a:defRPr b="0" baseline="0" cap="none" i="0" spc="0" strike="noStrike" sz="1800" u="none" kumimoji="0" normalizeH="0">
             <a:ln>
               <a:noFill/>
             </a:ln>
@@ -9165,15 +9279,9 @@
         </a:lvl9pPr>
       </a:lstStyle>
       <a:style>
-        <a:lnRef idx="0">
-          <a:scrgbClr r="0" g="0" b="0"/>
-        </a:lnRef>
-        <a:fillRef idx="0">
-          <a:scrgbClr r="0" g="0" b="0"/>
-        </a:fillRef>
-        <a:effectRef idx="0">
-          <a:scrgbClr r="0" g="0" b="0"/>
-        </a:effectRef>
+        <a:lnRef idx="0"/>
+        <a:fillRef idx="0"/>
+        <a:effectRef idx="0"/>
         <a:fontRef idx="none"/>
       </a:style>
     </a:lnDef>
@@ -9187,7 +9295,7 @@
         <a:effectLst/>
         <a:sp3d/>
       </a:spPr>
-      <a:bodyPr rot="0" spcFirstLastPara="1" vertOverflow="overflow" horzOverflow="overflow" vert="horz" wrap="square" lIns="45719" tIns="45719" rIns="45719" bIns="45719" numCol="1" spcCol="38100" rtlCol="0" anchor="t">
+      <a:bodyPr rot="0" spcFirstLastPara="1" vertOverflow="overflow" horzOverflow="overflow" vert="horz" wrap="square" lIns="45718" tIns="45718" rIns="45718" bIns="45718" numCol="1" spcCol="38100" rtlCol="0" anchor="t" upright="0">
         <a:spAutoFit/>
       </a:bodyPr>
       <a:lstStyle>
@@ -9206,7 +9314,7 @@
           <a:buFontTx/>
           <a:buNone/>
           <a:tabLst/>
-          <a:defRPr kumimoji="0" sz="1800" b="0" i="0" u="none" strike="noStrike" cap="none" spc="0" normalizeH="0" baseline="0">
+          <a:defRPr b="0" baseline="0" cap="none" i="0" spc="0" strike="noStrike" sz="1800" u="none" kumimoji="0" normalizeH="0">
             <a:ln>
               <a:noFill/>
             </a:ln>
@@ -9215,10 +9323,10 @@
             </a:solidFill>
             <a:effectLst/>
             <a:uFillTx/>
-            <a:latin typeface="Calibri"/>
-            <a:ea typeface="Calibri"/>
-            <a:cs typeface="Calibri"/>
-            <a:sym typeface="Calibri"/>
+            <a:latin typeface="+mn-lt"/>
+            <a:ea typeface="+mn-ea"/>
+            <a:cs typeface="+mn-cs"/>
+            <a:sym typeface="Helvetica Neue"/>
           </a:defRPr>
         </a:defPPr>
         <a:lvl1pPr marL="0" marR="0" indent="0" algn="l" defTabSz="914400" rtl="0" fontAlgn="auto" latinLnBrk="1" hangingPunct="0">
@@ -9236,7 +9344,7 @@
           <a:buFontTx/>
           <a:buNone/>
           <a:tabLst/>
-          <a:defRPr kumimoji="0" sz="1800" b="0" i="0" u="none" strike="noStrike" cap="none" spc="0" normalizeH="0" baseline="0">
+          <a:defRPr b="0" baseline="0" cap="none" i="0" spc="0" strike="noStrike" sz="1800" u="none" kumimoji="0" normalizeH="0">
             <a:ln>
               <a:noFill/>
             </a:ln>
@@ -9262,7 +9370,7 @@
           <a:buFontTx/>
           <a:buNone/>
           <a:tabLst/>
-          <a:defRPr kumimoji="0" sz="1800" b="0" i="0" u="none" strike="noStrike" cap="none" spc="0" normalizeH="0" baseline="0">
+          <a:defRPr b="0" baseline="0" cap="none" i="0" spc="0" strike="noStrike" sz="1800" u="none" kumimoji="0" normalizeH="0">
             <a:ln>
               <a:noFill/>
             </a:ln>
@@ -9288,7 +9396,7 @@
           <a:buFontTx/>
           <a:buNone/>
           <a:tabLst/>
-          <a:defRPr kumimoji="0" sz="1800" b="0" i="0" u="none" strike="noStrike" cap="none" spc="0" normalizeH="0" baseline="0">
+          <a:defRPr b="0" baseline="0" cap="none" i="0" spc="0" strike="noStrike" sz="1800" u="none" kumimoji="0" normalizeH="0">
             <a:ln>
               <a:noFill/>
             </a:ln>
@@ -9314,7 +9422,7 @@
           <a:buFontTx/>
           <a:buNone/>
           <a:tabLst/>
-          <a:defRPr kumimoji="0" sz="1800" b="0" i="0" u="none" strike="noStrike" cap="none" spc="0" normalizeH="0" baseline="0">
+          <a:defRPr b="0" baseline="0" cap="none" i="0" spc="0" strike="noStrike" sz="1800" u="none" kumimoji="0" normalizeH="0">
             <a:ln>
               <a:noFill/>
             </a:ln>
@@ -9340,7 +9448,7 @@
           <a:buFontTx/>
           <a:buNone/>
           <a:tabLst/>
-          <a:defRPr kumimoji="0" sz="1800" b="0" i="0" u="none" strike="noStrike" cap="none" spc="0" normalizeH="0" baseline="0">
+          <a:defRPr b="0" baseline="0" cap="none" i="0" spc="0" strike="noStrike" sz="1800" u="none" kumimoji="0" normalizeH="0">
             <a:ln>
               <a:noFill/>
             </a:ln>
@@ -9366,7 +9474,7 @@
           <a:buFontTx/>
           <a:buNone/>
           <a:tabLst/>
-          <a:defRPr kumimoji="0" sz="1800" b="0" i="0" u="none" strike="noStrike" cap="none" spc="0" normalizeH="0" baseline="0">
+          <a:defRPr b="0" baseline="0" cap="none" i="0" spc="0" strike="noStrike" sz="1800" u="none" kumimoji="0" normalizeH="0">
             <a:ln>
               <a:noFill/>
             </a:ln>
@@ -9392,7 +9500,7 @@
           <a:buFontTx/>
           <a:buNone/>
           <a:tabLst/>
-          <a:defRPr kumimoji="0" sz="1800" b="0" i="0" u="none" strike="noStrike" cap="none" spc="0" normalizeH="0" baseline="0">
+          <a:defRPr b="0" baseline="0" cap="none" i="0" spc="0" strike="noStrike" sz="1800" u="none" kumimoji="0" normalizeH="0">
             <a:ln>
               <a:noFill/>
             </a:ln>
@@ -9418,7 +9526,7 @@
           <a:buFontTx/>
           <a:buNone/>
           <a:tabLst/>
-          <a:defRPr kumimoji="0" sz="1800" b="0" i="0" u="none" strike="noStrike" cap="none" spc="0" normalizeH="0" baseline="0">
+          <a:defRPr b="0" baseline="0" cap="none" i="0" spc="0" strike="noStrike" sz="1800" u="none" kumimoji="0" normalizeH="0">
             <a:ln>
               <a:noFill/>
             </a:ln>
@@ -9444,7 +9552,7 @@
           <a:buFontTx/>
           <a:buNone/>
           <a:tabLst/>
-          <a:defRPr kumimoji="0" sz="1800" b="0" i="0" u="none" strike="noStrike" cap="none" spc="0" normalizeH="0" baseline="0">
+          <a:defRPr b="0" baseline="0" cap="none" i="0" spc="0" strike="noStrike" sz="1800" u="none" kumimoji="0" normalizeH="0">
             <a:ln>
               <a:noFill/>
             </a:ln>
@@ -9457,25 +9565,18 @@
         </a:lvl9pPr>
       </a:lstStyle>
       <a:style>
-        <a:lnRef idx="0">
-          <a:scrgbClr r="0" g="0" b="0"/>
-        </a:lnRef>
-        <a:fillRef idx="0">
-          <a:scrgbClr r="0" g="0" b="0"/>
-        </a:fillRef>
-        <a:effectRef idx="0">
-          <a:scrgbClr r="0" g="0" b="0"/>
-        </a:effectRef>
+        <a:lnRef idx="0"/>
+        <a:fillRef idx="0"/>
+        <a:effectRef idx="0"/>
         <a:fontRef idx="none"/>
       </a:style>
     </a:txDef>
   </a:objectDefaults>
-  <a:extraClrSchemeLst/>
 </a:theme>
 </file>
 
 <file path=ppt/theme/theme2.xml><?xml version="1.0" encoding="utf-8"?>
-<a:theme xmlns:a="http://schemas.openxmlformats.org/drawingml/2006/main" name="Office Theme">
+<a:theme xmlns:a="http://schemas.openxmlformats.org/drawingml/2006/main" xmlns:r="http://schemas.openxmlformats.org/officeDocument/2006/relationships" name="Office Theme">
   <a:themeElements>
     <a:clrScheme name="Office Theme">
       <a:dk1>
@@ -9601,7 +9702,7 @@
       <a:effectStyleLst>
         <a:effectStyle>
           <a:effectLst>
-            <a:outerShdw blurRad="38100" dist="23000" dir="5400000" rotWithShape="0">
+            <a:outerShdw sx="100000" sy="100000" kx="0" ky="0" algn="b" rotWithShape="0" blurRad="38100" dist="23000" dir="5400000">
               <a:srgbClr val="000000">
                 <a:alpha val="35000"/>
               </a:srgbClr>
@@ -9610,7 +9711,7 @@
         </a:effectStyle>
         <a:effectStyle>
           <a:effectLst>
-            <a:outerShdw blurRad="38100" dist="23000" dir="5400000" rotWithShape="0">
+            <a:outerShdw sx="100000" sy="100000" kx="0" ky="0" algn="b" rotWithShape="0" blurRad="38100" dist="23000" dir="5400000">
               <a:srgbClr val="000000">
                 <a:alpha val="35000"/>
               </a:srgbClr>
@@ -9619,9 +9720,9 @@
         </a:effectStyle>
         <a:effectStyle>
           <a:effectLst>
-            <a:outerShdw blurRad="38100" dist="20000" dir="5400000" rotWithShape="0">
+            <a:outerShdw sx="100000" sy="100000" kx="0" ky="0" algn="b" rotWithShape="0" blurRad="38100" dist="23000" dir="5400000">
               <a:srgbClr val="000000">
-                <a:alpha val="38000"/>
+                <a:alpha val="35000"/>
               </a:srgbClr>
             </a:outerShdw>
           </a:effectLst>
@@ -9693,7 +9794,7 @@
           <a:round/>
         </a:ln>
         <a:effectLst>
-          <a:outerShdw blurRad="38100" dist="23000" dir="5400000" rotWithShape="0">
+          <a:outerShdw sx="100000" sy="100000" kx="0" ky="0" algn="b" rotWithShape="0" blurRad="38100" dist="23000" dir="5400000">
             <a:srgbClr val="000000">
               <a:alpha val="35000"/>
             </a:srgbClr>
@@ -9701,7 +9802,7 @@
         </a:effectLst>
         <a:sp3d/>
       </a:spPr>
-      <a:bodyPr rot="0" spcFirstLastPara="1" vertOverflow="overflow" horzOverflow="overflow" vert="horz" wrap="square" lIns="45719" tIns="45719" rIns="45719" bIns="45719" numCol="1" spcCol="38100" rtlCol="0" anchor="ctr">
+      <a:bodyPr rot="0" spcFirstLastPara="1" vertOverflow="overflow" horzOverflow="overflow" vert="horz" wrap="square" lIns="45718" tIns="45718" rIns="45718" bIns="45718" numCol="1" spcCol="38100" rtlCol="0" anchor="ctr" upright="0">
         <a:spAutoFit/>
       </a:bodyPr>
       <a:lstStyle>
@@ -9720,7 +9821,7 @@
           <a:buFontTx/>
           <a:buNone/>
           <a:tabLst/>
-          <a:defRPr kumimoji="0" sz="1800" b="0" i="0" u="none" strike="noStrike" cap="none" spc="0" normalizeH="0" baseline="0">
+          <a:defRPr b="0" baseline="0" cap="none" i="0" spc="0" strike="noStrike" sz="1800" u="none" kumimoji="0" normalizeH="0">
             <a:ln>
               <a:noFill/>
             </a:ln>
@@ -9729,10 +9830,10 @@
             </a:solidFill>
             <a:effectLst/>
             <a:uFillTx/>
-            <a:latin typeface="Calibri"/>
-            <a:ea typeface="Calibri"/>
-            <a:cs typeface="Calibri"/>
-            <a:sym typeface="Calibri"/>
+            <a:latin typeface="+mn-lt"/>
+            <a:ea typeface="+mn-ea"/>
+            <a:cs typeface="+mn-cs"/>
+            <a:sym typeface="Helvetica Neue"/>
           </a:defRPr>
         </a:defPPr>
         <a:lvl1pPr marL="0" marR="0" indent="0" algn="l" defTabSz="914400" rtl="0" fontAlgn="auto" latinLnBrk="1" hangingPunct="0">
@@ -9750,7 +9851,7 @@
           <a:buFontTx/>
           <a:buNone/>
           <a:tabLst/>
-          <a:defRPr kumimoji="0" sz="1800" b="0" i="0" u="none" strike="noStrike" cap="none" spc="0" normalizeH="0" baseline="0">
+          <a:defRPr b="0" baseline="0" cap="none" i="0" spc="0" strike="noStrike" sz="1800" u="none" kumimoji="0" normalizeH="0">
             <a:ln>
               <a:noFill/>
             </a:ln>
@@ -9776,7 +9877,7 @@
           <a:buFontTx/>
           <a:buNone/>
           <a:tabLst/>
-          <a:defRPr kumimoji="0" sz="1800" b="0" i="0" u="none" strike="noStrike" cap="none" spc="0" normalizeH="0" baseline="0">
+          <a:defRPr b="0" baseline="0" cap="none" i="0" spc="0" strike="noStrike" sz="1800" u="none" kumimoji="0" normalizeH="0">
             <a:ln>
               <a:noFill/>
             </a:ln>
@@ -9802,7 +9903,7 @@
           <a:buFontTx/>
           <a:buNone/>
           <a:tabLst/>
-          <a:defRPr kumimoji="0" sz="1800" b="0" i="0" u="none" strike="noStrike" cap="none" spc="0" normalizeH="0" baseline="0">
+          <a:defRPr b="0" baseline="0" cap="none" i="0" spc="0" strike="noStrike" sz="1800" u="none" kumimoji="0" normalizeH="0">
             <a:ln>
               <a:noFill/>
             </a:ln>
@@ -9828,7 +9929,7 @@
           <a:buFontTx/>
           <a:buNone/>
           <a:tabLst/>
-          <a:defRPr kumimoji="0" sz="1800" b="0" i="0" u="none" strike="noStrike" cap="none" spc="0" normalizeH="0" baseline="0">
+          <a:defRPr b="0" baseline="0" cap="none" i="0" spc="0" strike="noStrike" sz="1800" u="none" kumimoji="0" normalizeH="0">
             <a:ln>
               <a:noFill/>
             </a:ln>
@@ -9854,7 +9955,7 @@
           <a:buFontTx/>
           <a:buNone/>
           <a:tabLst/>
-          <a:defRPr kumimoji="0" sz="1800" b="0" i="0" u="none" strike="noStrike" cap="none" spc="0" normalizeH="0" baseline="0">
+          <a:defRPr b="0" baseline="0" cap="none" i="0" spc="0" strike="noStrike" sz="1800" u="none" kumimoji="0" normalizeH="0">
             <a:ln>
               <a:noFill/>
             </a:ln>
@@ -9880,7 +9981,7 @@
           <a:buFontTx/>
           <a:buNone/>
           <a:tabLst/>
-          <a:defRPr kumimoji="0" sz="1800" b="0" i="0" u="none" strike="noStrike" cap="none" spc="0" normalizeH="0" baseline="0">
+          <a:defRPr b="0" baseline="0" cap="none" i="0" spc="0" strike="noStrike" sz="1800" u="none" kumimoji="0" normalizeH="0">
             <a:ln>
               <a:noFill/>
             </a:ln>
@@ -9906,7 +10007,7 @@
           <a:buFontTx/>
           <a:buNone/>
           <a:tabLst/>
-          <a:defRPr kumimoji="0" sz="1800" b="0" i="0" u="none" strike="noStrike" cap="none" spc="0" normalizeH="0" baseline="0">
+          <a:defRPr b="0" baseline="0" cap="none" i="0" spc="0" strike="noStrike" sz="1800" u="none" kumimoji="0" normalizeH="0">
             <a:ln>
               <a:noFill/>
             </a:ln>
@@ -9932,7 +10033,7 @@
           <a:buFontTx/>
           <a:buNone/>
           <a:tabLst/>
-          <a:defRPr kumimoji="0" sz="1800" b="0" i="0" u="none" strike="noStrike" cap="none" spc="0" normalizeH="0" baseline="0">
+          <a:defRPr b="0" baseline="0" cap="none" i="0" spc="0" strike="noStrike" sz="1800" u="none" kumimoji="0" normalizeH="0">
             <a:ln>
               <a:noFill/>
             </a:ln>
@@ -9958,7 +10059,7 @@
           <a:buFontTx/>
           <a:buNone/>
           <a:tabLst/>
-          <a:defRPr kumimoji="0" sz="1800" b="0" i="0" u="none" strike="noStrike" cap="none" spc="0" normalizeH="0" baseline="0">
+          <a:defRPr b="0" baseline="0" cap="none" i="0" spc="0" strike="noStrike" sz="1800" u="none" kumimoji="0" normalizeH="0">
             <a:ln>
               <a:noFill/>
             </a:ln>
@@ -9971,15 +10072,9 @@
         </a:lvl9pPr>
       </a:lstStyle>
       <a:style>
-        <a:lnRef idx="0">
-          <a:scrgbClr r="0" g="0" b="0"/>
-        </a:lnRef>
-        <a:fillRef idx="0">
-          <a:scrgbClr r="0" g="0" b="0"/>
-        </a:fillRef>
-        <a:effectRef idx="0">
-          <a:scrgbClr r="0" g="0" b="0"/>
-        </a:effectRef>
+        <a:lnRef idx="0"/>
+        <a:fillRef idx="0"/>
+        <a:effectRef idx="0"/>
         <a:fontRef idx="none"/>
       </a:style>
     </a:spDef>
@@ -9994,15 +10089,15 @@
           <a:round/>
         </a:ln>
         <a:effectLst>
-          <a:outerShdw blurRad="38100" dist="20000" dir="5400000" rotWithShape="0">
+          <a:outerShdw sx="100000" sy="100000" kx="0" ky="0" algn="b" rotWithShape="0" blurRad="38100" dist="23000" dir="5400000">
             <a:srgbClr val="000000">
-              <a:alpha val="38000"/>
+              <a:alpha val="35000"/>
             </a:srgbClr>
           </a:outerShdw>
         </a:effectLst>
         <a:sp3d/>
       </a:spPr>
-      <a:bodyPr rot="0" spcFirstLastPara="1" vertOverflow="overflow" horzOverflow="overflow" vert="horz" wrap="square" lIns="91439" tIns="45719" rIns="91439" bIns="45719" numCol="1" spcCol="38100" rtlCol="0" anchor="t">
+      <a:bodyPr rot="0" spcFirstLastPara="1" vertOverflow="overflow" horzOverflow="overflow" vert="horz" wrap="square" lIns="91439" tIns="45719" rIns="91439" bIns="45719" numCol="1" spcCol="38100" rtlCol="0" anchor="t" upright="0">
         <a:noAutofit/>
       </a:bodyPr>
       <a:lstStyle>
@@ -10021,7 +10116,7 @@
           <a:buFontTx/>
           <a:buNone/>
           <a:tabLst/>
-          <a:defRPr kumimoji="0" sz="1800" b="0" i="0" u="none" strike="noStrike" cap="none" spc="0" normalizeH="0" baseline="0">
+          <a:defRPr b="0" baseline="0" cap="none" i="0" spc="0" strike="noStrike" sz="1800" u="none" kumimoji="0" normalizeH="0">
             <a:ln>
               <a:noFill/>
             </a:ln>
@@ -10047,7 +10142,7 @@
           <a:buFontTx/>
           <a:buNone/>
           <a:tabLst/>
-          <a:defRPr kumimoji="0" sz="1800" b="0" i="0" u="none" strike="noStrike" cap="none" spc="0" normalizeH="0" baseline="0">
+          <a:defRPr b="0" baseline="0" cap="none" i="0" spc="0" strike="noStrike" sz="1800" u="none" kumimoji="0" normalizeH="0">
             <a:ln>
               <a:noFill/>
             </a:ln>
@@ -10073,7 +10168,7 @@
           <a:buFontTx/>
           <a:buNone/>
           <a:tabLst/>
-          <a:defRPr kumimoji="0" sz="1800" b="0" i="0" u="none" strike="noStrike" cap="none" spc="0" normalizeH="0" baseline="0">
+          <a:defRPr b="0" baseline="0" cap="none" i="0" spc="0" strike="noStrike" sz="1800" u="none" kumimoji="0" normalizeH="0">
             <a:ln>
               <a:noFill/>
             </a:ln>
@@ -10099,7 +10194,7 @@
           <a:buFontTx/>
           <a:buNone/>
           <a:tabLst/>
-          <a:defRPr kumimoji="0" sz="1800" b="0" i="0" u="none" strike="noStrike" cap="none" spc="0" normalizeH="0" baseline="0">
+          <a:defRPr b="0" baseline="0" cap="none" i="0" spc="0" strike="noStrike" sz="1800" u="none" kumimoji="0" normalizeH="0">
             <a:ln>
               <a:noFill/>
             </a:ln>
@@ -10125,7 +10220,7 @@
           <a:buFontTx/>
           <a:buNone/>
           <a:tabLst/>
-          <a:defRPr kumimoji="0" sz="1800" b="0" i="0" u="none" strike="noStrike" cap="none" spc="0" normalizeH="0" baseline="0">
+          <a:defRPr b="0" baseline="0" cap="none" i="0" spc="0" strike="noStrike" sz="1800" u="none" kumimoji="0" normalizeH="0">
             <a:ln>
               <a:noFill/>
             </a:ln>
@@ -10151,7 +10246,7 @@
           <a:buFontTx/>
           <a:buNone/>
           <a:tabLst/>
-          <a:defRPr kumimoji="0" sz="1800" b="0" i="0" u="none" strike="noStrike" cap="none" spc="0" normalizeH="0" baseline="0">
+          <a:defRPr b="0" baseline="0" cap="none" i="0" spc="0" strike="noStrike" sz="1800" u="none" kumimoji="0" normalizeH="0">
             <a:ln>
               <a:noFill/>
             </a:ln>
@@ -10177,7 +10272,7 @@
           <a:buFontTx/>
           <a:buNone/>
           <a:tabLst/>
-          <a:defRPr kumimoji="0" sz="1800" b="0" i="0" u="none" strike="noStrike" cap="none" spc="0" normalizeH="0" baseline="0">
+          <a:defRPr b="0" baseline="0" cap="none" i="0" spc="0" strike="noStrike" sz="1800" u="none" kumimoji="0" normalizeH="0">
             <a:ln>
               <a:noFill/>
             </a:ln>
@@ -10203,7 +10298,7 @@
           <a:buFontTx/>
           <a:buNone/>
           <a:tabLst/>
-          <a:defRPr kumimoji="0" sz="1800" b="0" i="0" u="none" strike="noStrike" cap="none" spc="0" normalizeH="0" baseline="0">
+          <a:defRPr b="0" baseline="0" cap="none" i="0" spc="0" strike="noStrike" sz="1800" u="none" kumimoji="0" normalizeH="0">
             <a:ln>
               <a:noFill/>
             </a:ln>
@@ -10229,7 +10324,7 @@
           <a:buFontTx/>
           <a:buNone/>
           <a:tabLst/>
-          <a:defRPr kumimoji="0" sz="1800" b="0" i="0" u="none" strike="noStrike" cap="none" spc="0" normalizeH="0" baseline="0">
+          <a:defRPr b="0" baseline="0" cap="none" i="0" spc="0" strike="noStrike" sz="1800" u="none" kumimoji="0" normalizeH="0">
             <a:ln>
               <a:noFill/>
             </a:ln>
@@ -10255,7 +10350,7 @@
           <a:buFontTx/>
           <a:buNone/>
           <a:tabLst/>
-          <a:defRPr kumimoji="0" sz="1800" b="0" i="0" u="none" strike="noStrike" cap="none" spc="0" normalizeH="0" baseline="0">
+          <a:defRPr b="0" baseline="0" cap="none" i="0" spc="0" strike="noStrike" sz="1800" u="none" kumimoji="0" normalizeH="0">
             <a:ln>
               <a:noFill/>
             </a:ln>
@@ -10268,15 +10363,9 @@
         </a:lvl9pPr>
       </a:lstStyle>
       <a:style>
-        <a:lnRef idx="0">
-          <a:scrgbClr r="0" g="0" b="0"/>
-        </a:lnRef>
-        <a:fillRef idx="0">
-          <a:scrgbClr r="0" g="0" b="0"/>
-        </a:fillRef>
-        <a:effectRef idx="0">
-          <a:scrgbClr r="0" g="0" b="0"/>
-        </a:effectRef>
+        <a:lnRef idx="0"/>
+        <a:fillRef idx="0"/>
+        <a:effectRef idx="0"/>
         <a:fontRef idx="none"/>
       </a:style>
     </a:lnDef>
@@ -10290,7 +10379,7 @@
         <a:effectLst/>
         <a:sp3d/>
       </a:spPr>
-      <a:bodyPr rot="0" spcFirstLastPara="1" vertOverflow="overflow" horzOverflow="overflow" vert="horz" wrap="square" lIns="45719" tIns="45719" rIns="45719" bIns="45719" numCol="1" spcCol="38100" rtlCol="0" anchor="t">
+      <a:bodyPr rot="0" spcFirstLastPara="1" vertOverflow="overflow" horzOverflow="overflow" vert="horz" wrap="square" lIns="45718" tIns="45718" rIns="45718" bIns="45718" numCol="1" spcCol="38100" rtlCol="0" anchor="t" upright="0">
         <a:spAutoFit/>
       </a:bodyPr>
       <a:lstStyle>
@@ -10309,7 +10398,7 @@
           <a:buFontTx/>
           <a:buNone/>
           <a:tabLst/>
-          <a:defRPr kumimoji="0" sz="1800" b="0" i="0" u="none" strike="noStrike" cap="none" spc="0" normalizeH="0" baseline="0">
+          <a:defRPr b="0" baseline="0" cap="none" i="0" spc="0" strike="noStrike" sz="1800" u="none" kumimoji="0" normalizeH="0">
             <a:ln>
               <a:noFill/>
             </a:ln>
@@ -10318,10 +10407,10 @@
             </a:solidFill>
             <a:effectLst/>
             <a:uFillTx/>
-            <a:latin typeface="Calibri"/>
-            <a:ea typeface="Calibri"/>
-            <a:cs typeface="Calibri"/>
-            <a:sym typeface="Calibri"/>
+            <a:latin typeface="+mn-lt"/>
+            <a:ea typeface="+mn-ea"/>
+            <a:cs typeface="+mn-cs"/>
+            <a:sym typeface="Helvetica Neue"/>
           </a:defRPr>
         </a:defPPr>
         <a:lvl1pPr marL="0" marR="0" indent="0" algn="l" defTabSz="914400" rtl="0" fontAlgn="auto" latinLnBrk="1" hangingPunct="0">
@@ -10339,7 +10428,7 @@
           <a:buFontTx/>
           <a:buNone/>
           <a:tabLst/>
-          <a:defRPr kumimoji="0" sz="1800" b="0" i="0" u="none" strike="noStrike" cap="none" spc="0" normalizeH="0" baseline="0">
+          <a:defRPr b="0" baseline="0" cap="none" i="0" spc="0" strike="noStrike" sz="1800" u="none" kumimoji="0" normalizeH="0">
             <a:ln>
               <a:noFill/>
             </a:ln>
@@ -10365,7 +10454,7 @@
           <a:buFontTx/>
           <a:buNone/>
           <a:tabLst/>
-          <a:defRPr kumimoji="0" sz="1800" b="0" i="0" u="none" strike="noStrike" cap="none" spc="0" normalizeH="0" baseline="0">
+          <a:defRPr b="0" baseline="0" cap="none" i="0" spc="0" strike="noStrike" sz="1800" u="none" kumimoji="0" normalizeH="0">
             <a:ln>
               <a:noFill/>
             </a:ln>
@@ -10391,7 +10480,7 @@
           <a:buFontTx/>
           <a:buNone/>
           <a:tabLst/>
-          <a:defRPr kumimoji="0" sz="1800" b="0" i="0" u="none" strike="noStrike" cap="none" spc="0" normalizeH="0" baseline="0">
+          <a:defRPr b="0" baseline="0" cap="none" i="0" spc="0" strike="noStrike" sz="1800" u="none" kumimoji="0" normalizeH="0">
             <a:ln>
               <a:noFill/>
             </a:ln>
@@ -10417,7 +10506,7 @@
           <a:buFontTx/>
           <a:buNone/>
           <a:tabLst/>
-          <a:defRPr kumimoji="0" sz="1800" b="0" i="0" u="none" strike="noStrike" cap="none" spc="0" normalizeH="0" baseline="0">
+          <a:defRPr b="0" baseline="0" cap="none" i="0" spc="0" strike="noStrike" sz="1800" u="none" kumimoji="0" normalizeH="0">
             <a:ln>
               <a:noFill/>
             </a:ln>
@@ -10443,7 +10532,7 @@
           <a:buFontTx/>
           <a:buNone/>
           <a:tabLst/>
-          <a:defRPr kumimoji="0" sz="1800" b="0" i="0" u="none" strike="noStrike" cap="none" spc="0" normalizeH="0" baseline="0">
+          <a:defRPr b="0" baseline="0" cap="none" i="0" spc="0" strike="noStrike" sz="1800" u="none" kumimoji="0" normalizeH="0">
             <a:ln>
               <a:noFill/>
             </a:ln>
@@ -10469,7 +10558,7 @@
           <a:buFontTx/>
           <a:buNone/>
           <a:tabLst/>
-          <a:defRPr kumimoji="0" sz="1800" b="0" i="0" u="none" strike="noStrike" cap="none" spc="0" normalizeH="0" baseline="0">
+          <a:defRPr b="0" baseline="0" cap="none" i="0" spc="0" strike="noStrike" sz="1800" u="none" kumimoji="0" normalizeH="0">
             <a:ln>
               <a:noFill/>
             </a:ln>
@@ -10495,7 +10584,7 @@
           <a:buFontTx/>
           <a:buNone/>
           <a:tabLst/>
-          <a:defRPr kumimoji="0" sz="1800" b="0" i="0" u="none" strike="noStrike" cap="none" spc="0" normalizeH="0" baseline="0">
+          <a:defRPr b="0" baseline="0" cap="none" i="0" spc="0" strike="noStrike" sz="1800" u="none" kumimoji="0" normalizeH="0">
             <a:ln>
               <a:noFill/>
             </a:ln>
@@ -10521,7 +10610,7 @@
           <a:buFontTx/>
           <a:buNone/>
           <a:tabLst/>
-          <a:defRPr kumimoji="0" sz="1800" b="0" i="0" u="none" strike="noStrike" cap="none" spc="0" normalizeH="0" baseline="0">
+          <a:defRPr b="0" baseline="0" cap="none" i="0" spc="0" strike="noStrike" sz="1800" u="none" kumimoji="0" normalizeH="0">
             <a:ln>
               <a:noFill/>
             </a:ln>
@@ -10547,7 +10636,7 @@
           <a:buFontTx/>
           <a:buNone/>
           <a:tabLst/>
-          <a:defRPr kumimoji="0" sz="1800" b="0" i="0" u="none" strike="noStrike" cap="none" spc="0" normalizeH="0" baseline="0">
+          <a:defRPr b="0" baseline="0" cap="none" i="0" spc="0" strike="noStrike" sz="1800" u="none" kumimoji="0" normalizeH="0">
             <a:ln>
               <a:noFill/>
             </a:ln>
@@ -10560,19 +10649,12 @@
         </a:lvl9pPr>
       </a:lstStyle>
       <a:style>
-        <a:lnRef idx="0">
-          <a:scrgbClr r="0" g="0" b="0"/>
-        </a:lnRef>
-        <a:fillRef idx="0">
-          <a:scrgbClr r="0" g="0" b="0"/>
-        </a:fillRef>
-        <a:effectRef idx="0">
-          <a:scrgbClr r="0" g="0" b="0"/>
-        </a:effectRef>
+        <a:lnRef idx="0"/>
+        <a:fillRef idx="0"/>
+        <a:effectRef idx="0"/>
         <a:fontRef idx="none"/>
       </a:style>
     </a:txDef>
   </a:objectDefaults>
-  <a:extraClrSchemeLst/>
 </a:theme>
 </file>
--- a/Pronóstico de Demanda Eléctrica GBA.pptx
+++ b/Pronóstico de Demanda Eléctrica GBA.pptx
@@ -500,7 +500,7 @@
         <p:spPr>
           <a:xfrm>
             <a:off x="6573097" y="3683134"/>
-            <a:ext cx="6934346" cy="1217242"/>
+            <a:ext cx="6934346" cy="1217243"/>
           </a:xfrm>
           <a:prstGeom prst="rect">
             <a:avLst/>
@@ -538,7 +538,7 @@
         <p:spPr>
           <a:xfrm>
             <a:off x="6466985" y="3362850"/>
-            <a:ext cx="6955792" cy="1478281"/>
+            <a:ext cx="6955792" cy="1478282"/>
           </a:xfrm>
           <a:prstGeom prst="rect">
             <a:avLst/>
@@ -566,7 +566,7 @@
         <p:spPr>
           <a:xfrm>
             <a:off x="3015613" y="6333235"/>
-            <a:ext cx="14072873" cy="2827339"/>
+            <a:ext cx="14072873" cy="2827340"/>
           </a:xfrm>
           <a:prstGeom prst="rect">
             <a:avLst/>
@@ -690,7 +690,7 @@
         <p:spPr>
           <a:xfrm>
             <a:off x="10366175" y="3376860"/>
-            <a:ext cx="8458201" cy="5505452"/>
+            <a:ext cx="8458201" cy="5505453"/>
           </a:xfrm>
           <a:prstGeom prst="rect">
             <a:avLst/>
@@ -814,7 +814,7 @@
         <p:spPr>
           <a:xfrm>
             <a:off x="10366175" y="3376860"/>
-            <a:ext cx="8458201" cy="5505452"/>
+            <a:ext cx="8458201" cy="5505453"/>
           </a:xfrm>
           <a:prstGeom prst="rect">
             <a:avLst/>
@@ -1161,7 +1161,7 @@
         <p:spPr>
           <a:xfrm>
             <a:off x="912419" y="535057"/>
-            <a:ext cx="10010769" cy="1026796"/>
+            <a:ext cx="10010769" cy="1026797"/>
           </a:xfrm>
           <a:prstGeom prst="rect">
             <a:avLst/>
@@ -2050,8 +2050,8 @@
         </p:nvSpPr>
         <p:spPr>
           <a:xfrm>
-            <a:off x="15706" y="2874258"/>
-            <a:ext cx="20080540" cy="871704"/>
+            <a:off x="15705" y="2874258"/>
+            <a:ext cx="20080542" cy="871704"/>
           </a:xfrm>
           <a:prstGeom prst="rect">
             <a:avLst/>
@@ -2088,8 +2088,8 @@
         </p:nvSpPr>
         <p:spPr>
           <a:xfrm>
-            <a:off x="1900151" y="2548083"/>
-            <a:ext cx="16188692" cy="1419863"/>
+            <a:off x="1900150" y="2548083"/>
+            <a:ext cx="16188694" cy="1419864"/>
           </a:xfrm>
           <a:prstGeom prst="rect">
             <a:avLst/>
@@ -2099,7 +2099,7 @@
           <a:bodyPr/>
           <a:lstStyle/>
           <a:p>
-            <a:pPr indent="11428" defTabSz="822958">
+            <a:pPr indent="11427" defTabSz="822958">
               <a:defRPr spc="-100" sz="8100">
                 <a:latin typeface="Avenir Book"/>
                 <a:ea typeface="Avenir Book"/>
@@ -2125,7 +2125,7 @@
             <a:r>
               <a:rPr spc="0">
                 <a:solidFill>
-                  <a:srgbClr val="DFFF9A"/>
+                  <a:srgbClr val="D783FF"/>
                 </a:solidFill>
               </a:rPr>
               <a:t>Demanda</a:t>
@@ -2133,7 +2133,7 @@
             <a:r>
               <a:rPr spc="100">
                 <a:solidFill>
-                  <a:srgbClr val="DFFF9A"/>
+                  <a:srgbClr val="D783FF"/>
                 </a:solidFill>
               </a:rPr>
               <a:t> </a:t>
@@ -2141,7 +2141,7 @@
             <a:r>
               <a:rPr spc="0">
                 <a:solidFill>
-                  <a:srgbClr val="DFFF9A"/>
+                  <a:srgbClr val="D783FF"/>
                 </a:solidFill>
               </a:rPr>
               <a:t>Eléctrica</a:t>
@@ -2157,8 +2157,8 @@
         </p:nvSpPr>
         <p:spPr>
           <a:xfrm>
-            <a:off x="15706" y="4256413"/>
-            <a:ext cx="20080540" cy="824585"/>
+            <a:off x="15705" y="4256413"/>
+            <a:ext cx="20080542" cy="824586"/>
           </a:xfrm>
           <a:prstGeom prst="rect">
             <a:avLst/>
@@ -2244,8 +2244,8 @@
         </p:nvSpPr>
         <p:spPr>
           <a:xfrm>
-            <a:off x="15706" y="5748516"/>
-            <a:ext cx="20080540" cy="337688"/>
+            <a:off x="15705" y="5748516"/>
+            <a:ext cx="20080542" cy="337689"/>
           </a:xfrm>
           <a:prstGeom prst="rect">
             <a:avLst/>
@@ -2281,7 +2281,7 @@
         <p:spPr>
           <a:xfrm>
             <a:off x="5428665" y="5667921"/>
-            <a:ext cx="9222742" cy="3797301"/>
+            <a:ext cx="9222742" cy="3378201"/>
           </a:xfrm>
           <a:prstGeom prst="rect">
             <a:avLst/>
@@ -2548,8 +2548,8 @@
         </p:blipFill>
         <p:spPr>
           <a:xfrm>
-            <a:off x="11557337" y="7593373"/>
-            <a:ext cx="3427607" cy="1289285"/>
+            <a:off x="11557337" y="7593372"/>
+            <a:ext cx="3427608" cy="1289286"/>
           </a:xfrm>
           <a:prstGeom prst="rect">
             <a:avLst/>
@@ -2600,8 +2600,8 @@
         </p:nvSpPr>
         <p:spPr>
           <a:xfrm>
-            <a:off x="15706" y="769608"/>
-            <a:ext cx="20080540" cy="636109"/>
+            <a:off x="15705" y="769608"/>
+            <a:ext cx="20080542" cy="636110"/>
           </a:xfrm>
           <a:prstGeom prst="rect">
             <a:avLst/>
@@ -2638,8 +2638,8 @@
         </p:nvSpPr>
         <p:spPr>
           <a:xfrm>
-            <a:off x="932197" y="551417"/>
-            <a:ext cx="8392160" cy="1007113"/>
+            <a:off x="932197" y="551416"/>
+            <a:ext cx="8392160" cy="1007115"/>
           </a:xfrm>
           <a:prstGeom prst="rect">
             <a:avLst/>
@@ -2649,7 +2649,7 @@
           <a:bodyPr/>
           <a:lstStyle/>
           <a:p>
-            <a:pPr indent="11557" defTabSz="832103">
+            <a:pPr indent="11557" defTabSz="832102">
               <a:defRPr spc="-200" sz="5800">
                 <a:latin typeface="Avenir Book"/>
                 <a:ea typeface="Avenir Book"/>
@@ -2667,7 +2667,7 @@
             <a:r>
               <a:rPr spc="-100">
                 <a:solidFill>
-                  <a:srgbClr val="DBFFA1"/>
+                  <a:srgbClr val="D783FF"/>
                 </a:solidFill>
               </a:rPr>
               <a:t>Monte</a:t>
@@ -2675,7 +2675,7 @@
             <a:r>
               <a:rPr spc="-500">
                 <a:solidFill>
-                  <a:srgbClr val="DBFFA1"/>
+                  <a:srgbClr val="D783FF"/>
                 </a:solidFill>
               </a:rPr>
               <a:t> </a:t>
@@ -2683,7 +2683,7 @@
             <a:r>
               <a:rPr spc="-100">
                 <a:solidFill>
-                  <a:srgbClr val="DFFF97"/>
+                  <a:srgbClr val="D783FF"/>
                 </a:solidFill>
               </a:rPr>
               <a:t>Carlo</a:t>
@@ -2700,7 +2700,7 @@
         <p:spPr>
           <a:xfrm>
             <a:off x="10930983" y="2561464"/>
-            <a:ext cx="8458202" cy="4832550"/>
+            <a:ext cx="8458203" cy="4832549"/>
           </a:xfrm>
           <a:prstGeom prst="rect">
             <a:avLst/>
@@ -2858,7 +2858,7 @@
             </a:r>
           </a:p>
           <a:p>
-            <a:pPr marL="539648" indent="-227227">
+            <a:pPr marL="539648" indent="-227226">
               <a:lnSpc>
                 <a:spcPct val="200000"/>
               </a:lnSpc>
@@ -2998,7 +2998,7 @@
               <a:t> </a:t>
             </a:r>
             <a:r>
-              <a:rPr b="0" spc="-234"/>
+              <a:rPr b="0" spc="-233"/>
               <a:t>El</a:t>
             </a:r>
             <a:r>
@@ -3070,8 +3070,8 @@
         </p:blipFill>
         <p:spPr>
           <a:xfrm>
-            <a:off x="692352" y="2225794"/>
-            <a:ext cx="10130654" cy="7965983"/>
+            <a:off x="692352" y="2225793"/>
+            <a:ext cx="10130654" cy="7965984"/>
           </a:xfrm>
           <a:prstGeom prst="rect">
             <a:avLst/>
@@ -3125,7 +3125,7 @@
         <p:spPr>
           <a:xfrm>
             <a:off x="6466985" y="3362850"/>
-            <a:ext cx="6955792" cy="1478281"/>
+            <a:ext cx="6955792" cy="1478282"/>
           </a:xfrm>
           <a:prstGeom prst="rect">
             <a:avLst/>
@@ -3158,7 +3158,7 @@
         <p:spPr>
           <a:xfrm>
             <a:off x="6109761" y="5324445"/>
-            <a:ext cx="7892431" cy="306276"/>
+            <a:ext cx="7892431" cy="306277"/>
           </a:xfrm>
           <a:prstGeom prst="rect">
             <a:avLst/>
@@ -3399,8 +3399,8 @@
         </p:nvSpPr>
         <p:spPr>
           <a:xfrm>
-            <a:off x="15706" y="816729"/>
-            <a:ext cx="20080540" cy="777465"/>
+            <a:off x="15705" y="816729"/>
+            <a:ext cx="20080542" cy="777466"/>
           </a:xfrm>
           <a:prstGeom prst="rect">
             <a:avLst/>
@@ -3437,8 +3437,8 @@
         </p:nvSpPr>
         <p:spPr>
           <a:xfrm>
-            <a:off x="912418" y="535057"/>
-            <a:ext cx="10010769" cy="1026796"/>
+            <a:off x="912418" y="535056"/>
+            <a:ext cx="10010769" cy="1026798"/>
           </a:xfrm>
           <a:prstGeom prst="rect">
             <a:avLst/>
@@ -3448,7 +3448,7 @@
           <a:bodyPr/>
           <a:lstStyle/>
           <a:p>
-            <a:pPr indent="12267" defTabSz="841247">
+            <a:pPr indent="12266" defTabSz="841247">
               <a:defRPr spc="-100" sz="5800">
                 <a:latin typeface="Avenir Book"/>
                 <a:ea typeface="Avenir Book"/>
@@ -3474,7 +3474,7 @@
             <a:r>
               <a:rPr spc="-200">
                 <a:solidFill>
-                  <a:srgbClr val="DDFF9A"/>
+                  <a:srgbClr val="D783FF"/>
                 </a:solidFill>
               </a:rPr>
               <a:t>Preprocesamiento</a:t>
@@ -3491,7 +3491,7 @@
         <p:spPr>
           <a:xfrm>
             <a:off x="1478599" y="2537281"/>
-            <a:ext cx="7311392" cy="5083150"/>
+            <a:ext cx="7311391" cy="5083150"/>
           </a:xfrm>
           <a:prstGeom prst="rect">
             <a:avLst/>
@@ -4136,8 +4136,8 @@
         </p:nvSpPr>
         <p:spPr>
           <a:xfrm>
-            <a:off x="15706" y="769608"/>
-            <a:ext cx="20080540" cy="636109"/>
+            <a:off x="15705" y="769608"/>
+            <a:ext cx="20080542" cy="636110"/>
           </a:xfrm>
           <a:prstGeom prst="rect">
             <a:avLst/>
@@ -4174,8 +4174,8 @@
         </p:nvSpPr>
         <p:spPr>
           <a:xfrm>
-            <a:off x="912418" y="535057"/>
-            <a:ext cx="10010769" cy="1026796"/>
+            <a:off x="912418" y="535056"/>
+            <a:ext cx="10010769" cy="1026798"/>
           </a:xfrm>
           <a:prstGeom prst="rect">
             <a:avLst/>
@@ -4185,7 +4185,7 @@
           <a:bodyPr/>
           <a:lstStyle/>
           <a:p>
-            <a:pPr indent="12267" defTabSz="841247">
+            <a:pPr indent="12266" defTabSz="841247">
               <a:defRPr spc="-200" sz="5800">
                 <a:latin typeface="Avenir Book"/>
                 <a:ea typeface="Avenir Book"/>
@@ -4207,7 +4207,7 @@
             <a:r>
               <a:rPr>
                 <a:solidFill>
-                  <a:srgbClr val="DFFF87"/>
+                  <a:srgbClr val="D783FF"/>
                 </a:solidFill>
               </a:rPr>
               <a:t>Anomalías</a:t>
@@ -4223,8 +4223,8 @@
         </p:nvSpPr>
         <p:spPr>
           <a:xfrm>
-            <a:off x="11694237" y="2750991"/>
-            <a:ext cx="8143877" cy="4612743"/>
+            <a:off x="11694237" y="2750990"/>
+            <a:ext cx="8143878" cy="4612743"/>
           </a:xfrm>
           <a:prstGeom prst="rect">
             <a:avLst/>
@@ -4663,8 +4663,8 @@
         </p:blipFill>
         <p:spPr>
           <a:xfrm>
-            <a:off x="569241" y="2606585"/>
-            <a:ext cx="10697122" cy="7755702"/>
+            <a:off x="569240" y="2606585"/>
+            <a:ext cx="10697124" cy="7755702"/>
           </a:xfrm>
           <a:prstGeom prst="rect">
             <a:avLst/>
@@ -4715,8 +4715,8 @@
         </p:nvSpPr>
         <p:spPr>
           <a:xfrm>
-            <a:off x="15706" y="769610"/>
-            <a:ext cx="20080540" cy="824582"/>
+            <a:off x="15705" y="769610"/>
+            <a:ext cx="20080542" cy="824582"/>
           </a:xfrm>
           <a:prstGeom prst="rect">
             <a:avLst/>
@@ -4753,8 +4753,8 @@
         </p:nvSpPr>
         <p:spPr>
           <a:xfrm>
-            <a:off x="912418" y="535057"/>
-            <a:ext cx="10010769" cy="1026796"/>
+            <a:off x="912418" y="535056"/>
+            <a:ext cx="10010769" cy="1026798"/>
           </a:xfrm>
           <a:prstGeom prst="rect">
             <a:avLst/>
@@ -4764,7 +4764,7 @@
           <a:bodyPr/>
           <a:lstStyle/>
           <a:p>
-            <a:pPr indent="11557" defTabSz="832103">
+            <a:pPr indent="11557" defTabSz="832102">
               <a:defRPr spc="-300" sz="5900">
                 <a:latin typeface="Avenir Book"/>
                 <a:ea typeface="Avenir Book"/>
@@ -4782,7 +4782,7 @@
             <a:r>
               <a:rPr>
                 <a:solidFill>
-                  <a:srgbClr val="DBFF9E"/>
+                  <a:srgbClr val="D783FF"/>
                 </a:solidFill>
               </a:rPr>
               <a:t>Estacional</a:t>
@@ -4799,7 +4799,7 @@
         <p:spPr>
           <a:xfrm>
             <a:off x="1316327" y="2018775"/>
-            <a:ext cx="1756412" cy="482601"/>
+            <a:ext cx="1756413" cy="482601"/>
           </a:xfrm>
           <a:prstGeom prst="rect">
             <a:avLst/>
@@ -4824,7 +4824,7 @@
               </a:spcBef>
               <a:defRPr spc="-10" sz="2800">
                 <a:solidFill>
-                  <a:srgbClr val="E4F997"/>
+                  <a:srgbClr val="D783FF"/>
                 </a:solidFill>
                 <a:latin typeface="Avenir Heavy"/>
                 <a:ea typeface="Avenir Heavy"/>
@@ -4849,8 +4849,8 @@
         </p:nvSpPr>
         <p:spPr>
           <a:xfrm>
-            <a:off x="1298656" y="2711298"/>
-            <a:ext cx="4751708" cy="1476909"/>
+            <a:off x="1298655" y="2711298"/>
+            <a:ext cx="4751710" cy="1476909"/>
           </a:xfrm>
           <a:prstGeom prst="rect">
             <a:avLst/>
@@ -4870,7 +4870,7 @@
           </a:bodyPr>
           <a:lstStyle/>
           <a:p>
-            <a:pPr marR="5080" indent="12064" algn="just">
+            <a:pPr marR="5080" indent="12063" algn="just">
               <a:lnSpc>
                 <a:spcPct val="126200"/>
               </a:lnSpc>
@@ -5115,7 +5115,7 @@
               </a:spcBef>
               <a:defRPr spc="100" sz="2800">
                 <a:solidFill>
-                  <a:srgbClr val="E9F6AB"/>
+                  <a:srgbClr val="D783FF"/>
                 </a:solidFill>
                 <a:latin typeface="Avenir Heavy"/>
                 <a:ea typeface="Avenir Heavy"/>
@@ -5140,8 +5140,8 @@
         </p:nvSpPr>
         <p:spPr>
           <a:xfrm>
-            <a:off x="1655357" y="5862823"/>
-            <a:ext cx="4546603" cy="1545972"/>
+            <a:off x="1655356" y="5862823"/>
+            <a:ext cx="4546604" cy="1545972"/>
           </a:xfrm>
           <a:prstGeom prst="rect">
             <a:avLst/>
@@ -5332,7 +5332,7 @@
         <p:spPr>
           <a:xfrm>
             <a:off x="1717173" y="8107298"/>
-            <a:ext cx="1392135" cy="482601"/>
+            <a:ext cx="1392136" cy="482601"/>
           </a:xfrm>
           <a:prstGeom prst="rect">
             <a:avLst/>
@@ -5357,7 +5357,7 @@
               </a:spcBef>
               <a:defRPr spc="-10" sz="2800">
                 <a:solidFill>
-                  <a:srgbClr val="E2FDB1"/>
+                  <a:srgbClr val="D783FF"/>
                 </a:solidFill>
                 <a:latin typeface="Avenir Heavy"/>
                 <a:ea typeface="Avenir Heavy"/>
@@ -5382,8 +5382,8 @@
         </p:nvSpPr>
         <p:spPr>
           <a:xfrm>
-            <a:off x="1710134" y="8802458"/>
-            <a:ext cx="4129975" cy="1478485"/>
+            <a:off x="1710133" y="8802458"/>
+            <a:ext cx="4129977" cy="1478484"/>
           </a:xfrm>
           <a:prstGeom prst="rect">
             <a:avLst/>
@@ -5403,7 +5403,7 @@
           </a:bodyPr>
           <a:lstStyle/>
           <a:p>
-            <a:pPr marR="5080" indent="12063">
+            <a:pPr marR="5080" indent="12062">
               <a:lnSpc>
                 <a:spcPct val="121200"/>
               </a:lnSpc>
@@ -5571,8 +5571,8 @@
         </p:nvSpPr>
         <p:spPr>
           <a:xfrm>
-            <a:off x="912417" y="1625075"/>
-            <a:ext cx="5524184" cy="2795699"/>
+            <a:off x="912417" y="1625074"/>
+            <a:ext cx="5524185" cy="2795701"/>
           </a:xfrm>
           <a:custGeom>
             <a:avLst/>
@@ -5736,7 +5736,7 @@
           </a:custGeom>
           <a:ln w="25400">
             <a:solidFill>
-              <a:srgbClr val="FFFC79"/>
+              <a:srgbClr val="FF40FF"/>
             </a:solidFill>
           </a:ln>
           <a:effectLst>
@@ -5771,7 +5771,7 @@
         <p:spPr>
           <a:xfrm>
             <a:off x="912417" y="4817243"/>
-            <a:ext cx="5524184" cy="2661020"/>
+            <a:ext cx="5524185" cy="2661020"/>
           </a:xfrm>
           <a:custGeom>
             <a:avLst/>
@@ -5935,7 +5935,7 @@
           </a:custGeom>
           <a:ln w="25400">
             <a:solidFill>
-              <a:srgbClr val="FFFC79"/>
+              <a:srgbClr val="FF40FF"/>
             </a:solidFill>
           </a:ln>
           <a:effectLst>
@@ -5970,7 +5970,7 @@
         <p:spPr>
           <a:xfrm>
             <a:off x="918768" y="7875871"/>
-            <a:ext cx="5511484" cy="2819794"/>
+            <a:ext cx="5511485" cy="2819795"/>
           </a:xfrm>
           <a:custGeom>
             <a:avLst/>
@@ -6134,7 +6134,7 @@
           </a:custGeom>
           <a:ln w="25400">
             <a:solidFill>
-              <a:srgbClr val="FFFC79"/>
+              <a:srgbClr val="FF40FF"/>
             </a:solidFill>
           </a:ln>
           <a:effectLst>
@@ -6178,8 +6178,8 @@
         </p:blipFill>
         <p:spPr>
           <a:xfrm>
-            <a:off x="7228655" y="1740311"/>
-            <a:ext cx="12094773" cy="8570757"/>
+            <a:off x="7228654" y="1740311"/>
+            <a:ext cx="12094775" cy="8570757"/>
           </a:xfrm>
           <a:prstGeom prst="rect">
             <a:avLst/>
@@ -6230,8 +6230,8 @@
         </p:nvSpPr>
         <p:spPr>
           <a:xfrm>
-            <a:off x="15706" y="769610"/>
-            <a:ext cx="20080540" cy="824582"/>
+            <a:off x="15705" y="769610"/>
+            <a:ext cx="20080542" cy="824582"/>
           </a:xfrm>
           <a:prstGeom prst="rect">
             <a:avLst/>
@@ -6268,8 +6268,8 @@
         </p:nvSpPr>
         <p:spPr>
           <a:xfrm>
-            <a:off x="912418" y="535057"/>
-            <a:ext cx="10010769" cy="1026796"/>
+            <a:off x="912418" y="535056"/>
+            <a:ext cx="10010769" cy="1026798"/>
           </a:xfrm>
           <a:prstGeom prst="rect">
             <a:avLst/>
@@ -6279,7 +6279,7 @@
           <a:bodyPr/>
           <a:lstStyle/>
           <a:p>
-            <a:pPr indent="11557" defTabSz="832103">
+            <a:pPr indent="11557" defTabSz="832102">
               <a:defRPr spc="-100" sz="5900">
                 <a:latin typeface="Avenir Book"/>
                 <a:ea typeface="Avenir Book"/>
@@ -6301,7 +6301,7 @@
             <a:r>
               <a:rPr spc="-200">
                 <a:solidFill>
-                  <a:srgbClr val="DFFDA3"/>
+                  <a:srgbClr val="D783FF"/>
                 </a:solidFill>
               </a:rPr>
               <a:t>Temperatura</a:t>
@@ -6997,8 +6997,8 @@
         </p:blipFill>
         <p:spPr>
           <a:xfrm>
-            <a:off x="8974071" y="2645377"/>
-            <a:ext cx="10569701" cy="6314367"/>
+            <a:off x="8974070" y="2645377"/>
+            <a:ext cx="10569703" cy="6314367"/>
           </a:xfrm>
           <a:prstGeom prst="rect">
             <a:avLst/>
@@ -7049,8 +7049,8 @@
         </p:nvSpPr>
         <p:spPr>
           <a:xfrm>
-            <a:off x="15706" y="2340242"/>
-            <a:ext cx="20080540" cy="636109"/>
+            <a:off x="15705" y="2340242"/>
+            <a:ext cx="20080542" cy="636110"/>
           </a:xfrm>
           <a:prstGeom prst="rect">
             <a:avLst/>
@@ -7088,7 +7088,7 @@
         <p:spPr>
           <a:xfrm>
             <a:off x="906721" y="2105690"/>
-            <a:ext cx="8140066" cy="1026796"/>
+            <a:ext cx="8140066" cy="1026797"/>
           </a:xfrm>
           <a:prstGeom prst="rect">
             <a:avLst/>
@@ -7098,7 +7098,7 @@
           <a:bodyPr/>
           <a:lstStyle/>
           <a:p>
-            <a:pPr indent="11557" defTabSz="832103">
+            <a:pPr indent="11557" defTabSz="832102">
               <a:defRPr sz="5900">
                 <a:latin typeface="Avenir Book"/>
                 <a:ea typeface="Avenir Book"/>
@@ -7123,7 +7123,7 @@
             <a:r>
               <a:rPr spc="-100">
                 <a:solidFill>
-                  <a:srgbClr val="D4F789"/>
+                  <a:srgbClr val="D783FF"/>
                 </a:solidFill>
               </a:rPr>
               <a:t>Modelos</a:t>
@@ -7139,10 +7139,10 @@
         </p:nvGrpSpPr>
         <p:grpSpPr>
           <a:xfrm>
-            <a:off x="15704" y="5497214"/>
-            <a:ext cx="20080547" cy="494751"/>
+            <a:off x="15703" y="5497214"/>
+            <a:ext cx="20080549" cy="494754"/>
             <a:chOff x="0" y="0"/>
-            <a:chExt cx="20080546" cy="494749"/>
+            <a:chExt cx="20080547" cy="494752"/>
           </a:xfrm>
         </p:grpSpPr>
         <p:pic>
@@ -7164,7 +7164,7 @@
           <p:spPr>
             <a:xfrm>
               <a:off x="6266826" y="15706"/>
-              <a:ext cx="5465805" cy="471192"/>
+              <a:ext cx="5465806" cy="471194"/>
             </a:xfrm>
             <a:prstGeom prst="rect">
               <a:avLst/>
@@ -7184,8 +7184,8 @@
           </p:nvSpPr>
           <p:spPr>
             <a:xfrm>
-              <a:off x="0" y="0"/>
-              <a:ext cx="20080547" cy="494751"/>
+              <a:off x="-1" y="-1"/>
+              <a:ext cx="20080549" cy="494754"/>
             </a:xfrm>
             <a:prstGeom prst="rect">
               <a:avLst/>
@@ -7225,8 +7225,8 @@
         </p:nvSpPr>
         <p:spPr>
           <a:xfrm>
-            <a:off x="15706" y="7020728"/>
-            <a:ext cx="20080540" cy="337688"/>
+            <a:off x="15705" y="7020728"/>
+            <a:ext cx="20080542" cy="337689"/>
           </a:xfrm>
           <a:prstGeom prst="rect">
             <a:avLst/>
@@ -7261,8 +7261,8 @@
         </p:nvSpPr>
         <p:spPr>
           <a:xfrm>
-            <a:off x="15706" y="7491917"/>
-            <a:ext cx="20080540" cy="337688"/>
+            <a:off x="15705" y="7491917"/>
+            <a:ext cx="20080542" cy="337689"/>
           </a:xfrm>
           <a:prstGeom prst="rect">
             <a:avLst/>
@@ -7593,8 +7593,8 @@
         </p:nvSpPr>
         <p:spPr>
           <a:xfrm>
-            <a:off x="15706" y="2340242"/>
-            <a:ext cx="20080540" cy="636109"/>
+            <a:off x="15705" y="2340242"/>
+            <a:ext cx="20080542" cy="636110"/>
           </a:xfrm>
           <a:prstGeom prst="rect">
             <a:avLst/>
@@ -7632,7 +7632,7 @@
         <p:spPr>
           <a:xfrm>
             <a:off x="975994" y="1179945"/>
-            <a:ext cx="8140066" cy="1026796"/>
+            <a:ext cx="8140066" cy="1026797"/>
           </a:xfrm>
           <a:prstGeom prst="rect">
             <a:avLst/>
@@ -7642,7 +7642,7 @@
           <a:bodyPr/>
           <a:lstStyle/>
           <a:p>
-            <a:pPr indent="11557" defTabSz="832103">
+            <a:pPr indent="11557" defTabSz="832102">
               <a:defRPr sz="5900">
                 <a:latin typeface="Avenir Book"/>
                 <a:ea typeface="Avenir Book"/>
@@ -7667,7 +7667,7 @@
             <a:r>
               <a:rPr spc="-100">
                 <a:solidFill>
-                  <a:srgbClr val="D4F789"/>
+                  <a:srgbClr val="D783FF"/>
                 </a:solidFill>
               </a:rPr>
               <a:t>Modelos</a:t>
@@ -7683,10 +7683,10 @@
         </p:nvGrpSpPr>
         <p:grpSpPr>
           <a:xfrm>
-            <a:off x="15704" y="5497214"/>
-            <a:ext cx="20080547" cy="494751"/>
+            <a:off x="15703" y="5497214"/>
+            <a:ext cx="20080549" cy="494754"/>
             <a:chOff x="0" y="0"/>
-            <a:chExt cx="20080546" cy="494749"/>
+            <a:chExt cx="20080547" cy="494752"/>
           </a:xfrm>
         </p:grpSpPr>
         <p:pic>
@@ -7708,7 +7708,7 @@
           <p:spPr>
             <a:xfrm>
               <a:off x="6266826" y="15706"/>
-              <a:ext cx="5465805" cy="471192"/>
+              <a:ext cx="5465806" cy="471194"/>
             </a:xfrm>
             <a:prstGeom prst="rect">
               <a:avLst/>
@@ -7728,8 +7728,8 @@
           </p:nvSpPr>
           <p:spPr>
             <a:xfrm>
-              <a:off x="0" y="0"/>
-              <a:ext cx="20080547" cy="494751"/>
+              <a:off x="-1" y="-1"/>
+              <a:ext cx="20080549" cy="494754"/>
             </a:xfrm>
             <a:prstGeom prst="rect">
               <a:avLst/>
@@ -7769,8 +7769,8 @@
         </p:nvSpPr>
         <p:spPr>
           <a:xfrm>
-            <a:off x="15706" y="7020728"/>
-            <a:ext cx="20080540" cy="337688"/>
+            <a:off x="15705" y="7020728"/>
+            <a:ext cx="20080542" cy="337689"/>
           </a:xfrm>
           <a:prstGeom prst="rect">
             <a:avLst/>
@@ -7805,8 +7805,8 @@
         </p:nvSpPr>
         <p:spPr>
           <a:xfrm>
-            <a:off x="15706" y="7491917"/>
-            <a:ext cx="20080540" cy="337688"/>
+            <a:off x="15705" y="7491917"/>
+            <a:ext cx="20080542" cy="337689"/>
           </a:xfrm>
           <a:prstGeom prst="rect">
             <a:avLst/>
@@ -7851,8 +7851,8 @@
         </p:blipFill>
         <p:spPr>
           <a:xfrm>
-            <a:off x="975993" y="2450584"/>
-            <a:ext cx="17366238" cy="8217416"/>
+            <a:off x="975993" y="2450583"/>
+            <a:ext cx="17366238" cy="8217418"/>
           </a:xfrm>
           <a:prstGeom prst="rect">
             <a:avLst/>
@@ -7903,8 +7903,8 @@
         </p:nvSpPr>
         <p:spPr>
           <a:xfrm>
-            <a:off x="15706" y="2340242"/>
-            <a:ext cx="20080540" cy="636109"/>
+            <a:off x="15705" y="2340242"/>
+            <a:ext cx="20080542" cy="636110"/>
           </a:xfrm>
           <a:prstGeom prst="rect">
             <a:avLst/>
@@ -7942,7 +7942,7 @@
         <p:spPr>
           <a:xfrm>
             <a:off x="975994" y="1179945"/>
-            <a:ext cx="8140066" cy="1026796"/>
+            <a:ext cx="8140066" cy="1026797"/>
           </a:xfrm>
           <a:prstGeom prst="rect">
             <a:avLst/>
@@ -7952,7 +7952,7 @@
           <a:bodyPr/>
           <a:lstStyle/>
           <a:p>
-            <a:pPr indent="11557" defTabSz="832103">
+            <a:pPr indent="11557" defTabSz="832102">
               <a:defRPr sz="5900">
                 <a:latin typeface="Avenir Book"/>
                 <a:ea typeface="Avenir Book"/>
@@ -7977,7 +7977,7 @@
             <a:r>
               <a:rPr spc="-100">
                 <a:solidFill>
-                  <a:srgbClr val="D4F789"/>
+                  <a:srgbClr val="D783FF"/>
                 </a:solidFill>
               </a:rPr>
               <a:t>Modelos</a:t>
@@ -7993,10 +7993,10 @@
         </p:nvGrpSpPr>
         <p:grpSpPr>
           <a:xfrm>
-            <a:off x="15704" y="5497214"/>
-            <a:ext cx="20080547" cy="494751"/>
+            <a:off x="15703" y="5497214"/>
+            <a:ext cx="20080549" cy="494754"/>
             <a:chOff x="0" y="0"/>
-            <a:chExt cx="20080546" cy="494749"/>
+            <a:chExt cx="20080547" cy="494752"/>
           </a:xfrm>
         </p:grpSpPr>
         <p:pic>
@@ -8018,7 +8018,7 @@
           <p:spPr>
             <a:xfrm>
               <a:off x="6266826" y="15706"/>
-              <a:ext cx="5465805" cy="471192"/>
+              <a:ext cx="5465806" cy="471194"/>
             </a:xfrm>
             <a:prstGeom prst="rect">
               <a:avLst/>
@@ -8038,8 +8038,8 @@
           </p:nvSpPr>
           <p:spPr>
             <a:xfrm>
-              <a:off x="0" y="0"/>
-              <a:ext cx="20080547" cy="494751"/>
+              <a:off x="-1" y="-1"/>
+              <a:ext cx="20080549" cy="494754"/>
             </a:xfrm>
             <a:prstGeom prst="rect">
               <a:avLst/>
@@ -8079,8 +8079,8 @@
         </p:nvSpPr>
         <p:spPr>
           <a:xfrm>
-            <a:off x="15706" y="7020728"/>
-            <a:ext cx="20080540" cy="337688"/>
+            <a:off x="15705" y="7020728"/>
+            <a:ext cx="20080542" cy="337689"/>
           </a:xfrm>
           <a:prstGeom prst="rect">
             <a:avLst/>
@@ -8115,8 +8115,8 @@
         </p:nvSpPr>
         <p:spPr>
           <a:xfrm>
-            <a:off x="15706" y="7491917"/>
-            <a:ext cx="20080540" cy="337688"/>
+            <a:off x="15705" y="7491917"/>
+            <a:ext cx="20080542" cy="337689"/>
           </a:xfrm>
           <a:prstGeom prst="rect">
             <a:avLst/>
@@ -8162,7 +8162,7 @@
         <p:spPr>
           <a:xfrm>
             <a:off x="776864" y="2340241"/>
-            <a:ext cx="18322589" cy="7782814"/>
+            <a:ext cx="18322589" cy="7782815"/>
           </a:xfrm>
           <a:prstGeom prst="rect">
             <a:avLst/>
@@ -8213,8 +8213,8 @@
         </p:nvSpPr>
         <p:spPr>
           <a:xfrm>
-            <a:off x="15706" y="2340242"/>
-            <a:ext cx="20080540" cy="636109"/>
+            <a:off x="15705" y="2340242"/>
+            <a:ext cx="20080542" cy="636110"/>
           </a:xfrm>
           <a:prstGeom prst="rect">
             <a:avLst/>
@@ -8252,7 +8252,7 @@
         <p:spPr>
           <a:xfrm>
             <a:off x="975994" y="1179945"/>
-            <a:ext cx="8140066" cy="1026796"/>
+            <a:ext cx="8140066" cy="1026797"/>
           </a:xfrm>
           <a:prstGeom prst="rect">
             <a:avLst/>
@@ -8262,7 +8262,7 @@
           <a:bodyPr/>
           <a:lstStyle/>
           <a:p>
-            <a:pPr indent="11557" defTabSz="832103">
+            <a:pPr indent="11557" defTabSz="832102">
               <a:defRPr sz="5900">
                 <a:latin typeface="Avenir Book"/>
                 <a:ea typeface="Avenir Book"/>
@@ -8287,7 +8287,7 @@
             <a:r>
               <a:rPr spc="-100">
                 <a:solidFill>
-                  <a:srgbClr val="D4F789"/>
+                  <a:srgbClr val="D783FF"/>
                 </a:solidFill>
               </a:rPr>
               <a:t>Modelos</a:t>
@@ -8303,10 +8303,10 @@
         </p:nvGrpSpPr>
         <p:grpSpPr>
           <a:xfrm>
-            <a:off x="15704" y="5497214"/>
-            <a:ext cx="20080547" cy="494751"/>
+            <a:off x="15703" y="5497214"/>
+            <a:ext cx="20080549" cy="494754"/>
             <a:chOff x="0" y="0"/>
-            <a:chExt cx="20080546" cy="494749"/>
+            <a:chExt cx="20080547" cy="494752"/>
           </a:xfrm>
         </p:grpSpPr>
         <p:pic>
@@ -8328,7 +8328,7 @@
           <p:spPr>
             <a:xfrm>
               <a:off x="6266826" y="15706"/>
-              <a:ext cx="5465805" cy="471192"/>
+              <a:ext cx="5465806" cy="471194"/>
             </a:xfrm>
             <a:prstGeom prst="rect">
               <a:avLst/>
@@ -8348,8 +8348,8 @@
           </p:nvSpPr>
           <p:spPr>
             <a:xfrm>
-              <a:off x="0" y="0"/>
-              <a:ext cx="20080547" cy="494751"/>
+              <a:off x="-1" y="-1"/>
+              <a:ext cx="20080549" cy="494754"/>
             </a:xfrm>
             <a:prstGeom prst="rect">
               <a:avLst/>
@@ -8389,8 +8389,8 @@
         </p:nvSpPr>
         <p:spPr>
           <a:xfrm>
-            <a:off x="15706" y="7020728"/>
-            <a:ext cx="20080540" cy="337688"/>
+            <a:off x="15705" y="7020728"/>
+            <a:ext cx="20080542" cy="337689"/>
           </a:xfrm>
           <a:prstGeom prst="rect">
             <a:avLst/>
@@ -8425,8 +8425,8 @@
         </p:nvSpPr>
         <p:spPr>
           <a:xfrm>
-            <a:off x="15706" y="7491917"/>
-            <a:ext cx="20080540" cy="337688"/>
+            <a:off x="15705" y="7491917"/>
+            <a:ext cx="20080542" cy="337689"/>
           </a:xfrm>
           <a:prstGeom prst="rect">
             <a:avLst/>

--- a/Pronóstico de Demanda Eléctrica GBA.pptx
+++ b/Pronóstico de Demanda Eléctrica GBA.pptx
@@ -500,7 +500,7 @@
         <p:spPr>
           <a:xfrm>
             <a:off x="6573097" y="3683134"/>
-            <a:ext cx="6934346" cy="1217243"/>
+            <a:ext cx="6934346" cy="1217244"/>
           </a:xfrm>
           <a:prstGeom prst="rect">
             <a:avLst/>
@@ -538,7 +538,7 @@
         <p:spPr>
           <a:xfrm>
             <a:off x="6466985" y="3362850"/>
-            <a:ext cx="6955792" cy="1478282"/>
+            <a:ext cx="6955792" cy="1478283"/>
           </a:xfrm>
           <a:prstGeom prst="rect">
             <a:avLst/>
@@ -566,7 +566,7 @@
         <p:spPr>
           <a:xfrm>
             <a:off x="3015613" y="6333235"/>
-            <a:ext cx="14072873" cy="2827340"/>
+            <a:ext cx="14072873" cy="2827341"/>
           </a:xfrm>
           <a:prstGeom prst="rect">
             <a:avLst/>
@@ -690,7 +690,7 @@
         <p:spPr>
           <a:xfrm>
             <a:off x="10366175" y="3376860"/>
-            <a:ext cx="8458201" cy="5505453"/>
+            <a:ext cx="8458201" cy="5505454"/>
           </a:xfrm>
           <a:prstGeom prst="rect">
             <a:avLst/>
@@ -814,7 +814,7 @@
         <p:spPr>
           <a:xfrm>
             <a:off x="10366175" y="3376860"/>
-            <a:ext cx="8458201" cy="5505453"/>
+            <a:ext cx="8458201" cy="5505454"/>
           </a:xfrm>
           <a:prstGeom prst="rect">
             <a:avLst/>
@@ -1161,7 +1161,7 @@
         <p:spPr>
           <a:xfrm>
             <a:off x="912419" y="535057"/>
-            <a:ext cx="10010769" cy="1026797"/>
+            <a:ext cx="10010769" cy="1026798"/>
           </a:xfrm>
           <a:prstGeom prst="rect">
             <a:avLst/>
@@ -2088,8 +2088,8 @@
         </p:nvSpPr>
         <p:spPr>
           <a:xfrm>
-            <a:off x="1900150" y="2548083"/>
-            <a:ext cx="16188694" cy="1419864"/>
+            <a:off x="1900149" y="2548083"/>
+            <a:ext cx="16188695" cy="1419865"/>
           </a:xfrm>
           <a:prstGeom prst="rect">
             <a:avLst/>
@@ -2099,7 +2099,7 @@
           <a:bodyPr/>
           <a:lstStyle/>
           <a:p>
-            <a:pPr indent="11427" defTabSz="822958">
+            <a:pPr indent="11426" defTabSz="822958">
               <a:defRPr spc="-100" sz="8100">
                 <a:latin typeface="Avenir Book"/>
                 <a:ea typeface="Avenir Book"/>
@@ -2158,7 +2158,7 @@
         <p:spPr>
           <a:xfrm>
             <a:off x="15705" y="4256413"/>
-            <a:ext cx="20080542" cy="824586"/>
+            <a:ext cx="20080542" cy="824587"/>
           </a:xfrm>
           <a:prstGeom prst="rect">
             <a:avLst/>
@@ -2245,7 +2245,7 @@
         <p:spPr>
           <a:xfrm>
             <a:off x="15705" y="5748516"/>
-            <a:ext cx="20080542" cy="337689"/>
+            <a:ext cx="20080542" cy="337690"/>
           </a:xfrm>
           <a:prstGeom prst="rect">
             <a:avLst/>
@@ -2549,7 +2549,7 @@
         <p:spPr>
           <a:xfrm>
             <a:off x="11557337" y="7593372"/>
-            <a:ext cx="3427608" cy="1289286"/>
+            <a:ext cx="3427609" cy="1289287"/>
           </a:xfrm>
           <a:prstGeom prst="rect">
             <a:avLst/>
@@ -2559,6 +2559,68 @@
           </a:ln>
         </p:spPr>
       </p:pic>
+      <p:sp>
+        <p:nvSpPr>
+          <p:cNvPr id="72" name="Link al repositorio"/>
+          <p:cNvSpPr txBox="1"/>
+          <p:nvPr/>
+        </p:nvSpPr>
+        <p:spPr>
+          <a:xfrm>
+            <a:off x="8396399" y="9743502"/>
+            <a:ext cx="2959223" cy="364436"/>
+          </a:xfrm>
+          <a:prstGeom prst="rect">
+            <a:avLst/>
+          </a:prstGeom>
+          <a:ln w="12700">
+            <a:miter lim="400000"/>
+          </a:ln>
+          <a:extLst>
+            <a:ext uri="{C572A759-6A51-4108-AA02-DFA0A04FC94B}">
+              <ma14:wrappingTextBoxFlag xmlns:ma14="http://schemas.microsoft.com/office/mac/drawingml/2011/main" val="1"/>
+            </a:ext>
+          </a:extLst>
+        </p:spPr>
+        <p:txBody>
+          <a:bodyPr lIns="45718" tIns="45718" rIns="45718" bIns="45718">
+            <a:spAutoFit/>
+          </a:bodyPr>
+          <a:lstStyle>
+            <a:lvl1pPr algn="ctr">
+              <a:defRPr u="sng">
+                <a:solidFill>
+                  <a:srgbClr val="FF40FF"/>
+                </a:solidFill>
+                <a:uFill>
+                  <a:solidFill>
+                    <a:srgbClr val="0000FF"/>
+                  </a:solidFill>
+                </a:uFill>
+                <a:hlinkClick r:id="rId3" invalidUrl="" action="" tgtFrame="" tooltip="" history="1" highlightClick="0" endSnd="0"/>
+              </a:defRPr>
+            </a:lvl1pPr>
+          </a:lstStyle>
+          <a:p>
+            <a:pPr>
+              <a:defRPr u="none">
+                <a:uFillTx/>
+              </a:defRPr>
+            </a:pPr>
+            <a:r>
+              <a:rPr u="sng">
+                <a:uFill>
+                  <a:solidFill>
+                    <a:srgbClr val="0000FF"/>
+                  </a:solidFill>
+                </a:uFill>
+                <a:hlinkClick r:id="rId3" invalidUrl="" action="" tgtFrame="" tooltip="" history="1" highlightClick="0" endSnd="0"/>
+              </a:rPr>
+              <a:t>Link al repositorio</a:t>
+            </a:r>
+          </a:p>
+        </p:txBody>
+      </p:sp>
     </p:spTree>
   </p:cSld>
   <p:clrMapOvr>
@@ -2594,14 +2656,14 @@
       </p:grpSpPr>
       <p:sp>
         <p:nvSpPr>
-          <p:cNvPr id="138" name="object 8"/>
+          <p:cNvPr id="139" name="object 8"/>
           <p:cNvSpPr/>
           <p:nvPr/>
         </p:nvSpPr>
         <p:spPr>
           <a:xfrm>
             <a:off x="15705" y="769608"/>
-            <a:ext cx="20080542" cy="636110"/>
+            <a:ext cx="20080542" cy="636111"/>
           </a:xfrm>
           <a:prstGeom prst="rect">
             <a:avLst/>
@@ -2630,7 +2692,7 @@
       </p:sp>
       <p:sp>
         <p:nvSpPr>
-          <p:cNvPr id="139" name="object 9"/>
+          <p:cNvPr id="140" name="object 9"/>
           <p:cNvSpPr txBox="1"/>
           <p:nvPr>
             <p:ph type="title"/>
@@ -2693,14 +2755,14 @@
       </p:sp>
       <p:sp>
         <p:nvSpPr>
-          <p:cNvPr id="140" name="object 10"/>
+          <p:cNvPr id="141" name="object 10"/>
           <p:cNvSpPr txBox="1"/>
           <p:nvPr/>
         </p:nvSpPr>
         <p:spPr>
           <a:xfrm>
             <a:off x="10930983" y="2561464"/>
-            <a:ext cx="8458203" cy="4832549"/>
+            <a:ext cx="8458204" cy="4832549"/>
           </a:xfrm>
           <a:prstGeom prst="rect">
             <a:avLst/>
@@ -3054,7 +3116,7 @@
       </p:sp>
       <p:pic>
         <p:nvPicPr>
-          <p:cNvPr id="141" name="Screenshot 2026-06-15 at 2.21.56 PM.png" descr="Screenshot 2026-06-15 at 2.21.56 PM.png"/>
+          <p:cNvPr id="142" name="Screenshot 2026-06-15 at 2.21.56 PM.png" descr="Screenshot 2026-06-15 at 2.21.56 PM.png"/>
           <p:cNvPicPr>
             <a:picLocks noChangeAspect="1"/>
           </p:cNvPicPr>
@@ -3071,7 +3133,7 @@
         <p:spPr>
           <a:xfrm>
             <a:off x="692352" y="2225793"/>
-            <a:ext cx="10130654" cy="7965984"/>
+            <a:ext cx="10130654" cy="7965985"/>
           </a:xfrm>
           <a:prstGeom prst="rect">
             <a:avLst/>
@@ -3116,7 +3178,7 @@
       </p:grpSpPr>
       <p:sp>
         <p:nvSpPr>
-          <p:cNvPr id="143" name="object 2"/>
+          <p:cNvPr id="144" name="object 2"/>
           <p:cNvSpPr txBox="1"/>
           <p:nvPr>
             <p:ph type="ctrTitle"/>
@@ -3125,7 +3187,7 @@
         <p:spPr>
           <a:xfrm>
             <a:off x="6466985" y="3362850"/>
-            <a:ext cx="6955792" cy="1478282"/>
+            <a:ext cx="6955792" cy="1478283"/>
           </a:xfrm>
           <a:prstGeom prst="rect">
             <a:avLst/>
@@ -3151,14 +3213,14 @@
       </p:sp>
       <p:sp>
         <p:nvSpPr>
-          <p:cNvPr id="144" name="object 3"/>
+          <p:cNvPr id="145" name="object 3"/>
           <p:cNvSpPr/>
           <p:nvPr/>
         </p:nvSpPr>
         <p:spPr>
           <a:xfrm>
             <a:off x="6109761" y="5324445"/>
-            <a:ext cx="7892431" cy="306277"/>
+            <a:ext cx="7892431" cy="306278"/>
           </a:xfrm>
           <a:prstGeom prst="rect">
             <a:avLst/>
@@ -3187,7 +3249,7 @@
       </p:sp>
       <p:sp>
         <p:nvSpPr>
-          <p:cNvPr id="145" name="object 4"/>
+          <p:cNvPr id="146" name="object 4"/>
           <p:cNvSpPr txBox="1"/>
           <p:nvPr/>
         </p:nvSpPr>
@@ -3393,14 +3455,14 @@
       </p:grpSpPr>
       <p:sp>
         <p:nvSpPr>
-          <p:cNvPr id="73" name="object 8"/>
+          <p:cNvPr id="74" name="object 8"/>
           <p:cNvSpPr/>
           <p:nvPr/>
         </p:nvSpPr>
         <p:spPr>
           <a:xfrm>
             <a:off x="15705" y="816729"/>
-            <a:ext cx="20080542" cy="777466"/>
+            <a:ext cx="20080542" cy="777467"/>
           </a:xfrm>
           <a:prstGeom prst="rect">
             <a:avLst/>
@@ -3429,7 +3491,7 @@
       </p:sp>
       <p:sp>
         <p:nvSpPr>
-          <p:cNvPr id="74" name="object 9"/>
+          <p:cNvPr id="75" name="object 9"/>
           <p:cNvSpPr txBox="1"/>
           <p:nvPr>
             <p:ph type="title"/>
@@ -3448,7 +3510,7 @@
           <a:bodyPr/>
           <a:lstStyle/>
           <a:p>
-            <a:pPr indent="12266" defTabSz="841247">
+            <a:pPr indent="12265" defTabSz="841247">
               <a:defRPr spc="-100" sz="5800">
                 <a:latin typeface="Avenir Book"/>
                 <a:ea typeface="Avenir Book"/>
@@ -3484,7 +3546,7 @@
       </p:sp>
       <p:sp>
         <p:nvSpPr>
-          <p:cNvPr id="75" name="object 16"/>
+          <p:cNvPr id="76" name="object 16"/>
           <p:cNvSpPr txBox="1"/>
           <p:nvPr/>
         </p:nvSpPr>
@@ -4068,7 +4130,7 @@
       </p:sp>
       <p:pic>
         <p:nvPicPr>
-          <p:cNvPr id="76" name="Screenshot 2026-06-15 at 2.20.27 PM.png" descr="Screenshot 2026-06-15 at 2.20.27 PM.png"/>
+          <p:cNvPr id="77" name="Screenshot 2026-06-15 at 2.20.27 PM.png" descr="Screenshot 2026-06-15 at 2.20.27 PM.png"/>
           <p:cNvPicPr>
             <a:picLocks noChangeAspect="1"/>
           </p:cNvPicPr>
@@ -4130,14 +4192,14 @@
       </p:grpSpPr>
       <p:sp>
         <p:nvSpPr>
-          <p:cNvPr id="78" name="object 8"/>
+          <p:cNvPr id="79" name="object 8"/>
           <p:cNvSpPr/>
           <p:nvPr/>
         </p:nvSpPr>
         <p:spPr>
           <a:xfrm>
             <a:off x="15705" y="769608"/>
-            <a:ext cx="20080542" cy="636110"/>
+            <a:ext cx="20080542" cy="636111"/>
           </a:xfrm>
           <a:prstGeom prst="rect">
             <a:avLst/>
@@ -4166,7 +4228,7 @@
       </p:sp>
       <p:sp>
         <p:nvSpPr>
-          <p:cNvPr id="79" name="object 9"/>
+          <p:cNvPr id="80" name="object 9"/>
           <p:cNvSpPr txBox="1"/>
           <p:nvPr>
             <p:ph type="title"/>
@@ -4185,7 +4247,7 @@
           <a:bodyPr/>
           <a:lstStyle/>
           <a:p>
-            <a:pPr indent="12266" defTabSz="841247">
+            <a:pPr indent="12265" defTabSz="841247">
               <a:defRPr spc="-200" sz="5800">
                 <a:latin typeface="Avenir Book"/>
                 <a:ea typeface="Avenir Book"/>
@@ -4217,14 +4279,14 @@
       </p:sp>
       <p:sp>
         <p:nvSpPr>
-          <p:cNvPr id="80" name="object 10"/>
+          <p:cNvPr id="81" name="object 10"/>
           <p:cNvSpPr txBox="1"/>
           <p:nvPr/>
         </p:nvSpPr>
         <p:spPr>
           <a:xfrm>
-            <a:off x="11694237" y="2750990"/>
-            <a:ext cx="8143878" cy="4612743"/>
+            <a:off x="11694237" y="2750989"/>
+            <a:ext cx="8143879" cy="4612743"/>
           </a:xfrm>
           <a:prstGeom prst="rect">
             <a:avLst/>
@@ -4647,7 +4709,7 @@
       </p:sp>
       <p:pic>
         <p:nvPicPr>
-          <p:cNvPr id="81" name="Screenshot 2026-06-15 at 2.20.05 PM.png" descr="Screenshot 2026-06-15 at 2.20.05 PM.png"/>
+          <p:cNvPr id="82" name="Screenshot 2026-06-15 at 2.20.05 PM.png" descr="Screenshot 2026-06-15 at 2.20.05 PM.png"/>
           <p:cNvPicPr>
             <a:picLocks noChangeAspect="1"/>
           </p:cNvPicPr>
@@ -4709,7 +4771,7 @@
       </p:grpSpPr>
       <p:sp>
         <p:nvSpPr>
-          <p:cNvPr id="83" name="object 2"/>
+          <p:cNvPr id="84" name="object 2"/>
           <p:cNvSpPr/>
           <p:nvPr/>
         </p:nvSpPr>
@@ -4745,7 +4807,7 @@
       </p:sp>
       <p:sp>
         <p:nvSpPr>
-          <p:cNvPr id="84" name="object 3"/>
+          <p:cNvPr id="85" name="object 3"/>
           <p:cNvSpPr txBox="1"/>
           <p:nvPr>
             <p:ph type="title"/>
@@ -4792,7 +4854,7 @@
       </p:sp>
       <p:sp>
         <p:nvSpPr>
-          <p:cNvPr id="85" name="object 5"/>
+          <p:cNvPr id="86" name="object 5"/>
           <p:cNvSpPr txBox="1"/>
           <p:nvPr/>
         </p:nvSpPr>
@@ -4843,14 +4905,14 @@
       </p:sp>
       <p:sp>
         <p:nvSpPr>
-          <p:cNvPr id="86" name="object 6"/>
+          <p:cNvPr id="87" name="object 6"/>
           <p:cNvSpPr txBox="1"/>
           <p:nvPr/>
         </p:nvSpPr>
         <p:spPr>
           <a:xfrm>
             <a:off x="1298655" y="2711298"/>
-            <a:ext cx="4751710" cy="1476909"/>
+            <a:ext cx="4751711" cy="1476909"/>
           </a:xfrm>
           <a:prstGeom prst="rect">
             <a:avLst/>
@@ -4870,7 +4932,7 @@
           </a:bodyPr>
           <a:lstStyle/>
           <a:p>
-            <a:pPr marR="5080" indent="12063" algn="just">
+            <a:pPr marR="5080" indent="12062" algn="just">
               <a:lnSpc>
                 <a:spcPct val="126200"/>
               </a:lnSpc>
@@ -5083,7 +5145,7 @@
       </p:sp>
       <p:sp>
         <p:nvSpPr>
-          <p:cNvPr id="87" name="object 7"/>
+          <p:cNvPr id="88" name="object 7"/>
           <p:cNvSpPr txBox="1"/>
           <p:nvPr/>
         </p:nvSpPr>
@@ -5134,14 +5196,14 @@
       </p:sp>
       <p:sp>
         <p:nvSpPr>
-          <p:cNvPr id="88" name="object 8"/>
+          <p:cNvPr id="89" name="object 8"/>
           <p:cNvSpPr txBox="1"/>
           <p:nvPr/>
         </p:nvSpPr>
         <p:spPr>
           <a:xfrm>
-            <a:off x="1655356" y="5862823"/>
-            <a:ext cx="4546604" cy="1545972"/>
+            <a:off x="1655355" y="5862823"/>
+            <a:ext cx="4546605" cy="1545972"/>
           </a:xfrm>
           <a:prstGeom prst="rect">
             <a:avLst/>
@@ -5325,14 +5387,14 @@
       </p:sp>
       <p:sp>
         <p:nvSpPr>
-          <p:cNvPr id="89" name="object 9"/>
+          <p:cNvPr id="90" name="object 9"/>
           <p:cNvSpPr txBox="1"/>
           <p:nvPr/>
         </p:nvSpPr>
         <p:spPr>
           <a:xfrm>
             <a:off x="1717173" y="8107298"/>
-            <a:ext cx="1392136" cy="482601"/>
+            <a:ext cx="1392137" cy="482601"/>
           </a:xfrm>
           <a:prstGeom prst="rect">
             <a:avLst/>
@@ -5376,14 +5438,14 @@
       </p:sp>
       <p:sp>
         <p:nvSpPr>
-          <p:cNvPr id="90" name="object 10"/>
+          <p:cNvPr id="91" name="object 10"/>
           <p:cNvSpPr txBox="1"/>
           <p:nvPr/>
         </p:nvSpPr>
         <p:spPr>
           <a:xfrm>
             <a:off x="1710133" y="8802458"/>
-            <a:ext cx="4129977" cy="1478484"/>
+            <a:ext cx="4129978" cy="1478484"/>
           </a:xfrm>
           <a:prstGeom prst="rect">
             <a:avLst/>
@@ -5403,7 +5465,7 @@
           </a:bodyPr>
           <a:lstStyle/>
           <a:p>
-            <a:pPr marR="5080" indent="12062">
+            <a:pPr marR="5080" indent="12061">
               <a:lnSpc>
                 <a:spcPct val="121200"/>
               </a:lnSpc>
@@ -5565,14 +5627,14 @@
       </p:sp>
       <p:sp>
         <p:nvSpPr>
-          <p:cNvPr id="91" name="Shape"/>
+          <p:cNvPr id="92" name="Shape"/>
           <p:cNvSpPr/>
           <p:nvPr/>
         </p:nvSpPr>
         <p:spPr>
           <a:xfrm>
-            <a:off x="912417" y="1625074"/>
-            <a:ext cx="5524185" cy="2795701"/>
+            <a:off x="912416" y="1625073"/>
+            <a:ext cx="5524186" cy="2795703"/>
           </a:xfrm>
           <a:custGeom>
             <a:avLst/>
@@ -5764,14 +5826,14 @@
       </p:sp>
       <p:sp>
         <p:nvSpPr>
-          <p:cNvPr id="92" name="Shape"/>
+          <p:cNvPr id="93" name="Shape"/>
           <p:cNvSpPr/>
           <p:nvPr/>
         </p:nvSpPr>
         <p:spPr>
           <a:xfrm>
-            <a:off x="912417" y="4817243"/>
-            <a:ext cx="5524185" cy="2661020"/>
+            <a:off x="912416" y="4817243"/>
+            <a:ext cx="5524186" cy="2661020"/>
           </a:xfrm>
           <a:custGeom>
             <a:avLst/>
@@ -5963,14 +6025,14 @@
       </p:sp>
       <p:sp>
         <p:nvSpPr>
-          <p:cNvPr id="93" name="Shape"/>
+          <p:cNvPr id="94" name="Shape"/>
           <p:cNvSpPr/>
           <p:nvPr/>
         </p:nvSpPr>
         <p:spPr>
           <a:xfrm>
-            <a:off x="918768" y="7875871"/>
-            <a:ext cx="5511485" cy="2819795"/>
+            <a:off x="918767" y="7875871"/>
+            <a:ext cx="5511486" cy="2819796"/>
           </a:xfrm>
           <a:custGeom>
             <a:avLst/>
@@ -6162,7 +6224,7 @@
       </p:sp>
       <p:pic>
         <p:nvPicPr>
-          <p:cNvPr id="94" name="Imagen 2" descr="Imagen 2"/>
+          <p:cNvPr id="95" name="Imagen 2" descr="Imagen 2"/>
           <p:cNvPicPr>
             <a:picLocks noChangeAspect="1"/>
           </p:cNvPicPr>
@@ -6179,7 +6241,7 @@
         <p:spPr>
           <a:xfrm>
             <a:off x="7228654" y="1740311"/>
-            <a:ext cx="12094775" cy="8570757"/>
+            <a:ext cx="12094776" cy="8570757"/>
           </a:xfrm>
           <a:prstGeom prst="rect">
             <a:avLst/>
@@ -6224,7 +6286,7 @@
       </p:grpSpPr>
       <p:sp>
         <p:nvSpPr>
-          <p:cNvPr id="96" name="object 8"/>
+          <p:cNvPr id="97" name="object 8"/>
           <p:cNvSpPr/>
           <p:nvPr/>
         </p:nvSpPr>
@@ -6260,7 +6322,7 @@
       </p:sp>
       <p:sp>
         <p:nvSpPr>
-          <p:cNvPr id="97" name="object 9"/>
+          <p:cNvPr id="98" name="object 9"/>
           <p:cNvSpPr txBox="1"/>
           <p:nvPr>
             <p:ph type="title"/>
@@ -6311,7 +6373,7 @@
       </p:sp>
       <p:sp>
         <p:nvSpPr>
-          <p:cNvPr id="98" name="object 10"/>
+          <p:cNvPr id="99" name="object 10"/>
           <p:cNvSpPr txBox="1"/>
           <p:nvPr/>
         </p:nvSpPr>
@@ -6981,7 +7043,7 @@
       </p:sp>
       <p:pic>
         <p:nvPicPr>
-          <p:cNvPr id="99" name="Screenshot 2026-06-15 at 2.21.07 PM.png" descr="Screenshot 2026-06-15 at 2.21.07 PM.png"/>
+          <p:cNvPr id="100" name="Screenshot 2026-06-15 at 2.21.07 PM.png" descr="Screenshot 2026-06-15 at 2.21.07 PM.png"/>
           <p:cNvPicPr>
             <a:picLocks noChangeAspect="1"/>
           </p:cNvPicPr>
@@ -7043,14 +7105,14 @@
       </p:grpSpPr>
       <p:sp>
         <p:nvSpPr>
-          <p:cNvPr id="101" name="object 2"/>
+          <p:cNvPr id="102" name="object 2"/>
           <p:cNvSpPr/>
           <p:nvPr/>
         </p:nvSpPr>
         <p:spPr>
           <a:xfrm>
             <a:off x="15705" y="2340242"/>
-            <a:ext cx="20080542" cy="636110"/>
+            <a:ext cx="20080542" cy="636111"/>
           </a:xfrm>
           <a:prstGeom prst="rect">
             <a:avLst/>
@@ -7079,7 +7141,7 @@
       </p:sp>
       <p:sp>
         <p:nvSpPr>
-          <p:cNvPr id="102" name="object 3"/>
+          <p:cNvPr id="103" name="object 3"/>
           <p:cNvSpPr txBox="1"/>
           <p:nvPr>
             <p:ph type="title"/>
@@ -7088,7 +7150,7 @@
         <p:spPr>
           <a:xfrm>
             <a:off x="906721" y="2105690"/>
-            <a:ext cx="8140066" cy="1026797"/>
+            <a:ext cx="8140066" cy="1026798"/>
           </a:xfrm>
           <a:prstGeom prst="rect">
             <a:avLst/>
@@ -7133,21 +7195,21 @@
       </p:sp>
       <p:grpSp>
         <p:nvGrpSpPr>
-          <p:cNvPr id="105" name="object 14"/>
+          <p:cNvPr id="106" name="object 14"/>
           <p:cNvGrpSpPr/>
           <p:nvPr/>
         </p:nvGrpSpPr>
         <p:grpSpPr>
           <a:xfrm>
-            <a:off x="15703" y="5497214"/>
-            <a:ext cx="20080549" cy="494754"/>
-            <a:chOff x="0" y="0"/>
-            <a:chExt cx="20080547" cy="494752"/>
+            <a:off x="15702" y="5497213"/>
+            <a:ext cx="20080552" cy="494757"/>
+            <a:chOff x="0" y="-1"/>
+            <a:chExt cx="20080551" cy="494755"/>
           </a:xfrm>
         </p:grpSpPr>
         <p:pic>
           <p:nvPicPr>
-            <p:cNvPr id="103" name="object 15" descr="object 15"/>
+            <p:cNvPr id="104" name="object 15" descr="object 15"/>
             <p:cNvPicPr>
               <a:picLocks noChangeAspect="1"/>
             </p:cNvPicPr>
@@ -7164,7 +7226,7 @@
           <p:spPr>
             <a:xfrm>
               <a:off x="6266826" y="15706"/>
-              <a:ext cx="5465806" cy="471194"/>
+              <a:ext cx="5465808" cy="471196"/>
             </a:xfrm>
             <a:prstGeom prst="rect">
               <a:avLst/>
@@ -7178,14 +7240,14 @@
         </p:pic>
         <p:sp>
           <p:nvSpPr>
-            <p:cNvPr id="104" name="object 16"/>
+            <p:cNvPr id="105" name="object 16"/>
             <p:cNvSpPr/>
             <p:nvPr/>
           </p:nvSpPr>
           <p:spPr>
             <a:xfrm>
-              <a:off x="-1" y="-1"/>
-              <a:ext cx="20080549" cy="494754"/>
+              <a:off x="-1" y="-2"/>
+              <a:ext cx="20080552" cy="494757"/>
             </a:xfrm>
             <a:prstGeom prst="rect">
               <a:avLst/>
@@ -7219,14 +7281,14 @@
       </p:grpSp>
       <p:sp>
         <p:nvSpPr>
-          <p:cNvPr id="106" name="object 19"/>
+          <p:cNvPr id="107" name="object 19"/>
           <p:cNvSpPr/>
           <p:nvPr/>
         </p:nvSpPr>
         <p:spPr>
           <a:xfrm>
             <a:off x="15705" y="7020728"/>
-            <a:ext cx="20080542" cy="337689"/>
+            <a:ext cx="20080542" cy="337690"/>
           </a:xfrm>
           <a:prstGeom prst="rect">
             <a:avLst/>
@@ -7255,14 +7317,14 @@
       </p:sp>
       <p:sp>
         <p:nvSpPr>
-          <p:cNvPr id="107" name="object 20"/>
+          <p:cNvPr id="108" name="object 20"/>
           <p:cNvSpPr/>
           <p:nvPr/>
         </p:nvSpPr>
         <p:spPr>
           <a:xfrm>
             <a:off x="15705" y="7491917"/>
-            <a:ext cx="20080542" cy="337689"/>
+            <a:ext cx="20080542" cy="337690"/>
           </a:xfrm>
           <a:prstGeom prst="rect">
             <a:avLst/>
@@ -7291,7 +7353,7 @@
       </p:sp>
       <p:sp>
         <p:nvSpPr>
-          <p:cNvPr id="108" name="object 21"/>
+          <p:cNvPr id="109" name="object 21"/>
           <p:cNvSpPr txBox="1"/>
           <p:nvPr/>
         </p:nvSpPr>
@@ -7525,7 +7587,7 @@
       </p:sp>
       <p:pic>
         <p:nvPicPr>
-          <p:cNvPr id="109" name="Screenshot 2026-06-15 at 2.42.22 PM.png" descr="Screenshot 2026-06-15 at 2.42.22 PM.png"/>
+          <p:cNvPr id="110" name="Screenshot 2026-06-15 at 2.42.22 PM.png" descr="Screenshot 2026-06-15 at 2.42.22 PM.png"/>
           <p:cNvPicPr>
             <a:picLocks noChangeAspect="1"/>
           </p:cNvPicPr>
@@ -7587,14 +7649,14 @@
       </p:grpSpPr>
       <p:sp>
         <p:nvSpPr>
-          <p:cNvPr id="111" name="object 2"/>
+          <p:cNvPr id="112" name="object 2"/>
           <p:cNvSpPr/>
           <p:nvPr/>
         </p:nvSpPr>
         <p:spPr>
           <a:xfrm>
             <a:off x="15705" y="2340242"/>
-            <a:ext cx="20080542" cy="636110"/>
+            <a:ext cx="20080542" cy="636111"/>
           </a:xfrm>
           <a:prstGeom prst="rect">
             <a:avLst/>
@@ -7623,7 +7685,7 @@
       </p:sp>
       <p:sp>
         <p:nvSpPr>
-          <p:cNvPr id="112" name="object 3"/>
+          <p:cNvPr id="113" name="object 3"/>
           <p:cNvSpPr txBox="1"/>
           <p:nvPr>
             <p:ph type="title"/>
@@ -7632,7 +7694,7 @@
         <p:spPr>
           <a:xfrm>
             <a:off x="975994" y="1179945"/>
-            <a:ext cx="8140066" cy="1026797"/>
+            <a:ext cx="8140066" cy="1026798"/>
           </a:xfrm>
           <a:prstGeom prst="rect">
             <a:avLst/>
@@ -7677,21 +7739,21 @@
       </p:sp>
       <p:grpSp>
         <p:nvGrpSpPr>
-          <p:cNvPr id="115" name="object 14"/>
+          <p:cNvPr id="116" name="object 14"/>
           <p:cNvGrpSpPr/>
           <p:nvPr/>
         </p:nvGrpSpPr>
         <p:grpSpPr>
           <a:xfrm>
-            <a:off x="15703" y="5497214"/>
-            <a:ext cx="20080549" cy="494754"/>
-            <a:chOff x="0" y="0"/>
-            <a:chExt cx="20080547" cy="494752"/>
+            <a:off x="15702" y="5497213"/>
+            <a:ext cx="20080552" cy="494757"/>
+            <a:chOff x="0" y="-1"/>
+            <a:chExt cx="20080551" cy="494755"/>
           </a:xfrm>
         </p:grpSpPr>
         <p:pic>
           <p:nvPicPr>
-            <p:cNvPr id="113" name="object 15" descr="object 15"/>
+            <p:cNvPr id="114" name="object 15" descr="object 15"/>
             <p:cNvPicPr>
               <a:picLocks noChangeAspect="1"/>
             </p:cNvPicPr>
@@ -7708,7 +7770,7 @@
           <p:spPr>
             <a:xfrm>
               <a:off x="6266826" y="15706"/>
-              <a:ext cx="5465806" cy="471194"/>
+              <a:ext cx="5465808" cy="471196"/>
             </a:xfrm>
             <a:prstGeom prst="rect">
               <a:avLst/>
@@ -7722,14 +7784,14 @@
         </p:pic>
         <p:sp>
           <p:nvSpPr>
-            <p:cNvPr id="114" name="object 16"/>
+            <p:cNvPr id="115" name="object 16"/>
             <p:cNvSpPr/>
             <p:nvPr/>
           </p:nvSpPr>
           <p:spPr>
             <a:xfrm>
-              <a:off x="-1" y="-1"/>
-              <a:ext cx="20080549" cy="494754"/>
+              <a:off x="-1" y="-2"/>
+              <a:ext cx="20080552" cy="494757"/>
             </a:xfrm>
             <a:prstGeom prst="rect">
               <a:avLst/>
@@ -7763,14 +7825,14 @@
       </p:grpSp>
       <p:sp>
         <p:nvSpPr>
-          <p:cNvPr id="116" name="object 19"/>
+          <p:cNvPr id="117" name="object 19"/>
           <p:cNvSpPr/>
           <p:nvPr/>
         </p:nvSpPr>
         <p:spPr>
           <a:xfrm>
             <a:off x="15705" y="7020728"/>
-            <a:ext cx="20080542" cy="337689"/>
+            <a:ext cx="20080542" cy="337690"/>
           </a:xfrm>
           <a:prstGeom prst="rect">
             <a:avLst/>
@@ -7799,14 +7861,14 @@
       </p:sp>
       <p:sp>
         <p:nvSpPr>
-          <p:cNvPr id="117" name="object 20"/>
+          <p:cNvPr id="118" name="object 20"/>
           <p:cNvSpPr/>
           <p:nvPr/>
         </p:nvSpPr>
         <p:spPr>
           <a:xfrm>
             <a:off x="15705" y="7491917"/>
-            <a:ext cx="20080542" cy="337689"/>
+            <a:ext cx="20080542" cy="337690"/>
           </a:xfrm>
           <a:prstGeom prst="rect">
             <a:avLst/>
@@ -7835,7 +7897,7 @@
       </p:sp>
       <p:pic>
         <p:nvPicPr>
-          <p:cNvPr id="118" name="Imagen 4" descr="Imagen 4"/>
+          <p:cNvPr id="119" name="Imagen 4" descr="Imagen 4"/>
           <p:cNvPicPr>
             <a:picLocks noChangeAspect="1"/>
           </p:cNvPicPr>
@@ -7851,8 +7913,8 @@
         </p:blipFill>
         <p:spPr>
           <a:xfrm>
-            <a:off x="975993" y="2450583"/>
-            <a:ext cx="17366238" cy="8217418"/>
+            <a:off x="975993" y="2450582"/>
+            <a:ext cx="17366238" cy="8217419"/>
           </a:xfrm>
           <a:prstGeom prst="rect">
             <a:avLst/>
@@ -7897,14 +7959,14 @@
       </p:grpSpPr>
       <p:sp>
         <p:nvSpPr>
-          <p:cNvPr id="120" name="object 2"/>
+          <p:cNvPr id="121" name="object 2"/>
           <p:cNvSpPr/>
           <p:nvPr/>
         </p:nvSpPr>
         <p:spPr>
           <a:xfrm>
             <a:off x="15705" y="2340242"/>
-            <a:ext cx="20080542" cy="636110"/>
+            <a:ext cx="20080542" cy="636111"/>
           </a:xfrm>
           <a:prstGeom prst="rect">
             <a:avLst/>
@@ -7933,7 +7995,7 @@
       </p:sp>
       <p:sp>
         <p:nvSpPr>
-          <p:cNvPr id="121" name="object 3"/>
+          <p:cNvPr id="122" name="object 3"/>
           <p:cNvSpPr txBox="1"/>
           <p:nvPr>
             <p:ph type="title"/>
@@ -7942,7 +8004,7 @@
         <p:spPr>
           <a:xfrm>
             <a:off x="975994" y="1179945"/>
-            <a:ext cx="8140066" cy="1026797"/>
+            <a:ext cx="8140066" cy="1026798"/>
           </a:xfrm>
           <a:prstGeom prst="rect">
             <a:avLst/>
@@ -7987,21 +8049,21 @@
       </p:sp>
       <p:grpSp>
         <p:nvGrpSpPr>
-          <p:cNvPr id="124" name="object 14"/>
+          <p:cNvPr id="125" name="object 14"/>
           <p:cNvGrpSpPr/>
           <p:nvPr/>
         </p:nvGrpSpPr>
         <p:grpSpPr>
           <a:xfrm>
-            <a:off x="15703" y="5497214"/>
-            <a:ext cx="20080549" cy="494754"/>
-            <a:chOff x="0" y="0"/>
-            <a:chExt cx="20080547" cy="494752"/>
+            <a:off x="15702" y="5497213"/>
+            <a:ext cx="20080552" cy="494757"/>
+            <a:chOff x="0" y="-1"/>
+            <a:chExt cx="20080551" cy="494755"/>
           </a:xfrm>
         </p:grpSpPr>
         <p:pic>
           <p:nvPicPr>
-            <p:cNvPr id="122" name="object 15" descr="object 15"/>
+            <p:cNvPr id="123" name="object 15" descr="object 15"/>
             <p:cNvPicPr>
               <a:picLocks noChangeAspect="1"/>
             </p:cNvPicPr>
@@ -8018,7 +8080,7 @@
           <p:spPr>
             <a:xfrm>
               <a:off x="6266826" y="15706"/>
-              <a:ext cx="5465806" cy="471194"/>
+              <a:ext cx="5465808" cy="471196"/>
             </a:xfrm>
             <a:prstGeom prst="rect">
               <a:avLst/>
@@ -8032,14 +8094,14 @@
         </p:pic>
         <p:sp>
           <p:nvSpPr>
-            <p:cNvPr id="123" name="object 16"/>
+            <p:cNvPr id="124" name="object 16"/>
             <p:cNvSpPr/>
             <p:nvPr/>
           </p:nvSpPr>
           <p:spPr>
             <a:xfrm>
-              <a:off x="-1" y="-1"/>
-              <a:ext cx="20080549" cy="494754"/>
+              <a:off x="-1" y="-2"/>
+              <a:ext cx="20080552" cy="494757"/>
             </a:xfrm>
             <a:prstGeom prst="rect">
               <a:avLst/>
@@ -8073,14 +8135,14 @@
       </p:grpSp>
       <p:sp>
         <p:nvSpPr>
-          <p:cNvPr id="125" name="object 19"/>
+          <p:cNvPr id="126" name="object 19"/>
           <p:cNvSpPr/>
           <p:nvPr/>
         </p:nvSpPr>
         <p:spPr>
           <a:xfrm>
             <a:off x="15705" y="7020728"/>
-            <a:ext cx="20080542" cy="337689"/>
+            <a:ext cx="20080542" cy="337690"/>
           </a:xfrm>
           <a:prstGeom prst="rect">
             <a:avLst/>
@@ -8109,14 +8171,14 @@
       </p:sp>
       <p:sp>
         <p:nvSpPr>
-          <p:cNvPr id="126" name="object 20"/>
+          <p:cNvPr id="127" name="object 20"/>
           <p:cNvSpPr/>
           <p:nvPr/>
         </p:nvSpPr>
         <p:spPr>
           <a:xfrm>
             <a:off x="15705" y="7491917"/>
-            <a:ext cx="20080542" cy="337689"/>
+            <a:ext cx="20080542" cy="337690"/>
           </a:xfrm>
           <a:prstGeom prst="rect">
             <a:avLst/>
@@ -8145,7 +8207,7 @@
       </p:sp>
       <p:pic>
         <p:nvPicPr>
-          <p:cNvPr id="127" name="Imagen 2" descr="Imagen 2"/>
+          <p:cNvPr id="128" name="Imagen 2" descr="Imagen 2"/>
           <p:cNvPicPr>
             <a:picLocks noChangeAspect="1"/>
           </p:cNvPicPr>
@@ -8207,14 +8269,14 @@
       </p:grpSpPr>
       <p:sp>
         <p:nvSpPr>
-          <p:cNvPr id="129" name="object 2"/>
+          <p:cNvPr id="130" name="object 2"/>
           <p:cNvSpPr/>
           <p:nvPr/>
         </p:nvSpPr>
         <p:spPr>
           <a:xfrm>
             <a:off x="15705" y="2340242"/>
-            <a:ext cx="20080542" cy="636110"/>
+            <a:ext cx="20080542" cy="636111"/>
           </a:xfrm>
           <a:prstGeom prst="rect">
             <a:avLst/>
@@ -8243,7 +8305,7 @@
       </p:sp>
       <p:sp>
         <p:nvSpPr>
-          <p:cNvPr id="130" name="object 3"/>
+          <p:cNvPr id="131" name="object 3"/>
           <p:cNvSpPr txBox="1"/>
           <p:nvPr>
             <p:ph type="title"/>
@@ -8252,7 +8314,7 @@
         <p:spPr>
           <a:xfrm>
             <a:off x="975994" y="1179945"/>
-            <a:ext cx="8140066" cy="1026797"/>
+            <a:ext cx="8140066" cy="1026798"/>
           </a:xfrm>
           <a:prstGeom prst="rect">
             <a:avLst/>
@@ -8297,21 +8359,21 @@
       </p:sp>
       <p:grpSp>
         <p:nvGrpSpPr>
-          <p:cNvPr id="133" name="object 14"/>
+          <p:cNvPr id="134" name="object 14"/>
           <p:cNvGrpSpPr/>
           <p:nvPr/>
         </p:nvGrpSpPr>
         <p:grpSpPr>
           <a:xfrm>
-            <a:off x="15703" y="5497214"/>
-            <a:ext cx="20080549" cy="494754"/>
-            <a:chOff x="0" y="0"/>
-            <a:chExt cx="20080547" cy="494752"/>
+            <a:off x="15702" y="5497213"/>
+            <a:ext cx="20080552" cy="494757"/>
+            <a:chOff x="0" y="-1"/>
+            <a:chExt cx="20080551" cy="494755"/>
           </a:xfrm>
         </p:grpSpPr>
         <p:pic>
           <p:nvPicPr>
-            <p:cNvPr id="131" name="object 15" descr="object 15"/>
+            <p:cNvPr id="132" name="object 15" descr="object 15"/>
             <p:cNvPicPr>
               <a:picLocks noChangeAspect="1"/>
             </p:cNvPicPr>
@@ -8328,7 +8390,7 @@
           <p:spPr>
             <a:xfrm>
               <a:off x="6266826" y="15706"/>
-              <a:ext cx="5465806" cy="471194"/>
+              <a:ext cx="5465808" cy="471196"/>
             </a:xfrm>
             <a:prstGeom prst="rect">
               <a:avLst/>
@@ -8342,14 +8404,14 @@
         </p:pic>
         <p:sp>
           <p:nvSpPr>
-            <p:cNvPr id="132" name="object 16"/>
+            <p:cNvPr id="133" name="object 16"/>
             <p:cNvSpPr/>
             <p:nvPr/>
           </p:nvSpPr>
           <p:spPr>
             <a:xfrm>
-              <a:off x="-1" y="-1"/>
-              <a:ext cx="20080549" cy="494754"/>
+              <a:off x="-1" y="-2"/>
+              <a:ext cx="20080552" cy="494757"/>
             </a:xfrm>
             <a:prstGeom prst="rect">
               <a:avLst/>
@@ -8383,14 +8445,14 @@
       </p:grpSp>
       <p:sp>
         <p:nvSpPr>
-          <p:cNvPr id="134" name="object 19"/>
+          <p:cNvPr id="135" name="object 19"/>
           <p:cNvSpPr/>
           <p:nvPr/>
         </p:nvSpPr>
         <p:spPr>
           <a:xfrm>
             <a:off x="15705" y="7020728"/>
-            <a:ext cx="20080542" cy="337689"/>
+            <a:ext cx="20080542" cy="337690"/>
           </a:xfrm>
           <a:prstGeom prst="rect">
             <a:avLst/>
@@ -8419,14 +8481,14 @@
       </p:sp>
       <p:sp>
         <p:nvSpPr>
-          <p:cNvPr id="135" name="object 20"/>
+          <p:cNvPr id="136" name="object 20"/>
           <p:cNvSpPr/>
           <p:nvPr/>
         </p:nvSpPr>
         <p:spPr>
           <a:xfrm>
             <a:off x="15705" y="7491917"/>
-            <a:ext cx="20080542" cy="337689"/>
+            <a:ext cx="20080542" cy="337690"/>
           </a:xfrm>
           <a:prstGeom prst="rect">
             <a:avLst/>
@@ -8455,7 +8517,7 @@
       </p:sp>
       <p:pic>
         <p:nvPicPr>
-          <p:cNvPr id="136" name="Imagen 3" descr="Imagen 3"/>
+          <p:cNvPr id="137" name="Imagen 3" descr="Imagen 3"/>
           <p:cNvPicPr>
             <a:picLocks noChangeAspect="1"/>
           </p:cNvPicPr>
